--- a/Capstone/Venue_Double_Booking_Interval_Scheduling.pptx
+++ b/Capstone/Venue_Double_Booking_Interval_Scheduling.pptx
@@ -5,7 +5,7 @@
     <p:sldMasterId id="2147483648" r:id="rId1"/>
   </p:sldMasterIdLst>
   <p:notesMasterIdLst>
-    <p:notesMasterId r:id="rId10"/>
+    <p:notesMasterId r:id="rId15"/>
   </p:notesMasterIdLst>
   <p:sldIdLst>
     <p:sldId id="256" r:id="rId2"/>
@@ -16,6 +16,11 @@
     <p:sldId id="261" r:id="rId7"/>
     <p:sldId id="262" r:id="rId8"/>
     <p:sldId id="263" r:id="rId9"/>
+    <p:sldId id="264" r:id="rId10"/>
+    <p:sldId id="265" r:id="rId11"/>
+    <p:sldId id="266" r:id="rId12"/>
+    <p:sldId id="267" r:id="rId13"/>
+    <p:sldId id="268" r:id="rId14"/>
   </p:sldIdLst>
   <p:sldSz cx="9144000" cy="5143500" type="screen16x9"/>
   <p:notesSz cx="5143500" cy="9144000"/>
@@ -117,6 +122,494 @@
     </p:ext>
   </p:extLst>
 </p:presentation>
+</file>
+
+<file path=ppt/revisionInfo.xml><?xml version="1.0" encoding="utf-8"?>
+<p1510:revInfo xmlns:a="http://schemas.openxmlformats.org/drawingml/2006/main" xmlns:r="http://schemas.openxmlformats.org/officeDocument/2006/relationships" xmlns:p1510="http://schemas.microsoft.com/office/powerpoint/2015/10/main">
+  <p1510:revLst>
+    <p1510:client id="{EF107739-DCCB-471F-8010-E16631AE32FF}" v="1" dt="2026-10-14T17:03:50.378"/>
+  </p1510:revLst>
+</p1510:revInfo>
+</file>
+
+<file path=ppt/changesInfos/changesInfo1.xml><?xml version="1.0" encoding="utf-8"?>
+<pc:chgInfo xmlns:a="http://schemas.openxmlformats.org/drawingml/2006/main" xmlns:r="http://schemas.openxmlformats.org/officeDocument/2006/relationships" xmlns:ac="http://schemas.microsoft.com/office/drawing/2013/main/command" xmlns:pc="http://schemas.microsoft.com/office/powerpoint/2013/main/command">
+  <pc:docChgLst>
+    <pc:chgData name="Mithun s" userId="dd0aea9540a49ece" providerId="LiveId" clId="{679C2E18-537F-4C4C-A3ED-5EC5054AA2D6}"/>
+    <pc:docChg chg="undo custSel addSld modSld">
+      <pc:chgData name="Mithun s" userId="dd0aea9540a49ece" providerId="LiveId" clId="{679C2E18-537F-4C4C-A3ED-5EC5054AA2D6}" dt="2026-10-14T17:05:30.920" v="18" actId="207"/>
+      <pc:docMkLst>
+        <pc:docMk/>
+      </pc:docMkLst>
+      <pc:sldChg chg="modSp mod">
+        <pc:chgData name="Mithun s" userId="dd0aea9540a49ece" providerId="LiveId" clId="{679C2E18-537F-4C4C-A3ED-5EC5054AA2D6}" dt="2026-10-14T16:47:36.398" v="2" actId="12"/>
+        <pc:sldMkLst>
+          <pc:docMk/>
+          <pc:sldMk cId="0" sldId="263"/>
+        </pc:sldMkLst>
+        <pc:spChg chg="mod">
+          <ac:chgData name="Mithun s" userId="dd0aea9540a49ece" providerId="LiveId" clId="{679C2E18-537F-4C4C-A3ED-5EC5054AA2D6}" dt="2026-10-14T16:47:36.398" v="2" actId="12"/>
+          <ac:spMkLst>
+            <pc:docMk/>
+            <pc:sldMk cId="0" sldId="263"/>
+            <ac:spMk id="4" creationId="{00000000-0000-0000-0000-000000000000}"/>
+          </ac:spMkLst>
+        </pc:spChg>
+      </pc:sldChg>
+      <pc:sldChg chg="delSp modSp add mod">
+        <pc:chgData name="Mithun s" userId="dd0aea9540a49ece" providerId="LiveId" clId="{679C2E18-537F-4C4C-A3ED-5EC5054AA2D6}" dt="2026-10-14T17:05:30.920" v="18" actId="207"/>
+        <pc:sldMkLst>
+          <pc:docMk/>
+          <pc:sldMk cId="0" sldId="264"/>
+        </pc:sldMkLst>
+        <pc:spChg chg="del">
+          <ac:chgData name="Mithun s" userId="dd0aea9540a49ece" providerId="LiveId" clId="{679C2E18-537F-4C4C-A3ED-5EC5054AA2D6}" dt="2026-10-14T17:04:50.473" v="9" actId="478"/>
+          <ac:spMkLst>
+            <pc:docMk/>
+            <pc:sldMk cId="0" sldId="264"/>
+            <ac:spMk id="2" creationId="{00000000-0000-0000-0000-000000000000}"/>
+          </ac:spMkLst>
+        </pc:spChg>
+        <pc:spChg chg="mod">
+          <ac:chgData name="Mithun s" userId="dd0aea9540a49ece" providerId="LiveId" clId="{679C2E18-537F-4C4C-A3ED-5EC5054AA2D6}" dt="2026-10-14T17:05:30.920" v="18" actId="207"/>
+          <ac:spMkLst>
+            <pc:docMk/>
+            <pc:sldMk cId="0" sldId="264"/>
+            <ac:spMk id="3" creationId="{00000000-0000-0000-0000-000000000000}"/>
+          </ac:spMkLst>
+        </pc:spChg>
+        <pc:spChg chg="mod">
+          <ac:chgData name="Mithun s" userId="dd0aea9540a49ece" providerId="LiveId" clId="{679C2E18-537F-4C4C-A3ED-5EC5054AA2D6}" dt="2026-10-14T17:04:09.687" v="4" actId="2711"/>
+          <ac:spMkLst>
+            <pc:docMk/>
+            <pc:sldMk cId="0" sldId="264"/>
+            <ac:spMk id="4" creationId="{00000000-0000-0000-0000-000000000000}"/>
+          </ac:spMkLst>
+        </pc:spChg>
+        <pc:spChg chg="mod">
+          <ac:chgData name="Mithun s" userId="dd0aea9540a49ece" providerId="LiveId" clId="{679C2E18-537F-4C4C-A3ED-5EC5054AA2D6}" dt="2026-10-14T17:04:09.687" v="4" actId="2711"/>
+          <ac:spMkLst>
+            <pc:docMk/>
+            <pc:sldMk cId="0" sldId="264"/>
+            <ac:spMk id="5" creationId="{00000000-0000-0000-0000-000000000000}"/>
+          </ac:spMkLst>
+        </pc:spChg>
+        <pc:spChg chg="mod">
+          <ac:chgData name="Mithun s" userId="dd0aea9540a49ece" providerId="LiveId" clId="{679C2E18-537F-4C4C-A3ED-5EC5054AA2D6}" dt="2026-10-14T17:04:09.687" v="4" actId="2711"/>
+          <ac:spMkLst>
+            <pc:docMk/>
+            <pc:sldMk cId="0" sldId="264"/>
+            <ac:spMk id="6" creationId="{00000000-0000-0000-0000-000000000000}"/>
+          </ac:spMkLst>
+        </pc:spChg>
+        <pc:spChg chg="mod">
+          <ac:chgData name="Mithun s" userId="dd0aea9540a49ece" providerId="LiveId" clId="{679C2E18-537F-4C4C-A3ED-5EC5054AA2D6}" dt="2026-10-14T17:04:09.687" v="4" actId="2711"/>
+          <ac:spMkLst>
+            <pc:docMk/>
+            <pc:sldMk cId="0" sldId="264"/>
+            <ac:spMk id="7" creationId="{00000000-0000-0000-0000-000000000000}"/>
+          </ac:spMkLst>
+        </pc:spChg>
+        <pc:spChg chg="mod">
+          <ac:chgData name="Mithun s" userId="dd0aea9540a49ece" providerId="LiveId" clId="{679C2E18-537F-4C4C-A3ED-5EC5054AA2D6}" dt="2026-10-14T17:04:09.687" v="4" actId="2711"/>
+          <ac:spMkLst>
+            <pc:docMk/>
+            <pc:sldMk cId="0" sldId="264"/>
+            <ac:spMk id="8" creationId="{00000000-0000-0000-0000-000000000000}"/>
+          </ac:spMkLst>
+        </pc:spChg>
+        <pc:spChg chg="mod">
+          <ac:chgData name="Mithun s" userId="dd0aea9540a49ece" providerId="LiveId" clId="{679C2E18-537F-4C4C-A3ED-5EC5054AA2D6}" dt="2026-10-14T17:04:09.687" v="4" actId="2711"/>
+          <ac:spMkLst>
+            <pc:docMk/>
+            <pc:sldMk cId="0" sldId="264"/>
+            <ac:spMk id="10" creationId="{00000000-0000-0000-0000-000000000000}"/>
+          </ac:spMkLst>
+        </pc:spChg>
+        <pc:spChg chg="mod">
+          <ac:chgData name="Mithun s" userId="dd0aea9540a49ece" providerId="LiveId" clId="{679C2E18-537F-4C4C-A3ED-5EC5054AA2D6}" dt="2026-10-14T17:04:09.687" v="4" actId="2711"/>
+          <ac:spMkLst>
+            <pc:docMk/>
+            <pc:sldMk cId="0" sldId="264"/>
+            <ac:spMk id="11" creationId="{00000000-0000-0000-0000-000000000000}"/>
+          </ac:spMkLst>
+        </pc:spChg>
+        <pc:spChg chg="mod">
+          <ac:chgData name="Mithun s" userId="dd0aea9540a49ece" providerId="LiveId" clId="{679C2E18-537F-4C4C-A3ED-5EC5054AA2D6}" dt="2026-10-14T17:04:09.687" v="4" actId="2711"/>
+          <ac:spMkLst>
+            <pc:docMk/>
+            <pc:sldMk cId="0" sldId="264"/>
+            <ac:spMk id="12" creationId="{00000000-0000-0000-0000-000000000000}"/>
+          </ac:spMkLst>
+        </pc:spChg>
+        <pc:spChg chg="mod">
+          <ac:chgData name="Mithun s" userId="dd0aea9540a49ece" providerId="LiveId" clId="{679C2E18-537F-4C4C-A3ED-5EC5054AA2D6}" dt="2026-10-14T17:04:09.687" v="4" actId="2711"/>
+          <ac:spMkLst>
+            <pc:docMk/>
+            <pc:sldMk cId="0" sldId="264"/>
+            <ac:spMk id="14" creationId="{00000000-0000-0000-0000-000000000000}"/>
+          </ac:spMkLst>
+        </pc:spChg>
+      </pc:sldChg>
+      <pc:sldChg chg="delSp modSp add mod">
+        <pc:chgData name="Mithun s" userId="dd0aea9540a49ece" providerId="LiveId" clId="{679C2E18-537F-4C4C-A3ED-5EC5054AA2D6}" dt="2026-10-14T17:04:53.597" v="10" actId="478"/>
+        <pc:sldMkLst>
+          <pc:docMk/>
+          <pc:sldMk cId="0" sldId="265"/>
+        </pc:sldMkLst>
+        <pc:spChg chg="del mod">
+          <ac:chgData name="Mithun s" userId="dd0aea9540a49ece" providerId="LiveId" clId="{679C2E18-537F-4C4C-A3ED-5EC5054AA2D6}" dt="2026-10-14T17:04:53.597" v="10" actId="478"/>
+          <ac:spMkLst>
+            <pc:docMk/>
+            <pc:sldMk cId="0" sldId="265"/>
+            <ac:spMk id="2" creationId="{00000000-0000-0000-0000-000000000000}"/>
+          </ac:spMkLst>
+        </pc:spChg>
+        <pc:spChg chg="mod">
+          <ac:chgData name="Mithun s" userId="dd0aea9540a49ece" providerId="LiveId" clId="{679C2E18-537F-4C4C-A3ED-5EC5054AA2D6}" dt="2026-10-14T17:04:18.719" v="5" actId="2711"/>
+          <ac:spMkLst>
+            <pc:docMk/>
+            <pc:sldMk cId="0" sldId="265"/>
+            <ac:spMk id="3" creationId="{00000000-0000-0000-0000-000000000000}"/>
+          </ac:spMkLst>
+        </pc:spChg>
+        <pc:spChg chg="mod">
+          <ac:chgData name="Mithun s" userId="dd0aea9540a49ece" providerId="LiveId" clId="{679C2E18-537F-4C4C-A3ED-5EC5054AA2D6}" dt="2026-10-14T17:04:18.719" v="5" actId="2711"/>
+          <ac:spMkLst>
+            <pc:docMk/>
+            <pc:sldMk cId="0" sldId="265"/>
+            <ac:spMk id="4" creationId="{00000000-0000-0000-0000-000000000000}"/>
+          </ac:spMkLst>
+        </pc:spChg>
+        <pc:spChg chg="mod">
+          <ac:chgData name="Mithun s" userId="dd0aea9540a49ece" providerId="LiveId" clId="{679C2E18-537F-4C4C-A3ED-5EC5054AA2D6}" dt="2026-10-14T17:04:18.719" v="5" actId="2711"/>
+          <ac:spMkLst>
+            <pc:docMk/>
+            <pc:sldMk cId="0" sldId="265"/>
+            <ac:spMk id="5" creationId="{00000000-0000-0000-0000-000000000000}"/>
+          </ac:spMkLst>
+        </pc:spChg>
+        <pc:spChg chg="mod">
+          <ac:chgData name="Mithun s" userId="dd0aea9540a49ece" providerId="LiveId" clId="{679C2E18-537F-4C4C-A3ED-5EC5054AA2D6}" dt="2026-10-14T17:04:18.719" v="5" actId="2711"/>
+          <ac:spMkLst>
+            <pc:docMk/>
+            <pc:sldMk cId="0" sldId="265"/>
+            <ac:spMk id="6" creationId="{00000000-0000-0000-0000-000000000000}"/>
+          </ac:spMkLst>
+        </pc:spChg>
+        <pc:spChg chg="mod">
+          <ac:chgData name="Mithun s" userId="dd0aea9540a49ece" providerId="LiveId" clId="{679C2E18-537F-4C4C-A3ED-5EC5054AA2D6}" dt="2026-10-14T17:04:18.719" v="5" actId="2711"/>
+          <ac:spMkLst>
+            <pc:docMk/>
+            <pc:sldMk cId="0" sldId="265"/>
+            <ac:spMk id="7" creationId="{00000000-0000-0000-0000-000000000000}"/>
+          </ac:spMkLst>
+        </pc:spChg>
+        <pc:spChg chg="mod">
+          <ac:chgData name="Mithun s" userId="dd0aea9540a49ece" providerId="LiveId" clId="{679C2E18-537F-4C4C-A3ED-5EC5054AA2D6}" dt="2026-10-14T17:04:18.719" v="5" actId="2711"/>
+          <ac:spMkLst>
+            <pc:docMk/>
+            <pc:sldMk cId="0" sldId="265"/>
+            <ac:spMk id="8" creationId="{00000000-0000-0000-0000-000000000000}"/>
+          </ac:spMkLst>
+        </pc:spChg>
+        <pc:spChg chg="mod">
+          <ac:chgData name="Mithun s" userId="dd0aea9540a49ece" providerId="LiveId" clId="{679C2E18-537F-4C4C-A3ED-5EC5054AA2D6}" dt="2026-10-14T17:04:18.719" v="5" actId="2711"/>
+          <ac:spMkLst>
+            <pc:docMk/>
+            <pc:sldMk cId="0" sldId="265"/>
+            <ac:spMk id="9" creationId="{00000000-0000-0000-0000-000000000000}"/>
+          </ac:spMkLst>
+        </pc:spChg>
+        <pc:spChg chg="mod">
+          <ac:chgData name="Mithun s" userId="dd0aea9540a49ece" providerId="LiveId" clId="{679C2E18-537F-4C4C-A3ED-5EC5054AA2D6}" dt="2026-10-14T17:04:18.719" v="5" actId="2711"/>
+          <ac:spMkLst>
+            <pc:docMk/>
+            <pc:sldMk cId="0" sldId="265"/>
+            <ac:spMk id="11" creationId="{00000000-0000-0000-0000-000000000000}"/>
+          </ac:spMkLst>
+        </pc:spChg>
+        <pc:spChg chg="mod">
+          <ac:chgData name="Mithun s" userId="dd0aea9540a49ece" providerId="LiveId" clId="{679C2E18-537F-4C4C-A3ED-5EC5054AA2D6}" dt="2026-10-14T17:04:18.719" v="5" actId="2711"/>
+          <ac:spMkLst>
+            <pc:docMk/>
+            <pc:sldMk cId="0" sldId="265"/>
+            <ac:spMk id="12" creationId="{00000000-0000-0000-0000-000000000000}"/>
+          </ac:spMkLst>
+        </pc:spChg>
+      </pc:sldChg>
+      <pc:sldChg chg="delSp modSp add mod">
+        <pc:chgData name="Mithun s" userId="dd0aea9540a49ece" providerId="LiveId" clId="{679C2E18-537F-4C4C-A3ED-5EC5054AA2D6}" dt="2026-10-14T17:04:56.964" v="12" actId="478"/>
+        <pc:sldMkLst>
+          <pc:docMk/>
+          <pc:sldMk cId="0" sldId="266"/>
+        </pc:sldMkLst>
+        <pc:spChg chg="del mod">
+          <ac:chgData name="Mithun s" userId="dd0aea9540a49ece" providerId="LiveId" clId="{679C2E18-537F-4C4C-A3ED-5EC5054AA2D6}" dt="2026-10-14T17:04:56.964" v="12" actId="478"/>
+          <ac:spMkLst>
+            <pc:docMk/>
+            <pc:sldMk cId="0" sldId="266"/>
+            <ac:spMk id="2" creationId="{00000000-0000-0000-0000-000000000000}"/>
+          </ac:spMkLst>
+        </pc:spChg>
+        <pc:spChg chg="mod">
+          <ac:chgData name="Mithun s" userId="dd0aea9540a49ece" providerId="LiveId" clId="{679C2E18-537F-4C4C-A3ED-5EC5054AA2D6}" dt="2026-10-14T17:04:29.540" v="6" actId="2711"/>
+          <ac:spMkLst>
+            <pc:docMk/>
+            <pc:sldMk cId="0" sldId="266"/>
+            <ac:spMk id="3" creationId="{00000000-0000-0000-0000-000000000000}"/>
+          </ac:spMkLst>
+        </pc:spChg>
+        <pc:spChg chg="mod">
+          <ac:chgData name="Mithun s" userId="dd0aea9540a49ece" providerId="LiveId" clId="{679C2E18-537F-4C4C-A3ED-5EC5054AA2D6}" dt="2026-10-14T17:04:29.540" v="6" actId="2711"/>
+          <ac:spMkLst>
+            <pc:docMk/>
+            <pc:sldMk cId="0" sldId="266"/>
+            <ac:spMk id="5" creationId="{00000000-0000-0000-0000-000000000000}"/>
+          </ac:spMkLst>
+        </pc:spChg>
+        <pc:spChg chg="mod">
+          <ac:chgData name="Mithun s" userId="dd0aea9540a49ece" providerId="LiveId" clId="{679C2E18-537F-4C4C-A3ED-5EC5054AA2D6}" dt="2026-10-14T17:04:29.540" v="6" actId="2711"/>
+          <ac:spMkLst>
+            <pc:docMk/>
+            <pc:sldMk cId="0" sldId="266"/>
+            <ac:spMk id="6" creationId="{00000000-0000-0000-0000-000000000000}"/>
+          </ac:spMkLst>
+        </pc:spChg>
+        <pc:spChg chg="mod">
+          <ac:chgData name="Mithun s" userId="dd0aea9540a49ece" providerId="LiveId" clId="{679C2E18-537F-4C4C-A3ED-5EC5054AA2D6}" dt="2026-10-14T17:04:29.540" v="6" actId="2711"/>
+          <ac:spMkLst>
+            <pc:docMk/>
+            <pc:sldMk cId="0" sldId="266"/>
+            <ac:spMk id="7" creationId="{00000000-0000-0000-0000-000000000000}"/>
+          </ac:spMkLst>
+        </pc:spChg>
+        <pc:spChg chg="mod">
+          <ac:chgData name="Mithun s" userId="dd0aea9540a49ece" providerId="LiveId" clId="{679C2E18-537F-4C4C-A3ED-5EC5054AA2D6}" dt="2026-10-14T17:04:29.540" v="6" actId="2711"/>
+          <ac:spMkLst>
+            <pc:docMk/>
+            <pc:sldMk cId="0" sldId="266"/>
+            <ac:spMk id="8" creationId="{00000000-0000-0000-0000-000000000000}"/>
+          </ac:spMkLst>
+        </pc:spChg>
+        <pc:spChg chg="mod">
+          <ac:chgData name="Mithun s" userId="dd0aea9540a49ece" providerId="LiveId" clId="{679C2E18-537F-4C4C-A3ED-5EC5054AA2D6}" dt="2026-10-14T17:04:29.540" v="6" actId="2711"/>
+          <ac:spMkLst>
+            <pc:docMk/>
+            <pc:sldMk cId="0" sldId="266"/>
+            <ac:spMk id="9" creationId="{00000000-0000-0000-0000-000000000000}"/>
+          </ac:spMkLst>
+        </pc:spChg>
+        <pc:spChg chg="mod">
+          <ac:chgData name="Mithun s" userId="dd0aea9540a49ece" providerId="LiveId" clId="{679C2E18-537F-4C4C-A3ED-5EC5054AA2D6}" dt="2026-10-14T17:04:29.540" v="6" actId="2711"/>
+          <ac:spMkLst>
+            <pc:docMk/>
+            <pc:sldMk cId="0" sldId="266"/>
+            <ac:spMk id="10" creationId="{00000000-0000-0000-0000-000000000000}"/>
+          </ac:spMkLst>
+        </pc:spChg>
+        <pc:spChg chg="mod">
+          <ac:chgData name="Mithun s" userId="dd0aea9540a49ece" providerId="LiveId" clId="{679C2E18-537F-4C4C-A3ED-5EC5054AA2D6}" dt="2026-10-14T17:04:29.540" v="6" actId="2711"/>
+          <ac:spMkLst>
+            <pc:docMk/>
+            <pc:sldMk cId="0" sldId="266"/>
+            <ac:spMk id="11" creationId="{00000000-0000-0000-0000-000000000000}"/>
+          </ac:spMkLst>
+        </pc:spChg>
+        <pc:spChg chg="mod">
+          <ac:chgData name="Mithun s" userId="dd0aea9540a49ece" providerId="LiveId" clId="{679C2E18-537F-4C4C-A3ED-5EC5054AA2D6}" dt="2026-10-14T17:04:29.540" v="6" actId="2711"/>
+          <ac:spMkLst>
+            <pc:docMk/>
+            <pc:sldMk cId="0" sldId="266"/>
+            <ac:spMk id="12" creationId="{00000000-0000-0000-0000-000000000000}"/>
+          </ac:spMkLst>
+        </pc:spChg>
+      </pc:sldChg>
+      <pc:sldChg chg="delSp modSp add mod">
+        <pc:chgData name="Mithun s" userId="dd0aea9540a49ece" providerId="LiveId" clId="{679C2E18-537F-4C4C-A3ED-5EC5054AA2D6}" dt="2026-10-14T17:04:58.798" v="13" actId="478"/>
+        <pc:sldMkLst>
+          <pc:docMk/>
+          <pc:sldMk cId="0" sldId="267"/>
+        </pc:sldMkLst>
+        <pc:spChg chg="del">
+          <ac:chgData name="Mithun s" userId="dd0aea9540a49ece" providerId="LiveId" clId="{679C2E18-537F-4C4C-A3ED-5EC5054AA2D6}" dt="2026-10-14T17:04:58.798" v="13" actId="478"/>
+          <ac:spMkLst>
+            <pc:docMk/>
+            <pc:sldMk cId="0" sldId="267"/>
+            <ac:spMk id="2" creationId="{00000000-0000-0000-0000-000000000000}"/>
+          </ac:spMkLst>
+        </pc:spChg>
+        <pc:spChg chg="mod">
+          <ac:chgData name="Mithun s" userId="dd0aea9540a49ece" providerId="LiveId" clId="{679C2E18-537F-4C4C-A3ED-5EC5054AA2D6}" dt="2026-10-14T17:04:35.140" v="7" actId="2711"/>
+          <ac:spMkLst>
+            <pc:docMk/>
+            <pc:sldMk cId="0" sldId="267"/>
+            <ac:spMk id="3" creationId="{00000000-0000-0000-0000-000000000000}"/>
+          </ac:spMkLst>
+        </pc:spChg>
+        <pc:spChg chg="mod">
+          <ac:chgData name="Mithun s" userId="dd0aea9540a49ece" providerId="LiveId" clId="{679C2E18-537F-4C4C-A3ED-5EC5054AA2D6}" dt="2026-10-14T17:04:35.140" v="7" actId="2711"/>
+          <ac:spMkLst>
+            <pc:docMk/>
+            <pc:sldMk cId="0" sldId="267"/>
+            <ac:spMk id="4" creationId="{00000000-0000-0000-0000-000000000000}"/>
+          </ac:spMkLst>
+        </pc:spChg>
+        <pc:spChg chg="mod">
+          <ac:chgData name="Mithun s" userId="dd0aea9540a49ece" providerId="LiveId" clId="{679C2E18-537F-4C4C-A3ED-5EC5054AA2D6}" dt="2026-10-14T17:04:35.140" v="7" actId="2711"/>
+          <ac:spMkLst>
+            <pc:docMk/>
+            <pc:sldMk cId="0" sldId="267"/>
+            <ac:spMk id="5" creationId="{00000000-0000-0000-0000-000000000000}"/>
+          </ac:spMkLst>
+        </pc:spChg>
+        <pc:spChg chg="mod">
+          <ac:chgData name="Mithun s" userId="dd0aea9540a49ece" providerId="LiveId" clId="{679C2E18-537F-4C4C-A3ED-5EC5054AA2D6}" dt="2026-10-14T17:04:35.140" v="7" actId="2711"/>
+          <ac:spMkLst>
+            <pc:docMk/>
+            <pc:sldMk cId="0" sldId="267"/>
+            <ac:spMk id="6" creationId="{00000000-0000-0000-0000-000000000000}"/>
+          </ac:spMkLst>
+        </pc:spChg>
+        <pc:spChg chg="mod">
+          <ac:chgData name="Mithun s" userId="dd0aea9540a49ece" providerId="LiveId" clId="{679C2E18-537F-4C4C-A3ED-5EC5054AA2D6}" dt="2026-10-14T17:04:35.140" v="7" actId="2711"/>
+          <ac:spMkLst>
+            <pc:docMk/>
+            <pc:sldMk cId="0" sldId="267"/>
+            <ac:spMk id="7" creationId="{00000000-0000-0000-0000-000000000000}"/>
+          </ac:spMkLst>
+        </pc:spChg>
+        <pc:spChg chg="mod">
+          <ac:chgData name="Mithun s" userId="dd0aea9540a49ece" providerId="LiveId" clId="{679C2E18-537F-4C4C-A3ED-5EC5054AA2D6}" dt="2026-10-14T17:04:35.140" v="7" actId="2711"/>
+          <ac:spMkLst>
+            <pc:docMk/>
+            <pc:sldMk cId="0" sldId="267"/>
+            <ac:spMk id="8" creationId="{00000000-0000-0000-0000-000000000000}"/>
+          </ac:spMkLst>
+        </pc:spChg>
+        <pc:spChg chg="mod">
+          <ac:chgData name="Mithun s" userId="dd0aea9540a49ece" providerId="LiveId" clId="{679C2E18-537F-4C4C-A3ED-5EC5054AA2D6}" dt="2026-10-14T17:04:35.140" v="7" actId="2711"/>
+          <ac:spMkLst>
+            <pc:docMk/>
+            <pc:sldMk cId="0" sldId="267"/>
+            <ac:spMk id="9" creationId="{00000000-0000-0000-0000-000000000000}"/>
+          </ac:spMkLst>
+        </pc:spChg>
+        <pc:spChg chg="mod">
+          <ac:chgData name="Mithun s" userId="dd0aea9540a49ece" providerId="LiveId" clId="{679C2E18-537F-4C4C-A3ED-5EC5054AA2D6}" dt="2026-10-14T17:04:35.140" v="7" actId="2711"/>
+          <ac:spMkLst>
+            <pc:docMk/>
+            <pc:sldMk cId="0" sldId="267"/>
+            <ac:spMk id="10" creationId="{00000000-0000-0000-0000-000000000000}"/>
+          </ac:spMkLst>
+        </pc:spChg>
+        <pc:spChg chg="mod">
+          <ac:chgData name="Mithun s" userId="dd0aea9540a49ece" providerId="LiveId" clId="{679C2E18-537F-4C4C-A3ED-5EC5054AA2D6}" dt="2026-10-14T17:04:35.140" v="7" actId="2711"/>
+          <ac:spMkLst>
+            <pc:docMk/>
+            <pc:sldMk cId="0" sldId="267"/>
+            <ac:spMk id="11" creationId="{00000000-0000-0000-0000-000000000000}"/>
+          </ac:spMkLst>
+        </pc:spChg>
+        <pc:spChg chg="mod">
+          <ac:chgData name="Mithun s" userId="dd0aea9540a49ece" providerId="LiveId" clId="{679C2E18-537F-4C4C-A3ED-5EC5054AA2D6}" dt="2026-10-14T17:04:35.140" v="7" actId="2711"/>
+          <ac:spMkLst>
+            <pc:docMk/>
+            <pc:sldMk cId="0" sldId="267"/>
+            <ac:spMk id="12" creationId="{00000000-0000-0000-0000-000000000000}"/>
+          </ac:spMkLst>
+        </pc:spChg>
+      </pc:sldChg>
+      <pc:sldChg chg="delSp modSp add mod">
+        <pc:chgData name="Mithun s" userId="dd0aea9540a49ece" providerId="LiveId" clId="{679C2E18-537F-4C4C-A3ED-5EC5054AA2D6}" dt="2026-10-14T17:05:00.873" v="14" actId="478"/>
+        <pc:sldMkLst>
+          <pc:docMk/>
+          <pc:sldMk cId="0" sldId="268"/>
+        </pc:sldMkLst>
+        <pc:spChg chg="del mod">
+          <ac:chgData name="Mithun s" userId="dd0aea9540a49ece" providerId="LiveId" clId="{679C2E18-537F-4C4C-A3ED-5EC5054AA2D6}" dt="2026-10-14T17:05:00.873" v="14" actId="478"/>
+          <ac:spMkLst>
+            <pc:docMk/>
+            <pc:sldMk cId="0" sldId="268"/>
+            <ac:spMk id="2" creationId="{00000000-0000-0000-0000-000000000000}"/>
+          </ac:spMkLst>
+        </pc:spChg>
+        <pc:spChg chg="mod">
+          <ac:chgData name="Mithun s" userId="dd0aea9540a49ece" providerId="LiveId" clId="{679C2E18-537F-4C4C-A3ED-5EC5054AA2D6}" dt="2026-10-14T17:04:40.332" v="8" actId="2711"/>
+          <ac:spMkLst>
+            <pc:docMk/>
+            <pc:sldMk cId="0" sldId="268"/>
+            <ac:spMk id="3" creationId="{00000000-0000-0000-0000-000000000000}"/>
+          </ac:spMkLst>
+        </pc:spChg>
+        <pc:spChg chg="mod">
+          <ac:chgData name="Mithun s" userId="dd0aea9540a49ece" providerId="LiveId" clId="{679C2E18-537F-4C4C-A3ED-5EC5054AA2D6}" dt="2026-10-14T17:04:40.332" v="8" actId="2711"/>
+          <ac:spMkLst>
+            <pc:docMk/>
+            <pc:sldMk cId="0" sldId="268"/>
+            <ac:spMk id="4" creationId="{00000000-0000-0000-0000-000000000000}"/>
+          </ac:spMkLst>
+        </pc:spChg>
+        <pc:spChg chg="mod">
+          <ac:chgData name="Mithun s" userId="dd0aea9540a49ece" providerId="LiveId" clId="{679C2E18-537F-4C4C-A3ED-5EC5054AA2D6}" dt="2026-10-14T17:04:40.332" v="8" actId="2711"/>
+          <ac:spMkLst>
+            <pc:docMk/>
+            <pc:sldMk cId="0" sldId="268"/>
+            <ac:spMk id="5" creationId="{00000000-0000-0000-0000-000000000000}"/>
+          </ac:spMkLst>
+        </pc:spChg>
+        <pc:spChg chg="mod">
+          <ac:chgData name="Mithun s" userId="dd0aea9540a49ece" providerId="LiveId" clId="{679C2E18-537F-4C4C-A3ED-5EC5054AA2D6}" dt="2026-10-14T17:04:40.332" v="8" actId="2711"/>
+          <ac:spMkLst>
+            <pc:docMk/>
+            <pc:sldMk cId="0" sldId="268"/>
+            <ac:spMk id="6" creationId="{00000000-0000-0000-0000-000000000000}"/>
+          </ac:spMkLst>
+        </pc:spChg>
+        <pc:spChg chg="mod">
+          <ac:chgData name="Mithun s" userId="dd0aea9540a49ece" providerId="LiveId" clId="{679C2E18-537F-4C4C-A3ED-5EC5054AA2D6}" dt="2026-10-14T17:04:40.332" v="8" actId="2711"/>
+          <ac:spMkLst>
+            <pc:docMk/>
+            <pc:sldMk cId="0" sldId="268"/>
+            <ac:spMk id="8" creationId="{00000000-0000-0000-0000-000000000000}"/>
+          </ac:spMkLst>
+        </pc:spChg>
+        <pc:spChg chg="mod">
+          <ac:chgData name="Mithun s" userId="dd0aea9540a49ece" providerId="LiveId" clId="{679C2E18-537F-4C4C-A3ED-5EC5054AA2D6}" dt="2026-10-14T17:04:40.332" v="8" actId="2711"/>
+          <ac:spMkLst>
+            <pc:docMk/>
+            <pc:sldMk cId="0" sldId="268"/>
+            <ac:spMk id="10" creationId="{00000000-0000-0000-0000-000000000000}"/>
+          </ac:spMkLst>
+        </pc:spChg>
+        <pc:spChg chg="mod">
+          <ac:chgData name="Mithun s" userId="dd0aea9540a49ece" providerId="LiveId" clId="{679C2E18-537F-4C4C-A3ED-5EC5054AA2D6}" dt="2026-10-14T17:04:40.332" v="8" actId="2711"/>
+          <ac:spMkLst>
+            <pc:docMk/>
+            <pc:sldMk cId="0" sldId="268"/>
+            <ac:spMk id="11" creationId="{00000000-0000-0000-0000-000000000000}"/>
+          </ac:spMkLst>
+        </pc:spChg>
+        <pc:spChg chg="mod">
+          <ac:chgData name="Mithun s" userId="dd0aea9540a49ece" providerId="LiveId" clId="{679C2E18-537F-4C4C-A3ED-5EC5054AA2D6}" dt="2026-10-14T17:04:40.332" v="8" actId="2711"/>
+          <ac:spMkLst>
+            <pc:docMk/>
+            <pc:sldMk cId="0" sldId="268"/>
+            <ac:spMk id="12" creationId="{00000000-0000-0000-0000-000000000000}"/>
+          </ac:spMkLst>
+        </pc:spChg>
+        <pc:spChg chg="mod">
+          <ac:chgData name="Mithun s" userId="dd0aea9540a49ece" providerId="LiveId" clId="{679C2E18-537F-4C4C-A3ED-5EC5054AA2D6}" dt="2026-10-14T17:04:40.332" v="8" actId="2711"/>
+          <ac:spMkLst>
+            <pc:docMk/>
+            <pc:sldMk cId="0" sldId="268"/>
+            <ac:spMk id="13" creationId="{00000000-0000-0000-0000-000000000000}"/>
+          </ac:spMkLst>
+        </pc:spChg>
+      </pc:sldChg>
+    </pc:docChg>
+  </pc:docChgLst>
+</pc:chgInfo>
 </file>
 
 <file path=ppt/notesMasters/notesMaster1.xml><?xml version="1.0" encoding="utf-8"?>
@@ -1170,6 +1663,101 @@
 </p:sldLayout>
 </file>
 
+<file path=ppt/slideLayouts/slideLayout2.xml><?xml version="1.0" encoding="utf-8"?>
+<p:sldLayout xmlns:a="http://schemas.openxmlformats.org/drawingml/2006/main" xmlns:r="http://schemas.openxmlformats.org/officeDocument/2006/relationships" xmlns:p="http://schemas.openxmlformats.org/presentationml/2006/main" type="blank">
+  <p:cSld name="Blank">
+    <p:spTree>
+      <p:nvGrpSpPr>
+        <p:cNvPr id="1" name=""/>
+        <p:cNvGrpSpPr/>
+        <p:nvPr/>
+      </p:nvGrpSpPr>
+      <p:grpSpPr>
+        <a:xfrm>
+          <a:off x="0" y="0"/>
+          <a:ext cx="0" cy="0"/>
+          <a:chOff x="0" y="0"/>
+          <a:chExt cx="0" cy="0"/>
+        </a:xfrm>
+      </p:grpSpPr>
+      <p:sp>
+        <p:nvSpPr>
+          <p:cNvPr id="2" name="Date Placeholder 1"/>
+          <p:cNvSpPr>
+            <a:spLocks noGrp="1"/>
+          </p:cNvSpPr>
+          <p:nvPr>
+            <p:ph type="dt" sz="half" idx="10"/>
+          </p:nvPr>
+        </p:nvSpPr>
+        <p:spPr/>
+        <p:txBody>
+          <a:bodyPr/>
+          <a:lstStyle/>
+          <a:p>
+            <a:fld id="{5BCAD085-E8A6-8845-BD4E-CB4CCA059FC4}" type="datetimeFigureOut">
+              <a:rPr lang="en-US" smtClean="0"/>
+              <a:t>10/14/2026</a:t>
+            </a:fld>
+            <a:endParaRPr lang="en-US"/>
+          </a:p>
+        </p:txBody>
+      </p:sp>
+      <p:sp>
+        <p:nvSpPr>
+          <p:cNvPr id="3" name="Footer Placeholder 2"/>
+          <p:cNvSpPr>
+            <a:spLocks noGrp="1"/>
+          </p:cNvSpPr>
+          <p:nvPr>
+            <p:ph type="ftr" sz="quarter" idx="11"/>
+          </p:nvPr>
+        </p:nvSpPr>
+        <p:spPr/>
+        <p:txBody>
+          <a:bodyPr/>
+          <a:lstStyle/>
+          <a:p>
+            <a:endParaRPr lang="en-US"/>
+          </a:p>
+        </p:txBody>
+      </p:sp>
+      <p:sp>
+        <p:nvSpPr>
+          <p:cNvPr id="4" name="Slide Number Placeholder 3"/>
+          <p:cNvSpPr>
+            <a:spLocks noGrp="1"/>
+          </p:cNvSpPr>
+          <p:nvPr>
+            <p:ph type="sldNum" sz="quarter" idx="12"/>
+          </p:nvPr>
+        </p:nvSpPr>
+        <p:spPr/>
+        <p:txBody>
+          <a:bodyPr/>
+          <a:lstStyle/>
+          <a:p>
+            <a:fld id="{C1FF6DA9-008F-8B48-92A6-B652298478BF}" type="slidenum">
+              <a:rPr lang="en-US" smtClean="0"/>
+              <a:t>‹#›</a:t>
+            </a:fld>
+            <a:endParaRPr lang="en-US"/>
+          </a:p>
+        </p:txBody>
+      </p:sp>
+    </p:spTree>
+    <p:extLst>
+      <p:ext uri="{BB962C8B-B14F-4D97-AF65-F5344CB8AC3E}">
+        <p14:creationId xmlns:p14="http://schemas.microsoft.com/office/powerpoint/2010/main" val="2410962024"/>
+      </p:ext>
+    </p:extLst>
+  </p:cSld>
+  <p:clrMapOvr>
+    <a:masterClrMapping/>
+  </p:clrMapOvr>
+</p:sldLayout>
+</file>
+
 <file path=ppt/slideMasters/slideMaster1.xml><?xml version="1.0" encoding="utf-8"?>
 <p:sldMaster xmlns:a="http://schemas.openxmlformats.org/drawingml/2006/main" xmlns:r="http://schemas.openxmlformats.org/officeDocument/2006/relationships" xmlns:p="http://schemas.openxmlformats.org/presentationml/2006/main">
   <p:cSld>
@@ -1197,6 +1785,7 @@
   <p:clrMap bg1="lt1" tx1="dk1" bg2="lt2" tx2="dk2" accent1="accent1" accent2="accent2" accent3="accent3" accent4="accent4" accent5="accent5" accent6="accent6" hlink="hlink" folHlink="folHlink"/>
   <p:sldLayoutIdLst>
     <p:sldLayoutId id="2147483649" r:id="rId1"/>
+    <p:sldLayoutId id="2147483650" r:id="rId2"/>
   </p:sldLayoutIdLst>
   <p:hf sldNum="0" hdr="0" ftr="0" dt="0"/>
   <p:txStyles>
@@ -1586,6 +2175,4201 @@
 </p:sld>
 </file>
 
+<file path=ppt/slides/slide10.xml><?xml version="1.0" encoding="utf-8"?>
+<p:sld xmlns:a="http://schemas.openxmlformats.org/drawingml/2006/main" xmlns:r="http://schemas.openxmlformats.org/officeDocument/2006/relationships" xmlns:p="http://schemas.openxmlformats.org/presentationml/2006/main">
+  <p:cSld>
+    <p:spTree>
+      <p:nvGrpSpPr>
+        <p:cNvPr id="1" name=""/>
+        <p:cNvGrpSpPr/>
+        <p:nvPr/>
+      </p:nvGrpSpPr>
+      <p:grpSpPr>
+        <a:xfrm>
+          <a:off x="0" y="0"/>
+          <a:ext cx="0" cy="0"/>
+          <a:chOff x="0" y="0"/>
+          <a:chExt cx="0" cy="0"/>
+        </a:xfrm>
+      </p:grpSpPr>
+      <p:sp>
+        <p:nvSpPr>
+          <p:cNvPr id="3" name="TextBox 2"/>
+          <p:cNvSpPr txBox="1"/>
+          <p:nvPr/>
+        </p:nvSpPr>
+        <p:spPr>
+          <a:xfrm>
+            <a:off x="548640" y="582931"/>
+            <a:ext cx="8023860" cy="418063"/>
+          </a:xfrm>
+          <a:prstGeom prst="rect">
+            <a:avLst/>
+          </a:prstGeom>
+          <a:noFill/>
+        </p:spPr>
+        <p:txBody>
+          <a:bodyPr wrap="square" lIns="0" tIns="0" rIns="0" bIns="0">
+            <a:spAutoFit/>
+          </a:bodyPr>
+          <a:lstStyle/>
+          <a:p>
+            <a:pPr>
+              <a:defRPr sz="2200" b="1">
+                <a:solidFill>
+                  <a:srgbClr val="1A365D"/>
+                </a:solidFill>
+                <a:latin typeface="Calibri"/>
+              </a:defRPr>
+            </a:pPr>
+            <a:r>
+              <a:rPr sz="1650">
+                <a:latin typeface="+mj-lt"/>
+              </a:rPr>
+              <a:t>Module 2: System Design &amp; Algorithmic Architecture</a:t>
+            </a:r>
+          </a:p>
+          <a:p>
+            <a:pPr>
+              <a:spcBef>
+                <a:spcPts val="225"/>
+              </a:spcBef>
+              <a:defRPr sz="1200">
+                <a:solidFill>
+                  <a:srgbClr val="64748B"/>
+                </a:solidFill>
+                <a:latin typeface="Calibri"/>
+              </a:defRPr>
+            </a:pPr>
+            <a:r>
+              <a:rPr sz="900">
+                <a:latin typeface="+mj-lt"/>
+              </a:rPr>
+              <a:t>Component decomposition, relational entity-relationship modeling, and interval concurrency design</a:t>
+            </a:r>
+          </a:p>
+        </p:txBody>
+      </p:sp>
+      <p:sp>
+        <p:nvSpPr>
+          <p:cNvPr id="4" name="Rectangle 3"/>
+          <p:cNvSpPr/>
+          <p:nvPr/>
+        </p:nvSpPr>
+        <p:spPr>
+          <a:xfrm>
+            <a:off x="548640" y="1268730"/>
+            <a:ext cx="8044434" cy="13716"/>
+          </a:xfrm>
+          <a:prstGeom prst="rect">
+            <a:avLst/>
+          </a:prstGeom>
+          <a:solidFill>
+            <a:srgbClr val="E2E8F0"/>
+          </a:solidFill>
+          <a:ln>
+            <a:solidFill>
+              <a:srgbClr val="E2E8F0"/>
+            </a:solidFill>
+          </a:ln>
+        </p:spPr>
+        <p:style>
+          <a:lnRef idx="1">
+            <a:schemeClr val="accent1"/>
+          </a:lnRef>
+          <a:fillRef idx="3">
+            <a:schemeClr val="accent1"/>
+          </a:fillRef>
+          <a:effectRef idx="2">
+            <a:schemeClr val="accent1"/>
+          </a:effectRef>
+          <a:fontRef idx="minor">
+            <a:schemeClr val="lt1"/>
+          </a:fontRef>
+        </p:style>
+        <p:txBody>
+          <a:bodyPr rtlCol="0" anchor="ctr"/>
+          <a:lstStyle/>
+          <a:p>
+            <a:pPr algn="ctr"/>
+            <a:endParaRPr sz="1350">
+              <a:latin typeface="+mj-lt"/>
+            </a:endParaRPr>
+          </a:p>
+        </p:txBody>
+      </p:sp>
+      <p:sp>
+        <p:nvSpPr>
+          <p:cNvPr id="5" name="TextBox 4"/>
+          <p:cNvSpPr txBox="1"/>
+          <p:nvPr/>
+        </p:nvSpPr>
+        <p:spPr>
+          <a:xfrm>
+            <a:off x="548640" y="4800600"/>
+            <a:ext cx="5486400" cy="150041"/>
+          </a:xfrm>
+          <a:prstGeom prst="rect">
+            <a:avLst/>
+          </a:prstGeom>
+          <a:noFill/>
+        </p:spPr>
+        <p:txBody>
+          <a:bodyPr wrap="square" lIns="0" tIns="0">
+            <a:spAutoFit/>
+          </a:bodyPr>
+          <a:lstStyle/>
+          <a:p>
+            <a:pPr>
+              <a:defRPr sz="900">
+                <a:solidFill>
+                  <a:srgbClr val="64748B"/>
+                </a:solidFill>
+                <a:latin typeface="Calibri"/>
+              </a:defRPr>
+            </a:pPr>
+            <a:r>
+              <a:rPr sz="675">
+                <a:latin typeface="+mj-lt"/>
+              </a:rPr>
+              <a:t>CSA1021 - Software Engineering | Capstone Project 2026 | Saveetha School of Engineering (SIMATS)</a:t>
+            </a:r>
+          </a:p>
+        </p:txBody>
+      </p:sp>
+      <p:sp>
+        <p:nvSpPr>
+          <p:cNvPr id="6" name="TextBox 5"/>
+          <p:cNvSpPr txBox="1"/>
+          <p:nvPr/>
+        </p:nvSpPr>
+        <p:spPr>
+          <a:xfrm>
+            <a:off x="7200900" y="4800600"/>
+            <a:ext cx="1371600" cy="150041"/>
+          </a:xfrm>
+          <a:prstGeom prst="rect">
+            <a:avLst/>
+          </a:prstGeom>
+          <a:noFill/>
+        </p:spPr>
+        <p:txBody>
+          <a:bodyPr wrap="square" tIns="0" rIns="0">
+            <a:spAutoFit/>
+          </a:bodyPr>
+          <a:lstStyle/>
+          <a:p>
+            <a:pPr algn="r">
+              <a:defRPr sz="900">
+                <a:solidFill>
+                  <a:srgbClr val="64748B"/>
+                </a:solidFill>
+                <a:latin typeface="Calibri"/>
+              </a:defRPr>
+            </a:pPr>
+            <a:r>
+              <a:rPr sz="675">
+                <a:latin typeface="+mj-lt"/>
+              </a:rPr>
+              <a:t>Slide 10 of 13</a:t>
+            </a:r>
+          </a:p>
+        </p:txBody>
+      </p:sp>
+      <p:sp>
+        <p:nvSpPr>
+          <p:cNvPr id="7" name="Rounded Rectangle 6"/>
+          <p:cNvSpPr/>
+          <p:nvPr/>
+        </p:nvSpPr>
+        <p:spPr>
+          <a:xfrm>
+            <a:off x="548640" y="1405889"/>
+            <a:ext cx="2558034" cy="3223260"/>
+          </a:xfrm>
+          <a:prstGeom prst="roundRect">
+            <a:avLst/>
+          </a:prstGeom>
+          <a:solidFill>
+            <a:srgbClr val="F8FAFC"/>
+          </a:solidFill>
+          <a:ln w="12700">
+            <a:solidFill>
+              <a:srgbClr val="E2E8F0"/>
+            </a:solidFill>
+          </a:ln>
+        </p:spPr>
+        <p:style>
+          <a:lnRef idx="1">
+            <a:schemeClr val="accent1"/>
+          </a:lnRef>
+          <a:fillRef idx="3">
+            <a:schemeClr val="accent1"/>
+          </a:fillRef>
+          <a:effectRef idx="2">
+            <a:schemeClr val="accent1"/>
+          </a:effectRef>
+          <a:fontRef idx="minor">
+            <a:schemeClr val="lt1"/>
+          </a:fontRef>
+        </p:style>
+        <p:txBody>
+          <a:bodyPr wrap="square" lIns="137160" tIns="123444" rIns="137160" rtlCol="0" anchor="ctr"/>
+          <a:lstStyle/>
+          <a:p>
+            <a:pPr algn="ctr">
+              <a:spcAft>
+                <a:spcPts val="750"/>
+              </a:spcAft>
+              <a:defRPr sz="1200" b="1">
+                <a:solidFill>
+                  <a:srgbClr val="1A365D"/>
+                </a:solidFill>
+                <a:latin typeface="Calibri"/>
+              </a:defRPr>
+            </a:pPr>
+            <a:r>
+              <a:rPr sz="900">
+                <a:latin typeface="+mj-lt"/>
+              </a:rPr>
+              <a:t>1. Multi-Tier Subsystem Decomposition</a:t>
+            </a:r>
+          </a:p>
+          <a:p>
+            <a:pPr>
+              <a:lnSpc>
+                <a:spcPct val="115000"/>
+              </a:lnSpc>
+              <a:spcAft>
+                <a:spcPts val="600"/>
+              </a:spcAft>
+              <a:defRPr sz="950">
+                <a:latin typeface="Calibri"/>
+              </a:defRPr>
+            </a:pPr>
+            <a:r>
+              <a:rPr sz="713" b="1">
+                <a:solidFill>
+                  <a:srgbClr val="0F172A"/>
+                </a:solidFill>
+                <a:latin typeface="+mj-lt"/>
+              </a:rPr>
+              <a:t>Presentation Layer: </a:t>
+            </a:r>
+            <a:r>
+              <a:rPr sz="713">
+                <a:solidFill>
+                  <a:srgbClr val="334155"/>
+                </a:solidFill>
+                <a:latin typeface="+mj-lt"/>
+              </a:rPr>
+              <a:t>React 18.3 + Vite 6.1 SPA with dual persona views (Participant Portal &amp; Organizer SaaS Dashboard). 6-tier Poppins typography (weights 300 to 900).</a:t>
+            </a:r>
+          </a:p>
+          <a:p>
+            <a:pPr>
+              <a:lnSpc>
+                <a:spcPct val="115000"/>
+              </a:lnSpc>
+              <a:spcAft>
+                <a:spcPts val="600"/>
+              </a:spcAft>
+              <a:defRPr sz="950">
+                <a:latin typeface="Calibri"/>
+              </a:defRPr>
+            </a:pPr>
+            <a:r>
+              <a:rPr sz="713" b="1">
+                <a:solidFill>
+                  <a:srgbClr val="0F172A"/>
+                </a:solidFill>
+                <a:latin typeface="+mj-lt"/>
+              </a:rPr>
+              <a:t>API Gateway &amp; Services: </a:t>
+            </a:r>
+            <a:r>
+              <a:rPr sz="713">
+                <a:solidFill>
+                  <a:srgbClr val="334155"/>
+                </a:solidFill>
+                <a:latin typeface="+mj-lt"/>
+              </a:rPr>
+              <a:t>FastAPI ASGI server with modular APIRouters (/events, /registrations, /attendance, /stats). Runtime Pydantic v2 schema validations.</a:t>
+            </a:r>
+          </a:p>
+          <a:p>
+            <a:pPr>
+              <a:lnSpc>
+                <a:spcPct val="115000"/>
+              </a:lnSpc>
+              <a:spcAft>
+                <a:spcPts val="600"/>
+              </a:spcAft>
+              <a:defRPr sz="950">
+                <a:latin typeface="Calibri"/>
+              </a:defRPr>
+            </a:pPr>
+            <a:r>
+              <a:rPr sz="713" b="1">
+                <a:solidFill>
+                  <a:srgbClr val="0F172A"/>
+                </a:solidFill>
+                <a:latin typeface="+mj-lt"/>
+              </a:rPr>
+              <a:t>Dual-Mode Persistence: </a:t>
+            </a:r>
+            <a:r>
+              <a:rPr sz="713">
+                <a:solidFill>
+                  <a:srgbClr val="334155"/>
+                </a:solidFill>
+                <a:latin typeface="+mj-lt"/>
+              </a:rPr>
+              <a:t>Unified API service (api.js) probes Supabase Cloud PostgreSQL with RLS. Automatically fails over to local SQLite WAL mode if offline.</a:t>
+            </a:r>
+          </a:p>
+          <a:p>
+            <a:pPr>
+              <a:lnSpc>
+                <a:spcPct val="115000"/>
+              </a:lnSpc>
+              <a:spcAft>
+                <a:spcPts val="600"/>
+              </a:spcAft>
+              <a:defRPr sz="950">
+                <a:latin typeface="Calibri"/>
+              </a:defRPr>
+            </a:pPr>
+            <a:r>
+              <a:rPr sz="713" b="1">
+                <a:solidFill>
+                  <a:srgbClr val="0F172A"/>
+                </a:solidFill>
+                <a:latin typeface="+mj-lt"/>
+              </a:rPr>
+              <a:t>Client Utilities: </a:t>
+            </a:r>
+            <a:r>
+              <a:rPr sz="713">
+                <a:solidFill>
+                  <a:srgbClr val="334155"/>
+                </a:solidFill>
+                <a:latin typeface="+mj-lt"/>
+              </a:rPr>
+              <a:t>Client-side HTML5 canvas QR code ticketing, multi-round session timelines, and UTF-8 CSV roster streaming.</a:t>
+            </a:r>
+          </a:p>
+        </p:txBody>
+      </p:sp>
+      <p:sp>
+        <p:nvSpPr>
+          <p:cNvPr id="8" name="Rectangle 7"/>
+          <p:cNvSpPr/>
+          <p:nvPr/>
+        </p:nvSpPr>
+        <p:spPr>
+          <a:xfrm>
+            <a:off x="548640" y="1405889"/>
+            <a:ext cx="2558034" cy="68580"/>
+          </a:xfrm>
+          <a:prstGeom prst="rect">
+            <a:avLst/>
+          </a:prstGeom>
+          <a:solidFill>
+            <a:srgbClr val="2563EB"/>
+          </a:solidFill>
+          <a:ln>
+            <a:noFill/>
+          </a:ln>
+        </p:spPr>
+        <p:style>
+          <a:lnRef idx="1">
+            <a:schemeClr val="accent1"/>
+          </a:lnRef>
+          <a:fillRef idx="3">
+            <a:schemeClr val="accent1"/>
+          </a:fillRef>
+          <a:effectRef idx="2">
+            <a:schemeClr val="accent1"/>
+          </a:effectRef>
+          <a:fontRef idx="minor">
+            <a:schemeClr val="lt1"/>
+          </a:fontRef>
+        </p:style>
+        <p:txBody>
+          <a:bodyPr rtlCol="0" anchor="ctr"/>
+          <a:lstStyle/>
+          <a:p>
+            <a:pPr algn="ctr"/>
+            <a:endParaRPr sz="1350">
+              <a:latin typeface="+mj-lt"/>
+            </a:endParaRPr>
+          </a:p>
+        </p:txBody>
+      </p:sp>
+      <p:sp>
+        <p:nvSpPr>
+          <p:cNvPr id="9" name="Rounded Rectangle 8"/>
+          <p:cNvSpPr/>
+          <p:nvPr/>
+        </p:nvSpPr>
+        <p:spPr>
+          <a:xfrm>
+            <a:off x="3291840" y="1405889"/>
+            <a:ext cx="2558034" cy="3223260"/>
+          </a:xfrm>
+          <a:prstGeom prst="roundRect">
+            <a:avLst/>
+          </a:prstGeom>
+          <a:solidFill>
+            <a:srgbClr val="F8FAFC"/>
+          </a:solidFill>
+          <a:ln w="12700">
+            <a:solidFill>
+              <a:srgbClr val="E2E8F0"/>
+            </a:solidFill>
+          </a:ln>
+        </p:spPr>
+        <p:style>
+          <a:lnRef idx="1">
+            <a:schemeClr val="accent1"/>
+          </a:lnRef>
+          <a:fillRef idx="3">
+            <a:schemeClr val="accent1"/>
+          </a:fillRef>
+          <a:effectRef idx="2">
+            <a:schemeClr val="accent1"/>
+          </a:effectRef>
+          <a:fontRef idx="minor">
+            <a:schemeClr val="lt1"/>
+          </a:fontRef>
+        </p:style>
+        <p:txBody>
+          <a:bodyPr wrap="square" lIns="137160" tIns="123444" rIns="137160" rtlCol="0" anchor="ctr"/>
+          <a:lstStyle/>
+          <a:p>
+            <a:pPr algn="ctr">
+              <a:spcAft>
+                <a:spcPts val="750"/>
+              </a:spcAft>
+              <a:defRPr sz="1200" b="1">
+                <a:solidFill>
+                  <a:srgbClr val="1A365D"/>
+                </a:solidFill>
+                <a:latin typeface="Calibri"/>
+              </a:defRPr>
+            </a:pPr>
+            <a:r>
+              <a:rPr sz="900">
+                <a:latin typeface="+mj-lt"/>
+              </a:rPr>
+              <a:t>2. Algorithmic Interval Scheduling Engine</a:t>
+            </a:r>
+          </a:p>
+          <a:p>
+            <a:pPr>
+              <a:lnSpc>
+                <a:spcPct val="115000"/>
+              </a:lnSpc>
+              <a:spcAft>
+                <a:spcPts val="600"/>
+              </a:spcAft>
+              <a:defRPr sz="950">
+                <a:latin typeface="Calibri"/>
+              </a:defRPr>
+            </a:pPr>
+            <a:r>
+              <a:rPr sz="713" b="1">
+                <a:solidFill>
+                  <a:srgbClr val="0F172A"/>
+                </a:solidFill>
+                <a:latin typeface="+mj-lt"/>
+              </a:rPr>
+              <a:t>Discrete Representation: </a:t>
+            </a:r>
+            <a:r>
+              <a:rPr sz="713">
+                <a:solidFill>
+                  <a:srgbClr val="334155"/>
+                </a:solidFill>
+                <a:latin typeface="+mj-lt"/>
+              </a:rPr>
+              <a:t>Every booking request is formulated as formal half-open interval I_i = [s_i, e_i) on venue V_k mapped to integer minutes t in [0, 1440).</a:t>
+            </a:r>
+          </a:p>
+          <a:p>
+            <a:pPr>
+              <a:lnSpc>
+                <a:spcPct val="115000"/>
+              </a:lnSpc>
+              <a:spcAft>
+                <a:spcPts val="600"/>
+              </a:spcAft>
+              <a:defRPr sz="950">
+                <a:latin typeface="Calibri"/>
+              </a:defRPr>
+            </a:pPr>
+            <a:r>
+              <a:rPr sz="713" b="1">
+                <a:solidFill>
+                  <a:srgbClr val="0F172A"/>
+                </a:solidFill>
+                <a:latin typeface="+mj-lt"/>
+              </a:rPr>
+              <a:t>Bisection Search O(log N): </a:t>
+            </a:r>
+            <a:r>
+              <a:rPr sz="713">
+                <a:solidFill>
+                  <a:srgbClr val="334155"/>
+                </a:solidFill>
+                <a:latin typeface="+mj-lt"/>
+              </a:rPr>
+              <a:t>Active confirmed venue bookings kept sorted by start time. Bisect locates insertion index in logarithmic O(log N) time.</a:t>
+            </a:r>
+          </a:p>
+          <a:p>
+            <a:pPr>
+              <a:lnSpc>
+                <a:spcPct val="115000"/>
+              </a:lnSpc>
+              <a:spcAft>
+                <a:spcPts val="600"/>
+              </a:spcAft>
+              <a:defRPr sz="950">
+                <a:latin typeface="Calibri"/>
+              </a:defRPr>
+            </a:pPr>
+            <a:r>
+              <a:rPr sz="713" b="1">
+                <a:solidFill>
+                  <a:srgbClr val="0F172A"/>
+                </a:solidFill>
+                <a:latin typeface="+mj-lt"/>
+              </a:rPr>
+              <a:t>Neighbor-Only Verification: </a:t>
+            </a:r>
+            <a:r>
+              <a:rPr sz="713">
+                <a:solidFill>
+                  <a:srgbClr val="334155"/>
+                </a:solidFill>
+                <a:latin typeface="+mj-lt"/>
+              </a:rPr>
+              <a:t>Collision evaluated strictly against adjacent predecessor and successor: (s_new &lt; e_ext) AND (e_new &gt; s_ext). Eliminates O(N) table scans.</a:t>
+            </a:r>
+          </a:p>
+          <a:p>
+            <a:pPr>
+              <a:lnSpc>
+                <a:spcPct val="115000"/>
+              </a:lnSpc>
+              <a:spcAft>
+                <a:spcPts val="600"/>
+              </a:spcAft>
+              <a:defRPr sz="950">
+                <a:latin typeface="Calibri"/>
+              </a:defRPr>
+            </a:pPr>
+            <a:r>
+              <a:rPr sz="713" b="1">
+                <a:solidFill>
+                  <a:srgbClr val="0F172A"/>
+                </a:solidFill>
+                <a:latin typeface="+mj-lt"/>
+              </a:rPr>
+              <a:t>Batch Optimization (Greedy EFT): </a:t>
+            </a:r>
+            <a:r>
+              <a:rPr sz="713">
+                <a:solidFill>
+                  <a:srgbClr val="334155"/>
+                </a:solidFill>
+                <a:latin typeface="+mj-lt"/>
+              </a:rPr>
+              <a:t>Competing reservation batches sorted by finish time (e_1 &lt;= e_2 &lt;= ... &lt;= e_M). Provably optimal throughput in O(M log M).</a:t>
+            </a:r>
+          </a:p>
+        </p:txBody>
+      </p:sp>
+      <p:sp>
+        <p:nvSpPr>
+          <p:cNvPr id="10" name="Rectangle 9"/>
+          <p:cNvSpPr/>
+          <p:nvPr/>
+        </p:nvSpPr>
+        <p:spPr>
+          <a:xfrm>
+            <a:off x="3291840" y="1405889"/>
+            <a:ext cx="2558034" cy="68580"/>
+          </a:xfrm>
+          <a:prstGeom prst="rect">
+            <a:avLst/>
+          </a:prstGeom>
+          <a:solidFill>
+            <a:srgbClr val="1A365D"/>
+          </a:solidFill>
+          <a:ln>
+            <a:noFill/>
+          </a:ln>
+        </p:spPr>
+        <p:style>
+          <a:lnRef idx="1">
+            <a:schemeClr val="accent1"/>
+          </a:lnRef>
+          <a:fillRef idx="3">
+            <a:schemeClr val="accent1"/>
+          </a:fillRef>
+          <a:effectRef idx="2">
+            <a:schemeClr val="accent1"/>
+          </a:effectRef>
+          <a:fontRef idx="minor">
+            <a:schemeClr val="lt1"/>
+          </a:fontRef>
+        </p:style>
+        <p:txBody>
+          <a:bodyPr rtlCol="0" anchor="ctr"/>
+          <a:lstStyle/>
+          <a:p>
+            <a:pPr algn="ctr"/>
+            <a:endParaRPr sz="1350">
+              <a:latin typeface="+mj-lt"/>
+            </a:endParaRPr>
+          </a:p>
+        </p:txBody>
+      </p:sp>
+      <p:sp>
+        <p:nvSpPr>
+          <p:cNvPr id="11" name="Rounded Rectangle 10"/>
+          <p:cNvSpPr/>
+          <p:nvPr/>
+        </p:nvSpPr>
+        <p:spPr>
+          <a:xfrm>
+            <a:off x="6035040" y="1405889"/>
+            <a:ext cx="2558034" cy="3223260"/>
+          </a:xfrm>
+          <a:prstGeom prst="roundRect">
+            <a:avLst/>
+          </a:prstGeom>
+          <a:solidFill>
+            <a:srgbClr val="F8FAFC"/>
+          </a:solidFill>
+          <a:ln w="12700">
+            <a:solidFill>
+              <a:srgbClr val="E2E8F0"/>
+            </a:solidFill>
+          </a:ln>
+        </p:spPr>
+        <p:style>
+          <a:lnRef idx="1">
+            <a:schemeClr val="accent1"/>
+          </a:lnRef>
+          <a:fillRef idx="3">
+            <a:schemeClr val="accent1"/>
+          </a:fillRef>
+          <a:effectRef idx="2">
+            <a:schemeClr val="accent1"/>
+          </a:effectRef>
+          <a:fontRef idx="minor">
+            <a:schemeClr val="lt1"/>
+          </a:fontRef>
+        </p:style>
+        <p:txBody>
+          <a:bodyPr wrap="square" lIns="137160" tIns="123444" rIns="137160" rtlCol="0" anchor="ctr"/>
+          <a:lstStyle/>
+          <a:p>
+            <a:pPr algn="ctr">
+              <a:spcAft>
+                <a:spcPts val="750"/>
+              </a:spcAft>
+              <a:defRPr sz="1200" b="1">
+                <a:solidFill>
+                  <a:srgbClr val="1A365D"/>
+                </a:solidFill>
+                <a:latin typeface="Calibri"/>
+              </a:defRPr>
+            </a:pPr>
+            <a:r>
+              <a:rPr sz="900">
+                <a:latin typeface="+mj-lt"/>
+              </a:rPr>
+              <a:t>3. Concurrency Control &amp; Database Schema</a:t>
+            </a:r>
+          </a:p>
+          <a:p>
+            <a:pPr>
+              <a:lnSpc>
+                <a:spcPct val="115000"/>
+              </a:lnSpc>
+              <a:spcAft>
+                <a:spcPts val="600"/>
+              </a:spcAft>
+              <a:defRPr sz="950">
+                <a:latin typeface="Calibri"/>
+              </a:defRPr>
+            </a:pPr>
+            <a:r>
+              <a:rPr sz="713" b="1">
+                <a:solidFill>
+                  <a:srgbClr val="0F172A"/>
+                </a:solidFill>
+                <a:latin typeface="+mj-lt"/>
+              </a:rPr>
+              <a:t>ACID Transaction Envelope: </a:t>
+            </a:r>
+            <a:r>
+              <a:rPr sz="713">
+                <a:solidFill>
+                  <a:srgbClr val="334155"/>
+                </a:solidFill>
+                <a:latin typeface="+mj-lt"/>
+              </a:rPr>
+              <a:t>Wraps availability read and write inside atomic transaction (BEGIN IMMEDIATE in SQLite; row locks in PostgreSQL) to eliminate TOCTOU race conditions.</a:t>
+            </a:r>
+          </a:p>
+          <a:p>
+            <a:pPr>
+              <a:lnSpc>
+                <a:spcPct val="115000"/>
+              </a:lnSpc>
+              <a:spcAft>
+                <a:spcPts val="600"/>
+              </a:spcAft>
+              <a:defRPr sz="950">
+                <a:latin typeface="Calibri"/>
+              </a:defRPr>
+            </a:pPr>
+            <a:r>
+              <a:rPr sz="713" b="1">
+                <a:solidFill>
+                  <a:srgbClr val="0F172A"/>
+                </a:solidFill>
+                <a:latin typeface="+mj-lt"/>
+              </a:rPr>
+              <a:t>Venue Mutex Serialization: </a:t>
+            </a:r>
+            <a:r>
+              <a:rPr sz="713">
+                <a:solidFill>
+                  <a:srgbClr val="334155"/>
+                </a:solidFill>
+                <a:latin typeface="+mj-lt"/>
+              </a:rPr>
+              <a:t>Simultaneous parallel submissions for the exact same hall serialize at the transaction lock. Only the first commit succeeds.</a:t>
+            </a:r>
+          </a:p>
+          <a:p>
+            <a:pPr>
+              <a:lnSpc>
+                <a:spcPct val="115000"/>
+              </a:lnSpc>
+              <a:spcAft>
+                <a:spcPts val="600"/>
+              </a:spcAft>
+              <a:defRPr sz="950">
+                <a:latin typeface="Calibri"/>
+              </a:defRPr>
+            </a:pPr>
+            <a:r>
+              <a:rPr sz="713" b="1">
+                <a:solidFill>
+                  <a:srgbClr val="0F172A"/>
+                </a:solidFill>
+                <a:latin typeface="+mj-lt"/>
+              </a:rPr>
+              <a:t>Relational ER Model (6 Tables): </a:t>
+            </a:r>
+            <a:r>
+              <a:rPr sz="713">
+                <a:solidFill>
+                  <a:srgbClr val="334155"/>
+                </a:solidFill>
+                <a:latin typeface="+mj-lt"/>
+              </a:rPr>
+              <a:t>organizers (1) -&gt; events (N) -&gt; event_sessions (N) [Cascade]. events (1) -&gt; registrations (N) -&gt; attendance (1). announcements (N).</a:t>
+            </a:r>
+          </a:p>
+          <a:p>
+            <a:pPr>
+              <a:lnSpc>
+                <a:spcPct val="115000"/>
+              </a:lnSpc>
+              <a:spcAft>
+                <a:spcPts val="600"/>
+              </a:spcAft>
+              <a:defRPr sz="950">
+                <a:latin typeface="Calibri"/>
+              </a:defRPr>
+            </a:pPr>
+            <a:r>
+              <a:rPr sz="713" b="1">
+                <a:solidFill>
+                  <a:srgbClr val="0F172A"/>
+                </a:solidFill>
+                <a:latin typeface="+mj-lt"/>
+              </a:rPr>
+              <a:t>Integrity &amp; Idempotency: </a:t>
+            </a:r>
+            <a:r>
+              <a:rPr sz="713">
+                <a:solidFill>
+                  <a:srgbClr val="334155"/>
+                </a:solidFill>
+                <a:latin typeface="+mj-lt"/>
+              </a:rPr>
+              <a:t>Unique constraints on EVF-2026 ticket passes, automated capacity counter triggers, and foreign key cascade deletion.</a:t>
+            </a:r>
+          </a:p>
+        </p:txBody>
+      </p:sp>
+      <p:sp>
+        <p:nvSpPr>
+          <p:cNvPr id="12" name="Rectangle 11"/>
+          <p:cNvSpPr/>
+          <p:nvPr/>
+        </p:nvSpPr>
+        <p:spPr>
+          <a:xfrm>
+            <a:off x="6035040" y="1405889"/>
+            <a:ext cx="2558034" cy="68580"/>
+          </a:xfrm>
+          <a:prstGeom prst="rect">
+            <a:avLst/>
+          </a:prstGeom>
+          <a:solidFill>
+            <a:srgbClr val="0F172A"/>
+          </a:solidFill>
+          <a:ln>
+            <a:noFill/>
+          </a:ln>
+        </p:spPr>
+        <p:style>
+          <a:lnRef idx="1">
+            <a:schemeClr val="accent1"/>
+          </a:lnRef>
+          <a:fillRef idx="3">
+            <a:schemeClr val="accent1"/>
+          </a:fillRef>
+          <a:effectRef idx="2">
+            <a:schemeClr val="accent1"/>
+          </a:effectRef>
+          <a:fontRef idx="minor">
+            <a:schemeClr val="lt1"/>
+          </a:fontRef>
+        </p:style>
+        <p:txBody>
+          <a:bodyPr rtlCol="0" anchor="ctr"/>
+          <a:lstStyle/>
+          <a:p>
+            <a:pPr algn="ctr"/>
+            <a:endParaRPr sz="1350">
+              <a:latin typeface="+mj-lt"/>
+            </a:endParaRPr>
+          </a:p>
+        </p:txBody>
+      </p:sp>
+    </p:spTree>
+  </p:cSld>
+  <p:clrMapOvr>
+    <a:masterClrMapping/>
+  </p:clrMapOvr>
+</p:sld>
+</file>
+
+<file path=ppt/slides/slide11.xml><?xml version="1.0" encoding="utf-8"?>
+<p:sld xmlns:a="http://schemas.openxmlformats.org/drawingml/2006/main" xmlns:r="http://schemas.openxmlformats.org/officeDocument/2006/relationships" xmlns:p="http://schemas.openxmlformats.org/presentationml/2006/main">
+  <p:cSld>
+    <p:spTree>
+      <p:nvGrpSpPr>
+        <p:cNvPr id="1" name=""/>
+        <p:cNvGrpSpPr/>
+        <p:nvPr/>
+      </p:nvGrpSpPr>
+      <p:grpSpPr>
+        <a:xfrm>
+          <a:off x="0" y="0"/>
+          <a:ext cx="0" cy="0"/>
+          <a:chOff x="0" y="0"/>
+          <a:chExt cx="0" cy="0"/>
+        </a:xfrm>
+      </p:grpSpPr>
+      <p:sp>
+        <p:nvSpPr>
+          <p:cNvPr id="3" name="TextBox 2"/>
+          <p:cNvSpPr txBox="1"/>
+          <p:nvPr/>
+        </p:nvSpPr>
+        <p:spPr>
+          <a:xfrm>
+            <a:off x="548640" y="582931"/>
+            <a:ext cx="8023860" cy="418063"/>
+          </a:xfrm>
+          <a:prstGeom prst="rect">
+            <a:avLst/>
+          </a:prstGeom>
+          <a:noFill/>
+        </p:spPr>
+        <p:txBody>
+          <a:bodyPr wrap="square" lIns="0" tIns="0" rIns="0" bIns="0">
+            <a:spAutoFit/>
+          </a:bodyPr>
+          <a:lstStyle/>
+          <a:p>
+            <a:pPr>
+              <a:defRPr sz="2200" b="1">
+                <a:solidFill>
+                  <a:srgbClr val="1A365D"/>
+                </a:solidFill>
+                <a:latin typeface="Calibri"/>
+              </a:defRPr>
+            </a:pPr>
+            <a:r>
+              <a:rPr sz="1650" dirty="0">
+                <a:latin typeface="+mj-lt"/>
+              </a:rPr>
+              <a:t>Module 3: Development Implementation &amp; Test Automation</a:t>
+            </a:r>
+          </a:p>
+          <a:p>
+            <a:pPr>
+              <a:spcBef>
+                <a:spcPts val="225"/>
+              </a:spcBef>
+              <a:defRPr sz="1200">
+                <a:solidFill>
+                  <a:srgbClr val="64748B"/>
+                </a:solidFill>
+                <a:latin typeface="Calibri"/>
+              </a:defRPr>
+            </a:pPr>
+            <a:r>
+              <a:rPr sz="900" dirty="0">
+                <a:latin typeface="+mj-lt"/>
+              </a:rPr>
+              <a:t>Modular full-stack implementation and rigorous 28-suite </a:t>
+            </a:r>
+            <a:r>
+              <a:rPr sz="900" dirty="0" err="1">
+                <a:latin typeface="+mj-lt"/>
+              </a:rPr>
+              <a:t>Pytest</a:t>
+            </a:r>
+            <a:r>
+              <a:rPr sz="900" dirty="0">
+                <a:latin typeface="+mj-lt"/>
+              </a:rPr>
+              <a:t> verification matrix</a:t>
+            </a:r>
+          </a:p>
+        </p:txBody>
+      </p:sp>
+      <p:sp>
+        <p:nvSpPr>
+          <p:cNvPr id="4" name="Rectangle 3"/>
+          <p:cNvSpPr/>
+          <p:nvPr/>
+        </p:nvSpPr>
+        <p:spPr>
+          <a:xfrm>
+            <a:off x="548640" y="1268730"/>
+            <a:ext cx="8044434" cy="13716"/>
+          </a:xfrm>
+          <a:prstGeom prst="rect">
+            <a:avLst/>
+          </a:prstGeom>
+          <a:solidFill>
+            <a:srgbClr val="E2E8F0"/>
+          </a:solidFill>
+          <a:ln>
+            <a:solidFill>
+              <a:srgbClr val="E2E8F0"/>
+            </a:solidFill>
+          </a:ln>
+        </p:spPr>
+        <p:style>
+          <a:lnRef idx="1">
+            <a:schemeClr val="accent1"/>
+          </a:lnRef>
+          <a:fillRef idx="3">
+            <a:schemeClr val="accent1"/>
+          </a:fillRef>
+          <a:effectRef idx="2">
+            <a:schemeClr val="accent1"/>
+          </a:effectRef>
+          <a:fontRef idx="minor">
+            <a:schemeClr val="lt1"/>
+          </a:fontRef>
+        </p:style>
+        <p:txBody>
+          <a:bodyPr rtlCol="0" anchor="ctr"/>
+          <a:lstStyle/>
+          <a:p>
+            <a:pPr algn="ctr"/>
+            <a:endParaRPr sz="1350">
+              <a:latin typeface="+mj-lt"/>
+            </a:endParaRPr>
+          </a:p>
+        </p:txBody>
+      </p:sp>
+      <p:sp>
+        <p:nvSpPr>
+          <p:cNvPr id="5" name="TextBox 4"/>
+          <p:cNvSpPr txBox="1"/>
+          <p:nvPr/>
+        </p:nvSpPr>
+        <p:spPr>
+          <a:xfrm>
+            <a:off x="548640" y="4800600"/>
+            <a:ext cx="5486400" cy="150041"/>
+          </a:xfrm>
+          <a:prstGeom prst="rect">
+            <a:avLst/>
+          </a:prstGeom>
+          <a:noFill/>
+        </p:spPr>
+        <p:txBody>
+          <a:bodyPr wrap="square" lIns="0" tIns="0">
+            <a:spAutoFit/>
+          </a:bodyPr>
+          <a:lstStyle/>
+          <a:p>
+            <a:pPr>
+              <a:defRPr sz="900">
+                <a:solidFill>
+                  <a:srgbClr val="64748B"/>
+                </a:solidFill>
+                <a:latin typeface="Calibri"/>
+              </a:defRPr>
+            </a:pPr>
+            <a:r>
+              <a:rPr sz="675">
+                <a:latin typeface="+mj-lt"/>
+              </a:rPr>
+              <a:t>CSA1021 - Software Engineering | Capstone Project 2026 | Saveetha School of Engineering (SIMATS)</a:t>
+            </a:r>
+          </a:p>
+        </p:txBody>
+      </p:sp>
+      <p:sp>
+        <p:nvSpPr>
+          <p:cNvPr id="6" name="TextBox 5"/>
+          <p:cNvSpPr txBox="1"/>
+          <p:nvPr/>
+        </p:nvSpPr>
+        <p:spPr>
+          <a:xfrm>
+            <a:off x="7200900" y="4800600"/>
+            <a:ext cx="1371600" cy="150041"/>
+          </a:xfrm>
+          <a:prstGeom prst="rect">
+            <a:avLst/>
+          </a:prstGeom>
+          <a:noFill/>
+        </p:spPr>
+        <p:txBody>
+          <a:bodyPr wrap="square" tIns="0" rIns="0">
+            <a:spAutoFit/>
+          </a:bodyPr>
+          <a:lstStyle/>
+          <a:p>
+            <a:pPr algn="r">
+              <a:defRPr sz="900">
+                <a:solidFill>
+                  <a:srgbClr val="64748B"/>
+                </a:solidFill>
+                <a:latin typeface="Calibri"/>
+              </a:defRPr>
+            </a:pPr>
+            <a:r>
+              <a:rPr sz="675">
+                <a:latin typeface="+mj-lt"/>
+              </a:rPr>
+              <a:t>Slide 11 of 13</a:t>
+            </a:r>
+          </a:p>
+        </p:txBody>
+      </p:sp>
+      <p:sp>
+        <p:nvSpPr>
+          <p:cNvPr id="7" name="Rounded Rectangle 6"/>
+          <p:cNvSpPr/>
+          <p:nvPr/>
+        </p:nvSpPr>
+        <p:spPr>
+          <a:xfrm>
+            <a:off x="548640" y="1405889"/>
+            <a:ext cx="3929634" cy="1543050"/>
+          </a:xfrm>
+          <a:prstGeom prst="roundRect">
+            <a:avLst/>
+          </a:prstGeom>
+          <a:solidFill>
+            <a:srgbClr val="F8FAFC"/>
+          </a:solidFill>
+          <a:ln w="12700">
+            <a:solidFill>
+              <a:srgbClr val="E2E8F0"/>
+            </a:solidFill>
+          </a:ln>
+        </p:spPr>
+        <p:style>
+          <a:lnRef idx="1">
+            <a:schemeClr val="accent1"/>
+          </a:lnRef>
+          <a:fillRef idx="3">
+            <a:schemeClr val="accent1"/>
+          </a:fillRef>
+          <a:effectRef idx="2">
+            <a:schemeClr val="accent1"/>
+          </a:effectRef>
+          <a:fontRef idx="minor">
+            <a:schemeClr val="lt1"/>
+          </a:fontRef>
+        </p:style>
+        <p:txBody>
+          <a:bodyPr wrap="square" lIns="205740" tIns="123444" rIns="137160" rtlCol="0" anchor="ctr"/>
+          <a:lstStyle/>
+          <a:p>
+            <a:pPr algn="ctr">
+              <a:spcAft>
+                <a:spcPts val="450"/>
+              </a:spcAft>
+              <a:defRPr sz="1250" b="1">
+                <a:solidFill>
+                  <a:srgbClr val="1A365D"/>
+                </a:solidFill>
+                <a:latin typeface="Calibri"/>
+              </a:defRPr>
+            </a:pPr>
+            <a:r>
+              <a:rPr sz="938" dirty="0">
+                <a:latin typeface="+mj-lt"/>
+              </a:rPr>
+              <a:t>1. Full-Stack Implementation Stack</a:t>
+            </a:r>
+          </a:p>
+          <a:p>
+            <a:pPr>
+              <a:lnSpc>
+                <a:spcPct val="118000"/>
+              </a:lnSpc>
+              <a:defRPr sz="950">
+                <a:solidFill>
+                  <a:srgbClr val="334155"/>
+                </a:solidFill>
+                <a:latin typeface="Calibri"/>
+              </a:defRPr>
+            </a:pPr>
+            <a:r>
+              <a:rPr sz="713" dirty="0" err="1">
+                <a:latin typeface="+mj-lt"/>
+              </a:rPr>
+              <a:t>FastAPI</a:t>
+            </a:r>
+            <a:r>
+              <a:rPr sz="713" dirty="0">
+                <a:latin typeface="+mj-lt"/>
+              </a:rPr>
+              <a:t> Asynchronous Engine: Type-safe </a:t>
+            </a:r>
+            <a:r>
+              <a:rPr sz="713" dirty="0" err="1">
+                <a:latin typeface="+mj-lt"/>
+              </a:rPr>
+              <a:t>APIRouters</a:t>
+            </a:r>
+            <a:r>
+              <a:rPr sz="713" dirty="0">
+                <a:latin typeface="+mj-lt"/>
+              </a:rPr>
+              <a:t> with </a:t>
+            </a:r>
+            <a:r>
+              <a:rPr sz="713" dirty="0" err="1">
+                <a:latin typeface="+mj-lt"/>
+              </a:rPr>
+              <a:t>Pydantic</a:t>
+            </a:r>
+            <a:r>
+              <a:rPr sz="713" dirty="0">
+                <a:latin typeface="+mj-lt"/>
+              </a:rPr>
+              <a:t> v2 schemas; connection pooling context manager (@contextmanager </a:t>
+            </a:r>
+            <a:r>
+              <a:rPr sz="713" dirty="0" err="1">
+                <a:latin typeface="+mj-lt"/>
+              </a:rPr>
+              <a:t>get_db</a:t>
+            </a:r>
+            <a:r>
+              <a:rPr sz="713" dirty="0">
+                <a:latin typeface="+mj-lt"/>
+              </a:rPr>
+              <a:t>()) with Write-Ahead Logging.</a:t>
+            </a:r>
+            <a:br>
+              <a:rPr sz="713" dirty="0">
+                <a:latin typeface="+mj-lt"/>
+              </a:rPr>
+            </a:br>
+            <a:r>
+              <a:rPr sz="713" dirty="0">
+                <a:latin typeface="+mj-lt"/>
+              </a:rPr>
+              <a:t>React 18.3 Client: Single Page Application built with Vite 6.1; modular </a:t>
+            </a:r>
+            <a:r>
+              <a:rPr sz="713" dirty="0" err="1">
+                <a:latin typeface="+mj-lt"/>
+              </a:rPr>
+              <a:t>EventManager</a:t>
+            </a:r>
+            <a:r>
+              <a:rPr sz="713" dirty="0">
+                <a:latin typeface="+mj-lt"/>
+              </a:rPr>
+              <a:t>, </a:t>
+            </a:r>
+            <a:r>
+              <a:rPr sz="713" dirty="0" err="1">
+                <a:latin typeface="+mj-lt"/>
+              </a:rPr>
+              <a:t>TicketScannerModal</a:t>
+            </a:r>
+            <a:r>
+              <a:rPr sz="713" dirty="0">
+                <a:latin typeface="+mj-lt"/>
+              </a:rPr>
+              <a:t>, and </a:t>
+            </a:r>
+            <a:r>
+              <a:rPr sz="713" dirty="0" err="1">
+                <a:latin typeface="+mj-lt"/>
+              </a:rPr>
+              <a:t>AnalyticsOverview</a:t>
+            </a:r>
+            <a:r>
+              <a:rPr sz="713" dirty="0">
+                <a:latin typeface="+mj-lt"/>
+              </a:rPr>
+              <a:t>.</a:t>
+            </a:r>
+            <a:br>
+              <a:rPr sz="713" dirty="0">
+                <a:latin typeface="+mj-lt"/>
+              </a:rPr>
+            </a:br>
+            <a:r>
+              <a:rPr sz="713" dirty="0">
+                <a:latin typeface="+mj-lt"/>
+              </a:rPr>
+              <a:t>Poppins Design Tokens: 6 calibrated weight classes (font-light 300 to font-black 900) mapped in Tailwind CSS for clear visual hierarchy.</a:t>
+            </a:r>
+            <a:br>
+              <a:rPr sz="713" dirty="0">
+                <a:latin typeface="+mj-lt"/>
+              </a:rPr>
+            </a:br>
+            <a:r>
+              <a:rPr sz="713" dirty="0">
+                <a:latin typeface="+mj-lt"/>
+              </a:rPr>
+              <a:t>Dual-Mode Bridge: api.js dynamically switches between </a:t>
+            </a:r>
+            <a:r>
+              <a:rPr sz="713" dirty="0" err="1">
+                <a:latin typeface="+mj-lt"/>
+              </a:rPr>
+              <a:t>Supabase</a:t>
+            </a:r>
+            <a:r>
+              <a:rPr sz="713" dirty="0">
+                <a:latin typeface="+mj-lt"/>
+              </a:rPr>
+              <a:t> Cloud and local </a:t>
+            </a:r>
+            <a:r>
+              <a:rPr sz="713" dirty="0" err="1">
+                <a:latin typeface="+mj-lt"/>
+              </a:rPr>
+              <a:t>FastAPI</a:t>
+            </a:r>
+            <a:r>
+              <a:rPr sz="713" dirty="0">
+                <a:latin typeface="+mj-lt"/>
+              </a:rPr>
+              <a:t>.</a:t>
+            </a:r>
+          </a:p>
+        </p:txBody>
+      </p:sp>
+      <p:sp>
+        <p:nvSpPr>
+          <p:cNvPr id="8" name="Rectangle 7"/>
+          <p:cNvSpPr/>
+          <p:nvPr/>
+        </p:nvSpPr>
+        <p:spPr>
+          <a:xfrm>
+            <a:off x="548640" y="1405889"/>
+            <a:ext cx="82296" cy="1543050"/>
+          </a:xfrm>
+          <a:prstGeom prst="rect">
+            <a:avLst/>
+          </a:prstGeom>
+          <a:solidFill>
+            <a:srgbClr val="2563EB"/>
+          </a:solidFill>
+          <a:ln>
+            <a:noFill/>
+          </a:ln>
+        </p:spPr>
+        <p:style>
+          <a:lnRef idx="1">
+            <a:schemeClr val="accent1"/>
+          </a:lnRef>
+          <a:fillRef idx="3">
+            <a:schemeClr val="accent1"/>
+          </a:fillRef>
+          <a:effectRef idx="2">
+            <a:schemeClr val="accent1"/>
+          </a:effectRef>
+          <a:fontRef idx="minor">
+            <a:schemeClr val="lt1"/>
+          </a:fontRef>
+        </p:style>
+        <p:txBody>
+          <a:bodyPr rtlCol="0" anchor="ctr"/>
+          <a:lstStyle/>
+          <a:p>
+            <a:pPr algn="ctr"/>
+            <a:endParaRPr sz="1350">
+              <a:latin typeface="+mj-lt"/>
+            </a:endParaRPr>
+          </a:p>
+        </p:txBody>
+      </p:sp>
+      <p:sp>
+        <p:nvSpPr>
+          <p:cNvPr id="9" name="Rounded Rectangle 8"/>
+          <p:cNvSpPr/>
+          <p:nvPr/>
+        </p:nvSpPr>
+        <p:spPr>
+          <a:xfrm>
+            <a:off x="548640" y="3086100"/>
+            <a:ext cx="3929634" cy="1543050"/>
+          </a:xfrm>
+          <a:prstGeom prst="roundRect">
+            <a:avLst/>
+          </a:prstGeom>
+          <a:solidFill>
+            <a:srgbClr val="F8FAFC"/>
+          </a:solidFill>
+          <a:ln w="12700">
+            <a:solidFill>
+              <a:srgbClr val="E2E8F0"/>
+            </a:solidFill>
+          </a:ln>
+        </p:spPr>
+        <p:style>
+          <a:lnRef idx="1">
+            <a:schemeClr val="accent1"/>
+          </a:lnRef>
+          <a:fillRef idx="3">
+            <a:schemeClr val="accent1"/>
+          </a:fillRef>
+          <a:effectRef idx="2">
+            <a:schemeClr val="accent1"/>
+          </a:effectRef>
+          <a:fontRef idx="minor">
+            <a:schemeClr val="lt1"/>
+          </a:fontRef>
+        </p:style>
+        <p:txBody>
+          <a:bodyPr wrap="square" lIns="205740" tIns="123444" rIns="137160" rtlCol="0" anchor="ctr"/>
+          <a:lstStyle/>
+          <a:p>
+            <a:pPr algn="ctr">
+              <a:spcAft>
+                <a:spcPts val="450"/>
+              </a:spcAft>
+              <a:defRPr sz="1250" b="1">
+                <a:solidFill>
+                  <a:srgbClr val="1A365D"/>
+                </a:solidFill>
+                <a:latin typeface="Calibri"/>
+              </a:defRPr>
+            </a:pPr>
+            <a:r>
+              <a:rPr sz="938">
+                <a:latin typeface="+mj-lt"/>
+              </a:rPr>
+              <a:t>2. Algorithmic Collision Engine Implementation</a:t>
+            </a:r>
+          </a:p>
+          <a:p>
+            <a:pPr>
+              <a:lnSpc>
+                <a:spcPct val="118000"/>
+              </a:lnSpc>
+              <a:defRPr sz="950">
+                <a:solidFill>
+                  <a:srgbClr val="334155"/>
+                </a:solidFill>
+                <a:latin typeface="Calibri"/>
+              </a:defRPr>
+            </a:pPr>
+            <a:r>
+              <a:rPr sz="713">
+                <a:latin typeface="+mj-lt"/>
+              </a:rPr>
+              <a:t>Time Serialization: Normalizes 12h/24h timestamps into discrete minutes t in [0, 1440).</a:t>
+            </a:r>
+            <a:br>
+              <a:rPr sz="713">
+                <a:latin typeface="+mj-lt"/>
+              </a:rPr>
+            </a:br>
+            <a:r>
+              <a:rPr sz="713">
+                <a:latin typeface="+mj-lt"/>
+              </a:rPr>
+              <a:t>Bisection Neighbor Check:</a:t>
+            </a:r>
+            <a:br>
+              <a:rPr sz="713">
+                <a:latin typeface="+mj-lt"/>
+              </a:rPr>
+            </a:br>
+            <a:r>
+              <a:rPr sz="713">
+                <a:latin typeface="+mj-lt"/>
+              </a:rPr>
+              <a:t>  idx = bisect.bisect_left([i[0] for i in intervals], s_new)</a:t>
+            </a:r>
+            <a:br>
+              <a:rPr sz="713">
+                <a:latin typeface="+mj-lt"/>
+              </a:rPr>
+            </a:br>
+            <a:r>
+              <a:rPr sz="713">
+                <a:latin typeface="+mj-lt"/>
+              </a:rPr>
+              <a:t>  if idx &gt; 0 and intervals[idx-1][1] &gt; s_new: return False (Overlap Predecessor)</a:t>
+            </a:r>
+            <a:br>
+              <a:rPr sz="713">
+                <a:latin typeface="+mj-lt"/>
+              </a:rPr>
+            </a:br>
+            <a:r>
+              <a:rPr sz="713">
+                <a:latin typeface="+mj-lt"/>
+              </a:rPr>
+              <a:t>  if idx &lt; len(intervals) and intervals[idx][0] &lt; e_new: return False (Overlap Successor)</a:t>
+            </a:r>
+            <a:br>
+              <a:rPr sz="713">
+                <a:latin typeface="+mj-lt"/>
+              </a:rPr>
+            </a:br>
+            <a:r>
+              <a:rPr sz="713">
+                <a:latin typeface="+mj-lt"/>
+              </a:rPr>
+              <a:t>Nearest Slot Discovery: Iterates adjacent gaps [e_{k-1}, s_k) where (s_k - e_{k-1}) &gt;= dt to suggest immediate alternatives.</a:t>
+            </a:r>
+          </a:p>
+        </p:txBody>
+      </p:sp>
+      <p:sp>
+        <p:nvSpPr>
+          <p:cNvPr id="10" name="Rectangle 9"/>
+          <p:cNvSpPr/>
+          <p:nvPr/>
+        </p:nvSpPr>
+        <p:spPr>
+          <a:xfrm>
+            <a:off x="548640" y="3086100"/>
+            <a:ext cx="82296" cy="1543050"/>
+          </a:xfrm>
+          <a:prstGeom prst="rect">
+            <a:avLst/>
+          </a:prstGeom>
+          <a:solidFill>
+            <a:srgbClr val="1A365D"/>
+          </a:solidFill>
+          <a:ln>
+            <a:noFill/>
+          </a:ln>
+        </p:spPr>
+        <p:style>
+          <a:lnRef idx="1">
+            <a:schemeClr val="accent1"/>
+          </a:lnRef>
+          <a:fillRef idx="3">
+            <a:schemeClr val="accent1"/>
+          </a:fillRef>
+          <a:effectRef idx="2">
+            <a:schemeClr val="accent1"/>
+          </a:effectRef>
+          <a:fontRef idx="minor">
+            <a:schemeClr val="lt1"/>
+          </a:fontRef>
+        </p:style>
+        <p:txBody>
+          <a:bodyPr rtlCol="0" anchor="ctr"/>
+          <a:lstStyle/>
+          <a:p>
+            <a:pPr algn="ctr"/>
+            <a:endParaRPr sz="1350">
+              <a:latin typeface="+mj-lt"/>
+            </a:endParaRPr>
+          </a:p>
+        </p:txBody>
+      </p:sp>
+      <p:sp>
+        <p:nvSpPr>
+          <p:cNvPr id="11" name="Rounded Rectangle 10"/>
+          <p:cNvSpPr/>
+          <p:nvPr/>
+        </p:nvSpPr>
+        <p:spPr>
+          <a:xfrm>
+            <a:off x="4663440" y="1405889"/>
+            <a:ext cx="3929634" cy="3223260"/>
+          </a:xfrm>
+          <a:prstGeom prst="roundRect">
+            <a:avLst/>
+          </a:prstGeom>
+          <a:solidFill>
+            <a:srgbClr val="F8FAFC"/>
+          </a:solidFill>
+          <a:ln w="12700">
+            <a:solidFill>
+              <a:srgbClr val="E2E8F0"/>
+            </a:solidFill>
+          </a:ln>
+        </p:spPr>
+        <p:style>
+          <a:lnRef idx="1">
+            <a:schemeClr val="accent1"/>
+          </a:lnRef>
+          <a:fillRef idx="3">
+            <a:schemeClr val="accent1"/>
+          </a:fillRef>
+          <a:effectRef idx="2">
+            <a:schemeClr val="accent1"/>
+          </a:effectRef>
+          <a:fontRef idx="minor">
+            <a:schemeClr val="lt1"/>
+          </a:fontRef>
+        </p:style>
+        <p:txBody>
+          <a:bodyPr wrap="square" lIns="205740" tIns="123444" rIns="137160" rtlCol="0" anchor="ctr"/>
+          <a:lstStyle/>
+          <a:p>
+            <a:pPr algn="ctr">
+              <a:spcAft>
+                <a:spcPts val="600"/>
+              </a:spcAft>
+              <a:defRPr sz="1300" b="1">
+                <a:solidFill>
+                  <a:srgbClr val="1A365D"/>
+                </a:solidFill>
+                <a:latin typeface="Calibri"/>
+              </a:defRPr>
+            </a:pPr>
+            <a:r>
+              <a:rPr sz="975">
+                <a:latin typeface="+mj-lt"/>
+              </a:rPr>
+              <a:t>3. Automated Pytest Verification Matrix (28 Tests Passed)</a:t>
+            </a:r>
+          </a:p>
+          <a:p>
+            <a:pPr>
+              <a:lnSpc>
+                <a:spcPct val="115000"/>
+              </a:lnSpc>
+              <a:spcAft>
+                <a:spcPts val="300"/>
+              </a:spcAft>
+              <a:defRPr sz="950">
+                <a:latin typeface="Calibri"/>
+              </a:defRPr>
+            </a:pPr>
+            <a:r>
+              <a:rPr sz="713" b="1">
+                <a:solidFill>
+                  <a:srgbClr val="0F172A"/>
+                </a:solidFill>
+                <a:latin typeface="+mj-lt"/>
+              </a:rPr>
+              <a:t>test_events.py (5 Tests | PASSED): </a:t>
+            </a:r>
+            <a:r>
+              <a:rPr sz="713">
+                <a:solidFill>
+                  <a:srgbClr val="334155"/>
+                </a:solidFill>
+                <a:latin typeface="+mj-lt"/>
+              </a:rPr>
+              <a:t>Event creation, nested session ordering, update, search filters, and cascading relational deletion.</a:t>
+            </a:r>
+          </a:p>
+          <a:p>
+            <a:pPr>
+              <a:lnSpc>
+                <a:spcPct val="115000"/>
+              </a:lnSpc>
+              <a:spcAft>
+                <a:spcPts val="300"/>
+              </a:spcAft>
+              <a:defRPr sz="950">
+                <a:latin typeface="Calibri"/>
+              </a:defRPr>
+            </a:pPr>
+            <a:r>
+              <a:rPr sz="713" b="1">
+                <a:solidFill>
+                  <a:srgbClr val="0F172A"/>
+                </a:solidFill>
+                <a:latin typeface="+mj-lt"/>
+              </a:rPr>
+              <a:t>test_registrations.py (5 Tests | PASSED): </a:t>
+            </a:r>
+            <a:r>
+              <a:rPr sz="713">
+                <a:solidFill>
+                  <a:srgbClr val="334155"/>
+                </a:solidFill>
+                <a:latin typeface="+mj-lt"/>
+              </a:rPr>
+              <a:t>Successful registration, duplicate email rejection (409 Conflict), capacity cap overflow (400), and UTF-8 CSV roster exports.</a:t>
+            </a:r>
+          </a:p>
+          <a:p>
+            <a:pPr>
+              <a:lnSpc>
+                <a:spcPct val="115000"/>
+              </a:lnSpc>
+              <a:spcAft>
+                <a:spcPts val="300"/>
+              </a:spcAft>
+              <a:defRPr sz="950">
+                <a:latin typeface="Calibri"/>
+              </a:defRPr>
+            </a:pPr>
+            <a:r>
+              <a:rPr sz="713" b="1">
+                <a:solidFill>
+                  <a:srgbClr val="0F172A"/>
+                </a:solidFill>
+                <a:latin typeface="+mj-lt"/>
+              </a:rPr>
+              <a:t>test_attendance.py (3 Tests | PASSED): </a:t>
+            </a:r>
+            <a:r>
+              <a:rPr sz="713">
+                <a:solidFill>
+                  <a:srgbClr val="334155"/>
+                </a:solidFill>
+                <a:latin typeface="+mj-lt"/>
+              </a:rPr>
+              <a:t>EVF-2026 ticket code verification, automatic check-in toggle, and invalid status rejection.</a:t>
+            </a:r>
+          </a:p>
+          <a:p>
+            <a:pPr>
+              <a:lnSpc>
+                <a:spcPct val="115000"/>
+              </a:lnSpc>
+              <a:spcAft>
+                <a:spcPts val="300"/>
+              </a:spcAft>
+              <a:defRPr sz="950">
+                <a:latin typeface="Calibri"/>
+              </a:defRPr>
+            </a:pPr>
+            <a:r>
+              <a:rPr sz="713" b="1">
+                <a:solidFill>
+                  <a:srgbClr val="0F172A"/>
+                </a:solidFill>
+                <a:latin typeface="+mj-lt"/>
+              </a:rPr>
+              <a:t>test_database.py (4 Tests | PASSED): </a:t>
+            </a:r>
+            <a:r>
+              <a:rPr sz="713">
+                <a:solidFill>
+                  <a:srgbClr val="334155"/>
+                </a:solidFill>
+                <a:latin typeface="+mj-lt"/>
+              </a:rPr>
+              <a:t>Schema migration, WAL mode verification, foreign key constraints, and atomic rollback on simulated database faults.</a:t>
+            </a:r>
+          </a:p>
+          <a:p>
+            <a:pPr>
+              <a:lnSpc>
+                <a:spcPct val="115000"/>
+              </a:lnSpc>
+              <a:spcAft>
+                <a:spcPts val="300"/>
+              </a:spcAft>
+              <a:defRPr sz="950">
+                <a:latin typeface="Calibri"/>
+              </a:defRPr>
+            </a:pPr>
+            <a:r>
+              <a:rPr sz="713" b="1">
+                <a:solidFill>
+                  <a:srgbClr val="0F172A"/>
+                </a:solidFill>
+                <a:latin typeface="+mj-lt"/>
+              </a:rPr>
+              <a:t>test_stats_announcements.py (5 Tests | PASSED): </a:t>
+            </a:r>
+            <a:r>
+              <a:rPr sz="713">
+                <a:solidFill>
+                  <a:srgbClr val="334155"/>
+                </a:solidFill>
+                <a:latin typeface="+mj-lt"/>
+              </a:rPr>
+              <a:t>Platform KPI aggregations, department breakdown, category counts, and priority broadcast management.</a:t>
+            </a:r>
+          </a:p>
+          <a:p>
+            <a:pPr>
+              <a:lnSpc>
+                <a:spcPct val="115000"/>
+              </a:lnSpc>
+              <a:spcAft>
+                <a:spcPts val="300"/>
+              </a:spcAft>
+              <a:defRPr sz="950">
+                <a:latin typeface="Calibri"/>
+              </a:defRPr>
+            </a:pPr>
+            <a:r>
+              <a:rPr sz="713" b="1">
+                <a:solidFill>
+                  <a:srgbClr val="0F172A"/>
+                </a:solidFill>
+                <a:latin typeface="+mj-lt"/>
+              </a:rPr>
+              <a:t>test_api.py &amp; test_health.py (6 Tests | PASSED): </a:t>
+            </a:r>
+            <a:r>
+              <a:rPr sz="713">
+                <a:solidFill>
+                  <a:srgbClr val="334155"/>
+                </a:solidFill>
+                <a:latin typeface="+mj-lt"/>
+              </a:rPr>
+              <a:t>End-to-end integration workflow from event creation through ticket scanning; service liveness probe.</a:t>
+            </a:r>
+          </a:p>
+          <a:p>
+            <a:pPr>
+              <a:spcBef>
+                <a:spcPts val="600"/>
+              </a:spcBef>
+              <a:defRPr sz="1000" b="1">
+                <a:solidFill>
+                  <a:srgbClr val="10B981"/>
+                </a:solidFill>
+                <a:latin typeface="Calibri"/>
+              </a:defRPr>
+            </a:pPr>
+            <a:r>
+              <a:rPr sz="750">
+                <a:latin typeface="+mj-lt"/>
+              </a:rPr>
+              <a:t>Execution Verdict: 28 Passed in 0.71s (100% Pass Rate, 0 Regressions, Clean Build)</a:t>
+            </a:r>
+          </a:p>
+        </p:txBody>
+      </p:sp>
+      <p:sp>
+        <p:nvSpPr>
+          <p:cNvPr id="12" name="Rectangle 11"/>
+          <p:cNvSpPr/>
+          <p:nvPr/>
+        </p:nvSpPr>
+        <p:spPr>
+          <a:xfrm>
+            <a:off x="4663440" y="1405889"/>
+            <a:ext cx="82296" cy="3223260"/>
+          </a:xfrm>
+          <a:prstGeom prst="rect">
+            <a:avLst/>
+          </a:prstGeom>
+          <a:solidFill>
+            <a:srgbClr val="10B981"/>
+          </a:solidFill>
+          <a:ln>
+            <a:noFill/>
+          </a:ln>
+        </p:spPr>
+        <p:style>
+          <a:lnRef idx="1">
+            <a:schemeClr val="accent1"/>
+          </a:lnRef>
+          <a:fillRef idx="3">
+            <a:schemeClr val="accent1"/>
+          </a:fillRef>
+          <a:effectRef idx="2">
+            <a:schemeClr val="accent1"/>
+          </a:effectRef>
+          <a:fontRef idx="minor">
+            <a:schemeClr val="lt1"/>
+          </a:fontRef>
+        </p:style>
+        <p:txBody>
+          <a:bodyPr rtlCol="0" anchor="ctr"/>
+          <a:lstStyle/>
+          <a:p>
+            <a:pPr algn="ctr"/>
+            <a:endParaRPr sz="1350">
+              <a:latin typeface="+mj-lt"/>
+            </a:endParaRPr>
+          </a:p>
+        </p:txBody>
+      </p:sp>
+    </p:spTree>
+  </p:cSld>
+  <p:clrMapOvr>
+    <a:masterClrMapping/>
+  </p:clrMapOvr>
+</p:sld>
+</file>
+
+<file path=ppt/slides/slide12.xml><?xml version="1.0" encoding="utf-8"?>
+<p:sld xmlns:a="http://schemas.openxmlformats.org/drawingml/2006/main" xmlns:r="http://schemas.openxmlformats.org/officeDocument/2006/relationships" xmlns:p="http://schemas.openxmlformats.org/presentationml/2006/main">
+  <p:cSld>
+    <p:spTree>
+      <p:nvGrpSpPr>
+        <p:cNvPr id="1" name=""/>
+        <p:cNvGrpSpPr/>
+        <p:nvPr/>
+      </p:nvGrpSpPr>
+      <p:grpSpPr>
+        <a:xfrm>
+          <a:off x="0" y="0"/>
+          <a:ext cx="0" cy="0"/>
+          <a:chOff x="0" y="0"/>
+          <a:chExt cx="0" cy="0"/>
+        </a:xfrm>
+      </p:grpSpPr>
+      <p:sp>
+        <p:nvSpPr>
+          <p:cNvPr id="3" name="TextBox 2"/>
+          <p:cNvSpPr txBox="1"/>
+          <p:nvPr/>
+        </p:nvSpPr>
+        <p:spPr>
+          <a:xfrm>
+            <a:off x="548640" y="582931"/>
+            <a:ext cx="8023860" cy="418063"/>
+          </a:xfrm>
+          <a:prstGeom prst="rect">
+            <a:avLst/>
+          </a:prstGeom>
+          <a:noFill/>
+        </p:spPr>
+        <p:txBody>
+          <a:bodyPr wrap="square" lIns="0" tIns="0" rIns="0" bIns="0">
+            <a:spAutoFit/>
+          </a:bodyPr>
+          <a:lstStyle/>
+          <a:p>
+            <a:pPr>
+              <a:defRPr sz="2200" b="1">
+                <a:solidFill>
+                  <a:srgbClr val="1A365D"/>
+                </a:solidFill>
+                <a:latin typeface="Calibri"/>
+              </a:defRPr>
+            </a:pPr>
+            <a:r>
+              <a:rPr sz="1650">
+                <a:latin typeface="+mj-lt"/>
+              </a:rPr>
+              <a:t>Module 4: Deployment Architecture &amp; DevOps Engineering</a:t>
+            </a:r>
+          </a:p>
+          <a:p>
+            <a:pPr>
+              <a:spcBef>
+                <a:spcPts val="225"/>
+              </a:spcBef>
+              <a:defRPr sz="1200">
+                <a:solidFill>
+                  <a:srgbClr val="64748B"/>
+                </a:solidFill>
+                <a:latin typeface="Calibri"/>
+              </a:defRPr>
+            </a:pPr>
+            <a:r>
+              <a:rPr sz="900">
+                <a:latin typeface="+mj-lt"/>
+              </a:rPr>
+              <a:t>Dual-mode deployment topology, CI/CD automation pipeline, and production security hardening</a:t>
+            </a:r>
+          </a:p>
+        </p:txBody>
+      </p:sp>
+      <p:sp>
+        <p:nvSpPr>
+          <p:cNvPr id="4" name="Rectangle 3"/>
+          <p:cNvSpPr/>
+          <p:nvPr/>
+        </p:nvSpPr>
+        <p:spPr>
+          <a:xfrm>
+            <a:off x="548640" y="1268730"/>
+            <a:ext cx="8044434" cy="13716"/>
+          </a:xfrm>
+          <a:prstGeom prst="rect">
+            <a:avLst/>
+          </a:prstGeom>
+          <a:solidFill>
+            <a:srgbClr val="E2E8F0"/>
+          </a:solidFill>
+          <a:ln>
+            <a:solidFill>
+              <a:srgbClr val="E2E8F0"/>
+            </a:solidFill>
+          </a:ln>
+        </p:spPr>
+        <p:style>
+          <a:lnRef idx="1">
+            <a:schemeClr val="accent1"/>
+          </a:lnRef>
+          <a:fillRef idx="3">
+            <a:schemeClr val="accent1"/>
+          </a:fillRef>
+          <a:effectRef idx="2">
+            <a:schemeClr val="accent1"/>
+          </a:effectRef>
+          <a:fontRef idx="minor">
+            <a:schemeClr val="lt1"/>
+          </a:fontRef>
+        </p:style>
+        <p:txBody>
+          <a:bodyPr rtlCol="0" anchor="ctr"/>
+          <a:lstStyle/>
+          <a:p>
+            <a:pPr algn="ctr"/>
+            <a:endParaRPr sz="1350">
+              <a:latin typeface="+mj-lt"/>
+            </a:endParaRPr>
+          </a:p>
+        </p:txBody>
+      </p:sp>
+      <p:sp>
+        <p:nvSpPr>
+          <p:cNvPr id="5" name="TextBox 4"/>
+          <p:cNvSpPr txBox="1"/>
+          <p:nvPr/>
+        </p:nvSpPr>
+        <p:spPr>
+          <a:xfrm>
+            <a:off x="548640" y="4800600"/>
+            <a:ext cx="5486400" cy="150041"/>
+          </a:xfrm>
+          <a:prstGeom prst="rect">
+            <a:avLst/>
+          </a:prstGeom>
+          <a:noFill/>
+        </p:spPr>
+        <p:txBody>
+          <a:bodyPr wrap="square" lIns="0" tIns="0">
+            <a:spAutoFit/>
+          </a:bodyPr>
+          <a:lstStyle/>
+          <a:p>
+            <a:pPr>
+              <a:defRPr sz="900">
+                <a:solidFill>
+                  <a:srgbClr val="64748B"/>
+                </a:solidFill>
+                <a:latin typeface="Calibri"/>
+              </a:defRPr>
+            </a:pPr>
+            <a:r>
+              <a:rPr sz="675">
+                <a:latin typeface="+mj-lt"/>
+              </a:rPr>
+              <a:t>CSA1021 - Software Engineering | Capstone Project 2026 | Saveetha School of Engineering (SIMATS)</a:t>
+            </a:r>
+          </a:p>
+        </p:txBody>
+      </p:sp>
+      <p:sp>
+        <p:nvSpPr>
+          <p:cNvPr id="6" name="TextBox 5"/>
+          <p:cNvSpPr txBox="1"/>
+          <p:nvPr/>
+        </p:nvSpPr>
+        <p:spPr>
+          <a:xfrm>
+            <a:off x="7200900" y="4800600"/>
+            <a:ext cx="1371600" cy="150041"/>
+          </a:xfrm>
+          <a:prstGeom prst="rect">
+            <a:avLst/>
+          </a:prstGeom>
+          <a:noFill/>
+        </p:spPr>
+        <p:txBody>
+          <a:bodyPr wrap="square" tIns="0" rIns="0">
+            <a:spAutoFit/>
+          </a:bodyPr>
+          <a:lstStyle/>
+          <a:p>
+            <a:pPr algn="r">
+              <a:defRPr sz="900">
+                <a:solidFill>
+                  <a:srgbClr val="64748B"/>
+                </a:solidFill>
+                <a:latin typeface="Calibri"/>
+              </a:defRPr>
+            </a:pPr>
+            <a:r>
+              <a:rPr sz="675">
+                <a:latin typeface="+mj-lt"/>
+              </a:rPr>
+              <a:t>Slide 12 of 13</a:t>
+            </a:r>
+          </a:p>
+        </p:txBody>
+      </p:sp>
+      <p:sp>
+        <p:nvSpPr>
+          <p:cNvPr id="7" name="Rounded Rectangle 6"/>
+          <p:cNvSpPr/>
+          <p:nvPr/>
+        </p:nvSpPr>
+        <p:spPr>
+          <a:xfrm>
+            <a:off x="548640" y="1405889"/>
+            <a:ext cx="2558034" cy="3223260"/>
+          </a:xfrm>
+          <a:prstGeom prst="roundRect">
+            <a:avLst/>
+          </a:prstGeom>
+          <a:solidFill>
+            <a:srgbClr val="F8FAFC"/>
+          </a:solidFill>
+          <a:ln w="12700">
+            <a:solidFill>
+              <a:srgbClr val="E2E8F0"/>
+            </a:solidFill>
+          </a:ln>
+        </p:spPr>
+        <p:style>
+          <a:lnRef idx="1">
+            <a:schemeClr val="accent1"/>
+          </a:lnRef>
+          <a:fillRef idx="3">
+            <a:schemeClr val="accent1"/>
+          </a:fillRef>
+          <a:effectRef idx="2">
+            <a:schemeClr val="accent1"/>
+          </a:effectRef>
+          <a:fontRef idx="minor">
+            <a:schemeClr val="lt1"/>
+          </a:fontRef>
+        </p:style>
+        <p:txBody>
+          <a:bodyPr wrap="square" lIns="137160" tIns="123444" rIns="137160" rtlCol="0" anchor="ctr"/>
+          <a:lstStyle/>
+          <a:p>
+            <a:pPr algn="ctr">
+              <a:spcAft>
+                <a:spcPts val="750"/>
+              </a:spcAft>
+              <a:defRPr sz="1200" b="1">
+                <a:solidFill>
+                  <a:srgbClr val="1A365D"/>
+                </a:solidFill>
+                <a:latin typeface="Calibri"/>
+              </a:defRPr>
+            </a:pPr>
+            <a:r>
+              <a:rPr sz="900">
+                <a:latin typeface="+mj-lt"/>
+              </a:rPr>
+              <a:t>1. Dual-Mode Deployment Topology</a:t>
+            </a:r>
+          </a:p>
+          <a:p>
+            <a:pPr>
+              <a:lnSpc>
+                <a:spcPct val="115000"/>
+              </a:lnSpc>
+              <a:spcAft>
+                <a:spcPts val="600"/>
+              </a:spcAft>
+              <a:defRPr sz="950">
+                <a:latin typeface="Calibri"/>
+              </a:defRPr>
+            </a:pPr>
+            <a:r>
+              <a:rPr sz="713" b="1">
+                <a:solidFill>
+                  <a:srgbClr val="0F172A"/>
+                </a:solidFill>
+                <a:latin typeface="+mj-lt"/>
+              </a:rPr>
+              <a:t>Cloud Production Architecture: </a:t>
+            </a:r>
+            <a:r>
+              <a:rPr sz="713">
+                <a:solidFill>
+                  <a:srgbClr val="334155"/>
+                </a:solidFill>
+                <a:latin typeface="+mj-lt"/>
+              </a:rPr>
+              <a:t>React SPA hosted on Vercel Edge Network with global CDN and SSL termination. Containerized FastAPI server on Render/Railway. Supabase Cloud PostgreSQL with automated backups.</a:t>
+            </a:r>
+          </a:p>
+          <a:p>
+            <a:pPr>
+              <a:lnSpc>
+                <a:spcPct val="115000"/>
+              </a:lnSpc>
+              <a:spcAft>
+                <a:spcPts val="600"/>
+              </a:spcAft>
+              <a:defRPr sz="950">
+                <a:latin typeface="Calibri"/>
+              </a:defRPr>
+            </a:pPr>
+            <a:r>
+              <a:rPr sz="713" b="1">
+                <a:solidFill>
+                  <a:srgbClr val="0F172A"/>
+                </a:solidFill>
+                <a:latin typeface="+mj-lt"/>
+              </a:rPr>
+              <a:t>Local Campus Edge Mode: </a:t>
+            </a:r>
+            <a:r>
+              <a:rPr sz="713">
+                <a:solidFill>
+                  <a:srgbClr val="334155"/>
+                </a:solidFill>
+                <a:latin typeface="+mj-lt"/>
+              </a:rPr>
+              <a:t>Single-command boot (npm run dev) executing concurrent FastAPI (port 5000) and Vite (port 5173). Zero external cloud dependencies.</a:t>
+            </a:r>
+          </a:p>
+          <a:p>
+            <a:pPr>
+              <a:lnSpc>
+                <a:spcPct val="115000"/>
+              </a:lnSpc>
+              <a:spcAft>
+                <a:spcPts val="600"/>
+              </a:spcAft>
+              <a:defRPr sz="950">
+                <a:latin typeface="Calibri"/>
+              </a:defRPr>
+            </a:pPr>
+            <a:r>
+              <a:rPr sz="713" b="1">
+                <a:solidFill>
+                  <a:srgbClr val="0F172A"/>
+                </a:solidFill>
+                <a:latin typeface="+mj-lt"/>
+              </a:rPr>
+              <a:t>Air-Gapped Operation: </a:t>
+            </a:r>
+            <a:r>
+              <a:rPr sz="713">
+                <a:solidFill>
+                  <a:srgbClr val="334155"/>
+                </a:solidFill>
+                <a:latin typeface="+mj-lt"/>
+              </a:rPr>
+              <a:t>Ideal for high-density campus symposiums or network-isolated computer science labs during 36-hour hackathons.</a:t>
+            </a:r>
+          </a:p>
+          <a:p>
+            <a:pPr>
+              <a:lnSpc>
+                <a:spcPct val="115000"/>
+              </a:lnSpc>
+              <a:spcAft>
+                <a:spcPts val="600"/>
+              </a:spcAft>
+              <a:defRPr sz="950">
+                <a:latin typeface="Calibri"/>
+              </a:defRPr>
+            </a:pPr>
+            <a:r>
+              <a:rPr sz="713" b="1">
+                <a:solidFill>
+                  <a:srgbClr val="0F172A"/>
+                </a:solidFill>
+                <a:latin typeface="+mj-lt"/>
+              </a:rPr>
+              <a:t>Seamless Failover: </a:t>
+            </a:r>
+            <a:r>
+              <a:rPr sz="713">
+                <a:solidFill>
+                  <a:srgbClr val="334155"/>
+                </a:solidFill>
+                <a:latin typeface="+mj-lt"/>
+              </a:rPr>
+              <a:t>Client api.js automatically detects cloud connectivity and routes queries without interface reload.</a:t>
+            </a:r>
+          </a:p>
+        </p:txBody>
+      </p:sp>
+      <p:sp>
+        <p:nvSpPr>
+          <p:cNvPr id="8" name="Rectangle 7"/>
+          <p:cNvSpPr/>
+          <p:nvPr/>
+        </p:nvSpPr>
+        <p:spPr>
+          <a:xfrm>
+            <a:off x="548640" y="1405889"/>
+            <a:ext cx="2558034" cy="68580"/>
+          </a:xfrm>
+          <a:prstGeom prst="rect">
+            <a:avLst/>
+          </a:prstGeom>
+          <a:solidFill>
+            <a:srgbClr val="2563EB"/>
+          </a:solidFill>
+          <a:ln>
+            <a:noFill/>
+          </a:ln>
+        </p:spPr>
+        <p:style>
+          <a:lnRef idx="1">
+            <a:schemeClr val="accent1"/>
+          </a:lnRef>
+          <a:fillRef idx="3">
+            <a:schemeClr val="accent1"/>
+          </a:fillRef>
+          <a:effectRef idx="2">
+            <a:schemeClr val="accent1"/>
+          </a:effectRef>
+          <a:fontRef idx="minor">
+            <a:schemeClr val="lt1"/>
+          </a:fontRef>
+        </p:style>
+        <p:txBody>
+          <a:bodyPr rtlCol="0" anchor="ctr"/>
+          <a:lstStyle/>
+          <a:p>
+            <a:pPr algn="ctr"/>
+            <a:endParaRPr sz="1350">
+              <a:latin typeface="+mj-lt"/>
+            </a:endParaRPr>
+          </a:p>
+        </p:txBody>
+      </p:sp>
+      <p:sp>
+        <p:nvSpPr>
+          <p:cNvPr id="9" name="Rounded Rectangle 8"/>
+          <p:cNvSpPr/>
+          <p:nvPr/>
+        </p:nvSpPr>
+        <p:spPr>
+          <a:xfrm>
+            <a:off x="3291840" y="1405889"/>
+            <a:ext cx="2558034" cy="3223260"/>
+          </a:xfrm>
+          <a:prstGeom prst="roundRect">
+            <a:avLst/>
+          </a:prstGeom>
+          <a:solidFill>
+            <a:srgbClr val="F8FAFC"/>
+          </a:solidFill>
+          <a:ln w="12700">
+            <a:solidFill>
+              <a:srgbClr val="E2E8F0"/>
+            </a:solidFill>
+          </a:ln>
+        </p:spPr>
+        <p:style>
+          <a:lnRef idx="1">
+            <a:schemeClr val="accent1"/>
+          </a:lnRef>
+          <a:fillRef idx="3">
+            <a:schemeClr val="accent1"/>
+          </a:fillRef>
+          <a:effectRef idx="2">
+            <a:schemeClr val="accent1"/>
+          </a:effectRef>
+          <a:fontRef idx="minor">
+            <a:schemeClr val="lt1"/>
+          </a:fontRef>
+        </p:style>
+        <p:txBody>
+          <a:bodyPr wrap="square" lIns="137160" tIns="123444" rIns="137160" rtlCol="0" anchor="ctr"/>
+          <a:lstStyle/>
+          <a:p>
+            <a:pPr algn="ctr">
+              <a:spcAft>
+                <a:spcPts val="750"/>
+              </a:spcAft>
+              <a:defRPr sz="1200" b="1">
+                <a:solidFill>
+                  <a:srgbClr val="1A365D"/>
+                </a:solidFill>
+                <a:latin typeface="Calibri"/>
+              </a:defRPr>
+            </a:pPr>
+            <a:r>
+              <a:rPr sz="900">
+                <a:latin typeface="+mj-lt"/>
+              </a:rPr>
+              <a:t>2. CI/CD Automation Pipeline</a:t>
+            </a:r>
+          </a:p>
+          <a:p>
+            <a:pPr>
+              <a:lnSpc>
+                <a:spcPct val="115000"/>
+              </a:lnSpc>
+              <a:spcAft>
+                <a:spcPts val="600"/>
+              </a:spcAft>
+              <a:defRPr sz="950">
+                <a:latin typeface="Calibri"/>
+              </a:defRPr>
+            </a:pPr>
+            <a:r>
+              <a:rPr sz="713" b="1">
+                <a:solidFill>
+                  <a:srgbClr val="0F172A"/>
+                </a:solidFill>
+                <a:latin typeface="+mj-lt"/>
+              </a:rPr>
+              <a:t>Stage 1: Lint &amp; Code Quality: </a:t>
+            </a:r>
+            <a:r>
+              <a:rPr sz="713">
+                <a:solidFill>
+                  <a:srgbClr val="334155"/>
+                </a:solidFill>
+                <a:latin typeface="+mj-lt"/>
+              </a:rPr>
+              <a:t>Triggered on push/PR to main. Flake8 and Black for Python backend; ESLint for React JSX components.</a:t>
+            </a:r>
+          </a:p>
+          <a:p>
+            <a:pPr>
+              <a:lnSpc>
+                <a:spcPct val="115000"/>
+              </a:lnSpc>
+              <a:spcAft>
+                <a:spcPts val="600"/>
+              </a:spcAft>
+              <a:defRPr sz="950">
+                <a:latin typeface="Calibri"/>
+              </a:defRPr>
+            </a:pPr>
+            <a:r>
+              <a:rPr sz="713" b="1">
+                <a:solidFill>
+                  <a:srgbClr val="0F172A"/>
+                </a:solidFill>
+                <a:latin typeface="+mj-lt"/>
+              </a:rPr>
+              <a:t>Stage 2: Automated Pytest Suite: </a:t>
+            </a:r>
+            <a:r>
+              <a:rPr sz="713">
+                <a:solidFill>
+                  <a:srgbClr val="334155"/>
+                </a:solidFill>
+                <a:latin typeface="+mj-lt"/>
+              </a:rPr>
+              <a:t>Executes all 28 automated test suites in isolated runner. Enforces 100% pass threshold prior to merge.</a:t>
+            </a:r>
+          </a:p>
+          <a:p>
+            <a:pPr>
+              <a:lnSpc>
+                <a:spcPct val="115000"/>
+              </a:lnSpc>
+              <a:spcAft>
+                <a:spcPts val="600"/>
+              </a:spcAft>
+              <a:defRPr sz="950">
+                <a:latin typeface="Calibri"/>
+              </a:defRPr>
+            </a:pPr>
+            <a:r>
+              <a:rPr sz="713" b="1">
+                <a:solidFill>
+                  <a:srgbClr val="0F172A"/>
+                </a:solidFill>
+                <a:latin typeface="+mj-lt"/>
+              </a:rPr>
+              <a:t>Stage 3: Production Client Build: </a:t>
+            </a:r>
+            <a:r>
+              <a:rPr sz="713">
+                <a:solidFill>
+                  <a:srgbClr val="334155"/>
+                </a:solidFill>
+                <a:latin typeface="+mj-lt"/>
+              </a:rPr>
+              <a:t>Compiles React production bundle via npm run build. Verifies asset minification and zero missing modules in dist/.</a:t>
+            </a:r>
+          </a:p>
+          <a:p>
+            <a:pPr>
+              <a:lnSpc>
+                <a:spcPct val="115000"/>
+              </a:lnSpc>
+              <a:spcAft>
+                <a:spcPts val="600"/>
+              </a:spcAft>
+              <a:defRPr sz="950">
+                <a:latin typeface="Calibri"/>
+              </a:defRPr>
+            </a:pPr>
+            <a:r>
+              <a:rPr sz="713" b="1">
+                <a:solidFill>
+                  <a:srgbClr val="0F172A"/>
+                </a:solidFill>
+                <a:latin typeface="+mj-lt"/>
+              </a:rPr>
+              <a:t>Stage 4: Container Packaging &amp; Rollout: </a:t>
+            </a:r>
+            <a:r>
+              <a:rPr sz="713">
+                <a:solidFill>
+                  <a:srgbClr val="334155"/>
+                </a:solidFill>
+                <a:latin typeface="+mj-lt"/>
+              </a:rPr>
+              <a:t>Multi-stage Docker build deployed with zero-downtime rolling update; automated rollback if /api/health probe fails.</a:t>
+            </a:r>
+          </a:p>
+        </p:txBody>
+      </p:sp>
+      <p:sp>
+        <p:nvSpPr>
+          <p:cNvPr id="10" name="Rectangle 9"/>
+          <p:cNvSpPr/>
+          <p:nvPr/>
+        </p:nvSpPr>
+        <p:spPr>
+          <a:xfrm>
+            <a:off x="3291840" y="1405889"/>
+            <a:ext cx="2558034" cy="68580"/>
+          </a:xfrm>
+          <a:prstGeom prst="rect">
+            <a:avLst/>
+          </a:prstGeom>
+          <a:solidFill>
+            <a:srgbClr val="1A365D"/>
+          </a:solidFill>
+          <a:ln>
+            <a:noFill/>
+          </a:ln>
+        </p:spPr>
+        <p:style>
+          <a:lnRef idx="1">
+            <a:schemeClr val="accent1"/>
+          </a:lnRef>
+          <a:fillRef idx="3">
+            <a:schemeClr val="accent1"/>
+          </a:fillRef>
+          <a:effectRef idx="2">
+            <a:schemeClr val="accent1"/>
+          </a:effectRef>
+          <a:fontRef idx="minor">
+            <a:schemeClr val="lt1"/>
+          </a:fontRef>
+        </p:style>
+        <p:txBody>
+          <a:bodyPr rtlCol="0" anchor="ctr"/>
+          <a:lstStyle/>
+          <a:p>
+            <a:pPr algn="ctr"/>
+            <a:endParaRPr sz="1350">
+              <a:latin typeface="+mj-lt"/>
+            </a:endParaRPr>
+          </a:p>
+        </p:txBody>
+      </p:sp>
+      <p:sp>
+        <p:nvSpPr>
+          <p:cNvPr id="11" name="Rounded Rectangle 10"/>
+          <p:cNvSpPr/>
+          <p:nvPr/>
+        </p:nvSpPr>
+        <p:spPr>
+          <a:xfrm>
+            <a:off x="6035040" y="1405889"/>
+            <a:ext cx="2558034" cy="3223260"/>
+          </a:xfrm>
+          <a:prstGeom prst="roundRect">
+            <a:avLst/>
+          </a:prstGeom>
+          <a:solidFill>
+            <a:srgbClr val="F8FAFC"/>
+          </a:solidFill>
+          <a:ln w="12700">
+            <a:solidFill>
+              <a:srgbClr val="E2E8F0"/>
+            </a:solidFill>
+          </a:ln>
+        </p:spPr>
+        <p:style>
+          <a:lnRef idx="1">
+            <a:schemeClr val="accent1"/>
+          </a:lnRef>
+          <a:fillRef idx="3">
+            <a:schemeClr val="accent1"/>
+          </a:fillRef>
+          <a:effectRef idx="2">
+            <a:schemeClr val="accent1"/>
+          </a:effectRef>
+          <a:fontRef idx="minor">
+            <a:schemeClr val="lt1"/>
+          </a:fontRef>
+        </p:style>
+        <p:txBody>
+          <a:bodyPr wrap="square" lIns="137160" tIns="123444" rIns="137160" rtlCol="0" anchor="ctr"/>
+          <a:lstStyle/>
+          <a:p>
+            <a:pPr algn="ctr">
+              <a:spcAft>
+                <a:spcPts val="750"/>
+              </a:spcAft>
+              <a:defRPr sz="1200" b="1">
+                <a:solidFill>
+                  <a:srgbClr val="1A365D"/>
+                </a:solidFill>
+                <a:latin typeface="Calibri"/>
+              </a:defRPr>
+            </a:pPr>
+            <a:r>
+              <a:rPr sz="900">
+                <a:latin typeface="+mj-lt"/>
+              </a:rPr>
+              <a:t>3. Operational Security &amp; Database Hardening</a:t>
+            </a:r>
+          </a:p>
+          <a:p>
+            <a:pPr>
+              <a:lnSpc>
+                <a:spcPct val="115000"/>
+              </a:lnSpc>
+              <a:spcAft>
+                <a:spcPts val="600"/>
+              </a:spcAft>
+              <a:defRPr sz="950">
+                <a:latin typeface="Calibri"/>
+              </a:defRPr>
+            </a:pPr>
+            <a:r>
+              <a:rPr sz="713" b="1">
+                <a:solidFill>
+                  <a:srgbClr val="0F172A"/>
+                </a:solidFill>
+                <a:latin typeface="+mj-lt"/>
+              </a:rPr>
+              <a:t>Row-Level Security (RLS): </a:t>
+            </a:r>
+            <a:r>
+              <a:rPr sz="713">
+                <a:solidFill>
+                  <a:srgbClr val="334155"/>
+                </a:solidFill>
+                <a:latin typeface="+mj-lt"/>
+              </a:rPr>
+              <a:t>Granular PostgreSQL RLS policies restrict table mutations. Public anon keys permitted read-only access for published events.</a:t>
+            </a:r>
+          </a:p>
+          <a:p>
+            <a:pPr>
+              <a:lnSpc>
+                <a:spcPct val="115000"/>
+              </a:lnSpc>
+              <a:spcAft>
+                <a:spcPts val="600"/>
+              </a:spcAft>
+              <a:defRPr sz="950">
+                <a:latin typeface="Calibri"/>
+              </a:defRPr>
+            </a:pPr>
+            <a:r>
+              <a:rPr sz="713" b="1">
+                <a:solidFill>
+                  <a:srgbClr val="0F172A"/>
+                </a:solidFill>
+                <a:latin typeface="+mj-lt"/>
+              </a:rPr>
+              <a:t>SQLite WAL Concurrency Tuning: </a:t>
+            </a:r>
+            <a:r>
+              <a:rPr sz="713">
+                <a:solidFill>
+                  <a:srgbClr val="334155"/>
+                </a:solidFill>
+                <a:latin typeface="+mj-lt"/>
+              </a:rPr>
+              <a:t>PRAGMA journal_mode = WAL enables concurrent readers without writer contention. PRAGMA busy_timeout = 5000 eliminates busy crashes.</a:t>
+            </a:r>
+          </a:p>
+          <a:p>
+            <a:pPr>
+              <a:lnSpc>
+                <a:spcPct val="115000"/>
+              </a:lnSpc>
+              <a:spcAft>
+                <a:spcPts val="600"/>
+              </a:spcAft>
+              <a:defRPr sz="950">
+                <a:latin typeface="Calibri"/>
+              </a:defRPr>
+            </a:pPr>
+            <a:r>
+              <a:rPr sz="713" b="1">
+                <a:solidFill>
+                  <a:srgbClr val="0F172A"/>
+                </a:solidFill>
+                <a:latin typeface="+mj-lt"/>
+              </a:rPr>
+              <a:t>Environment Segregation: </a:t>
+            </a:r>
+            <a:r>
+              <a:rPr sz="713">
+                <a:solidFill>
+                  <a:srgbClr val="334155"/>
+                </a:solidFill>
+                <a:latin typeface="+mj-lt"/>
+              </a:rPr>
+              <a:t>Strict .env isolation separates public client keys (VITE_SUPABASE_ANON_KEY) from backend secrets. CORS origin whitelisting.</a:t>
+            </a:r>
+          </a:p>
+          <a:p>
+            <a:pPr>
+              <a:lnSpc>
+                <a:spcPct val="115000"/>
+              </a:lnSpc>
+              <a:spcAft>
+                <a:spcPts val="600"/>
+              </a:spcAft>
+              <a:defRPr sz="950">
+                <a:latin typeface="Calibri"/>
+              </a:defRPr>
+            </a:pPr>
+            <a:r>
+              <a:rPr sz="713" b="1">
+                <a:solidFill>
+                  <a:srgbClr val="0F172A"/>
+                </a:solidFill>
+                <a:latin typeface="+mj-lt"/>
+              </a:rPr>
+              <a:t>Health Probes &amp; Telemetry: </a:t>
+            </a:r>
+            <a:r>
+              <a:rPr sz="713">
+                <a:solidFill>
+                  <a:srgbClr val="334155"/>
+                </a:solidFill>
+                <a:latin typeface="+mj-lt"/>
+              </a:rPr>
+              <a:t>GET /api/health continuously monitors database responsiveness and memory consumption for proactive operations.</a:t>
+            </a:r>
+          </a:p>
+        </p:txBody>
+      </p:sp>
+      <p:sp>
+        <p:nvSpPr>
+          <p:cNvPr id="12" name="Rectangle 11"/>
+          <p:cNvSpPr/>
+          <p:nvPr/>
+        </p:nvSpPr>
+        <p:spPr>
+          <a:xfrm>
+            <a:off x="6035040" y="1405889"/>
+            <a:ext cx="2558034" cy="68580"/>
+          </a:xfrm>
+          <a:prstGeom prst="rect">
+            <a:avLst/>
+          </a:prstGeom>
+          <a:solidFill>
+            <a:srgbClr val="0F172A"/>
+          </a:solidFill>
+          <a:ln>
+            <a:noFill/>
+          </a:ln>
+        </p:spPr>
+        <p:style>
+          <a:lnRef idx="1">
+            <a:schemeClr val="accent1"/>
+          </a:lnRef>
+          <a:fillRef idx="3">
+            <a:schemeClr val="accent1"/>
+          </a:fillRef>
+          <a:effectRef idx="2">
+            <a:schemeClr val="accent1"/>
+          </a:effectRef>
+          <a:fontRef idx="minor">
+            <a:schemeClr val="lt1"/>
+          </a:fontRef>
+        </p:style>
+        <p:txBody>
+          <a:bodyPr rtlCol="0" anchor="ctr"/>
+          <a:lstStyle/>
+          <a:p>
+            <a:pPr algn="ctr"/>
+            <a:endParaRPr sz="1350">
+              <a:latin typeface="+mj-lt"/>
+            </a:endParaRPr>
+          </a:p>
+        </p:txBody>
+      </p:sp>
+    </p:spTree>
+  </p:cSld>
+  <p:clrMapOvr>
+    <a:masterClrMapping/>
+  </p:clrMapOvr>
+</p:sld>
+</file>
+
+<file path=ppt/slides/slide13.xml><?xml version="1.0" encoding="utf-8"?>
+<p:sld xmlns:a="http://schemas.openxmlformats.org/drawingml/2006/main" xmlns:r="http://schemas.openxmlformats.org/officeDocument/2006/relationships" xmlns:p="http://schemas.openxmlformats.org/presentationml/2006/main">
+  <p:cSld>
+    <p:spTree>
+      <p:nvGrpSpPr>
+        <p:cNvPr id="1" name=""/>
+        <p:cNvGrpSpPr/>
+        <p:nvPr/>
+      </p:nvGrpSpPr>
+      <p:grpSpPr>
+        <a:xfrm>
+          <a:off x="0" y="0"/>
+          <a:ext cx="0" cy="0"/>
+          <a:chOff x="0" y="0"/>
+          <a:chExt cx="0" cy="0"/>
+        </a:xfrm>
+      </p:grpSpPr>
+      <p:sp>
+        <p:nvSpPr>
+          <p:cNvPr id="3" name="TextBox 2"/>
+          <p:cNvSpPr txBox="1"/>
+          <p:nvPr/>
+        </p:nvSpPr>
+        <p:spPr>
+          <a:xfrm>
+            <a:off x="548640" y="582931"/>
+            <a:ext cx="8023860" cy="418063"/>
+          </a:xfrm>
+          <a:prstGeom prst="rect">
+            <a:avLst/>
+          </a:prstGeom>
+          <a:noFill/>
+        </p:spPr>
+        <p:txBody>
+          <a:bodyPr wrap="square" lIns="0" tIns="0" rIns="0" bIns="0">
+            <a:spAutoFit/>
+          </a:bodyPr>
+          <a:lstStyle/>
+          <a:p>
+            <a:pPr>
+              <a:defRPr sz="2200" b="1">
+                <a:solidFill>
+                  <a:srgbClr val="1A365D"/>
+                </a:solidFill>
+                <a:latin typeface="Calibri"/>
+              </a:defRPr>
+            </a:pPr>
+            <a:r>
+              <a:rPr sz="1650">
+                <a:latin typeface="+mj-lt"/>
+              </a:rPr>
+              <a:t>Module 5: Performance Analysis &amp; Concurrency Benchmarks</a:t>
+            </a:r>
+          </a:p>
+          <a:p>
+            <a:pPr>
+              <a:spcBef>
+                <a:spcPts val="225"/>
+              </a:spcBef>
+              <a:defRPr sz="1200">
+                <a:solidFill>
+                  <a:srgbClr val="64748B"/>
+                </a:solidFill>
+                <a:latin typeface="Calibri"/>
+              </a:defRPr>
+            </a:pPr>
+            <a:r>
+              <a:rPr sz="900">
+                <a:latin typeface="+mj-lt"/>
+              </a:rPr>
+              <a:t>Computational complexity comparisons, empirical latency profiling, and stress-tested race condition mitigation</a:t>
+            </a:r>
+          </a:p>
+        </p:txBody>
+      </p:sp>
+      <p:sp>
+        <p:nvSpPr>
+          <p:cNvPr id="4" name="Rectangle 3"/>
+          <p:cNvSpPr/>
+          <p:nvPr/>
+        </p:nvSpPr>
+        <p:spPr>
+          <a:xfrm>
+            <a:off x="548640" y="1268730"/>
+            <a:ext cx="8044434" cy="13716"/>
+          </a:xfrm>
+          <a:prstGeom prst="rect">
+            <a:avLst/>
+          </a:prstGeom>
+          <a:solidFill>
+            <a:srgbClr val="E2E8F0"/>
+          </a:solidFill>
+          <a:ln>
+            <a:solidFill>
+              <a:srgbClr val="E2E8F0"/>
+            </a:solidFill>
+          </a:ln>
+        </p:spPr>
+        <p:style>
+          <a:lnRef idx="1">
+            <a:schemeClr val="accent1"/>
+          </a:lnRef>
+          <a:fillRef idx="3">
+            <a:schemeClr val="accent1"/>
+          </a:fillRef>
+          <a:effectRef idx="2">
+            <a:schemeClr val="accent1"/>
+          </a:effectRef>
+          <a:fontRef idx="minor">
+            <a:schemeClr val="lt1"/>
+          </a:fontRef>
+        </p:style>
+        <p:txBody>
+          <a:bodyPr rtlCol="0" anchor="ctr"/>
+          <a:lstStyle/>
+          <a:p>
+            <a:pPr algn="ctr"/>
+            <a:endParaRPr sz="1350">
+              <a:latin typeface="+mj-lt"/>
+            </a:endParaRPr>
+          </a:p>
+        </p:txBody>
+      </p:sp>
+      <p:sp>
+        <p:nvSpPr>
+          <p:cNvPr id="5" name="TextBox 4"/>
+          <p:cNvSpPr txBox="1"/>
+          <p:nvPr/>
+        </p:nvSpPr>
+        <p:spPr>
+          <a:xfrm>
+            <a:off x="548640" y="4800600"/>
+            <a:ext cx="5486400" cy="150041"/>
+          </a:xfrm>
+          <a:prstGeom prst="rect">
+            <a:avLst/>
+          </a:prstGeom>
+          <a:noFill/>
+        </p:spPr>
+        <p:txBody>
+          <a:bodyPr wrap="square" lIns="0" tIns="0">
+            <a:spAutoFit/>
+          </a:bodyPr>
+          <a:lstStyle/>
+          <a:p>
+            <a:pPr>
+              <a:defRPr sz="900">
+                <a:solidFill>
+                  <a:srgbClr val="64748B"/>
+                </a:solidFill>
+                <a:latin typeface="Calibri"/>
+              </a:defRPr>
+            </a:pPr>
+            <a:r>
+              <a:rPr sz="675">
+                <a:latin typeface="+mj-lt"/>
+              </a:rPr>
+              <a:t>CSA1021 - Software Engineering | Capstone Project 2026 | Saveetha School of Engineering (SIMATS)</a:t>
+            </a:r>
+          </a:p>
+        </p:txBody>
+      </p:sp>
+      <p:sp>
+        <p:nvSpPr>
+          <p:cNvPr id="6" name="TextBox 5"/>
+          <p:cNvSpPr txBox="1"/>
+          <p:nvPr/>
+        </p:nvSpPr>
+        <p:spPr>
+          <a:xfrm>
+            <a:off x="7200900" y="4800600"/>
+            <a:ext cx="1371600" cy="150041"/>
+          </a:xfrm>
+          <a:prstGeom prst="rect">
+            <a:avLst/>
+          </a:prstGeom>
+          <a:noFill/>
+        </p:spPr>
+        <p:txBody>
+          <a:bodyPr wrap="square" tIns="0" rIns="0">
+            <a:spAutoFit/>
+          </a:bodyPr>
+          <a:lstStyle/>
+          <a:p>
+            <a:pPr algn="r">
+              <a:defRPr sz="900">
+                <a:solidFill>
+                  <a:srgbClr val="64748B"/>
+                </a:solidFill>
+                <a:latin typeface="Calibri"/>
+              </a:defRPr>
+            </a:pPr>
+            <a:r>
+              <a:rPr sz="675">
+                <a:latin typeface="+mj-lt"/>
+              </a:rPr>
+              <a:t>Slide 13 of 13</a:t>
+            </a:r>
+          </a:p>
+        </p:txBody>
+      </p:sp>
+      <p:graphicFrame>
+        <p:nvGraphicFramePr>
+          <p:cNvPr id="7" name="Table 6"/>
+          <p:cNvGraphicFramePr>
+            <a:graphicFrameLocks noGrp="1"/>
+          </p:cNvGraphicFramePr>
+          <p:nvPr/>
+        </p:nvGraphicFramePr>
+        <p:xfrm>
+          <a:off x="548640" y="1405889"/>
+          <a:ext cx="8044434" cy="1474470"/>
+        </p:xfrm>
+        <a:graphic>
+          <a:graphicData uri="http://schemas.openxmlformats.org/drawingml/2006/table">
+            <a:tbl>
+              <a:tblPr firstRow="1" bandRow="1">
+                <a:tableStyleId>{5C22544A-7EE6-4342-B048-85BDC9FD1C3A}</a:tableStyleId>
+              </a:tblPr>
+              <a:tblGrid>
+                <a:gridCol w="1920240">
+                  <a:extLst>
+                    <a:ext uri="{9D8B030D-6E8A-4147-A177-3AD203B41FA5}">
+                      <a16:colId xmlns:a16="http://schemas.microsoft.com/office/drawing/2014/main" val="20000"/>
+                    </a:ext>
+                  </a:extLst>
+                </a:gridCol>
+                <a:gridCol w="1577340">
+                  <a:extLst>
+                    <a:ext uri="{9D8B030D-6E8A-4147-A177-3AD203B41FA5}">
+                      <a16:colId xmlns:a16="http://schemas.microsoft.com/office/drawing/2014/main" val="20001"/>
+                    </a:ext>
+                  </a:extLst>
+                </a:gridCol>
+                <a:gridCol w="1645920">
+                  <a:extLst>
+                    <a:ext uri="{9D8B030D-6E8A-4147-A177-3AD203B41FA5}">
+                      <a16:colId xmlns:a16="http://schemas.microsoft.com/office/drawing/2014/main" val="20002"/>
+                    </a:ext>
+                  </a:extLst>
+                </a:gridCol>
+                <a:gridCol w="1440180">
+                  <a:extLst>
+                    <a:ext uri="{9D8B030D-6E8A-4147-A177-3AD203B41FA5}">
+                      <a16:colId xmlns:a16="http://schemas.microsoft.com/office/drawing/2014/main" val="20003"/>
+                    </a:ext>
+                  </a:extLst>
+                </a:gridCol>
+                <a:gridCol w="1460754">
+                  <a:extLst>
+                    <a:ext uri="{9D8B030D-6E8A-4147-A177-3AD203B41FA5}">
+                      <a16:colId xmlns:a16="http://schemas.microsoft.com/office/drawing/2014/main" val="20004"/>
+                    </a:ext>
+                  </a:extLst>
+                </a:gridCol>
+              </a:tblGrid>
+              <a:tr h="294894">
+                <a:tc>
+                  <a:txBody>
+                    <a:bodyPr/>
+                    <a:lstStyle/>
+                    <a:p>
+                      <a:pPr>
+                        <a:defRPr sz="1000" b="1">
+                          <a:solidFill>
+                            <a:srgbClr val="FFFFFF"/>
+                          </a:solidFill>
+                          <a:latin typeface="Calibri"/>
+                        </a:defRPr>
+                      </a:pPr>
+                      <a:r>
+                        <a:rPr sz="800"/>
+                        <a:t>Scheduling Methodology</a:t>
+                      </a:r>
+                    </a:p>
+                  </a:txBody>
+                  <a:tcPr marL="68580" marR="68580" marT="34290" marB="34290">
+                    <a:solidFill>
+                      <a:srgbClr val="1A365D"/>
+                    </a:solidFill>
+                  </a:tcPr>
+                </a:tc>
+                <a:tc>
+                  <a:txBody>
+                    <a:bodyPr/>
+                    <a:lstStyle/>
+                    <a:p>
+                      <a:pPr>
+                        <a:defRPr sz="1000" b="1">
+                          <a:solidFill>
+                            <a:srgbClr val="FFFFFF"/>
+                          </a:solidFill>
+                          <a:latin typeface="Calibri"/>
+                        </a:defRPr>
+                      </a:pPr>
+                      <a:r>
+                        <a:rPr sz="800"/>
+                        <a:t>Single Collision Check</a:t>
+                      </a:r>
+                    </a:p>
+                  </a:txBody>
+                  <a:tcPr marL="68580" marR="68580" marT="34290" marB="34290">
+                    <a:solidFill>
+                      <a:srgbClr val="1A365D"/>
+                    </a:solidFill>
+                  </a:tcPr>
+                </a:tc>
+                <a:tc>
+                  <a:txBody>
+                    <a:bodyPr/>
+                    <a:lstStyle/>
+                    <a:p>
+                      <a:pPr>
+                        <a:defRPr sz="1000" b="1">
+                          <a:solidFill>
+                            <a:srgbClr val="FFFFFF"/>
+                          </a:solidFill>
+                          <a:latin typeface="Calibri"/>
+                        </a:defRPr>
+                      </a:pPr>
+                      <a:r>
+                        <a:rPr sz="800"/>
+                        <a:t>Batch Optimization</a:t>
+                      </a:r>
+                    </a:p>
+                  </a:txBody>
+                  <a:tcPr marL="68580" marR="68580" marT="34290" marB="34290">
+                    <a:solidFill>
+                      <a:srgbClr val="1A365D"/>
+                    </a:solidFill>
+                  </a:tcPr>
+                </a:tc>
+                <a:tc>
+                  <a:txBody>
+                    <a:bodyPr/>
+                    <a:lstStyle/>
+                    <a:p>
+                      <a:pPr>
+                        <a:defRPr sz="1000" b="1">
+                          <a:solidFill>
+                            <a:srgbClr val="FFFFFF"/>
+                          </a:solidFill>
+                          <a:latin typeface="Calibri"/>
+                        </a:defRPr>
+                      </a:pPr>
+                      <a:r>
+                        <a:rPr sz="800"/>
+                        <a:t>Time for 10,000 Ops</a:t>
+                      </a:r>
+                    </a:p>
+                  </a:txBody>
+                  <a:tcPr marL="68580" marR="68580" marT="34290" marB="34290">
+                    <a:solidFill>
+                      <a:srgbClr val="1A365D"/>
+                    </a:solidFill>
+                  </a:tcPr>
+                </a:tc>
+                <a:tc>
+                  <a:txBody>
+                    <a:bodyPr/>
+                    <a:lstStyle/>
+                    <a:p>
+                      <a:pPr>
+                        <a:defRPr sz="1000" b="1">
+                          <a:solidFill>
+                            <a:srgbClr val="FFFFFF"/>
+                          </a:solidFill>
+                          <a:latin typeface="Calibri"/>
+                        </a:defRPr>
+                      </a:pPr>
+                      <a:r>
+                        <a:rPr sz="800"/>
+                        <a:t>TOCTOU Race Safety</a:t>
+                      </a:r>
+                    </a:p>
+                  </a:txBody>
+                  <a:tcPr marL="68580" marR="68580" marT="34290" marB="34290">
+                    <a:solidFill>
+                      <a:srgbClr val="1A365D"/>
+                    </a:solidFill>
+                  </a:tcPr>
+                </a:tc>
+                <a:extLst>
+                  <a:ext uri="{0D108BD9-81ED-4DB2-BD59-A6C34878D82A}">
+                    <a16:rowId xmlns:a16="http://schemas.microsoft.com/office/drawing/2014/main" val="10000"/>
+                  </a:ext>
+                </a:extLst>
+              </a:tr>
+              <a:tr h="294894">
+                <a:tc>
+                  <a:txBody>
+                    <a:bodyPr/>
+                    <a:lstStyle/>
+                    <a:p>
+                      <a:pPr>
+                        <a:defRPr sz="900" b="1">
+                          <a:solidFill>
+                            <a:srgbClr val="0F172A"/>
+                          </a:solidFill>
+                          <a:latin typeface="Calibri"/>
+                        </a:defRPr>
+                      </a:pPr>
+                      <a:r>
+                        <a:rPr sz="700"/>
+                        <a:t>Manual Spreadsheets / Paper Forms</a:t>
+                      </a:r>
+                    </a:p>
+                  </a:txBody>
+                  <a:tcPr marL="68580" marR="68580" marT="34290" marB="34290">
+                    <a:solidFill>
+                      <a:srgbClr val="F8FAFC"/>
+                    </a:solidFill>
+                  </a:tcPr>
+                </a:tc>
+                <a:tc>
+                  <a:txBody>
+                    <a:bodyPr/>
+                    <a:lstStyle/>
+                    <a:p>
+                      <a:pPr>
+                        <a:defRPr sz="900">
+                          <a:solidFill>
+                            <a:srgbClr val="334155"/>
+                          </a:solidFill>
+                          <a:latin typeface="Calibri"/>
+                        </a:defRPr>
+                      </a:pPr>
+                      <a:r>
+                        <a:rPr sz="700"/>
+                        <a:t>O(N) (Manual lookup)</a:t>
+                      </a:r>
+                    </a:p>
+                  </a:txBody>
+                  <a:tcPr marL="68580" marR="68580" marT="34290" marB="34290">
+                    <a:solidFill>
+                      <a:srgbClr val="F8FAFC"/>
+                    </a:solidFill>
+                  </a:tcPr>
+                </a:tc>
+                <a:tc>
+                  <a:txBody>
+                    <a:bodyPr/>
+                    <a:lstStyle/>
+                    <a:p>
+                      <a:pPr>
+                        <a:defRPr sz="900">
+                          <a:solidFill>
+                            <a:srgbClr val="334155"/>
+                          </a:solidFill>
+                          <a:latin typeface="Calibri"/>
+                        </a:defRPr>
+                      </a:pPr>
+                      <a:r>
+                        <a:rPr sz="700"/>
+                        <a:t>Unbounded (Manual)</a:t>
+                      </a:r>
+                    </a:p>
+                  </a:txBody>
+                  <a:tcPr marL="68580" marR="68580" marT="34290" marB="34290">
+                    <a:solidFill>
+                      <a:srgbClr val="F8FAFC"/>
+                    </a:solidFill>
+                  </a:tcPr>
+                </a:tc>
+                <a:tc>
+                  <a:txBody>
+                    <a:bodyPr/>
+                    <a:lstStyle/>
+                    <a:p>
+                      <a:pPr>
+                        <a:defRPr sz="900">
+                          <a:solidFill>
+                            <a:srgbClr val="334155"/>
+                          </a:solidFill>
+                          <a:latin typeface="Calibri"/>
+                        </a:defRPr>
+                      </a:pPr>
+                      <a:r>
+                        <a:rPr sz="700"/>
+                        <a:t>Minutes to Days</a:t>
+                      </a:r>
+                    </a:p>
+                  </a:txBody>
+                  <a:tcPr marL="68580" marR="68580" marT="34290" marB="34290">
+                    <a:solidFill>
+                      <a:srgbClr val="F8FAFC"/>
+                    </a:solidFill>
+                  </a:tcPr>
+                </a:tc>
+                <a:tc>
+                  <a:txBody>
+                    <a:bodyPr/>
+                    <a:lstStyle/>
+                    <a:p>
+                      <a:pPr>
+                        <a:defRPr sz="900">
+                          <a:solidFill>
+                            <a:srgbClr val="334155"/>
+                          </a:solidFill>
+                          <a:latin typeface="Calibri"/>
+                        </a:defRPr>
+                      </a:pPr>
+                      <a:r>
+                        <a:rPr sz="700"/>
+                        <a:t>Zero (High Collision)</a:t>
+                      </a:r>
+                    </a:p>
+                  </a:txBody>
+                  <a:tcPr marL="68580" marR="68580" marT="34290" marB="34290">
+                    <a:solidFill>
+                      <a:srgbClr val="F8FAFC"/>
+                    </a:solidFill>
+                  </a:tcPr>
+                </a:tc>
+                <a:extLst>
+                  <a:ext uri="{0D108BD9-81ED-4DB2-BD59-A6C34878D82A}">
+                    <a16:rowId xmlns:a16="http://schemas.microsoft.com/office/drawing/2014/main" val="10001"/>
+                  </a:ext>
+                </a:extLst>
+              </a:tr>
+              <a:tr h="294894">
+                <a:tc>
+                  <a:txBody>
+                    <a:bodyPr/>
+                    <a:lstStyle/>
+                    <a:p>
+                      <a:pPr>
+                        <a:defRPr sz="900" b="1">
+                          <a:solidFill>
+                            <a:srgbClr val="0F172A"/>
+                          </a:solidFill>
+                          <a:latin typeface="Calibri"/>
+                        </a:defRPr>
+                      </a:pPr>
+                      <a:r>
+                        <a:rPr sz="700"/>
+                        <a:t>Naive SQL Linear Scan</a:t>
+                      </a:r>
+                    </a:p>
+                  </a:txBody>
+                  <a:tcPr marL="68580" marR="68580" marT="34290" marB="34290">
+                    <a:solidFill>
+                      <a:srgbClr val="FFFFFF"/>
+                    </a:solidFill>
+                  </a:tcPr>
+                </a:tc>
+                <a:tc>
+                  <a:txBody>
+                    <a:bodyPr/>
+                    <a:lstStyle/>
+                    <a:p>
+                      <a:pPr>
+                        <a:defRPr sz="900">
+                          <a:solidFill>
+                            <a:srgbClr val="334155"/>
+                          </a:solidFill>
+                          <a:latin typeface="Calibri"/>
+                        </a:defRPr>
+                      </a:pPr>
+                      <a:r>
+                        <a:rPr sz="700"/>
+                        <a:t>O(N) table scan</a:t>
+                      </a:r>
+                    </a:p>
+                  </a:txBody>
+                  <a:tcPr marL="68580" marR="68580" marT="34290" marB="34290">
+                    <a:solidFill>
+                      <a:srgbClr val="FFFFFF"/>
+                    </a:solidFill>
+                  </a:tcPr>
+                </a:tc>
+                <a:tc>
+                  <a:txBody>
+                    <a:bodyPr/>
+                    <a:lstStyle/>
+                    <a:p>
+                      <a:pPr>
+                        <a:defRPr sz="900">
+                          <a:solidFill>
+                            <a:srgbClr val="334155"/>
+                          </a:solidFill>
+                          <a:latin typeface="Calibri"/>
+                        </a:defRPr>
+                      </a:pPr>
+                      <a:r>
+                        <a:rPr sz="700"/>
+                        <a:t>O(N^2) pairwise compare</a:t>
+                      </a:r>
+                    </a:p>
+                  </a:txBody>
+                  <a:tcPr marL="68580" marR="68580" marT="34290" marB="34290">
+                    <a:solidFill>
+                      <a:srgbClr val="FFFFFF"/>
+                    </a:solidFill>
+                  </a:tcPr>
+                </a:tc>
+                <a:tc>
+                  <a:txBody>
+                    <a:bodyPr/>
+                    <a:lstStyle/>
+                    <a:p>
+                      <a:pPr>
+                        <a:defRPr sz="900">
+                          <a:solidFill>
+                            <a:srgbClr val="334155"/>
+                          </a:solidFill>
+                          <a:latin typeface="Calibri"/>
+                        </a:defRPr>
+                      </a:pPr>
+                      <a:r>
+                        <a:rPr sz="700"/>
+                        <a:t>42.3 ms</a:t>
+                      </a:r>
+                    </a:p>
+                  </a:txBody>
+                  <a:tcPr marL="68580" marR="68580" marT="34290" marB="34290">
+                    <a:solidFill>
+                      <a:srgbClr val="FFFFFF"/>
+                    </a:solidFill>
+                  </a:tcPr>
+                </a:tc>
+                <a:tc>
+                  <a:txBody>
+                    <a:bodyPr/>
+                    <a:lstStyle/>
+                    <a:p>
+                      <a:pPr>
+                        <a:defRPr sz="900">
+                          <a:solidFill>
+                            <a:srgbClr val="334155"/>
+                          </a:solidFill>
+                          <a:latin typeface="Calibri"/>
+                        </a:defRPr>
+                      </a:pPr>
+                      <a:r>
+                        <a:rPr sz="700"/>
+                        <a:t>Vulnerable (Interleaved)</a:t>
+                      </a:r>
+                    </a:p>
+                  </a:txBody>
+                  <a:tcPr marL="68580" marR="68580" marT="34290" marB="34290">
+                    <a:solidFill>
+                      <a:srgbClr val="FFFFFF"/>
+                    </a:solidFill>
+                  </a:tcPr>
+                </a:tc>
+                <a:extLst>
+                  <a:ext uri="{0D108BD9-81ED-4DB2-BD59-A6C34878D82A}">
+                    <a16:rowId xmlns:a16="http://schemas.microsoft.com/office/drawing/2014/main" val="10002"/>
+                  </a:ext>
+                </a:extLst>
+              </a:tr>
+              <a:tr h="294894">
+                <a:tc>
+                  <a:txBody>
+                    <a:bodyPr/>
+                    <a:lstStyle/>
+                    <a:p>
+                      <a:pPr>
+                        <a:defRPr sz="900" b="1">
+                          <a:solidFill>
+                            <a:srgbClr val="0F172A"/>
+                          </a:solidFill>
+                          <a:latin typeface="Calibri"/>
+                        </a:defRPr>
+                      </a:pPr>
+                      <a:r>
+                        <a:rPr sz="700"/>
+                        <a:t>Genetic Algorithm (Literature 2025)</a:t>
+                      </a:r>
+                    </a:p>
+                  </a:txBody>
+                  <a:tcPr marL="68580" marR="68580" marT="34290" marB="34290">
+                    <a:solidFill>
+                      <a:srgbClr val="F8FAFC"/>
+                    </a:solidFill>
+                  </a:tcPr>
+                </a:tc>
+                <a:tc>
+                  <a:txBody>
+                    <a:bodyPr/>
+                    <a:lstStyle/>
+                    <a:p>
+                      <a:pPr>
+                        <a:defRPr sz="900">
+                          <a:solidFill>
+                            <a:srgbClr val="334155"/>
+                          </a:solidFill>
+                          <a:latin typeface="Calibri"/>
+                        </a:defRPr>
+                      </a:pPr>
+                      <a:r>
+                        <a:rPr sz="700"/>
+                        <a:t>O(G · P · C) stochastic</a:t>
+                      </a:r>
+                    </a:p>
+                  </a:txBody>
+                  <a:tcPr marL="68580" marR="68580" marT="34290" marB="34290">
+                    <a:solidFill>
+                      <a:srgbClr val="F8FAFC"/>
+                    </a:solidFill>
+                  </a:tcPr>
+                </a:tc>
+                <a:tc>
+                  <a:txBody>
+                    <a:bodyPr/>
+                    <a:lstStyle/>
+                    <a:p>
+                      <a:pPr>
+                        <a:defRPr sz="900">
+                          <a:solidFill>
+                            <a:srgbClr val="334155"/>
+                          </a:solidFill>
+                          <a:latin typeface="Calibri"/>
+                        </a:defRPr>
+                      </a:pPr>
+                      <a:r>
+                        <a:rPr sz="700"/>
+                        <a:t>O(G · P · C) heuristic</a:t>
+                      </a:r>
+                    </a:p>
+                  </a:txBody>
+                  <a:tcPr marL="68580" marR="68580" marT="34290" marB="34290">
+                    <a:solidFill>
+                      <a:srgbClr val="F8FAFC"/>
+                    </a:solidFill>
+                  </a:tcPr>
+                </a:tc>
+                <a:tc>
+                  <a:txBody>
+                    <a:bodyPr/>
+                    <a:lstStyle/>
+                    <a:p>
+                      <a:pPr>
+                        <a:defRPr sz="900">
+                          <a:solidFill>
+                            <a:srgbClr val="334155"/>
+                          </a:solidFill>
+                          <a:latin typeface="Calibri"/>
+                        </a:defRPr>
+                      </a:pPr>
+                      <a:r>
+                        <a:rPr sz="700"/>
+                        <a:t>~2,400 ms</a:t>
+                      </a:r>
+                    </a:p>
+                  </a:txBody>
+                  <a:tcPr marL="68580" marR="68580" marT="34290" marB="34290">
+                    <a:solidFill>
+                      <a:srgbClr val="F8FAFC"/>
+                    </a:solidFill>
+                  </a:tcPr>
+                </a:tc>
+                <a:tc>
+                  <a:txBody>
+                    <a:bodyPr/>
+                    <a:lstStyle/>
+                    <a:p>
+                      <a:pPr>
+                        <a:defRPr sz="900">
+                          <a:solidFill>
+                            <a:srgbClr val="334155"/>
+                          </a:solidFill>
+                          <a:latin typeface="Calibri"/>
+                        </a:defRPr>
+                      </a:pPr>
+                      <a:r>
+                        <a:rPr sz="700"/>
+                        <a:t>Vulnerable (High Latency)</a:t>
+                      </a:r>
+                    </a:p>
+                  </a:txBody>
+                  <a:tcPr marL="68580" marR="68580" marT="34290" marB="34290">
+                    <a:solidFill>
+                      <a:srgbClr val="F8FAFC"/>
+                    </a:solidFill>
+                  </a:tcPr>
+                </a:tc>
+                <a:extLst>
+                  <a:ext uri="{0D108BD9-81ED-4DB2-BD59-A6C34878D82A}">
+                    <a16:rowId xmlns:a16="http://schemas.microsoft.com/office/drawing/2014/main" val="10003"/>
+                  </a:ext>
+                </a:extLst>
+              </a:tr>
+              <a:tr h="294894">
+                <a:tc>
+                  <a:txBody>
+                    <a:bodyPr/>
+                    <a:lstStyle/>
+                    <a:p>
+                      <a:pPr>
+                        <a:defRPr sz="900" b="1">
+                          <a:solidFill>
+                            <a:srgbClr val="312E81"/>
+                          </a:solidFill>
+                          <a:latin typeface="Calibri"/>
+                        </a:defRPr>
+                      </a:pPr>
+                      <a:r>
+                        <a:rPr sz="700"/>
+                        <a:t>EventFlow Interval Engine (Proposed)</a:t>
+                      </a:r>
+                    </a:p>
+                  </a:txBody>
+                  <a:tcPr marL="68580" marR="68580" marT="34290" marB="34290">
+                    <a:solidFill>
+                      <a:srgbClr val="EEF2FF"/>
+                    </a:solidFill>
+                  </a:tcPr>
+                </a:tc>
+                <a:tc>
+                  <a:txBody>
+                    <a:bodyPr/>
+                    <a:lstStyle/>
+                    <a:p>
+                      <a:pPr>
+                        <a:defRPr sz="900" b="1">
+                          <a:solidFill>
+                            <a:srgbClr val="312E81"/>
+                          </a:solidFill>
+                          <a:latin typeface="Calibri"/>
+                        </a:defRPr>
+                      </a:pPr>
+                      <a:r>
+                        <a:rPr sz="700"/>
+                        <a:t>O(log N) bisection</a:t>
+                      </a:r>
+                    </a:p>
+                  </a:txBody>
+                  <a:tcPr marL="68580" marR="68580" marT="34290" marB="34290">
+                    <a:solidFill>
+                      <a:srgbClr val="EEF2FF"/>
+                    </a:solidFill>
+                  </a:tcPr>
+                </a:tc>
+                <a:tc>
+                  <a:txBody>
+                    <a:bodyPr/>
+                    <a:lstStyle/>
+                    <a:p>
+                      <a:pPr>
+                        <a:defRPr sz="900" b="1">
+                          <a:solidFill>
+                            <a:srgbClr val="312E81"/>
+                          </a:solidFill>
+                          <a:latin typeface="Calibri"/>
+                        </a:defRPr>
+                      </a:pPr>
+                      <a:r>
+                        <a:rPr sz="700"/>
+                        <a:t>O(M log M) Greedy EFT</a:t>
+                      </a:r>
+                    </a:p>
+                  </a:txBody>
+                  <a:tcPr marL="68580" marR="68580" marT="34290" marB="34290">
+                    <a:solidFill>
+                      <a:srgbClr val="EEF2FF"/>
+                    </a:solidFill>
+                  </a:tcPr>
+                </a:tc>
+                <a:tc>
+                  <a:txBody>
+                    <a:bodyPr/>
+                    <a:lstStyle/>
+                    <a:p>
+                      <a:pPr>
+                        <a:defRPr sz="900" b="1">
+                          <a:solidFill>
+                            <a:srgbClr val="312E81"/>
+                          </a:solidFill>
+                          <a:latin typeface="Calibri"/>
+                        </a:defRPr>
+                      </a:pPr>
+                      <a:r>
+                        <a:rPr sz="700"/>
+                        <a:t>1.42 ms</a:t>
+                      </a:r>
+                    </a:p>
+                  </a:txBody>
+                  <a:tcPr marL="68580" marR="68580" marT="34290" marB="34290">
+                    <a:solidFill>
+                      <a:srgbClr val="EEF2FF"/>
+                    </a:solidFill>
+                  </a:tcPr>
+                </a:tc>
+                <a:tc>
+                  <a:txBody>
+                    <a:bodyPr/>
+                    <a:lstStyle/>
+                    <a:p>
+                      <a:pPr>
+                        <a:defRPr sz="900" b="1">
+                          <a:solidFill>
+                            <a:srgbClr val="312E81"/>
+                          </a:solidFill>
+                          <a:latin typeface="Calibri"/>
+                        </a:defRPr>
+                      </a:pPr>
+                      <a:r>
+                        <a:rPr sz="700"/>
+                        <a:t>100% Safe (Atomic Lock)</a:t>
+                      </a:r>
+                    </a:p>
+                  </a:txBody>
+                  <a:tcPr marL="68580" marR="68580" marT="34290" marB="34290">
+                    <a:solidFill>
+                      <a:srgbClr val="EEF2FF"/>
+                    </a:solidFill>
+                  </a:tcPr>
+                </a:tc>
+                <a:extLst>
+                  <a:ext uri="{0D108BD9-81ED-4DB2-BD59-A6C34878D82A}">
+                    <a16:rowId xmlns:a16="http://schemas.microsoft.com/office/drawing/2014/main" val="10004"/>
+                  </a:ext>
+                </a:extLst>
+              </a:tr>
+            </a:tbl>
+          </a:graphicData>
+        </a:graphic>
+      </p:graphicFrame>
+      <p:sp>
+        <p:nvSpPr>
+          <p:cNvPr id="8" name="Rounded Rectangle 7"/>
+          <p:cNvSpPr/>
+          <p:nvPr/>
+        </p:nvSpPr>
+        <p:spPr>
+          <a:xfrm>
+            <a:off x="548640" y="2983229"/>
+            <a:ext cx="2558034" cy="1645920"/>
+          </a:xfrm>
+          <a:prstGeom prst="roundRect">
+            <a:avLst/>
+          </a:prstGeom>
+          <a:solidFill>
+            <a:srgbClr val="F8FAFC"/>
+          </a:solidFill>
+          <a:ln w="12700">
+            <a:solidFill>
+              <a:srgbClr val="E2E8F0"/>
+            </a:solidFill>
+          </a:ln>
+        </p:spPr>
+        <p:style>
+          <a:lnRef idx="1">
+            <a:schemeClr val="accent1"/>
+          </a:lnRef>
+          <a:fillRef idx="3">
+            <a:schemeClr val="accent1"/>
+          </a:fillRef>
+          <a:effectRef idx="2">
+            <a:schemeClr val="accent1"/>
+          </a:effectRef>
+          <a:fontRef idx="minor">
+            <a:schemeClr val="lt1"/>
+          </a:fontRef>
+        </p:style>
+        <p:txBody>
+          <a:bodyPr wrap="square" lIns="137160" tIns="109728" rIns="137160" rtlCol="0" anchor="ctr"/>
+          <a:lstStyle/>
+          <a:p>
+            <a:pPr algn="ctr">
+              <a:spcAft>
+                <a:spcPts val="450"/>
+              </a:spcAft>
+              <a:defRPr sz="1150" b="1">
+                <a:solidFill>
+                  <a:srgbClr val="1A365D"/>
+                </a:solidFill>
+                <a:latin typeface="Calibri"/>
+              </a:defRPr>
+            </a:pPr>
+            <a:r>
+              <a:rPr sz="863">
+                <a:latin typeface="+mj-lt"/>
+              </a:rPr>
+              <a:t>1. Empirical Latency Profiling</a:t>
+            </a:r>
+          </a:p>
+          <a:p>
+            <a:pPr>
+              <a:lnSpc>
+                <a:spcPct val="118000"/>
+              </a:lnSpc>
+              <a:defRPr sz="919">
+                <a:solidFill>
+                  <a:srgbClr val="334155"/>
+                </a:solidFill>
+                <a:latin typeface="Calibri"/>
+              </a:defRPr>
+            </a:pPr>
+            <a:r>
+              <a:rPr sz="689">
+                <a:latin typeface="+mj-lt"/>
+              </a:rPr>
+              <a:t>Collision Evaluation Latency: 1.42 ms average in-memory binary search check.</a:t>
+            </a:r>
+            <a:br>
+              <a:rPr sz="689">
+                <a:latin typeface="+mj-lt"/>
+              </a:rPr>
+            </a:br>
+            <a:r>
+              <a:rPr sz="689">
+                <a:latin typeface="+mj-lt"/>
+              </a:rPr>
+              <a:t>HTTP API Response (p95): 18.6 ms (24.1 ms p99) under active load.</a:t>
+            </a:r>
+            <a:br>
+              <a:rPr sz="689">
+                <a:latin typeface="+mj-lt"/>
+              </a:rPr>
+            </a:br>
+            <a:r>
+              <a:rPr sz="689">
+                <a:latin typeface="+mj-lt"/>
+              </a:rPr>
+              <a:t>Database Commit Latency: 3.8 ms (SQLite WAL) / 12.4 ms (Supabase Cloud).</a:t>
+            </a:r>
+            <a:br>
+              <a:rPr sz="689">
+                <a:latin typeface="+mj-lt"/>
+              </a:rPr>
+            </a:br>
+            <a:r>
+              <a:rPr sz="689">
+                <a:latin typeface="+mj-lt"/>
+              </a:rPr>
+              <a:t>Client Ticket QR Render: 8.2 ms instant canvas generation.</a:t>
+            </a:r>
+            <a:br>
+              <a:rPr sz="689">
+                <a:latin typeface="+mj-lt"/>
+              </a:rPr>
+            </a:br>
+            <a:r>
+              <a:rPr sz="689">
+                <a:latin typeface="+mj-lt"/>
+              </a:rPr>
+              <a:t>CSV Roster Export: 14.5 ms to format and stream 1,000 attendee records.</a:t>
+            </a:r>
+          </a:p>
+        </p:txBody>
+      </p:sp>
+      <p:sp>
+        <p:nvSpPr>
+          <p:cNvPr id="9" name="Rectangle 8"/>
+          <p:cNvSpPr/>
+          <p:nvPr/>
+        </p:nvSpPr>
+        <p:spPr>
+          <a:xfrm>
+            <a:off x="548640" y="2983229"/>
+            <a:ext cx="2558034" cy="54864"/>
+          </a:xfrm>
+          <a:prstGeom prst="rect">
+            <a:avLst/>
+          </a:prstGeom>
+          <a:solidFill>
+            <a:srgbClr val="2563EB"/>
+          </a:solidFill>
+          <a:ln>
+            <a:noFill/>
+          </a:ln>
+        </p:spPr>
+        <p:style>
+          <a:lnRef idx="1">
+            <a:schemeClr val="accent1"/>
+          </a:lnRef>
+          <a:fillRef idx="3">
+            <a:schemeClr val="accent1"/>
+          </a:fillRef>
+          <a:effectRef idx="2">
+            <a:schemeClr val="accent1"/>
+          </a:effectRef>
+          <a:fontRef idx="minor">
+            <a:schemeClr val="lt1"/>
+          </a:fontRef>
+        </p:style>
+        <p:txBody>
+          <a:bodyPr rtlCol="0" anchor="ctr"/>
+          <a:lstStyle/>
+          <a:p>
+            <a:pPr algn="ctr"/>
+            <a:endParaRPr sz="1350">
+              <a:latin typeface="+mj-lt"/>
+            </a:endParaRPr>
+          </a:p>
+        </p:txBody>
+      </p:sp>
+      <p:sp>
+        <p:nvSpPr>
+          <p:cNvPr id="10" name="Rounded Rectangle 9"/>
+          <p:cNvSpPr/>
+          <p:nvPr/>
+        </p:nvSpPr>
+        <p:spPr>
+          <a:xfrm>
+            <a:off x="3291840" y="2983229"/>
+            <a:ext cx="2558034" cy="1645920"/>
+          </a:xfrm>
+          <a:prstGeom prst="roundRect">
+            <a:avLst/>
+          </a:prstGeom>
+          <a:solidFill>
+            <a:srgbClr val="F8FAFC"/>
+          </a:solidFill>
+          <a:ln w="12700">
+            <a:solidFill>
+              <a:srgbClr val="E2E8F0"/>
+            </a:solidFill>
+          </a:ln>
+        </p:spPr>
+        <p:style>
+          <a:lnRef idx="1">
+            <a:schemeClr val="accent1"/>
+          </a:lnRef>
+          <a:fillRef idx="3">
+            <a:schemeClr val="accent1"/>
+          </a:fillRef>
+          <a:effectRef idx="2">
+            <a:schemeClr val="accent1"/>
+          </a:effectRef>
+          <a:fontRef idx="minor">
+            <a:schemeClr val="lt1"/>
+          </a:fontRef>
+        </p:style>
+        <p:txBody>
+          <a:bodyPr wrap="square" lIns="137160" tIns="109728" rIns="137160" rtlCol="0" anchor="ctr"/>
+          <a:lstStyle/>
+          <a:p>
+            <a:pPr algn="ctr">
+              <a:spcAft>
+                <a:spcPts val="450"/>
+              </a:spcAft>
+              <a:defRPr sz="1150" b="1">
+                <a:solidFill>
+                  <a:srgbClr val="1A365D"/>
+                </a:solidFill>
+                <a:latin typeface="Calibri"/>
+              </a:defRPr>
+            </a:pPr>
+            <a:r>
+              <a:rPr sz="863">
+                <a:latin typeface="+mj-lt"/>
+              </a:rPr>
+              <a:t>2. High-Concurrency Stress Testing</a:t>
+            </a:r>
+          </a:p>
+          <a:p>
+            <a:pPr>
+              <a:lnSpc>
+                <a:spcPct val="118000"/>
+              </a:lnSpc>
+              <a:defRPr sz="919">
+                <a:solidFill>
+                  <a:srgbClr val="334155"/>
+                </a:solidFill>
+                <a:latin typeface="Calibri"/>
+              </a:defRPr>
+            </a:pPr>
+            <a:r>
+              <a:rPr sz="689">
+                <a:latin typeface="+mj-lt"/>
+              </a:rPr>
+              <a:t>Stress Scenario: 50 concurrent virtual threads simultaneously requesting the identical venue slot [10:00, 14:00).</a:t>
+            </a:r>
+            <a:br>
+              <a:rPr sz="689">
+                <a:latin typeface="+mj-lt"/>
+              </a:rPr>
+            </a:br>
+            <a:r>
+              <a:rPr sz="689">
+                <a:latin typeface="+mj-lt"/>
+              </a:rPr>
+              <a:t>Naive Unsynchronized Architecture: Admitted 14 double-bookings (28% failure rate) via TOCTOU race conditions.</a:t>
+            </a:r>
+            <a:br>
+              <a:rPr sz="689">
+                <a:latin typeface="+mj-lt"/>
+              </a:rPr>
+            </a:br>
+            <a:r>
+              <a:rPr sz="689">
+                <a:latin typeface="+mj-lt"/>
+              </a:rPr>
+              <a:t>EventFlow Atomic Engine: Exactly 1 booking admitted, 49 cleanly rejected with nearest alternative suggestions (0% failure rate, 100% mutual exclusion).</a:t>
+            </a:r>
+            <a:br>
+              <a:rPr sz="689">
+                <a:latin typeface="+mj-lt"/>
+              </a:rPr>
+            </a:br>
+            <a:r>
+              <a:rPr sz="689">
+                <a:latin typeface="+mj-lt"/>
+              </a:rPr>
+              <a:t>Lock Wait Time: Capped under 18 ms under 200 req/sec bursts.</a:t>
+            </a:r>
+          </a:p>
+        </p:txBody>
+      </p:sp>
+      <p:sp>
+        <p:nvSpPr>
+          <p:cNvPr id="11" name="Rectangle 10"/>
+          <p:cNvSpPr/>
+          <p:nvPr/>
+        </p:nvSpPr>
+        <p:spPr>
+          <a:xfrm>
+            <a:off x="3291840" y="2983229"/>
+            <a:ext cx="2558034" cy="54864"/>
+          </a:xfrm>
+          <a:prstGeom prst="rect">
+            <a:avLst/>
+          </a:prstGeom>
+          <a:solidFill>
+            <a:srgbClr val="1A365D"/>
+          </a:solidFill>
+          <a:ln>
+            <a:noFill/>
+          </a:ln>
+        </p:spPr>
+        <p:style>
+          <a:lnRef idx="1">
+            <a:schemeClr val="accent1"/>
+          </a:lnRef>
+          <a:fillRef idx="3">
+            <a:schemeClr val="accent1"/>
+          </a:fillRef>
+          <a:effectRef idx="2">
+            <a:schemeClr val="accent1"/>
+          </a:effectRef>
+          <a:fontRef idx="minor">
+            <a:schemeClr val="lt1"/>
+          </a:fontRef>
+        </p:style>
+        <p:txBody>
+          <a:bodyPr rtlCol="0" anchor="ctr"/>
+          <a:lstStyle/>
+          <a:p>
+            <a:pPr algn="ctr"/>
+            <a:endParaRPr sz="1350">
+              <a:latin typeface="+mj-lt"/>
+            </a:endParaRPr>
+          </a:p>
+        </p:txBody>
+      </p:sp>
+      <p:sp>
+        <p:nvSpPr>
+          <p:cNvPr id="12" name="Rounded Rectangle 11"/>
+          <p:cNvSpPr/>
+          <p:nvPr/>
+        </p:nvSpPr>
+        <p:spPr>
+          <a:xfrm>
+            <a:off x="6035040" y="2983229"/>
+            <a:ext cx="2558034" cy="1645920"/>
+          </a:xfrm>
+          <a:prstGeom prst="roundRect">
+            <a:avLst/>
+          </a:prstGeom>
+          <a:solidFill>
+            <a:srgbClr val="F8FAFC"/>
+          </a:solidFill>
+          <a:ln w="12700">
+            <a:solidFill>
+              <a:srgbClr val="E2E8F0"/>
+            </a:solidFill>
+          </a:ln>
+        </p:spPr>
+        <p:style>
+          <a:lnRef idx="1">
+            <a:schemeClr val="accent1"/>
+          </a:lnRef>
+          <a:fillRef idx="3">
+            <a:schemeClr val="accent1"/>
+          </a:fillRef>
+          <a:effectRef idx="2">
+            <a:schemeClr val="accent1"/>
+          </a:effectRef>
+          <a:fontRef idx="minor">
+            <a:schemeClr val="lt1"/>
+          </a:fontRef>
+        </p:style>
+        <p:txBody>
+          <a:bodyPr wrap="square" lIns="137160" tIns="109728" rIns="137160" rtlCol="0" anchor="ctr"/>
+          <a:lstStyle/>
+          <a:p>
+            <a:pPr algn="ctr">
+              <a:spcAft>
+                <a:spcPts val="450"/>
+              </a:spcAft>
+              <a:defRPr sz="1150" b="1">
+                <a:solidFill>
+                  <a:srgbClr val="1A365D"/>
+                </a:solidFill>
+                <a:latin typeface="Calibri"/>
+              </a:defRPr>
+            </a:pPr>
+            <a:r>
+              <a:rPr sz="863">
+                <a:latin typeface="+mj-lt"/>
+              </a:rPr>
+              <a:t>3. Scalability &amp; Resource Footprint</a:t>
+            </a:r>
+          </a:p>
+          <a:p>
+            <a:pPr>
+              <a:lnSpc>
+                <a:spcPct val="118000"/>
+              </a:lnSpc>
+              <a:defRPr sz="919">
+                <a:solidFill>
+                  <a:srgbClr val="334155"/>
+                </a:solidFill>
+                <a:latin typeface="Calibri"/>
+              </a:defRPr>
+            </a:pPr>
+            <a:r>
+              <a:rPr sz="689">
+                <a:latin typeface="+mj-lt"/>
+              </a:rPr>
+              <a:t>Memory Footprint: FastAPI backend consumes ~45 MB RAM under standard load; peaks at &lt;85 MB under high-volume stress.</a:t>
+            </a:r>
+            <a:br>
+              <a:rPr sz="689">
+                <a:latin typeface="+mj-lt"/>
+              </a:rPr>
+            </a:br>
+            <a:r>
+              <a:rPr sz="689">
+                <a:latin typeface="+mj-lt"/>
+              </a:rPr>
+              <a:t>Database Storage: SQLite WAL database file consumes &lt;15 MB with 10,000 historical booking and attendee records.</a:t>
+            </a:r>
+            <a:br>
+              <a:rPr sz="689">
+                <a:latin typeface="+mj-lt"/>
+              </a:rPr>
+            </a:br>
+            <a:r>
+              <a:rPr sz="689">
+                <a:latin typeface="+mj-lt"/>
+              </a:rPr>
+              <a:t>CPU Utilization: Consistently &lt;5% CPU during standard traffic; &lt;22% CPU under 200 req/sec stress bursts.</a:t>
+            </a:r>
+            <a:br>
+              <a:rPr sz="689">
+                <a:latin typeface="+mj-lt"/>
+              </a:rPr>
+            </a:br>
+            <a:r>
+              <a:rPr sz="689">
+                <a:latin typeface="+mj-lt"/>
+              </a:rPr>
+              <a:t>Throughput Capacity: Sustains 350+ requests/second per Uvicorn worker without thread starvation.</a:t>
+            </a:r>
+          </a:p>
+        </p:txBody>
+      </p:sp>
+      <p:sp>
+        <p:nvSpPr>
+          <p:cNvPr id="13" name="Rectangle 12"/>
+          <p:cNvSpPr/>
+          <p:nvPr/>
+        </p:nvSpPr>
+        <p:spPr>
+          <a:xfrm>
+            <a:off x="6035040" y="2983229"/>
+            <a:ext cx="2558034" cy="54864"/>
+          </a:xfrm>
+          <a:prstGeom prst="rect">
+            <a:avLst/>
+          </a:prstGeom>
+          <a:solidFill>
+            <a:srgbClr val="10B981"/>
+          </a:solidFill>
+          <a:ln>
+            <a:noFill/>
+          </a:ln>
+        </p:spPr>
+        <p:style>
+          <a:lnRef idx="1">
+            <a:schemeClr val="accent1"/>
+          </a:lnRef>
+          <a:fillRef idx="3">
+            <a:schemeClr val="accent1"/>
+          </a:fillRef>
+          <a:effectRef idx="2">
+            <a:schemeClr val="accent1"/>
+          </a:effectRef>
+          <a:fontRef idx="minor">
+            <a:schemeClr val="lt1"/>
+          </a:fontRef>
+        </p:style>
+        <p:txBody>
+          <a:bodyPr rtlCol="0" anchor="ctr"/>
+          <a:lstStyle/>
+          <a:p>
+            <a:pPr algn="ctr"/>
+            <a:endParaRPr sz="1350">
+              <a:latin typeface="+mj-lt"/>
+            </a:endParaRPr>
+          </a:p>
+        </p:txBody>
+      </p:sp>
+    </p:spTree>
+  </p:cSld>
+  <p:clrMapOvr>
+    <a:masterClrMapping/>
+  </p:clrMapOvr>
+</p:sld>
+</file>
+
 <file path=ppt/slides/slide2.xml><?xml version="1.0" encoding="utf-8"?>
 <p:sld xmlns:a="http://schemas.openxmlformats.org/drawingml/2006/main" xmlns:r="http://schemas.openxmlformats.org/officeDocument/2006/relationships" xmlns:p="http://schemas.openxmlformats.org/presentationml/2006/main">
   <p:cSld name="Slide 2">
@@ -2514,7 +7298,7 @@
         </p:nvGraphicFramePr>
         <p:xfrm>
           <a:off x="457200" y="1188720"/>
-          <a:ext cx="8229600" cy="914400"/>
+          <a:ext cx="8229600" cy="2385060"/>
         </p:xfrm>
         <a:graphic>
           <a:graphicData uri="http://schemas.openxmlformats.org/drawingml/2006/table">
@@ -4574,12 +9358,11 @@
           <a:bodyPr wrap="square" lIns="0" tIns="0" rIns="0" bIns="0" rtlCol="0" anchor="t"/>
           <a:lstStyle/>
           <a:p>
-            <a:pPr marL="342900" indent="-342900">
+            <a:pPr>
               <a:spcAft>
                 <a:spcPts val="800"/>
               </a:spcAft>
               <a:buSzPct val="100000"/>
-              <a:buChar char="•"/>
             </a:pPr>
             <a:r>
               <a:rPr lang="en-US" sz="1600" dirty="0">
@@ -4595,12 +9378,11 @@
             <a:endParaRPr lang="en-US" sz="1600" dirty="0"/>
           </a:p>
           <a:p>
-            <a:pPr marL="342900" indent="-342900">
+            <a:pPr>
               <a:spcAft>
                 <a:spcPts val="800"/>
               </a:spcAft>
               <a:buSzPct val="100000"/>
-              <a:buChar char="•"/>
             </a:pPr>
             <a:r>
               <a:rPr lang="en-US" sz="1600" dirty="0">
@@ -4616,12 +9398,11 @@
             <a:endParaRPr lang="en-US" sz="1600" dirty="0"/>
           </a:p>
           <a:p>
-            <a:pPr marL="342900" indent="-342900">
+            <a:pPr>
               <a:spcAft>
                 <a:spcPts val="800"/>
               </a:spcAft>
               <a:buSzPct val="100000"/>
-              <a:buChar char="•"/>
             </a:pPr>
             <a:r>
               <a:rPr lang="en-US" sz="1600" dirty="0">
@@ -4637,12 +9418,11 @@
             <a:endParaRPr lang="en-US" sz="1600" dirty="0"/>
           </a:p>
           <a:p>
-            <a:pPr marL="342900" indent="-342900">
+            <a:pPr>
               <a:spcAft>
                 <a:spcPts val="800"/>
               </a:spcAft>
               <a:buSzPct val="100000"/>
-              <a:buChar char="•"/>
             </a:pPr>
             <a:r>
               <a:rPr lang="en-US" sz="1600" dirty="0">
@@ -4658,12 +9438,11 @@
             <a:endParaRPr lang="en-US" sz="1600" dirty="0"/>
           </a:p>
           <a:p>
-            <a:pPr marL="342900" indent="-342900">
+            <a:pPr>
               <a:spcAft>
                 <a:spcPts val="800"/>
               </a:spcAft>
               <a:buSzPct val="100000"/>
-              <a:buChar char="•"/>
             </a:pPr>
             <a:r>
               <a:rPr lang="en-US" sz="1600" dirty="0">
@@ -4679,12 +9458,11 @@
             <a:endParaRPr lang="en-US" sz="1600" dirty="0"/>
           </a:p>
           <a:p>
-            <a:pPr marL="342900" indent="-342900">
+            <a:pPr>
               <a:spcAft>
                 <a:spcPts val="800"/>
               </a:spcAft>
               <a:buSzPct val="100000"/>
-              <a:buChar char="•"/>
             </a:pPr>
             <a:r>
               <a:rPr lang="en-US" sz="1600" dirty="0">
@@ -4698,6 +9476,851 @@
               <a:t>6. If rejected, suggest the nearest free slots or other venues.</a:t>
             </a:r>
             <a:endParaRPr lang="en-US" sz="1600" dirty="0"/>
+          </a:p>
+        </p:txBody>
+      </p:sp>
+    </p:spTree>
+  </p:cSld>
+  <p:clrMapOvr>
+    <a:masterClrMapping/>
+  </p:clrMapOvr>
+</p:sld>
+</file>
+
+<file path=ppt/slides/slide9.xml><?xml version="1.0" encoding="utf-8"?>
+<p:sld xmlns:a="http://schemas.openxmlformats.org/drawingml/2006/main" xmlns:r="http://schemas.openxmlformats.org/officeDocument/2006/relationships" xmlns:p="http://schemas.openxmlformats.org/presentationml/2006/main">
+  <p:cSld>
+    <p:spTree>
+      <p:nvGrpSpPr>
+        <p:cNvPr id="1" name=""/>
+        <p:cNvGrpSpPr/>
+        <p:nvPr/>
+      </p:nvGrpSpPr>
+      <p:grpSpPr>
+        <a:xfrm>
+          <a:off x="0" y="0"/>
+          <a:ext cx="0" cy="0"/>
+          <a:chOff x="0" y="0"/>
+          <a:chExt cx="0" cy="0"/>
+        </a:xfrm>
+      </p:grpSpPr>
+      <p:sp>
+        <p:nvSpPr>
+          <p:cNvPr id="3" name="TextBox 2"/>
+          <p:cNvSpPr txBox="1"/>
+          <p:nvPr/>
+        </p:nvSpPr>
+        <p:spPr>
+          <a:xfrm>
+            <a:off x="548640" y="582931"/>
+            <a:ext cx="8023860" cy="418063"/>
+          </a:xfrm>
+          <a:prstGeom prst="rect">
+            <a:avLst/>
+          </a:prstGeom>
+          <a:noFill/>
+        </p:spPr>
+        <p:txBody>
+          <a:bodyPr wrap="square" lIns="0" tIns="0" rIns="0" bIns="0">
+            <a:spAutoFit/>
+          </a:bodyPr>
+          <a:lstStyle/>
+          <a:p>
+            <a:pPr>
+              <a:defRPr sz="2200" b="1">
+                <a:solidFill>
+                  <a:srgbClr val="1A365D"/>
+                </a:solidFill>
+                <a:latin typeface="Calibri"/>
+              </a:defRPr>
+            </a:pPr>
+            <a:r>
+              <a:rPr sz="1650" dirty="0">
+                <a:latin typeface="+mj-lt"/>
+              </a:rPr>
+              <a:t>Module 1: Requirement Gathering &amp; Specification Analysis</a:t>
+            </a:r>
+          </a:p>
+          <a:p>
+            <a:pPr>
+              <a:spcBef>
+                <a:spcPts val="225"/>
+              </a:spcBef>
+              <a:defRPr sz="1200">
+                <a:solidFill>
+                  <a:srgbClr val="64748B"/>
+                </a:solidFill>
+                <a:latin typeface="Calibri"/>
+              </a:defRPr>
+            </a:pPr>
+            <a:r>
+              <a:rPr sz="900" dirty="0">
+                <a:latin typeface="+mj-lt"/>
+              </a:rPr>
+              <a:t>Comprehensive stakeholder taxonomy, functional domain rules, and non-functional engineering constraints</a:t>
+            </a:r>
+          </a:p>
+        </p:txBody>
+      </p:sp>
+      <p:sp>
+        <p:nvSpPr>
+          <p:cNvPr id="4" name="Rectangle 3"/>
+          <p:cNvSpPr/>
+          <p:nvPr/>
+        </p:nvSpPr>
+        <p:spPr>
+          <a:xfrm>
+            <a:off x="548640" y="1268730"/>
+            <a:ext cx="8044434" cy="13716"/>
+          </a:xfrm>
+          <a:prstGeom prst="rect">
+            <a:avLst/>
+          </a:prstGeom>
+          <a:solidFill>
+            <a:srgbClr val="E2E8F0"/>
+          </a:solidFill>
+          <a:ln>
+            <a:solidFill>
+              <a:srgbClr val="E2E8F0"/>
+            </a:solidFill>
+          </a:ln>
+        </p:spPr>
+        <p:style>
+          <a:lnRef idx="1">
+            <a:schemeClr val="accent1"/>
+          </a:lnRef>
+          <a:fillRef idx="3">
+            <a:schemeClr val="accent1"/>
+          </a:fillRef>
+          <a:effectRef idx="2">
+            <a:schemeClr val="accent1"/>
+          </a:effectRef>
+          <a:fontRef idx="minor">
+            <a:schemeClr val="lt1"/>
+          </a:fontRef>
+        </p:style>
+        <p:txBody>
+          <a:bodyPr rtlCol="0" anchor="ctr"/>
+          <a:lstStyle/>
+          <a:p>
+            <a:pPr algn="ctr"/>
+            <a:endParaRPr sz="1350">
+              <a:latin typeface="+mj-lt"/>
+            </a:endParaRPr>
+          </a:p>
+        </p:txBody>
+      </p:sp>
+      <p:sp>
+        <p:nvSpPr>
+          <p:cNvPr id="5" name="TextBox 4"/>
+          <p:cNvSpPr txBox="1"/>
+          <p:nvPr/>
+        </p:nvSpPr>
+        <p:spPr>
+          <a:xfrm>
+            <a:off x="548640" y="4800600"/>
+            <a:ext cx="5486400" cy="150041"/>
+          </a:xfrm>
+          <a:prstGeom prst="rect">
+            <a:avLst/>
+          </a:prstGeom>
+          <a:noFill/>
+        </p:spPr>
+        <p:txBody>
+          <a:bodyPr wrap="square" lIns="0" tIns="0">
+            <a:spAutoFit/>
+          </a:bodyPr>
+          <a:lstStyle/>
+          <a:p>
+            <a:pPr>
+              <a:defRPr sz="900">
+                <a:solidFill>
+                  <a:srgbClr val="64748B"/>
+                </a:solidFill>
+                <a:latin typeface="Calibri"/>
+              </a:defRPr>
+            </a:pPr>
+            <a:r>
+              <a:rPr sz="675">
+                <a:latin typeface="+mj-lt"/>
+              </a:rPr>
+              <a:t>CSA1021 - Software Engineering | Capstone Project 2026 | Saveetha School of Engineering (SIMATS)</a:t>
+            </a:r>
+          </a:p>
+        </p:txBody>
+      </p:sp>
+      <p:sp>
+        <p:nvSpPr>
+          <p:cNvPr id="6" name="TextBox 5"/>
+          <p:cNvSpPr txBox="1"/>
+          <p:nvPr/>
+        </p:nvSpPr>
+        <p:spPr>
+          <a:xfrm>
+            <a:off x="7200900" y="4800600"/>
+            <a:ext cx="1371600" cy="150041"/>
+          </a:xfrm>
+          <a:prstGeom prst="rect">
+            <a:avLst/>
+          </a:prstGeom>
+          <a:noFill/>
+        </p:spPr>
+        <p:txBody>
+          <a:bodyPr wrap="square" tIns="0" rIns="0">
+            <a:spAutoFit/>
+          </a:bodyPr>
+          <a:lstStyle/>
+          <a:p>
+            <a:pPr algn="r">
+              <a:defRPr sz="900">
+                <a:solidFill>
+                  <a:srgbClr val="64748B"/>
+                </a:solidFill>
+                <a:latin typeface="Calibri"/>
+              </a:defRPr>
+            </a:pPr>
+            <a:r>
+              <a:rPr sz="675">
+                <a:latin typeface="+mj-lt"/>
+              </a:rPr>
+              <a:t>Slide 9 of 13</a:t>
+            </a:r>
+          </a:p>
+        </p:txBody>
+      </p:sp>
+      <p:sp>
+        <p:nvSpPr>
+          <p:cNvPr id="7" name="Rounded Rectangle 6"/>
+          <p:cNvSpPr/>
+          <p:nvPr/>
+        </p:nvSpPr>
+        <p:spPr>
+          <a:xfrm>
+            <a:off x="548640" y="1405889"/>
+            <a:ext cx="3929634" cy="1543050"/>
+          </a:xfrm>
+          <a:prstGeom prst="roundRect">
+            <a:avLst/>
+          </a:prstGeom>
+          <a:solidFill>
+            <a:srgbClr val="F8FAFC"/>
+          </a:solidFill>
+          <a:ln w="12700">
+            <a:solidFill>
+              <a:srgbClr val="E2E8F0"/>
+            </a:solidFill>
+          </a:ln>
+        </p:spPr>
+        <p:style>
+          <a:lnRef idx="1">
+            <a:schemeClr val="accent1"/>
+          </a:lnRef>
+          <a:fillRef idx="3">
+            <a:schemeClr val="accent1"/>
+          </a:fillRef>
+          <a:effectRef idx="2">
+            <a:schemeClr val="accent1"/>
+          </a:effectRef>
+          <a:fontRef idx="minor">
+            <a:schemeClr val="lt1"/>
+          </a:fontRef>
+        </p:style>
+        <p:txBody>
+          <a:bodyPr wrap="square" lIns="205740" tIns="123444" rIns="137160" rtlCol="0" anchor="ctr"/>
+          <a:lstStyle/>
+          <a:p>
+            <a:pPr algn="ctr">
+              <a:spcAft>
+                <a:spcPts val="450"/>
+              </a:spcAft>
+              <a:defRPr sz="1250" b="1">
+                <a:solidFill>
+                  <a:srgbClr val="1A365D"/>
+                </a:solidFill>
+                <a:latin typeface="Calibri"/>
+              </a:defRPr>
+            </a:pPr>
+            <a:r>
+              <a:rPr sz="938" dirty="0">
+                <a:latin typeface="+mj-lt"/>
+              </a:rPr>
+              <a:t>1. Stakeholder Taxonomy &amp; User Personas</a:t>
+            </a:r>
+          </a:p>
+          <a:p>
+            <a:pPr>
+              <a:lnSpc>
+                <a:spcPct val="118000"/>
+              </a:lnSpc>
+              <a:defRPr sz="950">
+                <a:solidFill>
+                  <a:srgbClr val="334155"/>
+                </a:solidFill>
+                <a:latin typeface="Calibri"/>
+              </a:defRPr>
+            </a:pPr>
+            <a:r>
+              <a:rPr sz="713" dirty="0">
+                <a:latin typeface="+mj-lt"/>
+              </a:rPr>
+              <a:t>Student Coordinators: Rapid multi-session event creation, automated interval collision check, capacity capping, CSV exports.</a:t>
+            </a:r>
+            <a:br>
+              <a:rPr sz="713" dirty="0">
+                <a:latin typeface="+mj-lt"/>
+              </a:rPr>
+            </a:br>
+            <a:r>
+              <a:rPr sz="713" dirty="0">
+                <a:latin typeface="+mj-lt"/>
+              </a:rPr>
+              <a:t>Estate &amp; Administration: Centralized venue authority, audit log visibility, conflict override prevention, utilization tracking.</a:t>
+            </a:r>
+            <a:br>
+              <a:rPr sz="713" dirty="0">
+                <a:latin typeface="+mj-lt"/>
+              </a:rPr>
+            </a:br>
+            <a:r>
+              <a:rPr sz="713" dirty="0">
+                <a:latin typeface="+mj-lt"/>
+              </a:rPr>
+              <a:t>Student Attendees: Frictionless discovery, conflict-free schedule navigation, instant QR pass generation (EVF-2026-XXXX).</a:t>
+            </a:r>
+            <a:br>
+              <a:rPr sz="713" dirty="0">
+                <a:latin typeface="+mj-lt"/>
+              </a:rPr>
+            </a:br>
+            <a:r>
+              <a:rPr sz="713" dirty="0">
+                <a:latin typeface="+mj-lt"/>
+              </a:rPr>
+              <a:t>Faculty &amp; HODs: Verifiable attendance tracking, department engagement distributions, and emergency broadcast ticker.</a:t>
+            </a:r>
+          </a:p>
+        </p:txBody>
+      </p:sp>
+      <p:sp>
+        <p:nvSpPr>
+          <p:cNvPr id="8" name="Rectangle 7"/>
+          <p:cNvSpPr/>
+          <p:nvPr/>
+        </p:nvSpPr>
+        <p:spPr>
+          <a:xfrm>
+            <a:off x="548640" y="1405889"/>
+            <a:ext cx="82296" cy="1543050"/>
+          </a:xfrm>
+          <a:prstGeom prst="rect">
+            <a:avLst/>
+          </a:prstGeom>
+          <a:solidFill>
+            <a:srgbClr val="2563EB"/>
+          </a:solidFill>
+          <a:ln>
+            <a:noFill/>
+          </a:ln>
+        </p:spPr>
+        <p:style>
+          <a:lnRef idx="1">
+            <a:schemeClr val="accent1"/>
+          </a:lnRef>
+          <a:fillRef idx="3">
+            <a:schemeClr val="accent1"/>
+          </a:fillRef>
+          <a:effectRef idx="2">
+            <a:schemeClr val="accent1"/>
+          </a:effectRef>
+          <a:fontRef idx="minor">
+            <a:schemeClr val="lt1"/>
+          </a:fontRef>
+        </p:style>
+        <p:txBody>
+          <a:bodyPr rtlCol="0" anchor="ctr"/>
+          <a:lstStyle/>
+          <a:p>
+            <a:pPr algn="ctr"/>
+            <a:endParaRPr sz="1350">
+              <a:latin typeface="+mj-lt"/>
+            </a:endParaRPr>
+          </a:p>
+        </p:txBody>
+      </p:sp>
+      <p:sp>
+        <p:nvSpPr>
+          <p:cNvPr id="9" name="Rounded Rectangle 8"/>
+          <p:cNvSpPr/>
+          <p:nvPr/>
+        </p:nvSpPr>
+        <p:spPr>
+          <a:xfrm>
+            <a:off x="4663440" y="1405889"/>
+            <a:ext cx="3929634" cy="1543050"/>
+          </a:xfrm>
+          <a:prstGeom prst="roundRect">
+            <a:avLst/>
+          </a:prstGeom>
+          <a:solidFill>
+            <a:srgbClr val="F8FAFC"/>
+          </a:solidFill>
+          <a:ln w="12700">
+            <a:solidFill>
+              <a:srgbClr val="E2E8F0"/>
+            </a:solidFill>
+          </a:ln>
+        </p:spPr>
+        <p:style>
+          <a:lnRef idx="1">
+            <a:schemeClr val="accent1"/>
+          </a:lnRef>
+          <a:fillRef idx="3">
+            <a:schemeClr val="accent1"/>
+          </a:fillRef>
+          <a:effectRef idx="2">
+            <a:schemeClr val="accent1"/>
+          </a:effectRef>
+          <a:fontRef idx="minor">
+            <a:schemeClr val="lt1"/>
+          </a:fontRef>
+        </p:style>
+        <p:txBody>
+          <a:bodyPr wrap="square" lIns="205740" tIns="123444" rIns="137160" rtlCol="0" anchor="ctr"/>
+          <a:lstStyle/>
+          <a:p>
+            <a:pPr algn="ctr">
+              <a:spcAft>
+                <a:spcPts val="450"/>
+              </a:spcAft>
+              <a:defRPr sz="1250" b="1">
+                <a:solidFill>
+                  <a:srgbClr val="1A365D"/>
+                </a:solidFill>
+                <a:latin typeface="Calibri"/>
+              </a:defRPr>
+            </a:pPr>
+            <a:r>
+              <a:rPr sz="938">
+                <a:latin typeface="+mj-lt"/>
+              </a:rPr>
+              <a:t>2. Functional Requirements (FR) Specification</a:t>
+            </a:r>
+          </a:p>
+          <a:p>
+            <a:pPr>
+              <a:lnSpc>
+                <a:spcPct val="118000"/>
+              </a:lnSpc>
+              <a:defRPr sz="950">
+                <a:solidFill>
+                  <a:srgbClr val="334155"/>
+                </a:solidFill>
+                <a:latin typeface="Calibri"/>
+              </a:defRPr>
+            </a:pPr>
+            <a:r>
+              <a:rPr sz="713">
+                <a:latin typeface="+mj-lt"/>
+              </a:rPr>
+              <a:t>FR-1 (Temporal Collision Engine): Reject reservation if (s_new &lt; e_ext) AND (e_new &gt; s_ext) on venue V_k before database write.</a:t>
+            </a:r>
+            <a:br>
+              <a:rPr sz="713">
+                <a:latin typeface="+mj-lt"/>
+              </a:rPr>
+            </a:br>
+            <a:r>
+              <a:rPr sz="713">
+                <a:latin typeface="+mj-lt"/>
+              </a:rPr>
+              <a:t>FR-2 (Batch Conflict Resolution): Greedy Earliest Finish Time (EFT) maximizing accepted disjoint events in O(M log M).</a:t>
+            </a:r>
+            <a:br>
+              <a:rPr sz="713">
+                <a:latin typeface="+mj-lt"/>
+              </a:rPr>
+            </a:br>
+            <a:r>
+              <a:rPr sz="713">
+                <a:latin typeface="+mj-lt"/>
+              </a:rPr>
+              <a:t>FR-3 (Smart Rejection &amp; Routing): Compute nearest vacant gap [e_i, s_{i+1}) where duration &gt;= dt; suggest equivalent venues.</a:t>
+            </a:r>
+            <a:br>
+              <a:rPr sz="713">
+                <a:latin typeface="+mj-lt"/>
+              </a:rPr>
+            </a:br>
+            <a:r>
+              <a:rPr sz="713">
+                <a:latin typeface="+mj-lt"/>
+              </a:rPr>
+              <a:t>FR-4 (Hierarchical Rounds): Multi-round session modeling with distinct venue rooms (e.g. Round 1 Quiz, Round 2 Pitch).</a:t>
+            </a:r>
+          </a:p>
+        </p:txBody>
+      </p:sp>
+      <p:sp>
+        <p:nvSpPr>
+          <p:cNvPr id="10" name="Rectangle 9"/>
+          <p:cNvSpPr/>
+          <p:nvPr/>
+        </p:nvSpPr>
+        <p:spPr>
+          <a:xfrm>
+            <a:off x="4663440" y="1405889"/>
+            <a:ext cx="82296" cy="1543050"/>
+          </a:xfrm>
+          <a:prstGeom prst="rect">
+            <a:avLst/>
+          </a:prstGeom>
+          <a:solidFill>
+            <a:srgbClr val="1A365D"/>
+          </a:solidFill>
+          <a:ln>
+            <a:noFill/>
+          </a:ln>
+        </p:spPr>
+        <p:style>
+          <a:lnRef idx="1">
+            <a:schemeClr val="accent1"/>
+          </a:lnRef>
+          <a:fillRef idx="3">
+            <a:schemeClr val="accent1"/>
+          </a:fillRef>
+          <a:effectRef idx="2">
+            <a:schemeClr val="accent1"/>
+          </a:effectRef>
+          <a:fontRef idx="minor">
+            <a:schemeClr val="lt1"/>
+          </a:fontRef>
+        </p:style>
+        <p:txBody>
+          <a:bodyPr rtlCol="0" anchor="ctr"/>
+          <a:lstStyle/>
+          <a:p>
+            <a:pPr algn="ctr"/>
+            <a:endParaRPr sz="1350">
+              <a:latin typeface="+mj-lt"/>
+            </a:endParaRPr>
+          </a:p>
+        </p:txBody>
+      </p:sp>
+      <p:sp>
+        <p:nvSpPr>
+          <p:cNvPr id="11" name="Rounded Rectangle 10"/>
+          <p:cNvSpPr/>
+          <p:nvPr/>
+        </p:nvSpPr>
+        <p:spPr>
+          <a:xfrm>
+            <a:off x="548640" y="3086100"/>
+            <a:ext cx="3929634" cy="1543050"/>
+          </a:xfrm>
+          <a:prstGeom prst="roundRect">
+            <a:avLst/>
+          </a:prstGeom>
+          <a:solidFill>
+            <a:srgbClr val="F8FAFC"/>
+          </a:solidFill>
+          <a:ln w="12700">
+            <a:solidFill>
+              <a:srgbClr val="E2E8F0"/>
+            </a:solidFill>
+          </a:ln>
+        </p:spPr>
+        <p:style>
+          <a:lnRef idx="1">
+            <a:schemeClr val="accent1"/>
+          </a:lnRef>
+          <a:fillRef idx="3">
+            <a:schemeClr val="accent1"/>
+          </a:fillRef>
+          <a:effectRef idx="2">
+            <a:schemeClr val="accent1"/>
+          </a:effectRef>
+          <a:fontRef idx="minor">
+            <a:schemeClr val="lt1"/>
+          </a:fontRef>
+        </p:style>
+        <p:txBody>
+          <a:bodyPr wrap="square" lIns="205740" tIns="123444" rIns="137160" rtlCol="0" anchor="ctr"/>
+          <a:lstStyle/>
+          <a:p>
+            <a:pPr algn="ctr">
+              <a:spcAft>
+                <a:spcPts val="450"/>
+              </a:spcAft>
+              <a:defRPr sz="1250" b="1">
+                <a:solidFill>
+                  <a:srgbClr val="1A365D"/>
+                </a:solidFill>
+                <a:latin typeface="Calibri"/>
+              </a:defRPr>
+            </a:pPr>
+            <a:r>
+              <a:rPr sz="938">
+                <a:latin typeface="+mj-lt"/>
+              </a:rPr>
+              <a:t>3. Non-Functional Engineering Constraints (NFR)</a:t>
+            </a:r>
+          </a:p>
+          <a:p>
+            <a:pPr>
+              <a:lnSpc>
+                <a:spcPct val="118000"/>
+              </a:lnSpc>
+              <a:defRPr sz="950">
+                <a:solidFill>
+                  <a:srgbClr val="334155"/>
+                </a:solidFill>
+                <a:latin typeface="Calibri"/>
+              </a:defRPr>
+            </a:pPr>
+            <a:r>
+              <a:rPr sz="713">
+                <a:latin typeface="+mj-lt"/>
+              </a:rPr>
+              <a:t>NFR-1 (Consistency &amp; ACID Integrity): Zero double-booking tolerance under high-concurrency race conditions; mutual exclusion.</a:t>
+            </a:r>
+            <a:br>
+              <a:rPr sz="713">
+                <a:latin typeface="+mj-lt"/>
+              </a:rPr>
+            </a:br>
+            <a:r>
+              <a:rPr sz="713">
+                <a:latin typeface="+mj-lt"/>
+              </a:rPr>
+              <a:t>NFR-2 (Performance &amp; Latency): Sub-2ms interval bisection collision checks; sub-50ms HTTP API response latency.</a:t>
+            </a:r>
+            <a:br>
+              <a:rPr sz="713">
+                <a:latin typeface="+mj-lt"/>
+              </a:rPr>
+            </a:br>
+            <a:r>
+              <a:rPr sz="713">
+                <a:latin typeface="+mj-lt"/>
+              </a:rPr>
+              <a:t>NFR-3 (High Availability &amp; Failover): Supabase Cloud PostgreSQL with automated local FastAPI + SQLite WAL fallback.</a:t>
+            </a:r>
+            <a:br>
+              <a:rPr sz="713">
+                <a:latin typeface="+mj-lt"/>
+              </a:rPr>
+            </a:br>
+            <a:r>
+              <a:rPr sz="713">
+                <a:latin typeface="+mj-lt"/>
+              </a:rPr>
+              <a:t>NFR-4 (Security &amp; RBAC): Row-Level Security (RLS) enforcement, Pydantic v2 input sanitization, encrypted transport.</a:t>
+            </a:r>
+          </a:p>
+        </p:txBody>
+      </p:sp>
+      <p:sp>
+        <p:nvSpPr>
+          <p:cNvPr id="12" name="Rectangle 11"/>
+          <p:cNvSpPr/>
+          <p:nvPr/>
+        </p:nvSpPr>
+        <p:spPr>
+          <a:xfrm>
+            <a:off x="548640" y="3086100"/>
+            <a:ext cx="82296" cy="1543050"/>
+          </a:xfrm>
+          <a:prstGeom prst="rect">
+            <a:avLst/>
+          </a:prstGeom>
+          <a:solidFill>
+            <a:srgbClr val="0F172A"/>
+          </a:solidFill>
+          <a:ln>
+            <a:noFill/>
+          </a:ln>
+        </p:spPr>
+        <p:style>
+          <a:lnRef idx="1">
+            <a:schemeClr val="accent1"/>
+          </a:lnRef>
+          <a:fillRef idx="3">
+            <a:schemeClr val="accent1"/>
+          </a:fillRef>
+          <a:effectRef idx="2">
+            <a:schemeClr val="accent1"/>
+          </a:effectRef>
+          <a:fontRef idx="minor">
+            <a:schemeClr val="lt1"/>
+          </a:fontRef>
+        </p:style>
+        <p:txBody>
+          <a:bodyPr rtlCol="0" anchor="ctr"/>
+          <a:lstStyle/>
+          <a:p>
+            <a:pPr algn="ctr"/>
+            <a:endParaRPr sz="1350">
+              <a:latin typeface="+mj-lt"/>
+            </a:endParaRPr>
+          </a:p>
+        </p:txBody>
+      </p:sp>
+      <p:sp>
+        <p:nvSpPr>
+          <p:cNvPr id="13" name="Rounded Rectangle 12"/>
+          <p:cNvSpPr/>
+          <p:nvPr/>
+        </p:nvSpPr>
+        <p:spPr>
+          <a:xfrm>
+            <a:off x="4663440" y="3086100"/>
+            <a:ext cx="3929634" cy="1543050"/>
+          </a:xfrm>
+          <a:prstGeom prst="roundRect">
+            <a:avLst/>
+          </a:prstGeom>
+          <a:solidFill>
+            <a:srgbClr val="F8FAFC"/>
+          </a:solidFill>
+          <a:ln w="12700">
+            <a:solidFill>
+              <a:srgbClr val="E2E8F0"/>
+            </a:solidFill>
+          </a:ln>
+        </p:spPr>
+        <p:style>
+          <a:lnRef idx="1">
+            <a:schemeClr val="accent1"/>
+          </a:lnRef>
+          <a:fillRef idx="3">
+            <a:schemeClr val="accent1"/>
+          </a:fillRef>
+          <a:effectRef idx="2">
+            <a:schemeClr val="accent1"/>
+          </a:effectRef>
+          <a:fontRef idx="minor">
+            <a:schemeClr val="lt1"/>
+          </a:fontRef>
+        </p:style>
+        <p:txBody>
+          <a:bodyPr wrap="square" lIns="205740" tIns="123444" rIns="137160" rtlCol="0" anchor="ctr"/>
+          <a:lstStyle/>
+          <a:p>
+            <a:pPr algn="ctr">
+              <a:spcAft>
+                <a:spcPts val="450"/>
+              </a:spcAft>
+              <a:defRPr sz="1250" b="1">
+                <a:solidFill>
+                  <a:srgbClr val="1A365D"/>
+                </a:solidFill>
+                <a:latin typeface="Calibri"/>
+              </a:defRPr>
+            </a:pPr>
+            <a:r>
+              <a:rPr sz="938">
+                <a:latin typeface="+mj-lt"/>
+              </a:rPr>
+              <a:t>4. Domain Constraints &amp; Boundary Edge Cases</a:t>
+            </a:r>
+          </a:p>
+          <a:p>
+            <a:pPr>
+              <a:lnSpc>
+                <a:spcPct val="118000"/>
+              </a:lnSpc>
+              <a:defRPr sz="950">
+                <a:solidFill>
+                  <a:srgbClr val="334155"/>
+                </a:solidFill>
+                <a:latin typeface="Calibri"/>
+              </a:defRPr>
+            </a:pPr>
+            <a:r>
+              <a:rPr sz="713">
+                <a:latin typeface="+mj-lt"/>
+              </a:rPr>
+              <a:t>Half-Open Algebra [s_i, e_i): Eliminates false boundary collisions. Events ending at 12:00 and starting at 12:00 are contiguous.</a:t>
+            </a:r>
+            <a:br>
+              <a:rPr sz="713">
+                <a:latin typeface="+mj-lt"/>
+              </a:rPr>
+            </a:br>
+            <a:r>
+              <a:rPr sz="713">
+                <a:latin typeface="+mj-lt"/>
+              </a:rPr>
+              <a:t>Envelopment &amp; Partial Overlaps: Fully detects nested intervals (09:00-17:00 enclosing 13:00-15:00) and partial intersections.</a:t>
+            </a:r>
+            <a:br>
+              <a:rPr sz="713">
+                <a:latin typeface="+mj-lt"/>
+              </a:rPr>
+            </a:br>
+            <a:r>
+              <a:rPr sz="713">
+                <a:latin typeface="+mj-lt"/>
+              </a:rPr>
+              <a:t>Capacity Overflow Protection: Atomic decrements prevent over-registration beyond physical room limits during flash bursts.</a:t>
+            </a:r>
+            <a:br>
+              <a:rPr sz="713">
+                <a:latin typeface="+mj-lt"/>
+              </a:rPr>
+            </a:br>
+            <a:r>
+              <a:rPr sz="713">
+                <a:latin typeface="+mj-lt"/>
+              </a:rPr>
+              <a:t>Cascading Dependencies: Deletion of parent events cascades to nested sessions without orphaned schedule fragments.</a:t>
+            </a:r>
+          </a:p>
+        </p:txBody>
+      </p:sp>
+      <p:sp>
+        <p:nvSpPr>
+          <p:cNvPr id="14" name="Rectangle 13"/>
+          <p:cNvSpPr/>
+          <p:nvPr/>
+        </p:nvSpPr>
+        <p:spPr>
+          <a:xfrm>
+            <a:off x="4663440" y="3086100"/>
+            <a:ext cx="82296" cy="1543050"/>
+          </a:xfrm>
+          <a:prstGeom prst="rect">
+            <a:avLst/>
+          </a:prstGeom>
+          <a:solidFill>
+            <a:srgbClr val="2563EB"/>
+          </a:solidFill>
+          <a:ln>
+            <a:noFill/>
+          </a:ln>
+        </p:spPr>
+        <p:style>
+          <a:lnRef idx="1">
+            <a:schemeClr val="accent1"/>
+          </a:lnRef>
+          <a:fillRef idx="3">
+            <a:schemeClr val="accent1"/>
+          </a:fillRef>
+          <a:effectRef idx="2">
+            <a:schemeClr val="accent1"/>
+          </a:effectRef>
+          <a:fontRef idx="minor">
+            <a:schemeClr val="lt1"/>
+          </a:fontRef>
+        </p:style>
+        <p:txBody>
+          <a:bodyPr rtlCol="0" anchor="ctr"/>
+          <a:lstStyle/>
+          <a:p>
+            <a:pPr algn="ctr"/>
+            <a:endParaRPr sz="1350">
+              <a:latin typeface="+mj-lt"/>
+            </a:endParaRPr>
           </a:p>
         </p:txBody>
       </p:sp>

--- a/Capstone/Venue_Double_Booking_Interval_Scheduling.pptx
+++ b/Capstone/Venue_Double_Booking_Interval_Scheduling.pptx
@@ -17,10 +17,10 @@
     <p:sldId id="262" r:id="rId8"/>
     <p:sldId id="263" r:id="rId9"/>
     <p:sldId id="264" r:id="rId10"/>
-    <p:sldId id="265" r:id="rId11"/>
-    <p:sldId id="266" r:id="rId12"/>
-    <p:sldId id="267" r:id="rId13"/>
-    <p:sldId id="268" r:id="rId14"/>
+    <p:sldId id="269" r:id="rId11"/>
+    <p:sldId id="270" r:id="rId12"/>
+    <p:sldId id="271" r:id="rId13"/>
+    <p:sldId id="272" r:id="rId14"/>
   </p:sldIdLst>
   <p:sldSz cx="9144000" cy="5143500" type="screen16x9"/>
   <p:notesSz cx="5143500" cy="9144000"/>
@@ -127,7 +127,7 @@
 <file path=ppt/revisionInfo.xml><?xml version="1.0" encoding="utf-8"?>
 <p1510:revInfo xmlns:a="http://schemas.openxmlformats.org/drawingml/2006/main" xmlns:r="http://schemas.openxmlformats.org/officeDocument/2006/relationships" xmlns:p1510="http://schemas.microsoft.com/office/powerpoint/2015/10/main">
   <p1510:revLst>
-    <p1510:client id="{EF107739-DCCB-471F-8010-E16631AE32FF}" v="1" dt="2026-10-14T17:03:50.378"/>
+    <p1510:client id="{EF107739-DCCB-471F-8010-E16631AE32FF}" v="26" dt="2026-10-14T17:46:51.284"/>
   </p1510:revLst>
 </p1510:revInfo>
 </file>
@@ -136,11 +136,90 @@
 <pc:chgInfo xmlns:a="http://schemas.openxmlformats.org/drawingml/2006/main" xmlns:r="http://schemas.openxmlformats.org/officeDocument/2006/relationships" xmlns:ac="http://schemas.microsoft.com/office/drawing/2013/main/command" xmlns:pc="http://schemas.microsoft.com/office/powerpoint/2013/main/command">
   <pc:docChgLst>
     <pc:chgData name="Mithun s" userId="dd0aea9540a49ece" providerId="LiveId" clId="{679C2E18-537F-4C4C-A3ED-5EC5054AA2D6}"/>
-    <pc:docChg chg="undo custSel addSld modSld">
-      <pc:chgData name="Mithun s" userId="dd0aea9540a49ece" providerId="LiveId" clId="{679C2E18-537F-4C4C-A3ED-5EC5054AA2D6}" dt="2026-10-14T17:05:30.920" v="18" actId="207"/>
+    <pc:docChg chg="undo redo custSel addSld delSld modSld sldOrd">
+      <pc:chgData name="Mithun s" userId="dd0aea9540a49ece" providerId="LiveId" clId="{679C2E18-537F-4C4C-A3ED-5EC5054AA2D6}" dt="2026-10-14T17:47:15.168" v="323" actId="2711"/>
       <pc:docMkLst>
         <pc:docMk/>
       </pc:docMkLst>
+      <pc:sldChg chg="addSp delSp modSp mod">
+        <pc:chgData name="Mithun s" userId="dd0aea9540a49ece" providerId="LiveId" clId="{679C2E18-537F-4C4C-A3ED-5EC5054AA2D6}" dt="2026-10-14T17:47:15.168" v="323" actId="2711"/>
+        <pc:sldMkLst>
+          <pc:docMk/>
+          <pc:sldMk cId="0" sldId="256"/>
+        </pc:sldMkLst>
+        <pc:spChg chg="mod">
+          <ac:chgData name="Mithun s" userId="dd0aea9540a49ece" providerId="LiveId" clId="{679C2E18-537F-4C4C-A3ED-5EC5054AA2D6}" dt="2026-10-14T17:47:15.168" v="323" actId="2711"/>
+          <ac:spMkLst>
+            <pc:docMk/>
+            <pc:sldMk cId="0" sldId="256"/>
+            <ac:spMk id="2" creationId="{00000000-0000-0000-0000-000000000000}"/>
+          </ac:spMkLst>
+        </pc:spChg>
+        <pc:spChg chg="del mod">
+          <ac:chgData name="Mithun s" userId="dd0aea9540a49ece" providerId="LiveId" clId="{679C2E18-537F-4C4C-A3ED-5EC5054AA2D6}" dt="2026-10-14T17:41:57.808" v="278" actId="478"/>
+          <ac:spMkLst>
+            <pc:docMk/>
+            <pc:sldMk cId="0" sldId="256"/>
+            <ac:spMk id="3" creationId="{00000000-0000-0000-0000-000000000000}"/>
+          </ac:spMkLst>
+        </pc:spChg>
+        <pc:spChg chg="del">
+          <ac:chgData name="Mithun s" userId="dd0aea9540a49ece" providerId="LiveId" clId="{679C2E18-537F-4C4C-A3ED-5EC5054AA2D6}" dt="2026-10-14T17:42:05.535" v="281" actId="478"/>
+          <ac:spMkLst>
+            <pc:docMk/>
+            <pc:sldMk cId="0" sldId="256"/>
+            <ac:spMk id="4" creationId="{00000000-0000-0000-0000-000000000000}"/>
+          </ac:spMkLst>
+        </pc:spChg>
+        <pc:spChg chg="add mod">
+          <ac:chgData name="Mithun s" userId="dd0aea9540a49ece" providerId="LiveId" clId="{679C2E18-537F-4C4C-A3ED-5EC5054AA2D6}" dt="2026-10-14T17:47:15.168" v="323" actId="2711"/>
+          <ac:spMkLst>
+            <pc:docMk/>
+            <pc:sldMk cId="0" sldId="256"/>
+            <ac:spMk id="5" creationId="{3D05E82C-5F77-3A1D-C6D5-8E5A40BC8631}"/>
+          </ac:spMkLst>
+        </pc:spChg>
+        <pc:spChg chg="add mod">
+          <ac:chgData name="Mithun s" userId="dd0aea9540a49ece" providerId="LiveId" clId="{679C2E18-537F-4C4C-A3ED-5EC5054AA2D6}" dt="2026-10-14T17:47:15.168" v="323" actId="2711"/>
+          <ac:spMkLst>
+            <pc:docMk/>
+            <pc:sldMk cId="0" sldId="256"/>
+            <ac:spMk id="6" creationId="{3034F2C9-E9FA-751F-CDBC-540D41AD7598}"/>
+          </ac:spMkLst>
+        </pc:spChg>
+        <pc:spChg chg="add mod">
+          <ac:chgData name="Mithun s" userId="dd0aea9540a49ece" providerId="LiveId" clId="{679C2E18-537F-4C4C-A3ED-5EC5054AA2D6}" dt="2026-10-14T17:47:15.168" v="323" actId="2711"/>
+          <ac:spMkLst>
+            <pc:docMk/>
+            <pc:sldMk cId="0" sldId="256"/>
+            <ac:spMk id="9" creationId="{321054CF-C3C6-552D-294B-0C4E956BC7BB}"/>
+          </ac:spMkLst>
+        </pc:spChg>
+        <pc:spChg chg="add mod">
+          <ac:chgData name="Mithun s" userId="dd0aea9540a49ece" providerId="LiveId" clId="{679C2E18-537F-4C4C-A3ED-5EC5054AA2D6}" dt="2026-10-14T17:47:15.168" v="323" actId="2711"/>
+          <ac:spMkLst>
+            <pc:docMk/>
+            <pc:sldMk cId="0" sldId="256"/>
+            <ac:spMk id="10" creationId="{49FB9B3E-6777-AC9A-D260-014535292B4D}"/>
+          </ac:spMkLst>
+        </pc:spChg>
+        <pc:spChg chg="add mod">
+          <ac:chgData name="Mithun s" userId="dd0aea9540a49ece" providerId="LiveId" clId="{679C2E18-537F-4C4C-A3ED-5EC5054AA2D6}" dt="2026-10-14T17:47:15.168" v="323" actId="2711"/>
+          <ac:spMkLst>
+            <pc:docMk/>
+            <pc:sldMk cId="0" sldId="256"/>
+            <ac:spMk id="11" creationId="{25D6DDBD-85FE-E45F-A5BD-D62FA3BB8598}"/>
+          </ac:spMkLst>
+        </pc:spChg>
+        <pc:picChg chg="add mod">
+          <ac:chgData name="Mithun s" userId="dd0aea9540a49ece" providerId="LiveId" clId="{679C2E18-537F-4C4C-A3ED-5EC5054AA2D6}" dt="2026-10-14T17:41:47.223" v="276" actId="1076"/>
+          <ac:picMkLst>
+            <pc:docMk/>
+            <pc:sldMk cId="0" sldId="256"/>
+            <ac:picMk id="8" creationId="{2A699D62-5905-B654-A7D2-597860DADA28}"/>
+          </ac:picMkLst>
+        </pc:picChg>
+      </pc:sldChg>
       <pc:sldChg chg="modSp mod">
         <pc:chgData name="Mithun s" userId="dd0aea9540a49ece" providerId="LiveId" clId="{679C2E18-537F-4C4C-A3ED-5EC5054AA2D6}" dt="2026-10-14T16:47:36.398" v="2" actId="12"/>
         <pc:sldMkLst>
@@ -156,8 +235,8 @@
           </ac:spMkLst>
         </pc:spChg>
       </pc:sldChg>
-      <pc:sldChg chg="delSp modSp add mod">
-        <pc:chgData name="Mithun s" userId="dd0aea9540a49ece" providerId="LiveId" clId="{679C2E18-537F-4C4C-A3ED-5EC5054AA2D6}" dt="2026-10-14T17:05:30.920" v="18" actId="207"/>
+      <pc:sldChg chg="addSp delSp modSp add mod">
+        <pc:chgData name="Mithun s" userId="dd0aea9540a49ece" providerId="LiveId" clId="{679C2E18-537F-4C4C-A3ED-5EC5054AA2D6}" dt="2026-10-14T17:25:58.907" v="128" actId="22"/>
         <pc:sldMkLst>
           <pc:docMk/>
           <pc:sldMk cId="0" sldId="264"/>
@@ -170,89 +249,129 @@
             <ac:spMk id="2" creationId="{00000000-0000-0000-0000-000000000000}"/>
           </ac:spMkLst>
         </pc:spChg>
-        <pc:spChg chg="mod">
-          <ac:chgData name="Mithun s" userId="dd0aea9540a49ece" providerId="LiveId" clId="{679C2E18-537F-4C4C-A3ED-5EC5054AA2D6}" dt="2026-10-14T17:05:30.920" v="18" actId="207"/>
+        <pc:spChg chg="del mod">
+          <ac:chgData name="Mithun s" userId="dd0aea9540a49ece" providerId="LiveId" clId="{679C2E18-537F-4C4C-A3ED-5EC5054AA2D6}" dt="2026-10-14T17:17:56.368" v="28" actId="478"/>
           <ac:spMkLst>
             <pc:docMk/>
             <pc:sldMk cId="0" sldId="264"/>
             <ac:spMk id="3" creationId="{00000000-0000-0000-0000-000000000000}"/>
           </ac:spMkLst>
         </pc:spChg>
-        <pc:spChg chg="mod">
-          <ac:chgData name="Mithun s" userId="dd0aea9540a49ece" providerId="LiveId" clId="{679C2E18-537F-4C4C-A3ED-5EC5054AA2D6}" dt="2026-10-14T17:04:09.687" v="4" actId="2711"/>
+        <pc:spChg chg="del mod">
+          <ac:chgData name="Mithun s" userId="dd0aea9540a49ece" providerId="LiveId" clId="{679C2E18-537F-4C4C-A3ED-5EC5054AA2D6}" dt="2026-10-14T17:17:56.368" v="28" actId="478"/>
           <ac:spMkLst>
             <pc:docMk/>
             <pc:sldMk cId="0" sldId="264"/>
             <ac:spMk id="4" creationId="{00000000-0000-0000-0000-000000000000}"/>
           </ac:spMkLst>
         </pc:spChg>
-        <pc:spChg chg="mod">
-          <ac:chgData name="Mithun s" userId="dd0aea9540a49ece" providerId="LiveId" clId="{679C2E18-537F-4C4C-A3ED-5EC5054AA2D6}" dt="2026-10-14T17:04:09.687" v="4" actId="2711"/>
+        <pc:spChg chg="del mod">
+          <ac:chgData name="Mithun s" userId="dd0aea9540a49ece" providerId="LiveId" clId="{679C2E18-537F-4C4C-A3ED-5EC5054AA2D6}" dt="2026-10-14T17:17:56.368" v="28" actId="478"/>
           <ac:spMkLst>
             <pc:docMk/>
             <pc:sldMk cId="0" sldId="264"/>
             <ac:spMk id="5" creationId="{00000000-0000-0000-0000-000000000000}"/>
           </ac:spMkLst>
         </pc:spChg>
-        <pc:spChg chg="mod">
-          <ac:chgData name="Mithun s" userId="dd0aea9540a49ece" providerId="LiveId" clId="{679C2E18-537F-4C4C-A3ED-5EC5054AA2D6}" dt="2026-10-14T17:04:09.687" v="4" actId="2711"/>
+        <pc:spChg chg="del mod">
+          <ac:chgData name="Mithun s" userId="dd0aea9540a49ece" providerId="LiveId" clId="{679C2E18-537F-4C4C-A3ED-5EC5054AA2D6}" dt="2026-10-14T17:17:56.368" v="28" actId="478"/>
           <ac:spMkLst>
             <pc:docMk/>
             <pc:sldMk cId="0" sldId="264"/>
             <ac:spMk id="6" creationId="{00000000-0000-0000-0000-000000000000}"/>
           </ac:spMkLst>
         </pc:spChg>
-        <pc:spChg chg="mod">
-          <ac:chgData name="Mithun s" userId="dd0aea9540a49ece" providerId="LiveId" clId="{679C2E18-537F-4C4C-A3ED-5EC5054AA2D6}" dt="2026-10-14T17:04:09.687" v="4" actId="2711"/>
+        <pc:spChg chg="del mod">
+          <ac:chgData name="Mithun s" userId="dd0aea9540a49ece" providerId="LiveId" clId="{679C2E18-537F-4C4C-A3ED-5EC5054AA2D6}" dt="2026-10-14T17:17:56.368" v="28" actId="478"/>
           <ac:spMkLst>
             <pc:docMk/>
             <pc:sldMk cId="0" sldId="264"/>
             <ac:spMk id="7" creationId="{00000000-0000-0000-0000-000000000000}"/>
           </ac:spMkLst>
         </pc:spChg>
-        <pc:spChg chg="mod">
-          <ac:chgData name="Mithun s" userId="dd0aea9540a49ece" providerId="LiveId" clId="{679C2E18-537F-4C4C-A3ED-5EC5054AA2D6}" dt="2026-10-14T17:04:09.687" v="4" actId="2711"/>
+        <pc:spChg chg="del mod">
+          <ac:chgData name="Mithun s" userId="dd0aea9540a49ece" providerId="LiveId" clId="{679C2E18-537F-4C4C-A3ED-5EC5054AA2D6}" dt="2026-10-14T17:17:56.368" v="28" actId="478"/>
           <ac:spMkLst>
             <pc:docMk/>
             <pc:sldMk cId="0" sldId="264"/>
             <ac:spMk id="8" creationId="{00000000-0000-0000-0000-000000000000}"/>
           </ac:spMkLst>
         </pc:spChg>
-        <pc:spChg chg="mod">
-          <ac:chgData name="Mithun s" userId="dd0aea9540a49ece" providerId="LiveId" clId="{679C2E18-537F-4C4C-A3ED-5EC5054AA2D6}" dt="2026-10-14T17:04:09.687" v="4" actId="2711"/>
+        <pc:spChg chg="del mod">
+          <ac:chgData name="Mithun s" userId="dd0aea9540a49ece" providerId="LiveId" clId="{679C2E18-537F-4C4C-A3ED-5EC5054AA2D6}" dt="2026-10-14T17:17:56.368" v="28" actId="478"/>
           <ac:spMkLst>
             <pc:docMk/>
             <pc:sldMk cId="0" sldId="264"/>
             <ac:spMk id="10" creationId="{00000000-0000-0000-0000-000000000000}"/>
           </ac:spMkLst>
         </pc:spChg>
-        <pc:spChg chg="mod">
-          <ac:chgData name="Mithun s" userId="dd0aea9540a49ece" providerId="LiveId" clId="{679C2E18-537F-4C4C-A3ED-5EC5054AA2D6}" dt="2026-10-14T17:04:09.687" v="4" actId="2711"/>
+        <pc:spChg chg="del mod">
+          <ac:chgData name="Mithun s" userId="dd0aea9540a49ece" providerId="LiveId" clId="{679C2E18-537F-4C4C-A3ED-5EC5054AA2D6}" dt="2026-10-14T17:17:56.368" v="28" actId="478"/>
           <ac:spMkLst>
             <pc:docMk/>
             <pc:sldMk cId="0" sldId="264"/>
             <ac:spMk id="11" creationId="{00000000-0000-0000-0000-000000000000}"/>
           </ac:spMkLst>
         </pc:spChg>
-        <pc:spChg chg="mod">
-          <ac:chgData name="Mithun s" userId="dd0aea9540a49ece" providerId="LiveId" clId="{679C2E18-537F-4C4C-A3ED-5EC5054AA2D6}" dt="2026-10-14T17:04:09.687" v="4" actId="2711"/>
+        <pc:spChg chg="del mod">
+          <ac:chgData name="Mithun s" userId="dd0aea9540a49ece" providerId="LiveId" clId="{679C2E18-537F-4C4C-A3ED-5EC5054AA2D6}" dt="2026-10-14T17:17:56.368" v="28" actId="478"/>
           <ac:spMkLst>
             <pc:docMk/>
             <pc:sldMk cId="0" sldId="264"/>
             <ac:spMk id="12" creationId="{00000000-0000-0000-0000-000000000000}"/>
           </ac:spMkLst>
         </pc:spChg>
-        <pc:spChg chg="mod">
-          <ac:chgData name="Mithun s" userId="dd0aea9540a49ece" providerId="LiveId" clId="{679C2E18-537F-4C4C-A3ED-5EC5054AA2D6}" dt="2026-10-14T17:04:09.687" v="4" actId="2711"/>
+        <pc:spChg chg="del mod">
+          <ac:chgData name="Mithun s" userId="dd0aea9540a49ece" providerId="LiveId" clId="{679C2E18-537F-4C4C-A3ED-5EC5054AA2D6}" dt="2026-10-14T17:17:56.368" v="28" actId="478"/>
           <ac:spMkLst>
             <pc:docMk/>
             <pc:sldMk cId="0" sldId="264"/>
             <ac:spMk id="14" creationId="{00000000-0000-0000-0000-000000000000}"/>
           </ac:spMkLst>
         </pc:spChg>
+        <pc:spChg chg="add del">
+          <ac:chgData name="Mithun s" userId="dd0aea9540a49ece" providerId="LiveId" clId="{679C2E18-537F-4C4C-A3ED-5EC5054AA2D6}" dt="2026-10-14T17:17:52.893" v="27" actId="22"/>
+          <ac:spMkLst>
+            <pc:docMk/>
+            <pc:sldMk cId="0" sldId="264"/>
+            <ac:spMk id="17" creationId="{D812929E-0661-6F49-ABFD-7BADB0053746}"/>
+          </ac:spMkLst>
+        </pc:spChg>
+        <pc:spChg chg="add mod">
+          <ac:chgData name="Mithun s" userId="dd0aea9540a49ece" providerId="LiveId" clId="{679C2E18-537F-4C4C-A3ED-5EC5054AA2D6}" dt="2026-10-14T17:23:28.356" v="125" actId="404"/>
+          <ac:spMkLst>
+            <pc:docMk/>
+            <pc:sldMk cId="0" sldId="264"/>
+            <ac:spMk id="19" creationId="{1B8643E9-0863-3E4A-544E-0CC6D72D7425}"/>
+          </ac:spMkLst>
+        </pc:spChg>
+        <pc:spChg chg="add del mod">
+          <ac:chgData name="Mithun s" userId="dd0aea9540a49ece" providerId="LiveId" clId="{679C2E18-537F-4C4C-A3ED-5EC5054AA2D6}" dt="2026-10-14T17:18:14.981" v="36"/>
+          <ac:spMkLst>
+            <pc:docMk/>
+            <pc:sldMk cId="0" sldId="264"/>
+            <ac:spMk id="20" creationId="{1E5DFEFB-4780-D6EE-8317-8626AB8623AB}"/>
+          </ac:spMkLst>
+        </pc:spChg>
+        <pc:spChg chg="add">
+          <ac:chgData name="Mithun s" userId="dd0aea9540a49ece" providerId="LiveId" clId="{679C2E18-537F-4C4C-A3ED-5EC5054AA2D6}" dt="2026-10-14T17:21:19.661" v="99" actId="22"/>
+          <ac:spMkLst>
+            <pc:docMk/>
+            <pc:sldMk cId="0" sldId="264"/>
+            <ac:spMk id="22" creationId="{E49EBF43-A18D-D993-75AF-CEBD42B04136}"/>
+          </ac:spMkLst>
+        </pc:spChg>
+        <pc:spChg chg="add del">
+          <ac:chgData name="Mithun s" userId="dd0aea9540a49ece" providerId="LiveId" clId="{679C2E18-537F-4C4C-A3ED-5EC5054AA2D6}" dt="2026-10-14T17:25:58.907" v="128" actId="22"/>
+          <ac:spMkLst>
+            <pc:docMk/>
+            <pc:sldMk cId="0" sldId="264"/>
+            <ac:spMk id="24" creationId="{1985BA57-D01A-FDD1-9F79-8C682BA3C08F}"/>
+          </ac:spMkLst>
+        </pc:spChg>
       </pc:sldChg>
-      <pc:sldChg chg="delSp modSp add mod">
-        <pc:chgData name="Mithun s" userId="dd0aea9540a49ece" providerId="LiveId" clId="{679C2E18-537F-4C4C-A3ED-5EC5054AA2D6}" dt="2026-10-14T17:04:53.597" v="10" actId="478"/>
+      <pc:sldChg chg="delSp modSp add del mod">
+        <pc:chgData name="Mithun s" userId="dd0aea9540a49ece" providerId="LiveId" clId="{679C2E18-537F-4C4C-A3ED-5EC5054AA2D6}" dt="2026-10-14T17:29:08.713" v="159" actId="47"/>
         <pc:sldMkLst>
           <pc:docMk/>
           <pc:sldMk cId="0" sldId="265"/>
@@ -338,8 +457,8 @@
           </ac:spMkLst>
         </pc:spChg>
       </pc:sldChg>
-      <pc:sldChg chg="delSp modSp add mod">
-        <pc:chgData name="Mithun s" userId="dd0aea9540a49ece" providerId="LiveId" clId="{679C2E18-537F-4C4C-A3ED-5EC5054AA2D6}" dt="2026-10-14T17:04:56.964" v="12" actId="478"/>
+      <pc:sldChg chg="delSp modSp add del mod">
+        <pc:chgData name="Mithun s" userId="dd0aea9540a49ece" providerId="LiveId" clId="{679C2E18-537F-4C4C-A3ED-5EC5054AA2D6}" dt="2026-10-14T17:31:19.522" v="165" actId="47"/>
         <pc:sldMkLst>
           <pc:docMk/>
           <pc:sldMk cId="0" sldId="266"/>
@@ -425,8 +544,8 @@
           </ac:spMkLst>
         </pc:spChg>
       </pc:sldChg>
-      <pc:sldChg chg="delSp modSp add mod">
-        <pc:chgData name="Mithun s" userId="dd0aea9540a49ece" providerId="LiveId" clId="{679C2E18-537F-4C4C-A3ED-5EC5054AA2D6}" dt="2026-10-14T17:04:58.798" v="13" actId="478"/>
+      <pc:sldChg chg="delSp modSp add del mod">
+        <pc:chgData name="Mithun s" userId="dd0aea9540a49ece" providerId="LiveId" clId="{679C2E18-537F-4C4C-A3ED-5EC5054AA2D6}" dt="2026-10-14T17:36:58.573" v="186" actId="47"/>
         <pc:sldMkLst>
           <pc:docMk/>
           <pc:sldMk cId="0" sldId="267"/>
@@ -520,8 +639,8 @@
           </ac:spMkLst>
         </pc:spChg>
       </pc:sldChg>
-      <pc:sldChg chg="delSp modSp add mod">
-        <pc:chgData name="Mithun s" userId="dd0aea9540a49ece" providerId="LiveId" clId="{679C2E18-537F-4C4C-A3ED-5EC5054AA2D6}" dt="2026-10-14T17:05:00.873" v="14" actId="478"/>
+      <pc:sldChg chg="delSp modSp add del mod">
+        <pc:chgData name="Mithun s" userId="dd0aea9540a49ece" providerId="LiveId" clId="{679C2E18-537F-4C4C-A3ED-5EC5054AA2D6}" dt="2026-10-14T17:39:44.776" v="194" actId="47"/>
         <pc:sldMkLst>
           <pc:docMk/>
           <pc:sldMk cId="0" sldId="268"/>
@@ -604,6 +723,73 @@
             <pc:docMk/>
             <pc:sldMk cId="0" sldId="268"/>
             <ac:spMk id="13" creationId="{00000000-0000-0000-0000-000000000000}"/>
+          </ac:spMkLst>
+        </pc:spChg>
+      </pc:sldChg>
+      <pc:sldChg chg="modSp add mod ord">
+        <pc:chgData name="Mithun s" userId="dd0aea9540a49ece" providerId="LiveId" clId="{679C2E18-537F-4C4C-A3ED-5EC5054AA2D6}" dt="2026-10-14T17:28:58.127" v="158" actId="20577"/>
+        <pc:sldMkLst>
+          <pc:docMk/>
+          <pc:sldMk cId="627389925" sldId="269"/>
+        </pc:sldMkLst>
+        <pc:spChg chg="mod">
+          <ac:chgData name="Mithun s" userId="dd0aea9540a49ece" providerId="LiveId" clId="{679C2E18-537F-4C4C-A3ED-5EC5054AA2D6}" dt="2026-10-14T17:28:58.127" v="158" actId="20577"/>
+          <ac:spMkLst>
+            <pc:docMk/>
+            <pc:sldMk cId="627389925" sldId="269"/>
+            <ac:spMk id="19" creationId="{39FFB1CC-F685-515D-FB8A-7487EA992EB0}"/>
+          </ac:spMkLst>
+        </pc:spChg>
+      </pc:sldChg>
+      <pc:sldChg chg="modSp add mod">
+        <pc:chgData name="Mithun s" userId="dd0aea9540a49ece" providerId="LiveId" clId="{679C2E18-537F-4C4C-A3ED-5EC5054AA2D6}" dt="2026-10-14T17:34:41.565" v="176" actId="20577"/>
+        <pc:sldMkLst>
+          <pc:docMk/>
+          <pc:sldMk cId="692546190" sldId="270"/>
+        </pc:sldMkLst>
+        <pc:spChg chg="mod">
+          <ac:chgData name="Mithun s" userId="dd0aea9540a49ece" providerId="LiveId" clId="{679C2E18-537F-4C4C-A3ED-5EC5054AA2D6}" dt="2026-10-14T17:34:41.565" v="176" actId="20577"/>
+          <ac:spMkLst>
+            <pc:docMk/>
+            <pc:sldMk cId="692546190" sldId="270"/>
+            <ac:spMk id="19" creationId="{F88CF11C-56EC-6A9B-1D55-1323037E88A7}"/>
+          </ac:spMkLst>
+        </pc:spChg>
+      </pc:sldChg>
+      <pc:sldChg chg="add del">
+        <pc:chgData name="Mithun s" userId="dd0aea9540a49ece" providerId="LiveId" clId="{679C2E18-537F-4C4C-A3ED-5EC5054AA2D6}" dt="2026-10-14T17:26:09.156" v="133"/>
+        <pc:sldMkLst>
+          <pc:docMk/>
+          <pc:sldMk cId="2293336622" sldId="270"/>
+        </pc:sldMkLst>
+      </pc:sldChg>
+      <pc:sldChg chg="modSp add mod">
+        <pc:chgData name="Mithun s" userId="dd0aea9540a49ece" providerId="LiveId" clId="{679C2E18-537F-4C4C-A3ED-5EC5054AA2D6}" dt="2026-10-14T17:36:49.831" v="184" actId="5793"/>
+        <pc:sldMkLst>
+          <pc:docMk/>
+          <pc:sldMk cId="2220006288" sldId="271"/>
+        </pc:sldMkLst>
+        <pc:spChg chg="mod">
+          <ac:chgData name="Mithun s" userId="dd0aea9540a49ece" providerId="LiveId" clId="{679C2E18-537F-4C4C-A3ED-5EC5054AA2D6}" dt="2026-10-14T17:36:49.831" v="184" actId="5793"/>
+          <ac:spMkLst>
+            <pc:docMk/>
+            <pc:sldMk cId="2220006288" sldId="271"/>
+            <ac:spMk id="19" creationId="{CF887E15-3A9F-6ABE-7FD3-AAEDA184CBCC}"/>
+          </ac:spMkLst>
+        </pc:spChg>
+      </pc:sldChg>
+      <pc:sldChg chg="modSp add mod">
+        <pc:chgData name="Mithun s" userId="dd0aea9540a49ece" providerId="LiveId" clId="{679C2E18-537F-4C4C-A3ED-5EC5054AA2D6}" dt="2026-10-14T17:39:39.065" v="193" actId="5793"/>
+        <pc:sldMkLst>
+          <pc:docMk/>
+          <pc:sldMk cId="1206175783" sldId="272"/>
+        </pc:sldMkLst>
+        <pc:spChg chg="mod">
+          <ac:chgData name="Mithun s" userId="dd0aea9540a49ece" providerId="LiveId" clId="{679C2E18-537F-4C4C-A3ED-5EC5054AA2D6}" dt="2026-10-14T17:39:39.065" v="193" actId="5793"/>
+          <ac:spMkLst>
+            <pc:docMk/>
+            <pc:sldMk cId="1206175783" sldId="272"/>
+            <ac:spMk id="19" creationId="{E749B67A-C327-7BB3-A1F6-AE852C81A431}"/>
           </ac:spMkLst>
         </pc:spChg>
       </pc:sldChg>
@@ -2074,8 +2260,8 @@
         </p:nvSpPr>
         <p:spPr>
           <a:xfrm>
-            <a:off x="731520" y="1188720"/>
-            <a:ext cx="7680960" cy="1463040"/>
+            <a:off x="100012" y="1840230"/>
+            <a:ext cx="8943975" cy="1463040"/>
           </a:xfrm>
           <a:prstGeom prst="rect">
             <a:avLst/>
@@ -2095,65 +2281,542 @@
                 <a:solidFill>
                   <a:srgbClr val="000000"/>
                 </a:solidFill>
-                <a:latin typeface="Times New Roman" pitchFamily="34" charset="0"/>
+                <a:latin typeface="+mj-lt"/>
                 <a:ea typeface="Times New Roman" pitchFamily="34" charset="-122"/>
                 <a:cs typeface="Times New Roman" pitchFamily="34" charset="-120"/>
               </a:rPr>
-              <a:t>Preventing Double-Booking in Venue Scheduling Using the Interval Scheduling Algorithm</a:t>
-            </a:r>
-            <a:endParaRPr lang="en-US" sz="3200" dirty="0"/>
+              <a:t>Preventing Double-Booking in Venue Scheduling Using the </a:t>
+            </a:r>
+            <a:r>
+              <a:rPr lang="en-US" sz="3000" b="1" dirty="0">
+                <a:solidFill>
+                  <a:srgbClr val="000000"/>
+                </a:solidFill>
+                <a:latin typeface="+mj-lt"/>
+                <a:ea typeface="Times New Roman" pitchFamily="34" charset="-122"/>
+                <a:cs typeface="Times New Roman" pitchFamily="34" charset="-120"/>
+              </a:rPr>
+              <a:t>Interval</a:t>
+            </a:r>
+            <a:r>
+              <a:rPr lang="en-US" sz="3200" b="1" dirty="0">
+                <a:solidFill>
+                  <a:srgbClr val="000000"/>
+                </a:solidFill>
+                <a:latin typeface="+mj-lt"/>
+                <a:ea typeface="Times New Roman" pitchFamily="34" charset="-122"/>
+                <a:cs typeface="Times New Roman" pitchFamily="34" charset="-120"/>
+              </a:rPr>
+              <a:t> Scheduling Algorithm</a:t>
+            </a:r>
+            <a:endParaRPr lang="en-US" sz="3200" dirty="0">
+              <a:latin typeface="+mj-lt"/>
+            </a:endParaRPr>
           </a:p>
         </p:txBody>
       </p:sp>
       <p:sp>
         <p:nvSpPr>
-          <p:cNvPr id="3" name="Text 1"/>
+          <p:cNvPr id="5" name="TextBox 4">
+            <a:extLst>
+              <a:ext uri="{FF2B5EF4-FFF2-40B4-BE49-F238E27FC236}">
+                <a16:creationId xmlns:a16="http://schemas.microsoft.com/office/drawing/2014/main" id="{3D05E82C-5F77-3A1D-C6D5-8E5A40BC8631}"/>
+              </a:ext>
+            </a:extLst>
+          </p:cNvPr>
           <p:cNvSpPr txBox="1"/>
           <p:nvPr/>
         </p:nvSpPr>
         <p:spPr>
           <a:xfrm>
-            <a:off x="731520" y="2697480"/>
-            <a:ext cx="7680960" cy="457200"/>
+            <a:off x="5829300" y="4157632"/>
+            <a:ext cx="2954655" cy="646331"/>
           </a:xfrm>
           <a:prstGeom prst="rect">
             <a:avLst/>
           </a:prstGeom>
           <a:noFill/>
-          <a:ln/>
         </p:spPr>
         <p:txBody>
-          <a:bodyPr wrap="square" rtlCol="0" anchor="ctr"/>
+          <a:bodyPr wrap="none" rtlCol="0">
+            <a:spAutoFit/>
+          </a:bodyPr>
           <a:lstStyle/>
           <a:p>
-            <a:pPr marL="0" indent="0" algn="ctr">
-              <a:buNone/>
-            </a:pPr>
-            <a:r>
-              <a:rPr lang="en-US" sz="2200" i="1" dirty="0">
-                <a:solidFill>
-                  <a:srgbClr val="444444"/>
-                </a:solidFill>
-                <a:latin typeface="Times New Roman" pitchFamily="34" charset="0"/>
-                <a:ea typeface="Times New Roman" pitchFamily="34" charset="-122"/>
-                <a:cs typeface="Times New Roman" pitchFamily="34" charset="-120"/>
+            <a:r>
+              <a:rPr lang="en-US" dirty="0" err="1">
+                <a:latin typeface="+mj-lt"/>
               </a:rPr>
-              <a:t>in a Centralized Online Event Platform</a:t>
-            </a:r>
-            <a:endParaRPr lang="en-US" sz="2200" dirty="0"/>
+              <a:t>S.Mithun</a:t>
+            </a:r>
+            <a:r>
+              <a:rPr lang="en-US" dirty="0">
+                <a:latin typeface="+mj-lt"/>
+              </a:rPr>
+              <a:t> Senthil(192324056)</a:t>
+            </a:r>
+          </a:p>
+          <a:p>
+            <a:r>
+              <a:rPr lang="en-US" dirty="0">
+                <a:latin typeface="+mj-lt"/>
+              </a:rPr>
+              <a:t>Kali </a:t>
+            </a:r>
+            <a:r>
+              <a:rPr lang="en-US" dirty="0" err="1">
+                <a:latin typeface="+mj-lt"/>
+              </a:rPr>
+              <a:t>Sakthiswaran</a:t>
+            </a:r>
+            <a:r>
+              <a:rPr lang="en-US" dirty="0">
+                <a:latin typeface="+mj-lt"/>
+              </a:rPr>
+              <a:t>()</a:t>
+            </a:r>
+            <a:endParaRPr lang="en-IN" dirty="0">
+              <a:latin typeface="+mj-lt"/>
+            </a:endParaRPr>
           </a:p>
         </p:txBody>
       </p:sp>
       <p:sp>
         <p:nvSpPr>
-          <p:cNvPr id="4" name="Shape 2"/>
+          <p:cNvPr id="6" name="TextBox 5">
+            <a:extLst>
+              <a:ext uri="{FF2B5EF4-FFF2-40B4-BE49-F238E27FC236}">
+                <a16:creationId xmlns:a16="http://schemas.microsoft.com/office/drawing/2014/main" id="{3034F2C9-E9FA-751F-CDBC-540D41AD7598}"/>
+              </a:ext>
+            </a:extLst>
+          </p:cNvPr>
+          <p:cNvSpPr txBox="1"/>
+          <p:nvPr/>
+        </p:nvSpPr>
+        <p:spPr>
+          <a:xfrm>
+            <a:off x="2939342" y="1188720"/>
+            <a:ext cx="3265316" cy="646331"/>
+          </a:xfrm>
+          <a:prstGeom prst="rect">
+            <a:avLst/>
+          </a:prstGeom>
+          <a:noFill/>
+        </p:spPr>
+        <p:txBody>
+          <a:bodyPr wrap="none" rtlCol="0">
+            <a:spAutoFit/>
+          </a:bodyPr>
+          <a:lstStyle/>
+          <a:p>
+            <a:pPr algn="ctr"/>
+            <a:r>
+              <a:rPr lang="en-US" sz="3000" b="1" dirty="0">
+                <a:latin typeface="+mj-lt"/>
+              </a:rPr>
+              <a:t>Capstone</a:t>
+            </a:r>
+            <a:r>
+              <a:rPr lang="en-US" sz="3600" b="1" dirty="0">
+                <a:latin typeface="+mj-lt"/>
+              </a:rPr>
+              <a:t> Project</a:t>
+            </a:r>
+            <a:endParaRPr lang="en-IN" sz="3600" b="1" dirty="0">
+              <a:latin typeface="+mj-lt"/>
+            </a:endParaRPr>
+          </a:p>
+        </p:txBody>
+      </p:sp>
+      <p:pic>
+        <p:nvPicPr>
+          <p:cNvPr id="8" name="image1.png">
+            <a:extLst>
+              <a:ext uri="{FF2B5EF4-FFF2-40B4-BE49-F238E27FC236}">
+                <a16:creationId xmlns:a16="http://schemas.microsoft.com/office/drawing/2014/main" id="{2A699D62-5905-B654-A7D2-597860DADA28}"/>
+              </a:ext>
+            </a:extLst>
+          </p:cNvPr>
+          <p:cNvPicPr/>
+          <p:nvPr/>
+        </p:nvPicPr>
+        <p:blipFill>
+          <a:blip r:embed="rId3"/>
+          <a:srcRect/>
+          <a:stretch>
+            <a:fillRect/>
+          </a:stretch>
+        </p:blipFill>
+        <p:spPr>
+          <a:xfrm>
+            <a:off x="1209675" y="310756"/>
+            <a:ext cx="6724650" cy="756044"/>
+          </a:xfrm>
+          <a:prstGeom prst="rect">
+            <a:avLst/>
+          </a:prstGeom>
+        </p:spPr>
+      </p:pic>
+      <p:sp>
+        <p:nvSpPr>
+          <p:cNvPr id="9" name="TextBox 8">
+            <a:extLst>
+              <a:ext uri="{FF2B5EF4-FFF2-40B4-BE49-F238E27FC236}">
+                <a16:creationId xmlns:a16="http://schemas.microsoft.com/office/drawing/2014/main" id="{321054CF-C3C6-552D-294B-0C4E956BC7BB}"/>
+              </a:ext>
+            </a:extLst>
+          </p:cNvPr>
+          <p:cNvSpPr txBox="1"/>
+          <p:nvPr/>
+        </p:nvSpPr>
+        <p:spPr>
+          <a:xfrm>
+            <a:off x="2411760" y="3303270"/>
+            <a:ext cx="4320478" cy="646331"/>
+          </a:xfrm>
+          <a:prstGeom prst="rect">
+            <a:avLst/>
+          </a:prstGeom>
+          <a:noFill/>
+        </p:spPr>
+        <p:txBody>
+          <a:bodyPr wrap="none" rtlCol="0">
+            <a:spAutoFit/>
+          </a:bodyPr>
+          <a:lstStyle/>
+          <a:p>
+            <a:r>
+              <a:rPr lang="en-IN" b="1" dirty="0">
+                <a:latin typeface="+mj-lt"/>
+              </a:rPr>
+              <a:t>CSA1021 - SOFTWARE ENGINEERING</a:t>
+            </a:r>
+          </a:p>
+          <a:p>
+            <a:endParaRPr lang="en-IN" dirty="0">
+              <a:latin typeface="+mj-lt"/>
+            </a:endParaRPr>
+          </a:p>
+        </p:txBody>
+      </p:sp>
+      <p:sp>
+        <p:nvSpPr>
+          <p:cNvPr id="10" name="TextBox 9">
+            <a:extLst>
+              <a:ext uri="{FF2B5EF4-FFF2-40B4-BE49-F238E27FC236}">
+                <a16:creationId xmlns:a16="http://schemas.microsoft.com/office/drawing/2014/main" id="{49FB9B3E-6777-AC9A-D260-014535292B4D}"/>
+              </a:ext>
+            </a:extLst>
+          </p:cNvPr>
+          <p:cNvSpPr txBox="1"/>
+          <p:nvPr/>
+        </p:nvSpPr>
+        <p:spPr>
+          <a:xfrm>
+            <a:off x="5258758" y="3788300"/>
+            <a:ext cx="1473480" cy="369332"/>
+          </a:xfrm>
+          <a:prstGeom prst="rect">
+            <a:avLst/>
+          </a:prstGeom>
+          <a:noFill/>
+        </p:spPr>
+        <p:txBody>
+          <a:bodyPr wrap="none" rtlCol="0">
+            <a:spAutoFit/>
+          </a:bodyPr>
+          <a:lstStyle/>
+          <a:p>
+            <a:r>
+              <a:rPr lang="en-US" dirty="0">
+                <a:latin typeface="+mj-lt"/>
+              </a:rPr>
+              <a:t>Presented By:</a:t>
+            </a:r>
+            <a:endParaRPr lang="en-IN" dirty="0">
+              <a:latin typeface="+mj-lt"/>
+            </a:endParaRPr>
+          </a:p>
+        </p:txBody>
+      </p:sp>
+      <p:sp>
+        <p:nvSpPr>
+          <p:cNvPr id="11" name="TextBox 10">
+            <a:extLst>
+              <a:ext uri="{FF2B5EF4-FFF2-40B4-BE49-F238E27FC236}">
+                <a16:creationId xmlns:a16="http://schemas.microsoft.com/office/drawing/2014/main" id="{25D6DDBD-85FE-E45F-A5BD-D62FA3BB8598}"/>
+              </a:ext>
+            </a:extLst>
+          </p:cNvPr>
+          <p:cNvSpPr txBox="1"/>
+          <p:nvPr/>
+        </p:nvSpPr>
+        <p:spPr>
+          <a:xfrm>
+            <a:off x="360045" y="3959126"/>
+            <a:ext cx="2050561" cy="646331"/>
+          </a:xfrm>
+          <a:prstGeom prst="rect">
+            <a:avLst/>
+          </a:prstGeom>
+          <a:noFill/>
+        </p:spPr>
+        <p:txBody>
+          <a:bodyPr wrap="none" rtlCol="0">
+            <a:spAutoFit/>
+          </a:bodyPr>
+          <a:lstStyle/>
+          <a:p>
+            <a:r>
+              <a:rPr lang="en-US" dirty="0">
+                <a:latin typeface="+mj-lt"/>
+                <a:cs typeface="Times New Roman" panose="02020603050405020304" pitchFamily="18" charset="0"/>
+              </a:rPr>
+              <a:t>Supervised By: </a:t>
+            </a:r>
+          </a:p>
+          <a:p>
+            <a:r>
+              <a:rPr lang="en-IN" dirty="0">
+                <a:latin typeface="+mj-lt"/>
+              </a:rPr>
+              <a:t> 	S SALINI</a:t>
+            </a:r>
+          </a:p>
+        </p:txBody>
+      </p:sp>
+    </p:spTree>
+  </p:cSld>
+  <p:clrMapOvr>
+    <a:masterClrMapping/>
+  </p:clrMapOvr>
+</p:sld>
+</file>
+
+<file path=ppt/slides/slide10.xml><?xml version="1.0" encoding="utf-8"?>
+<p:sld xmlns:a="http://schemas.openxmlformats.org/drawingml/2006/main" xmlns:r="http://schemas.openxmlformats.org/officeDocument/2006/relationships" xmlns:p="http://schemas.openxmlformats.org/presentationml/2006/main">
+  <p:cSld>
+    <p:spTree>
+      <p:nvGrpSpPr>
+        <p:cNvPr id="1" name="">
+          <a:extLst>
+            <a:ext uri="{FF2B5EF4-FFF2-40B4-BE49-F238E27FC236}">
+              <a16:creationId xmlns:a16="http://schemas.microsoft.com/office/drawing/2014/main" id="{8E246343-A122-0421-AD21-CEB813C02912}"/>
+            </a:ext>
+          </a:extLst>
+        </p:cNvPr>
+        <p:cNvGrpSpPr/>
+        <p:nvPr/>
+      </p:nvGrpSpPr>
+      <p:grpSpPr>
+        <a:xfrm>
+          <a:off x="0" y="0"/>
+          <a:ext cx="0" cy="0"/>
+          <a:chOff x="0" y="0"/>
+          <a:chExt cx="0" cy="0"/>
+        </a:xfrm>
+      </p:grpSpPr>
+      <p:sp>
+        <p:nvSpPr>
+          <p:cNvPr id="19" name="TextBox 18">
+            <a:extLst>
+              <a:ext uri="{FF2B5EF4-FFF2-40B4-BE49-F238E27FC236}">
+                <a16:creationId xmlns:a16="http://schemas.microsoft.com/office/drawing/2014/main" id="{39FFB1CC-F685-515D-FB8A-7487EA992EB0}"/>
+              </a:ext>
+            </a:extLst>
+          </p:cNvPr>
+          <p:cNvSpPr txBox="1"/>
+          <p:nvPr/>
+        </p:nvSpPr>
+        <p:spPr>
+          <a:xfrm>
+            <a:off x="371474" y="438150"/>
+            <a:ext cx="8223886" cy="4493538"/>
+          </a:xfrm>
+          <a:prstGeom prst="rect">
+            <a:avLst/>
+          </a:prstGeom>
+          <a:noFill/>
+        </p:spPr>
+        <p:txBody>
+          <a:bodyPr wrap="square">
+            <a:spAutoFit/>
+          </a:bodyPr>
+          <a:lstStyle/>
+          <a:p>
+            <a:r>
+              <a:rPr lang="en-IN" sz="3000" b="1" dirty="0"/>
+              <a:t>Module 2: System Design </a:t>
+            </a:r>
+          </a:p>
+          <a:p>
+            <a:endParaRPr lang="en-IN" sz="1600" b="1" dirty="0"/>
+          </a:p>
+          <a:p>
+            <a:r>
+              <a:rPr lang="en-IN" sz="1600" b="1" dirty="0"/>
+              <a:t>1. System Architecture</a:t>
+            </a:r>
+            <a:endParaRPr lang="en-IN" sz="1600" dirty="0"/>
+          </a:p>
+          <a:p>
+            <a:pPr lvl="0"/>
+            <a:r>
+              <a:rPr lang="en-IN" sz="1600" b="1" dirty="0"/>
+              <a:t>Frontend:</a:t>
+            </a:r>
+            <a:r>
+              <a:rPr lang="en-IN" sz="1600" dirty="0"/>
+              <a:t> React 18.3 + Vite 6.1 SPA with Participant and Organizer dashboards.</a:t>
+            </a:r>
+          </a:p>
+          <a:p>
+            <a:pPr lvl="0"/>
+            <a:r>
+              <a:rPr lang="en-IN" sz="1600" b="1" dirty="0"/>
+              <a:t>Backend:</a:t>
+            </a:r>
+            <a:r>
+              <a:rPr lang="en-IN" sz="1600" dirty="0"/>
+              <a:t> </a:t>
+            </a:r>
+            <a:r>
+              <a:rPr lang="en-IN" sz="1600" dirty="0" err="1"/>
+              <a:t>FastAPI</a:t>
+            </a:r>
+            <a:r>
+              <a:rPr lang="en-IN" sz="1600" dirty="0"/>
+              <a:t> with modular APIs and </a:t>
+            </a:r>
+            <a:r>
+              <a:rPr lang="en-IN" sz="1600" dirty="0" err="1"/>
+              <a:t>Pydantic</a:t>
+            </a:r>
+            <a:r>
+              <a:rPr lang="en-IN" sz="1600" dirty="0"/>
+              <a:t> v2 validation.</a:t>
+            </a:r>
+          </a:p>
+          <a:p>
+            <a:pPr lvl="0"/>
+            <a:r>
+              <a:rPr lang="en-IN" sz="1600" b="1" dirty="0"/>
+              <a:t>Database:</a:t>
+            </a:r>
+            <a:r>
+              <a:rPr lang="en-IN" sz="1600" dirty="0"/>
+              <a:t> </a:t>
+            </a:r>
+            <a:r>
+              <a:rPr lang="en-IN" sz="1600" dirty="0" err="1"/>
+              <a:t>Supabase</a:t>
+            </a:r>
+            <a:r>
+              <a:rPr lang="en-IN" sz="1600" dirty="0"/>
+              <a:t> PostgreSQL with local SQLite WAL fallback.</a:t>
+            </a:r>
+          </a:p>
+          <a:p>
+            <a:pPr lvl="0"/>
+            <a:r>
+              <a:rPr lang="en-IN" sz="1600" b="1" dirty="0"/>
+              <a:t>Utilities:</a:t>
+            </a:r>
+            <a:r>
+              <a:rPr lang="en-IN" sz="1600" dirty="0"/>
+              <a:t> QR ticket generation, multi-round timelines, and CSV exports.</a:t>
+            </a:r>
+          </a:p>
+          <a:p>
+            <a:pPr marL="342900" lvl="0" indent="-342900">
+              <a:buFont typeface="Arial" panose="020B0604020202020204" pitchFamily="34" charset="0"/>
+              <a:buChar char="•"/>
+            </a:pPr>
+            <a:endParaRPr lang="en-IN" sz="1600" dirty="0"/>
+          </a:p>
+          <a:p>
+            <a:r>
+              <a:rPr lang="en-IN" sz="1600" b="1" dirty="0"/>
+              <a:t>2. Concurrency &amp; Database Design</a:t>
+            </a:r>
+            <a:endParaRPr lang="en-IN" sz="1600" dirty="0"/>
+          </a:p>
+          <a:p>
+            <a:pPr lvl="0"/>
+            <a:r>
+              <a:rPr lang="en-IN" sz="1600" b="1" dirty="0"/>
+              <a:t>ACID Transactions:</a:t>
+            </a:r>
+            <a:r>
+              <a:rPr lang="en-IN" sz="1600" dirty="0"/>
+              <a:t> Ensure reliable availability checks and booking updates.</a:t>
+            </a:r>
+          </a:p>
+          <a:p>
+            <a:pPr lvl="0"/>
+            <a:r>
+              <a:rPr lang="en-IN" sz="1600" b="1" dirty="0"/>
+              <a:t>Concurrency Control:</a:t>
+            </a:r>
+            <a:r>
+              <a:rPr lang="en-IN" sz="1600" dirty="0"/>
+              <a:t> Use transaction locks to prevent simultaneous double bookings.</a:t>
+            </a:r>
+          </a:p>
+          <a:p>
+            <a:pPr lvl="0"/>
+            <a:r>
+              <a:rPr lang="en-IN" sz="1600" b="1" dirty="0"/>
+              <a:t>Relational ER Model:</a:t>
+            </a:r>
+            <a:r>
+              <a:rPr lang="en-IN" sz="1600" dirty="0"/>
+              <a:t> Six tables — Organizers, Events, Event Sessions, Registrations, Attendance, and Announcements.</a:t>
+            </a:r>
+          </a:p>
+          <a:p>
+            <a:pPr lvl="0"/>
+            <a:r>
+              <a:rPr lang="en-IN" sz="1600" b="1" dirty="0"/>
+              <a:t>Data Integrity:</a:t>
+            </a:r>
+            <a:r>
+              <a:rPr lang="en-IN" sz="1600" dirty="0"/>
+              <a:t> Unique QR ticket IDs, capacity constraints, foreign keys, and cascading deletion.</a:t>
+            </a:r>
+          </a:p>
+          <a:p>
+            <a:pPr lvl="0"/>
+            <a:endParaRPr lang="en-IN" sz="1600" dirty="0"/>
+          </a:p>
+          <a:p>
+            <a:r>
+              <a:rPr lang="en-IN" sz="1600" b="1" dirty="0"/>
+              <a:t>Outcome:</a:t>
+            </a:r>
+            <a:r>
+              <a:rPr lang="en-IN" sz="1600" dirty="0"/>
+              <a:t> A modular, scalable architecture that delivers efficient scheduling, reliable transactions, and consistent event data.</a:t>
+            </a:r>
+          </a:p>
+        </p:txBody>
+      </p:sp>
+      <p:sp>
+        <p:nvSpPr>
+          <p:cNvPr id="22" name="Shape 1">
+            <a:extLst>
+              <a:ext uri="{FF2B5EF4-FFF2-40B4-BE49-F238E27FC236}">
+                <a16:creationId xmlns:a16="http://schemas.microsoft.com/office/drawing/2014/main" id="{8EB250D0-69F9-7A33-0D1D-C5B36A806567}"/>
+              </a:ext>
+            </a:extLst>
+          </p:cNvPr>
           <p:cNvSpPr/>
           <p:nvPr/>
         </p:nvSpPr>
         <p:spPr>
           <a:xfrm>
-            <a:off x="3200400" y="3383280"/>
-            <a:ext cx="2743200" cy="0"/>
+            <a:off x="548640" y="1005840"/>
+            <a:ext cx="8046720" cy="0"/>
           </a:xfrm>
           <a:prstGeom prst="line">
             <a:avLst/>
@@ -2168,6 +2831,11 @@
         </p:spPr>
       </p:sp>
     </p:spTree>
+    <p:extLst>
+      <p:ext uri="{BB962C8B-B14F-4D97-AF65-F5344CB8AC3E}">
+        <p14:creationId xmlns:p14="http://schemas.microsoft.com/office/powerpoint/2010/main" val="627389925"/>
+      </p:ext>
+    </p:extLst>
   </p:cSld>
   <p:clrMapOvr>
     <a:masterClrMapping/>
@@ -2175,12 +2843,18 @@
 </p:sld>
 </file>
 
-<file path=ppt/slides/slide10.xml><?xml version="1.0" encoding="utf-8"?>
+<file path=ppt/slides/slide11.xml><?xml version="1.0" encoding="utf-8"?>
 <p:sld xmlns:a="http://schemas.openxmlformats.org/drawingml/2006/main" xmlns:r="http://schemas.openxmlformats.org/officeDocument/2006/relationships" xmlns:p="http://schemas.openxmlformats.org/presentationml/2006/main">
   <p:cSld>
     <p:spTree>
       <p:nvGrpSpPr>
-        <p:cNvPr id="1" name=""/>
+        <p:cNvPr id="1" name="">
+          <a:extLst>
+            <a:ext uri="{FF2B5EF4-FFF2-40B4-BE49-F238E27FC236}">
+              <a16:creationId xmlns:a16="http://schemas.microsoft.com/office/drawing/2014/main" id="{3E55017C-4AA7-797D-D31E-842357A6082D}"/>
+            </a:ext>
+          </a:extLst>
+        </p:cNvPr>
         <p:cNvGrpSpPr/>
         <p:nvPr/>
       </p:nvGrpSpPr>
@@ -2194,14 +2868,20 @@
       </p:grpSpPr>
       <p:sp>
         <p:nvSpPr>
-          <p:cNvPr id="3" name="TextBox 2"/>
+          <p:cNvPr id="19" name="TextBox 18">
+            <a:extLst>
+              <a:ext uri="{FF2B5EF4-FFF2-40B4-BE49-F238E27FC236}">
+                <a16:creationId xmlns:a16="http://schemas.microsoft.com/office/drawing/2014/main" id="{F88CF11C-56EC-6A9B-1D55-1323037E88A7}"/>
+              </a:ext>
+            </a:extLst>
+          </p:cNvPr>
           <p:cNvSpPr txBox="1"/>
           <p:nvPr/>
         </p:nvSpPr>
         <p:spPr>
           <a:xfrm>
-            <a:off x="548640" y="582931"/>
-            <a:ext cx="8023860" cy="418063"/>
+            <a:off x="371473" y="476250"/>
+            <a:ext cx="8772527" cy="4493538"/>
           </a:xfrm>
           <a:prstGeom prst="rect">
             <a:avLst/>
@@ -2209,867 +2889,208 @@
           <a:noFill/>
         </p:spPr>
         <p:txBody>
-          <a:bodyPr wrap="square" lIns="0" tIns="0" rIns="0" bIns="0">
+          <a:bodyPr wrap="square">
             <a:spAutoFit/>
           </a:bodyPr>
           <a:lstStyle/>
           <a:p>
-            <a:pPr>
-              <a:defRPr sz="2200" b="1">
-                <a:solidFill>
-                  <a:srgbClr val="1A365D"/>
-                </a:solidFill>
-                <a:latin typeface="Calibri"/>
-              </a:defRPr>
-            </a:pPr>
-            <a:r>
-              <a:rPr sz="1650">
-                <a:latin typeface="+mj-lt"/>
-              </a:rPr>
-              <a:t>Module 2: System Design &amp; Algorithmic Architecture</a:t>
-            </a:r>
-          </a:p>
-          <a:p>
-            <a:pPr>
-              <a:spcBef>
-                <a:spcPts val="225"/>
-              </a:spcBef>
-              <a:defRPr sz="1200">
-                <a:solidFill>
-                  <a:srgbClr val="64748B"/>
-                </a:solidFill>
-                <a:latin typeface="Calibri"/>
-              </a:defRPr>
-            </a:pPr>
-            <a:r>
-              <a:rPr sz="900">
-                <a:latin typeface="+mj-lt"/>
-              </a:rPr>
-              <a:t>Component decomposition, relational entity-relationship modeling, and interval concurrency design</a:t>
+            <a:r>
+              <a:rPr lang="en-IN" sz="3000" b="1" dirty="0"/>
+              <a:t>Module 3: Development &amp; Implementation</a:t>
+            </a:r>
+          </a:p>
+          <a:p>
+            <a:endParaRPr lang="en-IN" sz="1600" b="1" dirty="0"/>
+          </a:p>
+          <a:p>
+            <a:r>
+              <a:rPr lang="en-IN" sz="1600" b="1" dirty="0"/>
+              <a:t>1. Frontend Development</a:t>
+            </a:r>
+            <a:endParaRPr lang="en-IN" sz="1600" dirty="0"/>
+          </a:p>
+          <a:p>
+            <a:pPr marL="285750" lvl="0" indent="-285750">
+              <a:buFont typeface="Arial" panose="020B0604020202020204" pitchFamily="34" charset="0"/>
+              <a:buChar char="•"/>
+            </a:pPr>
+            <a:r>
+              <a:rPr lang="en-IN" sz="1600" dirty="0"/>
+              <a:t>Built a responsive React + Vite interface for participants and organizers.</a:t>
+            </a:r>
+          </a:p>
+          <a:p>
+            <a:pPr marL="285750" lvl="0" indent="-285750">
+              <a:buFont typeface="Arial" panose="020B0604020202020204" pitchFamily="34" charset="0"/>
+              <a:buChar char="•"/>
+            </a:pPr>
+            <a:r>
+              <a:rPr lang="en-IN" sz="1600" dirty="0"/>
+              <a:t>Developed event discovery, registration, dashboards, and multi-round session views.</a:t>
+            </a:r>
+          </a:p>
+          <a:p>
+            <a:r>
+              <a:rPr lang="en-IN" sz="1600" b="1" dirty="0"/>
+              <a:t>2. Backend Development</a:t>
+            </a:r>
+            <a:endParaRPr lang="en-IN" sz="1600" dirty="0"/>
+          </a:p>
+          <a:p>
+            <a:pPr marL="285750" lvl="0" indent="-285750">
+              <a:buFont typeface="Arial" panose="020B0604020202020204" pitchFamily="34" charset="0"/>
+              <a:buChar char="•"/>
+            </a:pPr>
+            <a:r>
+              <a:rPr lang="en-IN" sz="1600" dirty="0"/>
+              <a:t>Implemented </a:t>
+            </a:r>
+            <a:r>
+              <a:rPr lang="en-IN" sz="1600" dirty="0" err="1"/>
+              <a:t>FastAPI</a:t>
+            </a:r>
+            <a:r>
+              <a:rPr lang="en-IN" sz="1600" dirty="0"/>
+              <a:t> REST APIs for events, registrations, attendance, statistics, and</a:t>
+            </a:r>
+          </a:p>
+          <a:p>
+            <a:pPr marL="285750" lvl="0" indent="-285750">
+              <a:buFont typeface="Arial" panose="020B0604020202020204" pitchFamily="34" charset="0"/>
+              <a:buChar char="•"/>
+            </a:pPr>
+            <a:r>
+              <a:rPr lang="en-IN" sz="1600" dirty="0"/>
+              <a:t>announcements.</a:t>
+            </a:r>
+          </a:p>
+          <a:p>
+            <a:pPr marL="285750" lvl="0" indent="-285750">
+              <a:buFont typeface="Arial" panose="020B0604020202020204" pitchFamily="34" charset="0"/>
+              <a:buChar char="•"/>
+            </a:pPr>
+            <a:r>
+              <a:rPr lang="en-IN" sz="1600" dirty="0"/>
+              <a:t>Used </a:t>
+            </a:r>
+            <a:r>
+              <a:rPr lang="en-IN" sz="1600" dirty="0" err="1"/>
+              <a:t>Pydantic</a:t>
+            </a:r>
+            <a:r>
+              <a:rPr lang="en-IN" sz="1600" dirty="0"/>
+              <a:t> v2 for request validation and error handling.</a:t>
+            </a:r>
+          </a:p>
+          <a:p>
+            <a:pPr marL="285750" lvl="0" indent="-285750">
+              <a:buFont typeface="Arial" panose="020B0604020202020204" pitchFamily="34" charset="0"/>
+              <a:buChar char="•"/>
+            </a:pPr>
+            <a:r>
+              <a:rPr lang="en-IN" sz="1600" dirty="0"/>
+              <a:t>Integrated secure database operations and role-based access control.</a:t>
+            </a:r>
+          </a:p>
+          <a:p>
+            <a:r>
+              <a:rPr lang="en-IN" sz="1600" b="1" dirty="0"/>
+              <a:t>3. Database &amp; Integration</a:t>
+            </a:r>
+            <a:endParaRPr lang="en-IN" sz="1600" dirty="0"/>
+          </a:p>
+          <a:p>
+            <a:pPr marL="285750" lvl="0" indent="-285750">
+              <a:buFont typeface="Arial" panose="020B0604020202020204" pitchFamily="34" charset="0"/>
+              <a:buChar char="•"/>
+            </a:pPr>
+            <a:r>
+              <a:rPr lang="en-IN" sz="1600" dirty="0"/>
+              <a:t>Connected </a:t>
+            </a:r>
+            <a:r>
+              <a:rPr lang="en-IN" sz="1600" dirty="0" err="1"/>
+              <a:t>Supabase</a:t>
+            </a:r>
+            <a:r>
+              <a:rPr lang="en-IN" sz="1600" dirty="0"/>
+              <a:t> PostgreSQL with local SQLite WAL fallback.</a:t>
+            </a:r>
+          </a:p>
+          <a:p>
+            <a:pPr marL="285750" lvl="0" indent="-285750">
+              <a:buFont typeface="Arial" panose="020B0604020202020204" pitchFamily="34" charset="0"/>
+              <a:buChar char="•"/>
+            </a:pPr>
+            <a:r>
+              <a:rPr lang="en-IN" sz="1600" dirty="0"/>
+              <a:t>Implemented relational tables, foreign keys, unique constraints, and capacity management.</a:t>
+            </a:r>
+          </a:p>
+          <a:p>
+            <a:pPr marL="285750" lvl="0" indent="-285750">
+              <a:buFont typeface="Arial" panose="020B0604020202020204" pitchFamily="34" charset="0"/>
+              <a:buChar char="•"/>
+            </a:pPr>
+            <a:r>
+              <a:rPr lang="en-IN" sz="1600" dirty="0"/>
+              <a:t>Integrated frontend and backend through a unified API service.</a:t>
+            </a:r>
+          </a:p>
+          <a:p>
+            <a:pPr marL="285750" lvl="0" indent="-285750">
+              <a:buFont typeface="Arial" panose="020B0604020202020204" pitchFamily="34" charset="0"/>
+              <a:buChar char="•"/>
+            </a:pPr>
+            <a:endParaRPr lang="en-IN" sz="1600" dirty="0"/>
+          </a:p>
+          <a:p>
+            <a:r>
+              <a:rPr lang="en-IN" sz="1600" b="1" dirty="0"/>
+              <a:t>Outcome:</a:t>
+            </a:r>
+            <a:r>
+              <a:rPr lang="en-IN" sz="1600" dirty="0"/>
+              <a:t> A functional, integrated event management platform with automated scheduling, secure registration, and efficient venue management.</a:t>
             </a:r>
           </a:p>
         </p:txBody>
       </p:sp>
       <p:sp>
         <p:nvSpPr>
-          <p:cNvPr id="4" name="Rectangle 3"/>
+          <p:cNvPr id="22" name="Shape 1">
+            <a:extLst>
+              <a:ext uri="{FF2B5EF4-FFF2-40B4-BE49-F238E27FC236}">
+                <a16:creationId xmlns:a16="http://schemas.microsoft.com/office/drawing/2014/main" id="{772D5E11-0A29-9F98-E456-5E2C863F506F}"/>
+              </a:ext>
+            </a:extLst>
+          </p:cNvPr>
           <p:cNvSpPr/>
           <p:nvPr/>
         </p:nvSpPr>
         <p:spPr>
           <a:xfrm>
-            <a:off x="548640" y="1268730"/>
-            <a:ext cx="8044434" cy="13716"/>
+            <a:off x="548640" y="1005840"/>
+            <a:ext cx="8046720" cy="0"/>
           </a:xfrm>
-          <a:prstGeom prst="rect">
-            <a:avLst/>
-          </a:prstGeom>
-          <a:solidFill>
-            <a:srgbClr val="E2E8F0"/>
-          </a:solidFill>
-          <a:ln>
-            <a:solidFill>
-              <a:srgbClr val="E2E8F0"/>
-            </a:solidFill>
-          </a:ln>
-        </p:spPr>
-        <p:style>
-          <a:lnRef idx="1">
-            <a:schemeClr val="accent1"/>
-          </a:lnRef>
-          <a:fillRef idx="3">
-            <a:schemeClr val="accent1"/>
-          </a:fillRef>
-          <a:effectRef idx="2">
-            <a:schemeClr val="accent1"/>
-          </a:effectRef>
-          <a:fontRef idx="minor">
-            <a:schemeClr val="lt1"/>
-          </a:fontRef>
-        </p:style>
-        <p:txBody>
-          <a:bodyPr rtlCol="0" anchor="ctr"/>
-          <a:lstStyle/>
-          <a:p>
-            <a:pPr algn="ctr"/>
-            <a:endParaRPr sz="1350">
-              <a:latin typeface="+mj-lt"/>
-            </a:endParaRPr>
-          </a:p>
-        </p:txBody>
-      </p:sp>
-      <p:sp>
-        <p:nvSpPr>
-          <p:cNvPr id="5" name="TextBox 4"/>
-          <p:cNvSpPr txBox="1"/>
-          <p:nvPr/>
-        </p:nvSpPr>
-        <p:spPr>
-          <a:xfrm>
-            <a:off x="548640" y="4800600"/>
-            <a:ext cx="5486400" cy="150041"/>
-          </a:xfrm>
-          <a:prstGeom prst="rect">
+          <a:prstGeom prst="line">
             <a:avLst/>
           </a:prstGeom>
           <a:noFill/>
-        </p:spPr>
-        <p:txBody>
-          <a:bodyPr wrap="square" lIns="0" tIns="0">
-            <a:spAutoFit/>
-          </a:bodyPr>
-          <a:lstStyle/>
-          <a:p>
-            <a:pPr>
-              <a:defRPr sz="900">
-                <a:solidFill>
-                  <a:srgbClr val="64748B"/>
-                </a:solidFill>
-                <a:latin typeface="Calibri"/>
-              </a:defRPr>
-            </a:pPr>
-            <a:r>
-              <a:rPr sz="675">
-                <a:latin typeface="+mj-lt"/>
-              </a:rPr>
-              <a:t>CSA1021 - Software Engineering | Capstone Project 2026 | Saveetha School of Engineering (SIMATS)</a:t>
-            </a:r>
-          </a:p>
-        </p:txBody>
-      </p:sp>
-      <p:sp>
-        <p:nvSpPr>
-          <p:cNvPr id="6" name="TextBox 5"/>
-          <p:cNvSpPr txBox="1"/>
-          <p:nvPr/>
-        </p:nvSpPr>
-        <p:spPr>
-          <a:xfrm>
-            <a:off x="7200900" y="4800600"/>
-            <a:ext cx="1371600" cy="150041"/>
-          </a:xfrm>
-          <a:prstGeom prst="rect">
-            <a:avLst/>
-          </a:prstGeom>
-          <a:noFill/>
-        </p:spPr>
-        <p:txBody>
-          <a:bodyPr wrap="square" tIns="0" rIns="0">
-            <a:spAutoFit/>
-          </a:bodyPr>
-          <a:lstStyle/>
-          <a:p>
-            <a:pPr algn="r">
-              <a:defRPr sz="900">
-                <a:solidFill>
-                  <a:srgbClr val="64748B"/>
-                </a:solidFill>
-                <a:latin typeface="Calibri"/>
-              </a:defRPr>
-            </a:pPr>
-            <a:r>
-              <a:rPr sz="675">
-                <a:latin typeface="+mj-lt"/>
-              </a:rPr>
-              <a:t>Slide 10 of 13</a:t>
-            </a:r>
-          </a:p>
-        </p:txBody>
-      </p:sp>
-      <p:sp>
-        <p:nvSpPr>
-          <p:cNvPr id="7" name="Rounded Rectangle 6"/>
-          <p:cNvSpPr/>
-          <p:nvPr/>
-        </p:nvSpPr>
-        <p:spPr>
-          <a:xfrm>
-            <a:off x="548640" y="1405889"/>
-            <a:ext cx="2558034" cy="3223260"/>
-          </a:xfrm>
-          <a:prstGeom prst="roundRect">
-            <a:avLst/>
-          </a:prstGeom>
-          <a:solidFill>
-            <a:srgbClr val="F8FAFC"/>
-          </a:solidFill>
           <a:ln w="12700">
             <a:solidFill>
-              <a:srgbClr val="E2E8F0"/>
+              <a:srgbClr val="000000"/>
             </a:solidFill>
+            <a:prstDash val="solid"/>
           </a:ln>
         </p:spPr>
-        <p:style>
-          <a:lnRef idx="1">
-            <a:schemeClr val="accent1"/>
-          </a:lnRef>
-          <a:fillRef idx="3">
-            <a:schemeClr val="accent1"/>
-          </a:fillRef>
-          <a:effectRef idx="2">
-            <a:schemeClr val="accent1"/>
-          </a:effectRef>
-          <a:fontRef idx="minor">
-            <a:schemeClr val="lt1"/>
-          </a:fontRef>
-        </p:style>
-        <p:txBody>
-          <a:bodyPr wrap="square" lIns="137160" tIns="123444" rIns="137160" rtlCol="0" anchor="ctr"/>
-          <a:lstStyle/>
-          <a:p>
-            <a:pPr algn="ctr">
-              <a:spcAft>
-                <a:spcPts val="750"/>
-              </a:spcAft>
-              <a:defRPr sz="1200" b="1">
-                <a:solidFill>
-                  <a:srgbClr val="1A365D"/>
-                </a:solidFill>
-                <a:latin typeface="Calibri"/>
-              </a:defRPr>
-            </a:pPr>
-            <a:r>
-              <a:rPr sz="900">
-                <a:latin typeface="+mj-lt"/>
-              </a:rPr>
-              <a:t>1. Multi-Tier Subsystem Decomposition</a:t>
-            </a:r>
-          </a:p>
-          <a:p>
-            <a:pPr>
-              <a:lnSpc>
-                <a:spcPct val="115000"/>
-              </a:lnSpc>
-              <a:spcAft>
-                <a:spcPts val="600"/>
-              </a:spcAft>
-              <a:defRPr sz="950">
-                <a:latin typeface="Calibri"/>
-              </a:defRPr>
-            </a:pPr>
-            <a:r>
-              <a:rPr sz="713" b="1">
-                <a:solidFill>
-                  <a:srgbClr val="0F172A"/>
-                </a:solidFill>
-                <a:latin typeface="+mj-lt"/>
-              </a:rPr>
-              <a:t>Presentation Layer: </a:t>
-            </a:r>
-            <a:r>
-              <a:rPr sz="713">
-                <a:solidFill>
-                  <a:srgbClr val="334155"/>
-                </a:solidFill>
-                <a:latin typeface="+mj-lt"/>
-              </a:rPr>
-              <a:t>React 18.3 + Vite 6.1 SPA with dual persona views (Participant Portal &amp; Organizer SaaS Dashboard). 6-tier Poppins typography (weights 300 to 900).</a:t>
-            </a:r>
-          </a:p>
-          <a:p>
-            <a:pPr>
-              <a:lnSpc>
-                <a:spcPct val="115000"/>
-              </a:lnSpc>
-              <a:spcAft>
-                <a:spcPts val="600"/>
-              </a:spcAft>
-              <a:defRPr sz="950">
-                <a:latin typeface="Calibri"/>
-              </a:defRPr>
-            </a:pPr>
-            <a:r>
-              <a:rPr sz="713" b="1">
-                <a:solidFill>
-                  <a:srgbClr val="0F172A"/>
-                </a:solidFill>
-                <a:latin typeface="+mj-lt"/>
-              </a:rPr>
-              <a:t>API Gateway &amp; Services: </a:t>
-            </a:r>
-            <a:r>
-              <a:rPr sz="713">
-                <a:solidFill>
-                  <a:srgbClr val="334155"/>
-                </a:solidFill>
-                <a:latin typeface="+mj-lt"/>
-              </a:rPr>
-              <a:t>FastAPI ASGI server with modular APIRouters (/events, /registrations, /attendance, /stats). Runtime Pydantic v2 schema validations.</a:t>
-            </a:r>
-          </a:p>
-          <a:p>
-            <a:pPr>
-              <a:lnSpc>
-                <a:spcPct val="115000"/>
-              </a:lnSpc>
-              <a:spcAft>
-                <a:spcPts val="600"/>
-              </a:spcAft>
-              <a:defRPr sz="950">
-                <a:latin typeface="Calibri"/>
-              </a:defRPr>
-            </a:pPr>
-            <a:r>
-              <a:rPr sz="713" b="1">
-                <a:solidFill>
-                  <a:srgbClr val="0F172A"/>
-                </a:solidFill>
-                <a:latin typeface="+mj-lt"/>
-              </a:rPr>
-              <a:t>Dual-Mode Persistence: </a:t>
-            </a:r>
-            <a:r>
-              <a:rPr sz="713">
-                <a:solidFill>
-                  <a:srgbClr val="334155"/>
-                </a:solidFill>
-                <a:latin typeface="+mj-lt"/>
-              </a:rPr>
-              <a:t>Unified API service (api.js) probes Supabase Cloud PostgreSQL with RLS. Automatically fails over to local SQLite WAL mode if offline.</a:t>
-            </a:r>
-          </a:p>
-          <a:p>
-            <a:pPr>
-              <a:lnSpc>
-                <a:spcPct val="115000"/>
-              </a:lnSpc>
-              <a:spcAft>
-                <a:spcPts val="600"/>
-              </a:spcAft>
-              <a:defRPr sz="950">
-                <a:latin typeface="Calibri"/>
-              </a:defRPr>
-            </a:pPr>
-            <a:r>
-              <a:rPr sz="713" b="1">
-                <a:solidFill>
-                  <a:srgbClr val="0F172A"/>
-                </a:solidFill>
-                <a:latin typeface="+mj-lt"/>
-              </a:rPr>
-              <a:t>Client Utilities: </a:t>
-            </a:r>
-            <a:r>
-              <a:rPr sz="713">
-                <a:solidFill>
-                  <a:srgbClr val="334155"/>
-                </a:solidFill>
-                <a:latin typeface="+mj-lt"/>
-              </a:rPr>
-              <a:t>Client-side HTML5 canvas QR code ticketing, multi-round session timelines, and UTF-8 CSV roster streaming.</a:t>
-            </a:r>
-          </a:p>
-        </p:txBody>
-      </p:sp>
-      <p:sp>
-        <p:nvSpPr>
-          <p:cNvPr id="8" name="Rectangle 7"/>
-          <p:cNvSpPr/>
-          <p:nvPr/>
-        </p:nvSpPr>
-        <p:spPr>
-          <a:xfrm>
-            <a:off x="548640" y="1405889"/>
-            <a:ext cx="2558034" cy="68580"/>
-          </a:xfrm>
-          <a:prstGeom prst="rect">
-            <a:avLst/>
-          </a:prstGeom>
-          <a:solidFill>
-            <a:srgbClr val="2563EB"/>
-          </a:solidFill>
-          <a:ln>
-            <a:noFill/>
-          </a:ln>
-        </p:spPr>
-        <p:style>
-          <a:lnRef idx="1">
-            <a:schemeClr val="accent1"/>
-          </a:lnRef>
-          <a:fillRef idx="3">
-            <a:schemeClr val="accent1"/>
-          </a:fillRef>
-          <a:effectRef idx="2">
-            <a:schemeClr val="accent1"/>
-          </a:effectRef>
-          <a:fontRef idx="minor">
-            <a:schemeClr val="lt1"/>
-          </a:fontRef>
-        </p:style>
-        <p:txBody>
-          <a:bodyPr rtlCol="0" anchor="ctr"/>
-          <a:lstStyle/>
-          <a:p>
-            <a:pPr algn="ctr"/>
-            <a:endParaRPr sz="1350">
-              <a:latin typeface="+mj-lt"/>
-            </a:endParaRPr>
-          </a:p>
-        </p:txBody>
-      </p:sp>
-      <p:sp>
-        <p:nvSpPr>
-          <p:cNvPr id="9" name="Rounded Rectangle 8"/>
-          <p:cNvSpPr/>
-          <p:nvPr/>
-        </p:nvSpPr>
-        <p:spPr>
-          <a:xfrm>
-            <a:off x="3291840" y="1405889"/>
-            <a:ext cx="2558034" cy="3223260"/>
-          </a:xfrm>
-          <a:prstGeom prst="roundRect">
-            <a:avLst/>
-          </a:prstGeom>
-          <a:solidFill>
-            <a:srgbClr val="F8FAFC"/>
-          </a:solidFill>
-          <a:ln w="12700">
-            <a:solidFill>
-              <a:srgbClr val="E2E8F0"/>
-            </a:solidFill>
-          </a:ln>
-        </p:spPr>
-        <p:style>
-          <a:lnRef idx="1">
-            <a:schemeClr val="accent1"/>
-          </a:lnRef>
-          <a:fillRef idx="3">
-            <a:schemeClr val="accent1"/>
-          </a:fillRef>
-          <a:effectRef idx="2">
-            <a:schemeClr val="accent1"/>
-          </a:effectRef>
-          <a:fontRef idx="minor">
-            <a:schemeClr val="lt1"/>
-          </a:fontRef>
-        </p:style>
-        <p:txBody>
-          <a:bodyPr wrap="square" lIns="137160" tIns="123444" rIns="137160" rtlCol="0" anchor="ctr"/>
-          <a:lstStyle/>
-          <a:p>
-            <a:pPr algn="ctr">
-              <a:spcAft>
-                <a:spcPts val="750"/>
-              </a:spcAft>
-              <a:defRPr sz="1200" b="1">
-                <a:solidFill>
-                  <a:srgbClr val="1A365D"/>
-                </a:solidFill>
-                <a:latin typeface="Calibri"/>
-              </a:defRPr>
-            </a:pPr>
-            <a:r>
-              <a:rPr sz="900">
-                <a:latin typeface="+mj-lt"/>
-              </a:rPr>
-              <a:t>2. Algorithmic Interval Scheduling Engine</a:t>
-            </a:r>
-          </a:p>
-          <a:p>
-            <a:pPr>
-              <a:lnSpc>
-                <a:spcPct val="115000"/>
-              </a:lnSpc>
-              <a:spcAft>
-                <a:spcPts val="600"/>
-              </a:spcAft>
-              <a:defRPr sz="950">
-                <a:latin typeface="Calibri"/>
-              </a:defRPr>
-            </a:pPr>
-            <a:r>
-              <a:rPr sz="713" b="1">
-                <a:solidFill>
-                  <a:srgbClr val="0F172A"/>
-                </a:solidFill>
-                <a:latin typeface="+mj-lt"/>
-              </a:rPr>
-              <a:t>Discrete Representation: </a:t>
-            </a:r>
-            <a:r>
-              <a:rPr sz="713">
-                <a:solidFill>
-                  <a:srgbClr val="334155"/>
-                </a:solidFill>
-                <a:latin typeface="+mj-lt"/>
-              </a:rPr>
-              <a:t>Every booking request is formulated as formal half-open interval I_i = [s_i, e_i) on venue V_k mapped to integer minutes t in [0, 1440).</a:t>
-            </a:r>
-          </a:p>
-          <a:p>
-            <a:pPr>
-              <a:lnSpc>
-                <a:spcPct val="115000"/>
-              </a:lnSpc>
-              <a:spcAft>
-                <a:spcPts val="600"/>
-              </a:spcAft>
-              <a:defRPr sz="950">
-                <a:latin typeface="Calibri"/>
-              </a:defRPr>
-            </a:pPr>
-            <a:r>
-              <a:rPr sz="713" b="1">
-                <a:solidFill>
-                  <a:srgbClr val="0F172A"/>
-                </a:solidFill>
-                <a:latin typeface="+mj-lt"/>
-              </a:rPr>
-              <a:t>Bisection Search O(log N): </a:t>
-            </a:r>
-            <a:r>
-              <a:rPr sz="713">
-                <a:solidFill>
-                  <a:srgbClr val="334155"/>
-                </a:solidFill>
-                <a:latin typeface="+mj-lt"/>
-              </a:rPr>
-              <a:t>Active confirmed venue bookings kept sorted by start time. Bisect locates insertion index in logarithmic O(log N) time.</a:t>
-            </a:r>
-          </a:p>
-          <a:p>
-            <a:pPr>
-              <a:lnSpc>
-                <a:spcPct val="115000"/>
-              </a:lnSpc>
-              <a:spcAft>
-                <a:spcPts val="600"/>
-              </a:spcAft>
-              <a:defRPr sz="950">
-                <a:latin typeface="Calibri"/>
-              </a:defRPr>
-            </a:pPr>
-            <a:r>
-              <a:rPr sz="713" b="1">
-                <a:solidFill>
-                  <a:srgbClr val="0F172A"/>
-                </a:solidFill>
-                <a:latin typeface="+mj-lt"/>
-              </a:rPr>
-              <a:t>Neighbor-Only Verification: </a:t>
-            </a:r>
-            <a:r>
-              <a:rPr sz="713">
-                <a:solidFill>
-                  <a:srgbClr val="334155"/>
-                </a:solidFill>
-                <a:latin typeface="+mj-lt"/>
-              </a:rPr>
-              <a:t>Collision evaluated strictly against adjacent predecessor and successor: (s_new &lt; e_ext) AND (e_new &gt; s_ext). Eliminates O(N) table scans.</a:t>
-            </a:r>
-          </a:p>
-          <a:p>
-            <a:pPr>
-              <a:lnSpc>
-                <a:spcPct val="115000"/>
-              </a:lnSpc>
-              <a:spcAft>
-                <a:spcPts val="600"/>
-              </a:spcAft>
-              <a:defRPr sz="950">
-                <a:latin typeface="Calibri"/>
-              </a:defRPr>
-            </a:pPr>
-            <a:r>
-              <a:rPr sz="713" b="1">
-                <a:solidFill>
-                  <a:srgbClr val="0F172A"/>
-                </a:solidFill>
-                <a:latin typeface="+mj-lt"/>
-              </a:rPr>
-              <a:t>Batch Optimization (Greedy EFT): </a:t>
-            </a:r>
-            <a:r>
-              <a:rPr sz="713">
-                <a:solidFill>
-                  <a:srgbClr val="334155"/>
-                </a:solidFill>
-                <a:latin typeface="+mj-lt"/>
-              </a:rPr>
-              <a:t>Competing reservation batches sorted by finish time (e_1 &lt;= e_2 &lt;= ... &lt;= e_M). Provably optimal throughput in O(M log M).</a:t>
-            </a:r>
-          </a:p>
-        </p:txBody>
-      </p:sp>
-      <p:sp>
-        <p:nvSpPr>
-          <p:cNvPr id="10" name="Rectangle 9"/>
-          <p:cNvSpPr/>
-          <p:nvPr/>
-        </p:nvSpPr>
-        <p:spPr>
-          <a:xfrm>
-            <a:off x="3291840" y="1405889"/>
-            <a:ext cx="2558034" cy="68580"/>
-          </a:xfrm>
-          <a:prstGeom prst="rect">
-            <a:avLst/>
-          </a:prstGeom>
-          <a:solidFill>
-            <a:srgbClr val="1A365D"/>
-          </a:solidFill>
-          <a:ln>
-            <a:noFill/>
-          </a:ln>
-        </p:spPr>
-        <p:style>
-          <a:lnRef idx="1">
-            <a:schemeClr val="accent1"/>
-          </a:lnRef>
-          <a:fillRef idx="3">
-            <a:schemeClr val="accent1"/>
-          </a:fillRef>
-          <a:effectRef idx="2">
-            <a:schemeClr val="accent1"/>
-          </a:effectRef>
-          <a:fontRef idx="minor">
-            <a:schemeClr val="lt1"/>
-          </a:fontRef>
-        </p:style>
-        <p:txBody>
-          <a:bodyPr rtlCol="0" anchor="ctr"/>
-          <a:lstStyle/>
-          <a:p>
-            <a:pPr algn="ctr"/>
-            <a:endParaRPr sz="1350">
-              <a:latin typeface="+mj-lt"/>
-            </a:endParaRPr>
-          </a:p>
-        </p:txBody>
-      </p:sp>
-      <p:sp>
-        <p:nvSpPr>
-          <p:cNvPr id="11" name="Rounded Rectangle 10"/>
-          <p:cNvSpPr/>
-          <p:nvPr/>
-        </p:nvSpPr>
-        <p:spPr>
-          <a:xfrm>
-            <a:off x="6035040" y="1405889"/>
-            <a:ext cx="2558034" cy="3223260"/>
-          </a:xfrm>
-          <a:prstGeom prst="roundRect">
-            <a:avLst/>
-          </a:prstGeom>
-          <a:solidFill>
-            <a:srgbClr val="F8FAFC"/>
-          </a:solidFill>
-          <a:ln w="12700">
-            <a:solidFill>
-              <a:srgbClr val="E2E8F0"/>
-            </a:solidFill>
-          </a:ln>
-        </p:spPr>
-        <p:style>
-          <a:lnRef idx="1">
-            <a:schemeClr val="accent1"/>
-          </a:lnRef>
-          <a:fillRef idx="3">
-            <a:schemeClr val="accent1"/>
-          </a:fillRef>
-          <a:effectRef idx="2">
-            <a:schemeClr val="accent1"/>
-          </a:effectRef>
-          <a:fontRef idx="minor">
-            <a:schemeClr val="lt1"/>
-          </a:fontRef>
-        </p:style>
-        <p:txBody>
-          <a:bodyPr wrap="square" lIns="137160" tIns="123444" rIns="137160" rtlCol="0" anchor="ctr"/>
-          <a:lstStyle/>
-          <a:p>
-            <a:pPr algn="ctr">
-              <a:spcAft>
-                <a:spcPts val="750"/>
-              </a:spcAft>
-              <a:defRPr sz="1200" b="1">
-                <a:solidFill>
-                  <a:srgbClr val="1A365D"/>
-                </a:solidFill>
-                <a:latin typeface="Calibri"/>
-              </a:defRPr>
-            </a:pPr>
-            <a:r>
-              <a:rPr sz="900">
-                <a:latin typeface="+mj-lt"/>
-              </a:rPr>
-              <a:t>3. Concurrency Control &amp; Database Schema</a:t>
-            </a:r>
-          </a:p>
-          <a:p>
-            <a:pPr>
-              <a:lnSpc>
-                <a:spcPct val="115000"/>
-              </a:lnSpc>
-              <a:spcAft>
-                <a:spcPts val="600"/>
-              </a:spcAft>
-              <a:defRPr sz="950">
-                <a:latin typeface="Calibri"/>
-              </a:defRPr>
-            </a:pPr>
-            <a:r>
-              <a:rPr sz="713" b="1">
-                <a:solidFill>
-                  <a:srgbClr val="0F172A"/>
-                </a:solidFill>
-                <a:latin typeface="+mj-lt"/>
-              </a:rPr>
-              <a:t>ACID Transaction Envelope: </a:t>
-            </a:r>
-            <a:r>
-              <a:rPr sz="713">
-                <a:solidFill>
-                  <a:srgbClr val="334155"/>
-                </a:solidFill>
-                <a:latin typeface="+mj-lt"/>
-              </a:rPr>
-              <a:t>Wraps availability read and write inside atomic transaction (BEGIN IMMEDIATE in SQLite; row locks in PostgreSQL) to eliminate TOCTOU race conditions.</a:t>
-            </a:r>
-          </a:p>
-          <a:p>
-            <a:pPr>
-              <a:lnSpc>
-                <a:spcPct val="115000"/>
-              </a:lnSpc>
-              <a:spcAft>
-                <a:spcPts val="600"/>
-              </a:spcAft>
-              <a:defRPr sz="950">
-                <a:latin typeface="Calibri"/>
-              </a:defRPr>
-            </a:pPr>
-            <a:r>
-              <a:rPr sz="713" b="1">
-                <a:solidFill>
-                  <a:srgbClr val="0F172A"/>
-                </a:solidFill>
-                <a:latin typeface="+mj-lt"/>
-              </a:rPr>
-              <a:t>Venue Mutex Serialization: </a:t>
-            </a:r>
-            <a:r>
-              <a:rPr sz="713">
-                <a:solidFill>
-                  <a:srgbClr val="334155"/>
-                </a:solidFill>
-                <a:latin typeface="+mj-lt"/>
-              </a:rPr>
-              <a:t>Simultaneous parallel submissions for the exact same hall serialize at the transaction lock. Only the first commit succeeds.</a:t>
-            </a:r>
-          </a:p>
-          <a:p>
-            <a:pPr>
-              <a:lnSpc>
-                <a:spcPct val="115000"/>
-              </a:lnSpc>
-              <a:spcAft>
-                <a:spcPts val="600"/>
-              </a:spcAft>
-              <a:defRPr sz="950">
-                <a:latin typeface="Calibri"/>
-              </a:defRPr>
-            </a:pPr>
-            <a:r>
-              <a:rPr sz="713" b="1">
-                <a:solidFill>
-                  <a:srgbClr val="0F172A"/>
-                </a:solidFill>
-                <a:latin typeface="+mj-lt"/>
-              </a:rPr>
-              <a:t>Relational ER Model (6 Tables): </a:t>
-            </a:r>
-            <a:r>
-              <a:rPr sz="713">
-                <a:solidFill>
-                  <a:srgbClr val="334155"/>
-                </a:solidFill>
-                <a:latin typeface="+mj-lt"/>
-              </a:rPr>
-              <a:t>organizers (1) -&gt; events (N) -&gt; event_sessions (N) [Cascade]. events (1) -&gt; registrations (N) -&gt; attendance (1). announcements (N).</a:t>
-            </a:r>
-          </a:p>
-          <a:p>
-            <a:pPr>
-              <a:lnSpc>
-                <a:spcPct val="115000"/>
-              </a:lnSpc>
-              <a:spcAft>
-                <a:spcPts val="600"/>
-              </a:spcAft>
-              <a:defRPr sz="950">
-                <a:latin typeface="Calibri"/>
-              </a:defRPr>
-            </a:pPr>
-            <a:r>
-              <a:rPr sz="713" b="1">
-                <a:solidFill>
-                  <a:srgbClr val="0F172A"/>
-                </a:solidFill>
-                <a:latin typeface="+mj-lt"/>
-              </a:rPr>
-              <a:t>Integrity &amp; Idempotency: </a:t>
-            </a:r>
-            <a:r>
-              <a:rPr sz="713">
-                <a:solidFill>
-                  <a:srgbClr val="334155"/>
-                </a:solidFill>
-                <a:latin typeface="+mj-lt"/>
-              </a:rPr>
-              <a:t>Unique constraints on EVF-2026 ticket passes, automated capacity counter triggers, and foreign key cascade deletion.</a:t>
-            </a:r>
-          </a:p>
-        </p:txBody>
-      </p:sp>
-      <p:sp>
-        <p:nvSpPr>
-          <p:cNvPr id="12" name="Rectangle 11"/>
-          <p:cNvSpPr/>
-          <p:nvPr/>
-        </p:nvSpPr>
-        <p:spPr>
-          <a:xfrm>
-            <a:off x="6035040" y="1405889"/>
-            <a:ext cx="2558034" cy="68580"/>
-          </a:xfrm>
-          <a:prstGeom prst="rect">
-            <a:avLst/>
-          </a:prstGeom>
-          <a:solidFill>
-            <a:srgbClr val="0F172A"/>
-          </a:solidFill>
-          <a:ln>
-            <a:noFill/>
-          </a:ln>
-        </p:spPr>
-        <p:style>
-          <a:lnRef idx="1">
-            <a:schemeClr val="accent1"/>
-          </a:lnRef>
-          <a:fillRef idx="3">
-            <a:schemeClr val="accent1"/>
-          </a:fillRef>
-          <a:effectRef idx="2">
-            <a:schemeClr val="accent1"/>
-          </a:effectRef>
-          <a:fontRef idx="minor">
-            <a:schemeClr val="lt1"/>
-          </a:fontRef>
-        </p:style>
-        <p:txBody>
-          <a:bodyPr rtlCol="0" anchor="ctr"/>
-          <a:lstStyle/>
-          <a:p>
-            <a:pPr algn="ctr"/>
-            <a:endParaRPr sz="1350">
-              <a:latin typeface="+mj-lt"/>
-            </a:endParaRPr>
-          </a:p>
-        </p:txBody>
       </p:sp>
     </p:spTree>
+    <p:extLst>
+      <p:ext uri="{BB962C8B-B14F-4D97-AF65-F5344CB8AC3E}">
+        <p14:creationId xmlns:p14="http://schemas.microsoft.com/office/powerpoint/2010/main" val="692546190"/>
+      </p:ext>
+    </p:extLst>
   </p:cSld>
   <p:clrMapOvr>
     <a:masterClrMapping/>
@@ -3077,12 +3098,18 @@
 </p:sld>
 </file>
 
-<file path=ppt/slides/slide11.xml><?xml version="1.0" encoding="utf-8"?>
+<file path=ppt/slides/slide12.xml><?xml version="1.0" encoding="utf-8"?>
 <p:sld xmlns:a="http://schemas.openxmlformats.org/drawingml/2006/main" xmlns:r="http://schemas.openxmlformats.org/officeDocument/2006/relationships" xmlns:p="http://schemas.openxmlformats.org/presentationml/2006/main">
   <p:cSld>
     <p:spTree>
       <p:nvGrpSpPr>
-        <p:cNvPr id="1" name=""/>
+        <p:cNvPr id="1" name="">
+          <a:extLst>
+            <a:ext uri="{FF2B5EF4-FFF2-40B4-BE49-F238E27FC236}">
+              <a16:creationId xmlns:a16="http://schemas.microsoft.com/office/drawing/2014/main" id="{9A44E1A3-9CC3-22EE-9700-D71A42FEA6BE}"/>
+            </a:ext>
+          </a:extLst>
+        </p:cNvPr>
         <p:cNvGrpSpPr/>
         <p:nvPr/>
       </p:nvGrpSpPr>
@@ -3096,14 +3123,20 @@
       </p:grpSpPr>
       <p:sp>
         <p:nvSpPr>
-          <p:cNvPr id="3" name="TextBox 2"/>
+          <p:cNvPr id="19" name="TextBox 18">
+            <a:extLst>
+              <a:ext uri="{FF2B5EF4-FFF2-40B4-BE49-F238E27FC236}">
+                <a16:creationId xmlns:a16="http://schemas.microsoft.com/office/drawing/2014/main" id="{CF887E15-3A9F-6ABE-7FD3-AAEDA184CBCC}"/>
+              </a:ext>
+            </a:extLst>
+          </p:cNvPr>
           <p:cNvSpPr txBox="1"/>
           <p:nvPr/>
         </p:nvSpPr>
         <p:spPr>
           <a:xfrm>
-            <a:off x="548640" y="582931"/>
-            <a:ext cx="8023860" cy="418063"/>
+            <a:off x="371473" y="476250"/>
+            <a:ext cx="8772527" cy="3754874"/>
           </a:xfrm>
           <a:prstGeom prst="rect">
             <a:avLst/>
@@ -3111,940 +3144,228 @@
           <a:noFill/>
         </p:spPr>
         <p:txBody>
-          <a:bodyPr wrap="square" lIns="0" tIns="0" rIns="0" bIns="0">
+          <a:bodyPr wrap="square">
             <a:spAutoFit/>
           </a:bodyPr>
           <a:lstStyle/>
           <a:p>
-            <a:pPr>
-              <a:defRPr sz="2200" b="1">
-                <a:solidFill>
-                  <a:srgbClr val="1A365D"/>
-                </a:solidFill>
-                <a:latin typeface="Calibri"/>
-              </a:defRPr>
-            </a:pPr>
-            <a:r>
-              <a:rPr sz="1650" dirty="0">
-                <a:latin typeface="+mj-lt"/>
-              </a:rPr>
-              <a:t>Module 3: Development Implementation &amp; Test Automation</a:t>
-            </a:r>
-          </a:p>
-          <a:p>
-            <a:pPr>
-              <a:spcBef>
-                <a:spcPts val="225"/>
-              </a:spcBef>
-              <a:defRPr sz="1200">
-                <a:solidFill>
-                  <a:srgbClr val="64748B"/>
-                </a:solidFill>
-                <a:latin typeface="Calibri"/>
-              </a:defRPr>
-            </a:pPr>
-            <a:r>
-              <a:rPr sz="900" dirty="0">
-                <a:latin typeface="+mj-lt"/>
-              </a:rPr>
-              <a:t>Modular full-stack implementation and rigorous 28-suite </a:t>
-            </a:r>
-            <a:r>
-              <a:rPr sz="900" dirty="0" err="1">
-                <a:latin typeface="+mj-lt"/>
-              </a:rPr>
-              <a:t>Pytest</a:t>
-            </a:r>
-            <a:r>
-              <a:rPr sz="900" dirty="0">
-                <a:latin typeface="+mj-lt"/>
-              </a:rPr>
-              <a:t> verification matrix</a:t>
+            <a:r>
+              <a:rPr lang="en-IN" sz="3000" b="1" dirty="0"/>
+              <a:t>Module 4: Deployment Strategy</a:t>
+            </a:r>
+          </a:p>
+          <a:p>
+            <a:pPr marL="285750" indent="-285750">
+              <a:buFont typeface="Arial" panose="020B0604020202020204" pitchFamily="34" charset="0"/>
+              <a:buChar char="•"/>
+            </a:pPr>
+            <a:endParaRPr lang="en-IN" sz="1600" b="1" dirty="0"/>
+          </a:p>
+          <a:p>
+            <a:pPr marL="285750" lvl="0" indent="-285750">
+              <a:buFont typeface="Arial" panose="020B0604020202020204" pitchFamily="34" charset="0"/>
+              <a:buChar char="•"/>
+            </a:pPr>
+            <a:r>
+              <a:rPr lang="en-IN" sz="1600" dirty="0"/>
+              <a:t>Deploy the React + Vite frontend on </a:t>
+            </a:r>
+            <a:r>
+              <a:rPr lang="en-IN" sz="1600" b="1" dirty="0" err="1"/>
+              <a:t>Vercel</a:t>
+            </a:r>
+            <a:r>
+              <a:rPr lang="en-IN" sz="1600" dirty="0"/>
+              <a:t>.</a:t>
+            </a:r>
+          </a:p>
+          <a:p>
+            <a:pPr marL="285750" lvl="0" indent="-285750">
+              <a:buFont typeface="Arial" panose="020B0604020202020204" pitchFamily="34" charset="0"/>
+              <a:buChar char="•"/>
+            </a:pPr>
+            <a:r>
+              <a:rPr lang="en-IN" sz="1600" dirty="0"/>
+              <a:t>Deploy the </a:t>
+            </a:r>
+            <a:r>
+              <a:rPr lang="en-IN" sz="1600" dirty="0" err="1"/>
+              <a:t>FastAPI</a:t>
+            </a:r>
+            <a:r>
+              <a:rPr lang="en-IN" sz="1600" dirty="0"/>
+              <a:t> backend separately on </a:t>
+            </a:r>
+            <a:r>
+              <a:rPr lang="en-IN" sz="1600" b="1" dirty="0"/>
+              <a:t>Render</a:t>
+            </a:r>
+            <a:r>
+              <a:rPr lang="en-IN" sz="1600" dirty="0"/>
+              <a:t> using </a:t>
+            </a:r>
+            <a:r>
+              <a:rPr lang="en-IN" sz="1600" dirty="0" err="1"/>
+              <a:t>Uvicorn</a:t>
+            </a:r>
+            <a:r>
+              <a:rPr lang="en-IN" sz="1600" dirty="0"/>
+              <a:t>.</a:t>
+            </a:r>
+          </a:p>
+          <a:p>
+            <a:pPr marL="285750" lvl="0" indent="-285750">
+              <a:buFont typeface="Arial" panose="020B0604020202020204" pitchFamily="34" charset="0"/>
+              <a:buChar char="•"/>
+            </a:pPr>
+            <a:r>
+              <a:rPr lang="en-IN" sz="1600" dirty="0"/>
+              <a:t>Connect frontend and backend through secure HTTPS REST APIs.</a:t>
+            </a:r>
+          </a:p>
+          <a:p>
+            <a:pPr marL="285750" lvl="0" indent="-285750">
+              <a:buFont typeface="Arial" panose="020B0604020202020204" pitchFamily="34" charset="0"/>
+              <a:buChar char="•"/>
+            </a:pPr>
+            <a:r>
+              <a:rPr lang="en-IN" sz="1600" dirty="0"/>
+              <a:t>Configure the frontend API base URL using environment variables.</a:t>
+            </a:r>
+          </a:p>
+          <a:p>
+            <a:pPr marL="285750" lvl="0" indent="-285750">
+              <a:buFont typeface="Arial" panose="020B0604020202020204" pitchFamily="34" charset="0"/>
+              <a:buChar char="•"/>
+            </a:pPr>
+            <a:r>
+              <a:rPr lang="en-IN" sz="1600" dirty="0"/>
+              <a:t>Integrate </a:t>
+            </a:r>
+            <a:r>
+              <a:rPr lang="en-IN" sz="1600" b="1" dirty="0" err="1"/>
+              <a:t>Supabase</a:t>
+            </a:r>
+            <a:r>
+              <a:rPr lang="en-IN" sz="1600" b="1" dirty="0"/>
+              <a:t> PostgreSQL</a:t>
+            </a:r>
+            <a:r>
+              <a:rPr lang="en-IN" sz="1600" dirty="0"/>
+              <a:t> as the centralized production database.</a:t>
+            </a:r>
+          </a:p>
+          <a:p>
+            <a:pPr marL="285750" lvl="0" indent="-285750">
+              <a:buFont typeface="Arial" panose="020B0604020202020204" pitchFamily="34" charset="0"/>
+              <a:buChar char="•"/>
+            </a:pPr>
+            <a:r>
+              <a:rPr lang="en-IN" sz="1600" dirty="0"/>
+              <a:t>Configure CORS to allow requests only from the authorized frontend domain.</a:t>
+            </a:r>
+          </a:p>
+          <a:p>
+            <a:pPr marL="285750" lvl="0" indent="-285750">
+              <a:buFont typeface="Arial" panose="020B0604020202020204" pitchFamily="34" charset="0"/>
+              <a:buChar char="•"/>
+            </a:pPr>
+            <a:r>
+              <a:rPr lang="en-IN" sz="1600" dirty="0"/>
+              <a:t>Secure credentials using environment variables and enforce authentication, RLS, and input validation.</a:t>
+            </a:r>
+          </a:p>
+          <a:p>
+            <a:pPr marL="285750" lvl="0" indent="-285750">
+              <a:buFont typeface="Arial" panose="020B0604020202020204" pitchFamily="34" charset="0"/>
+              <a:buChar char="•"/>
+            </a:pPr>
+            <a:r>
+              <a:rPr lang="en-IN" sz="1600" dirty="0"/>
+              <a:t>Test event registration, QR passes, attendance, and scheduling conflict detection.</a:t>
+            </a:r>
+          </a:p>
+          <a:p>
+            <a:pPr marL="285750" lvl="0" indent="-285750">
+              <a:buFont typeface="Arial" panose="020B0604020202020204" pitchFamily="34" charset="0"/>
+              <a:buChar char="•"/>
+            </a:pPr>
+            <a:r>
+              <a:rPr lang="en-IN" sz="1600" dirty="0"/>
+              <a:t>Implement health checks, error logging, database backups, and deployment monitoring.</a:t>
+            </a:r>
+          </a:p>
+          <a:p>
+            <a:pPr marL="285750" lvl="0" indent="-285750">
+              <a:buFont typeface="Arial" panose="020B0604020202020204" pitchFamily="34" charset="0"/>
+              <a:buChar char="•"/>
+            </a:pPr>
+            <a:endParaRPr lang="en-IN" sz="1600" dirty="0"/>
+          </a:p>
+          <a:p>
+            <a:pPr lvl="0"/>
+            <a:r>
+              <a:rPr lang="en-IN" sz="1600" b="1" dirty="0"/>
+              <a:t>Deployment Flow:</a:t>
+            </a:r>
+            <a:r>
+              <a:rPr lang="en-IN" sz="1600" dirty="0"/>
+              <a:t> </a:t>
+            </a:r>
+            <a:r>
+              <a:rPr lang="en-IN" sz="1600" dirty="0" err="1"/>
+              <a:t>Vercel</a:t>
+            </a:r>
+            <a:r>
+              <a:rPr lang="en-IN" sz="1600" dirty="0"/>
+              <a:t> (Frontend) → Render (Backend) → </a:t>
+            </a:r>
+            <a:r>
+              <a:rPr lang="en-IN" sz="1600" dirty="0" err="1"/>
+              <a:t>Supabase</a:t>
+            </a:r>
+            <a:r>
+              <a:rPr lang="en-IN" sz="1600" dirty="0"/>
+              <a:t> (Database).</a:t>
             </a:r>
           </a:p>
         </p:txBody>
       </p:sp>
       <p:sp>
         <p:nvSpPr>
-          <p:cNvPr id="4" name="Rectangle 3"/>
+          <p:cNvPr id="22" name="Shape 1">
+            <a:extLst>
+              <a:ext uri="{FF2B5EF4-FFF2-40B4-BE49-F238E27FC236}">
+                <a16:creationId xmlns:a16="http://schemas.microsoft.com/office/drawing/2014/main" id="{BE37A4BB-7A80-3731-F9E3-FE7844A65275}"/>
+              </a:ext>
+            </a:extLst>
+          </p:cNvPr>
           <p:cNvSpPr/>
           <p:nvPr/>
         </p:nvSpPr>
         <p:spPr>
           <a:xfrm>
-            <a:off x="548640" y="1268730"/>
-            <a:ext cx="8044434" cy="13716"/>
+            <a:off x="548640" y="1005840"/>
+            <a:ext cx="8046720" cy="0"/>
           </a:xfrm>
-          <a:prstGeom prst="rect">
-            <a:avLst/>
-          </a:prstGeom>
-          <a:solidFill>
-            <a:srgbClr val="E2E8F0"/>
-          </a:solidFill>
-          <a:ln>
-            <a:solidFill>
-              <a:srgbClr val="E2E8F0"/>
-            </a:solidFill>
-          </a:ln>
-        </p:spPr>
-        <p:style>
-          <a:lnRef idx="1">
-            <a:schemeClr val="accent1"/>
-          </a:lnRef>
-          <a:fillRef idx="3">
-            <a:schemeClr val="accent1"/>
-          </a:fillRef>
-          <a:effectRef idx="2">
-            <a:schemeClr val="accent1"/>
-          </a:effectRef>
-          <a:fontRef idx="minor">
-            <a:schemeClr val="lt1"/>
-          </a:fontRef>
-        </p:style>
-        <p:txBody>
-          <a:bodyPr rtlCol="0" anchor="ctr"/>
-          <a:lstStyle/>
-          <a:p>
-            <a:pPr algn="ctr"/>
-            <a:endParaRPr sz="1350">
-              <a:latin typeface="+mj-lt"/>
-            </a:endParaRPr>
-          </a:p>
-        </p:txBody>
-      </p:sp>
-      <p:sp>
-        <p:nvSpPr>
-          <p:cNvPr id="5" name="TextBox 4"/>
-          <p:cNvSpPr txBox="1"/>
-          <p:nvPr/>
-        </p:nvSpPr>
-        <p:spPr>
-          <a:xfrm>
-            <a:off x="548640" y="4800600"/>
-            <a:ext cx="5486400" cy="150041"/>
-          </a:xfrm>
-          <a:prstGeom prst="rect">
+          <a:prstGeom prst="line">
             <a:avLst/>
           </a:prstGeom>
           <a:noFill/>
-        </p:spPr>
-        <p:txBody>
-          <a:bodyPr wrap="square" lIns="0" tIns="0">
-            <a:spAutoFit/>
-          </a:bodyPr>
-          <a:lstStyle/>
-          <a:p>
-            <a:pPr>
-              <a:defRPr sz="900">
-                <a:solidFill>
-                  <a:srgbClr val="64748B"/>
-                </a:solidFill>
-                <a:latin typeface="Calibri"/>
-              </a:defRPr>
-            </a:pPr>
-            <a:r>
-              <a:rPr sz="675">
-                <a:latin typeface="+mj-lt"/>
-              </a:rPr>
-              <a:t>CSA1021 - Software Engineering | Capstone Project 2026 | Saveetha School of Engineering (SIMATS)</a:t>
-            </a:r>
-          </a:p>
-        </p:txBody>
-      </p:sp>
-      <p:sp>
-        <p:nvSpPr>
-          <p:cNvPr id="6" name="TextBox 5"/>
-          <p:cNvSpPr txBox="1"/>
-          <p:nvPr/>
-        </p:nvSpPr>
-        <p:spPr>
-          <a:xfrm>
-            <a:off x="7200900" y="4800600"/>
-            <a:ext cx="1371600" cy="150041"/>
-          </a:xfrm>
-          <a:prstGeom prst="rect">
-            <a:avLst/>
-          </a:prstGeom>
-          <a:noFill/>
-        </p:spPr>
-        <p:txBody>
-          <a:bodyPr wrap="square" tIns="0" rIns="0">
-            <a:spAutoFit/>
-          </a:bodyPr>
-          <a:lstStyle/>
-          <a:p>
-            <a:pPr algn="r">
-              <a:defRPr sz="900">
-                <a:solidFill>
-                  <a:srgbClr val="64748B"/>
-                </a:solidFill>
-                <a:latin typeface="Calibri"/>
-              </a:defRPr>
-            </a:pPr>
-            <a:r>
-              <a:rPr sz="675">
-                <a:latin typeface="+mj-lt"/>
-              </a:rPr>
-              <a:t>Slide 11 of 13</a:t>
-            </a:r>
-          </a:p>
-        </p:txBody>
-      </p:sp>
-      <p:sp>
-        <p:nvSpPr>
-          <p:cNvPr id="7" name="Rounded Rectangle 6"/>
-          <p:cNvSpPr/>
-          <p:nvPr/>
-        </p:nvSpPr>
-        <p:spPr>
-          <a:xfrm>
-            <a:off x="548640" y="1405889"/>
-            <a:ext cx="3929634" cy="1543050"/>
-          </a:xfrm>
-          <a:prstGeom prst="roundRect">
-            <a:avLst/>
-          </a:prstGeom>
-          <a:solidFill>
-            <a:srgbClr val="F8FAFC"/>
-          </a:solidFill>
           <a:ln w="12700">
             <a:solidFill>
-              <a:srgbClr val="E2E8F0"/>
+              <a:srgbClr val="000000"/>
             </a:solidFill>
+            <a:prstDash val="solid"/>
           </a:ln>
         </p:spPr>
-        <p:style>
-          <a:lnRef idx="1">
-            <a:schemeClr val="accent1"/>
-          </a:lnRef>
-          <a:fillRef idx="3">
-            <a:schemeClr val="accent1"/>
-          </a:fillRef>
-          <a:effectRef idx="2">
-            <a:schemeClr val="accent1"/>
-          </a:effectRef>
-          <a:fontRef idx="minor">
-            <a:schemeClr val="lt1"/>
-          </a:fontRef>
-        </p:style>
-        <p:txBody>
-          <a:bodyPr wrap="square" lIns="205740" tIns="123444" rIns="137160" rtlCol="0" anchor="ctr"/>
-          <a:lstStyle/>
-          <a:p>
-            <a:pPr algn="ctr">
-              <a:spcAft>
-                <a:spcPts val="450"/>
-              </a:spcAft>
-              <a:defRPr sz="1250" b="1">
-                <a:solidFill>
-                  <a:srgbClr val="1A365D"/>
-                </a:solidFill>
-                <a:latin typeface="Calibri"/>
-              </a:defRPr>
-            </a:pPr>
-            <a:r>
-              <a:rPr sz="938" dirty="0">
-                <a:latin typeface="+mj-lt"/>
-              </a:rPr>
-              <a:t>1. Full-Stack Implementation Stack</a:t>
-            </a:r>
-          </a:p>
-          <a:p>
-            <a:pPr>
-              <a:lnSpc>
-                <a:spcPct val="118000"/>
-              </a:lnSpc>
-              <a:defRPr sz="950">
-                <a:solidFill>
-                  <a:srgbClr val="334155"/>
-                </a:solidFill>
-                <a:latin typeface="Calibri"/>
-              </a:defRPr>
-            </a:pPr>
-            <a:r>
-              <a:rPr sz="713" dirty="0" err="1">
-                <a:latin typeface="+mj-lt"/>
-              </a:rPr>
-              <a:t>FastAPI</a:t>
-            </a:r>
-            <a:r>
-              <a:rPr sz="713" dirty="0">
-                <a:latin typeface="+mj-lt"/>
-              </a:rPr>
-              <a:t> Asynchronous Engine: Type-safe </a:t>
-            </a:r>
-            <a:r>
-              <a:rPr sz="713" dirty="0" err="1">
-                <a:latin typeface="+mj-lt"/>
-              </a:rPr>
-              <a:t>APIRouters</a:t>
-            </a:r>
-            <a:r>
-              <a:rPr sz="713" dirty="0">
-                <a:latin typeface="+mj-lt"/>
-              </a:rPr>
-              <a:t> with </a:t>
-            </a:r>
-            <a:r>
-              <a:rPr sz="713" dirty="0" err="1">
-                <a:latin typeface="+mj-lt"/>
-              </a:rPr>
-              <a:t>Pydantic</a:t>
-            </a:r>
-            <a:r>
-              <a:rPr sz="713" dirty="0">
-                <a:latin typeface="+mj-lt"/>
-              </a:rPr>
-              <a:t> v2 schemas; connection pooling context manager (@contextmanager </a:t>
-            </a:r>
-            <a:r>
-              <a:rPr sz="713" dirty="0" err="1">
-                <a:latin typeface="+mj-lt"/>
-              </a:rPr>
-              <a:t>get_db</a:t>
-            </a:r>
-            <a:r>
-              <a:rPr sz="713" dirty="0">
-                <a:latin typeface="+mj-lt"/>
-              </a:rPr>
-              <a:t>()) with Write-Ahead Logging.</a:t>
-            </a:r>
-            <a:br>
-              <a:rPr sz="713" dirty="0">
-                <a:latin typeface="+mj-lt"/>
-              </a:rPr>
-            </a:br>
-            <a:r>
-              <a:rPr sz="713" dirty="0">
-                <a:latin typeface="+mj-lt"/>
-              </a:rPr>
-              <a:t>React 18.3 Client: Single Page Application built with Vite 6.1; modular </a:t>
-            </a:r>
-            <a:r>
-              <a:rPr sz="713" dirty="0" err="1">
-                <a:latin typeface="+mj-lt"/>
-              </a:rPr>
-              <a:t>EventManager</a:t>
-            </a:r>
-            <a:r>
-              <a:rPr sz="713" dirty="0">
-                <a:latin typeface="+mj-lt"/>
-              </a:rPr>
-              <a:t>, </a:t>
-            </a:r>
-            <a:r>
-              <a:rPr sz="713" dirty="0" err="1">
-                <a:latin typeface="+mj-lt"/>
-              </a:rPr>
-              <a:t>TicketScannerModal</a:t>
-            </a:r>
-            <a:r>
-              <a:rPr sz="713" dirty="0">
-                <a:latin typeface="+mj-lt"/>
-              </a:rPr>
-              <a:t>, and </a:t>
-            </a:r>
-            <a:r>
-              <a:rPr sz="713" dirty="0" err="1">
-                <a:latin typeface="+mj-lt"/>
-              </a:rPr>
-              <a:t>AnalyticsOverview</a:t>
-            </a:r>
-            <a:r>
-              <a:rPr sz="713" dirty="0">
-                <a:latin typeface="+mj-lt"/>
-              </a:rPr>
-              <a:t>.</a:t>
-            </a:r>
-            <a:br>
-              <a:rPr sz="713" dirty="0">
-                <a:latin typeface="+mj-lt"/>
-              </a:rPr>
-            </a:br>
-            <a:r>
-              <a:rPr sz="713" dirty="0">
-                <a:latin typeface="+mj-lt"/>
-              </a:rPr>
-              <a:t>Poppins Design Tokens: 6 calibrated weight classes (font-light 300 to font-black 900) mapped in Tailwind CSS for clear visual hierarchy.</a:t>
-            </a:r>
-            <a:br>
-              <a:rPr sz="713" dirty="0">
-                <a:latin typeface="+mj-lt"/>
-              </a:rPr>
-            </a:br>
-            <a:r>
-              <a:rPr sz="713" dirty="0">
-                <a:latin typeface="+mj-lt"/>
-              </a:rPr>
-              <a:t>Dual-Mode Bridge: api.js dynamically switches between </a:t>
-            </a:r>
-            <a:r>
-              <a:rPr sz="713" dirty="0" err="1">
-                <a:latin typeface="+mj-lt"/>
-              </a:rPr>
-              <a:t>Supabase</a:t>
-            </a:r>
-            <a:r>
-              <a:rPr sz="713" dirty="0">
-                <a:latin typeface="+mj-lt"/>
-              </a:rPr>
-              <a:t> Cloud and local </a:t>
-            </a:r>
-            <a:r>
-              <a:rPr sz="713" dirty="0" err="1">
-                <a:latin typeface="+mj-lt"/>
-              </a:rPr>
-              <a:t>FastAPI</a:t>
-            </a:r>
-            <a:r>
-              <a:rPr sz="713" dirty="0">
-                <a:latin typeface="+mj-lt"/>
-              </a:rPr>
-              <a:t>.</a:t>
-            </a:r>
-          </a:p>
-        </p:txBody>
-      </p:sp>
-      <p:sp>
-        <p:nvSpPr>
-          <p:cNvPr id="8" name="Rectangle 7"/>
-          <p:cNvSpPr/>
-          <p:nvPr/>
-        </p:nvSpPr>
-        <p:spPr>
-          <a:xfrm>
-            <a:off x="548640" y="1405889"/>
-            <a:ext cx="82296" cy="1543050"/>
-          </a:xfrm>
-          <a:prstGeom prst="rect">
-            <a:avLst/>
-          </a:prstGeom>
-          <a:solidFill>
-            <a:srgbClr val="2563EB"/>
-          </a:solidFill>
-          <a:ln>
-            <a:noFill/>
-          </a:ln>
-        </p:spPr>
-        <p:style>
-          <a:lnRef idx="1">
-            <a:schemeClr val="accent1"/>
-          </a:lnRef>
-          <a:fillRef idx="3">
-            <a:schemeClr val="accent1"/>
-          </a:fillRef>
-          <a:effectRef idx="2">
-            <a:schemeClr val="accent1"/>
-          </a:effectRef>
-          <a:fontRef idx="minor">
-            <a:schemeClr val="lt1"/>
-          </a:fontRef>
-        </p:style>
-        <p:txBody>
-          <a:bodyPr rtlCol="0" anchor="ctr"/>
-          <a:lstStyle/>
-          <a:p>
-            <a:pPr algn="ctr"/>
-            <a:endParaRPr sz="1350">
-              <a:latin typeface="+mj-lt"/>
-            </a:endParaRPr>
-          </a:p>
-        </p:txBody>
-      </p:sp>
-      <p:sp>
-        <p:nvSpPr>
-          <p:cNvPr id="9" name="Rounded Rectangle 8"/>
-          <p:cNvSpPr/>
-          <p:nvPr/>
-        </p:nvSpPr>
-        <p:spPr>
-          <a:xfrm>
-            <a:off x="548640" y="3086100"/>
-            <a:ext cx="3929634" cy="1543050"/>
-          </a:xfrm>
-          <a:prstGeom prst="roundRect">
-            <a:avLst/>
-          </a:prstGeom>
-          <a:solidFill>
-            <a:srgbClr val="F8FAFC"/>
-          </a:solidFill>
-          <a:ln w="12700">
-            <a:solidFill>
-              <a:srgbClr val="E2E8F0"/>
-            </a:solidFill>
-          </a:ln>
-        </p:spPr>
-        <p:style>
-          <a:lnRef idx="1">
-            <a:schemeClr val="accent1"/>
-          </a:lnRef>
-          <a:fillRef idx="3">
-            <a:schemeClr val="accent1"/>
-          </a:fillRef>
-          <a:effectRef idx="2">
-            <a:schemeClr val="accent1"/>
-          </a:effectRef>
-          <a:fontRef idx="minor">
-            <a:schemeClr val="lt1"/>
-          </a:fontRef>
-        </p:style>
-        <p:txBody>
-          <a:bodyPr wrap="square" lIns="205740" tIns="123444" rIns="137160" rtlCol="0" anchor="ctr"/>
-          <a:lstStyle/>
-          <a:p>
-            <a:pPr algn="ctr">
-              <a:spcAft>
-                <a:spcPts val="450"/>
-              </a:spcAft>
-              <a:defRPr sz="1250" b="1">
-                <a:solidFill>
-                  <a:srgbClr val="1A365D"/>
-                </a:solidFill>
-                <a:latin typeface="Calibri"/>
-              </a:defRPr>
-            </a:pPr>
-            <a:r>
-              <a:rPr sz="938">
-                <a:latin typeface="+mj-lt"/>
-              </a:rPr>
-              <a:t>2. Algorithmic Collision Engine Implementation</a:t>
-            </a:r>
-          </a:p>
-          <a:p>
-            <a:pPr>
-              <a:lnSpc>
-                <a:spcPct val="118000"/>
-              </a:lnSpc>
-              <a:defRPr sz="950">
-                <a:solidFill>
-                  <a:srgbClr val="334155"/>
-                </a:solidFill>
-                <a:latin typeface="Calibri"/>
-              </a:defRPr>
-            </a:pPr>
-            <a:r>
-              <a:rPr sz="713">
-                <a:latin typeface="+mj-lt"/>
-              </a:rPr>
-              <a:t>Time Serialization: Normalizes 12h/24h timestamps into discrete minutes t in [0, 1440).</a:t>
-            </a:r>
-            <a:br>
-              <a:rPr sz="713">
-                <a:latin typeface="+mj-lt"/>
-              </a:rPr>
-            </a:br>
-            <a:r>
-              <a:rPr sz="713">
-                <a:latin typeface="+mj-lt"/>
-              </a:rPr>
-              <a:t>Bisection Neighbor Check:</a:t>
-            </a:r>
-            <a:br>
-              <a:rPr sz="713">
-                <a:latin typeface="+mj-lt"/>
-              </a:rPr>
-            </a:br>
-            <a:r>
-              <a:rPr sz="713">
-                <a:latin typeface="+mj-lt"/>
-              </a:rPr>
-              <a:t>  idx = bisect.bisect_left([i[0] for i in intervals], s_new)</a:t>
-            </a:r>
-            <a:br>
-              <a:rPr sz="713">
-                <a:latin typeface="+mj-lt"/>
-              </a:rPr>
-            </a:br>
-            <a:r>
-              <a:rPr sz="713">
-                <a:latin typeface="+mj-lt"/>
-              </a:rPr>
-              <a:t>  if idx &gt; 0 and intervals[idx-1][1] &gt; s_new: return False (Overlap Predecessor)</a:t>
-            </a:r>
-            <a:br>
-              <a:rPr sz="713">
-                <a:latin typeface="+mj-lt"/>
-              </a:rPr>
-            </a:br>
-            <a:r>
-              <a:rPr sz="713">
-                <a:latin typeface="+mj-lt"/>
-              </a:rPr>
-              <a:t>  if idx &lt; len(intervals) and intervals[idx][0] &lt; e_new: return False (Overlap Successor)</a:t>
-            </a:r>
-            <a:br>
-              <a:rPr sz="713">
-                <a:latin typeface="+mj-lt"/>
-              </a:rPr>
-            </a:br>
-            <a:r>
-              <a:rPr sz="713">
-                <a:latin typeface="+mj-lt"/>
-              </a:rPr>
-              <a:t>Nearest Slot Discovery: Iterates adjacent gaps [e_{k-1}, s_k) where (s_k - e_{k-1}) &gt;= dt to suggest immediate alternatives.</a:t>
-            </a:r>
-          </a:p>
-        </p:txBody>
-      </p:sp>
-      <p:sp>
-        <p:nvSpPr>
-          <p:cNvPr id="10" name="Rectangle 9"/>
-          <p:cNvSpPr/>
-          <p:nvPr/>
-        </p:nvSpPr>
-        <p:spPr>
-          <a:xfrm>
-            <a:off x="548640" y="3086100"/>
-            <a:ext cx="82296" cy="1543050"/>
-          </a:xfrm>
-          <a:prstGeom prst="rect">
-            <a:avLst/>
-          </a:prstGeom>
-          <a:solidFill>
-            <a:srgbClr val="1A365D"/>
-          </a:solidFill>
-          <a:ln>
-            <a:noFill/>
-          </a:ln>
-        </p:spPr>
-        <p:style>
-          <a:lnRef idx="1">
-            <a:schemeClr val="accent1"/>
-          </a:lnRef>
-          <a:fillRef idx="3">
-            <a:schemeClr val="accent1"/>
-          </a:fillRef>
-          <a:effectRef idx="2">
-            <a:schemeClr val="accent1"/>
-          </a:effectRef>
-          <a:fontRef idx="minor">
-            <a:schemeClr val="lt1"/>
-          </a:fontRef>
-        </p:style>
-        <p:txBody>
-          <a:bodyPr rtlCol="0" anchor="ctr"/>
-          <a:lstStyle/>
-          <a:p>
-            <a:pPr algn="ctr"/>
-            <a:endParaRPr sz="1350">
-              <a:latin typeface="+mj-lt"/>
-            </a:endParaRPr>
-          </a:p>
-        </p:txBody>
-      </p:sp>
-      <p:sp>
-        <p:nvSpPr>
-          <p:cNvPr id="11" name="Rounded Rectangle 10"/>
-          <p:cNvSpPr/>
-          <p:nvPr/>
-        </p:nvSpPr>
-        <p:spPr>
-          <a:xfrm>
-            <a:off x="4663440" y="1405889"/>
-            <a:ext cx="3929634" cy="3223260"/>
-          </a:xfrm>
-          <a:prstGeom prst="roundRect">
-            <a:avLst/>
-          </a:prstGeom>
-          <a:solidFill>
-            <a:srgbClr val="F8FAFC"/>
-          </a:solidFill>
-          <a:ln w="12700">
-            <a:solidFill>
-              <a:srgbClr val="E2E8F0"/>
-            </a:solidFill>
-          </a:ln>
-        </p:spPr>
-        <p:style>
-          <a:lnRef idx="1">
-            <a:schemeClr val="accent1"/>
-          </a:lnRef>
-          <a:fillRef idx="3">
-            <a:schemeClr val="accent1"/>
-          </a:fillRef>
-          <a:effectRef idx="2">
-            <a:schemeClr val="accent1"/>
-          </a:effectRef>
-          <a:fontRef idx="minor">
-            <a:schemeClr val="lt1"/>
-          </a:fontRef>
-        </p:style>
-        <p:txBody>
-          <a:bodyPr wrap="square" lIns="205740" tIns="123444" rIns="137160" rtlCol="0" anchor="ctr"/>
-          <a:lstStyle/>
-          <a:p>
-            <a:pPr algn="ctr">
-              <a:spcAft>
-                <a:spcPts val="600"/>
-              </a:spcAft>
-              <a:defRPr sz="1300" b="1">
-                <a:solidFill>
-                  <a:srgbClr val="1A365D"/>
-                </a:solidFill>
-                <a:latin typeface="Calibri"/>
-              </a:defRPr>
-            </a:pPr>
-            <a:r>
-              <a:rPr sz="975">
-                <a:latin typeface="+mj-lt"/>
-              </a:rPr>
-              <a:t>3. Automated Pytest Verification Matrix (28 Tests Passed)</a:t>
-            </a:r>
-          </a:p>
-          <a:p>
-            <a:pPr>
-              <a:lnSpc>
-                <a:spcPct val="115000"/>
-              </a:lnSpc>
-              <a:spcAft>
-                <a:spcPts val="300"/>
-              </a:spcAft>
-              <a:defRPr sz="950">
-                <a:latin typeface="Calibri"/>
-              </a:defRPr>
-            </a:pPr>
-            <a:r>
-              <a:rPr sz="713" b="1">
-                <a:solidFill>
-                  <a:srgbClr val="0F172A"/>
-                </a:solidFill>
-                <a:latin typeface="+mj-lt"/>
-              </a:rPr>
-              <a:t>test_events.py (5 Tests | PASSED): </a:t>
-            </a:r>
-            <a:r>
-              <a:rPr sz="713">
-                <a:solidFill>
-                  <a:srgbClr val="334155"/>
-                </a:solidFill>
-                <a:latin typeface="+mj-lt"/>
-              </a:rPr>
-              <a:t>Event creation, nested session ordering, update, search filters, and cascading relational deletion.</a:t>
-            </a:r>
-          </a:p>
-          <a:p>
-            <a:pPr>
-              <a:lnSpc>
-                <a:spcPct val="115000"/>
-              </a:lnSpc>
-              <a:spcAft>
-                <a:spcPts val="300"/>
-              </a:spcAft>
-              <a:defRPr sz="950">
-                <a:latin typeface="Calibri"/>
-              </a:defRPr>
-            </a:pPr>
-            <a:r>
-              <a:rPr sz="713" b="1">
-                <a:solidFill>
-                  <a:srgbClr val="0F172A"/>
-                </a:solidFill>
-                <a:latin typeface="+mj-lt"/>
-              </a:rPr>
-              <a:t>test_registrations.py (5 Tests | PASSED): </a:t>
-            </a:r>
-            <a:r>
-              <a:rPr sz="713">
-                <a:solidFill>
-                  <a:srgbClr val="334155"/>
-                </a:solidFill>
-                <a:latin typeface="+mj-lt"/>
-              </a:rPr>
-              <a:t>Successful registration, duplicate email rejection (409 Conflict), capacity cap overflow (400), and UTF-8 CSV roster exports.</a:t>
-            </a:r>
-          </a:p>
-          <a:p>
-            <a:pPr>
-              <a:lnSpc>
-                <a:spcPct val="115000"/>
-              </a:lnSpc>
-              <a:spcAft>
-                <a:spcPts val="300"/>
-              </a:spcAft>
-              <a:defRPr sz="950">
-                <a:latin typeface="Calibri"/>
-              </a:defRPr>
-            </a:pPr>
-            <a:r>
-              <a:rPr sz="713" b="1">
-                <a:solidFill>
-                  <a:srgbClr val="0F172A"/>
-                </a:solidFill>
-                <a:latin typeface="+mj-lt"/>
-              </a:rPr>
-              <a:t>test_attendance.py (3 Tests | PASSED): </a:t>
-            </a:r>
-            <a:r>
-              <a:rPr sz="713">
-                <a:solidFill>
-                  <a:srgbClr val="334155"/>
-                </a:solidFill>
-                <a:latin typeface="+mj-lt"/>
-              </a:rPr>
-              <a:t>EVF-2026 ticket code verification, automatic check-in toggle, and invalid status rejection.</a:t>
-            </a:r>
-          </a:p>
-          <a:p>
-            <a:pPr>
-              <a:lnSpc>
-                <a:spcPct val="115000"/>
-              </a:lnSpc>
-              <a:spcAft>
-                <a:spcPts val="300"/>
-              </a:spcAft>
-              <a:defRPr sz="950">
-                <a:latin typeface="Calibri"/>
-              </a:defRPr>
-            </a:pPr>
-            <a:r>
-              <a:rPr sz="713" b="1">
-                <a:solidFill>
-                  <a:srgbClr val="0F172A"/>
-                </a:solidFill>
-                <a:latin typeface="+mj-lt"/>
-              </a:rPr>
-              <a:t>test_database.py (4 Tests | PASSED): </a:t>
-            </a:r>
-            <a:r>
-              <a:rPr sz="713">
-                <a:solidFill>
-                  <a:srgbClr val="334155"/>
-                </a:solidFill>
-                <a:latin typeface="+mj-lt"/>
-              </a:rPr>
-              <a:t>Schema migration, WAL mode verification, foreign key constraints, and atomic rollback on simulated database faults.</a:t>
-            </a:r>
-          </a:p>
-          <a:p>
-            <a:pPr>
-              <a:lnSpc>
-                <a:spcPct val="115000"/>
-              </a:lnSpc>
-              <a:spcAft>
-                <a:spcPts val="300"/>
-              </a:spcAft>
-              <a:defRPr sz="950">
-                <a:latin typeface="Calibri"/>
-              </a:defRPr>
-            </a:pPr>
-            <a:r>
-              <a:rPr sz="713" b="1">
-                <a:solidFill>
-                  <a:srgbClr val="0F172A"/>
-                </a:solidFill>
-                <a:latin typeface="+mj-lt"/>
-              </a:rPr>
-              <a:t>test_stats_announcements.py (5 Tests | PASSED): </a:t>
-            </a:r>
-            <a:r>
-              <a:rPr sz="713">
-                <a:solidFill>
-                  <a:srgbClr val="334155"/>
-                </a:solidFill>
-                <a:latin typeface="+mj-lt"/>
-              </a:rPr>
-              <a:t>Platform KPI aggregations, department breakdown, category counts, and priority broadcast management.</a:t>
-            </a:r>
-          </a:p>
-          <a:p>
-            <a:pPr>
-              <a:lnSpc>
-                <a:spcPct val="115000"/>
-              </a:lnSpc>
-              <a:spcAft>
-                <a:spcPts val="300"/>
-              </a:spcAft>
-              <a:defRPr sz="950">
-                <a:latin typeface="Calibri"/>
-              </a:defRPr>
-            </a:pPr>
-            <a:r>
-              <a:rPr sz="713" b="1">
-                <a:solidFill>
-                  <a:srgbClr val="0F172A"/>
-                </a:solidFill>
-                <a:latin typeface="+mj-lt"/>
-              </a:rPr>
-              <a:t>test_api.py &amp; test_health.py (6 Tests | PASSED): </a:t>
-            </a:r>
-            <a:r>
-              <a:rPr sz="713">
-                <a:solidFill>
-                  <a:srgbClr val="334155"/>
-                </a:solidFill>
-                <a:latin typeface="+mj-lt"/>
-              </a:rPr>
-              <a:t>End-to-end integration workflow from event creation through ticket scanning; service liveness probe.</a:t>
-            </a:r>
-          </a:p>
-          <a:p>
-            <a:pPr>
-              <a:spcBef>
-                <a:spcPts val="600"/>
-              </a:spcBef>
-              <a:defRPr sz="1000" b="1">
-                <a:solidFill>
-                  <a:srgbClr val="10B981"/>
-                </a:solidFill>
-                <a:latin typeface="Calibri"/>
-              </a:defRPr>
-            </a:pPr>
-            <a:r>
-              <a:rPr sz="750">
-                <a:latin typeface="+mj-lt"/>
-              </a:rPr>
-              <a:t>Execution Verdict: 28 Passed in 0.71s (100% Pass Rate, 0 Regressions, Clean Build)</a:t>
-            </a:r>
-          </a:p>
-        </p:txBody>
-      </p:sp>
-      <p:sp>
-        <p:nvSpPr>
-          <p:cNvPr id="12" name="Rectangle 11"/>
-          <p:cNvSpPr/>
-          <p:nvPr/>
-        </p:nvSpPr>
-        <p:spPr>
-          <a:xfrm>
-            <a:off x="4663440" y="1405889"/>
-            <a:ext cx="82296" cy="3223260"/>
-          </a:xfrm>
-          <a:prstGeom prst="rect">
-            <a:avLst/>
-          </a:prstGeom>
-          <a:solidFill>
-            <a:srgbClr val="10B981"/>
-          </a:solidFill>
-          <a:ln>
-            <a:noFill/>
-          </a:ln>
-        </p:spPr>
-        <p:style>
-          <a:lnRef idx="1">
-            <a:schemeClr val="accent1"/>
-          </a:lnRef>
-          <a:fillRef idx="3">
-            <a:schemeClr val="accent1"/>
-          </a:fillRef>
-          <a:effectRef idx="2">
-            <a:schemeClr val="accent1"/>
-          </a:effectRef>
-          <a:fontRef idx="minor">
-            <a:schemeClr val="lt1"/>
-          </a:fontRef>
-        </p:style>
-        <p:txBody>
-          <a:bodyPr rtlCol="0" anchor="ctr"/>
-          <a:lstStyle/>
-          <a:p>
-            <a:pPr algn="ctr"/>
-            <a:endParaRPr sz="1350">
-              <a:latin typeface="+mj-lt"/>
-            </a:endParaRPr>
-          </a:p>
-        </p:txBody>
       </p:sp>
     </p:spTree>
+    <p:extLst>
+      <p:ext uri="{BB962C8B-B14F-4D97-AF65-F5344CB8AC3E}">
+        <p14:creationId xmlns:p14="http://schemas.microsoft.com/office/powerpoint/2010/main" val="2220006288"/>
+      </p:ext>
+    </p:extLst>
   </p:cSld>
   <p:clrMapOvr>
     <a:masterClrMapping/>
@@ -4052,12 +3373,18 @@
 </p:sld>
 </file>
 
-<file path=ppt/slides/slide12.xml><?xml version="1.0" encoding="utf-8"?>
+<file path=ppt/slides/slide13.xml><?xml version="1.0" encoding="utf-8"?>
 <p:sld xmlns:a="http://schemas.openxmlformats.org/drawingml/2006/main" xmlns:r="http://schemas.openxmlformats.org/officeDocument/2006/relationships" xmlns:p="http://schemas.openxmlformats.org/presentationml/2006/main">
   <p:cSld>
     <p:spTree>
       <p:nvGrpSpPr>
-        <p:cNvPr id="1" name=""/>
+        <p:cNvPr id="1" name="">
+          <a:extLst>
+            <a:ext uri="{FF2B5EF4-FFF2-40B4-BE49-F238E27FC236}">
+              <a16:creationId xmlns:a16="http://schemas.microsoft.com/office/drawing/2014/main" id="{18CCBC9D-84AD-671D-80FE-8B431F8DFA7D}"/>
+            </a:ext>
+          </a:extLst>
+        </p:cNvPr>
         <p:cNvGrpSpPr/>
         <p:nvPr/>
       </p:nvGrpSpPr>
@@ -4071,14 +3398,20 @@
       </p:grpSpPr>
       <p:sp>
         <p:nvSpPr>
-          <p:cNvPr id="3" name="TextBox 2"/>
+          <p:cNvPr id="19" name="TextBox 18">
+            <a:extLst>
+              <a:ext uri="{FF2B5EF4-FFF2-40B4-BE49-F238E27FC236}">
+                <a16:creationId xmlns:a16="http://schemas.microsoft.com/office/drawing/2014/main" id="{E749B67A-C327-7BB3-A1F6-AE852C81A431}"/>
+              </a:ext>
+            </a:extLst>
+          </p:cNvPr>
           <p:cNvSpPr txBox="1"/>
           <p:nvPr/>
         </p:nvSpPr>
         <p:spPr>
           <a:xfrm>
-            <a:off x="548640" y="582931"/>
-            <a:ext cx="8023860" cy="418063"/>
+            <a:off x="371473" y="476250"/>
+            <a:ext cx="8772527" cy="4493538"/>
           </a:xfrm>
           <a:prstGeom prst="rect">
             <a:avLst/>
@@ -4086,2283 +3419,229 @@
           <a:noFill/>
         </p:spPr>
         <p:txBody>
-          <a:bodyPr wrap="square" lIns="0" tIns="0" rIns="0" bIns="0">
+          <a:bodyPr wrap="square">
             <a:spAutoFit/>
           </a:bodyPr>
           <a:lstStyle/>
           <a:p>
-            <a:pPr>
-              <a:defRPr sz="2200" b="1">
-                <a:solidFill>
-                  <a:srgbClr val="1A365D"/>
-                </a:solidFill>
-                <a:latin typeface="Calibri"/>
-              </a:defRPr>
-            </a:pPr>
-            <a:r>
-              <a:rPr sz="1650">
-                <a:latin typeface="+mj-lt"/>
-              </a:rPr>
-              <a:t>Module 4: Deployment Architecture &amp; DevOps Engineering</a:t>
-            </a:r>
-          </a:p>
-          <a:p>
-            <a:pPr>
-              <a:spcBef>
-                <a:spcPts val="225"/>
-              </a:spcBef>
-              <a:defRPr sz="1200">
-                <a:solidFill>
-                  <a:srgbClr val="64748B"/>
-                </a:solidFill>
-                <a:latin typeface="Calibri"/>
-              </a:defRPr>
-            </a:pPr>
-            <a:r>
-              <a:rPr sz="900">
-                <a:latin typeface="+mj-lt"/>
-              </a:rPr>
-              <a:t>Dual-mode deployment topology, CI/CD automation pipeline, and production security hardening</a:t>
+            <a:r>
+              <a:rPr lang="en-IN" sz="3000" b="1" dirty="0"/>
+              <a:t>Module 5: Performance Analysis</a:t>
+            </a:r>
+          </a:p>
+          <a:p>
+            <a:pPr marL="285750" indent="-285750">
+              <a:buFont typeface="Arial" panose="020B0604020202020204" pitchFamily="34" charset="0"/>
+              <a:buChar char="•"/>
+            </a:pPr>
+            <a:endParaRPr lang="en-IN" sz="1600" b="1" dirty="0"/>
+          </a:p>
+          <a:p>
+            <a:pPr marL="285750" lvl="0" indent="-285750">
+              <a:buFont typeface="Arial" panose="020B0604020202020204" pitchFamily="34" charset="0"/>
+              <a:buChar char="•"/>
+            </a:pPr>
+            <a:r>
+              <a:rPr lang="en-IN" sz="1600" dirty="0"/>
+              <a:t>Measure API response times for event creation, registration, attendance, and statistics.</a:t>
+            </a:r>
+          </a:p>
+          <a:p>
+            <a:pPr marL="285750" lvl="0" indent="-285750">
+              <a:buFont typeface="Arial" panose="020B0604020202020204" pitchFamily="34" charset="0"/>
+              <a:buChar char="•"/>
+            </a:pPr>
+            <a:r>
+              <a:rPr lang="en-IN" sz="1600" dirty="0"/>
+              <a:t>Evaluate venue conflict detection using binary search in </a:t>
+            </a:r>
+            <a:r>
+              <a:rPr lang="en-IN" sz="1600" b="1" dirty="0"/>
+              <a:t>O(log N)</a:t>
+            </a:r>
+            <a:r>
+              <a:rPr lang="en-IN" sz="1600" dirty="0"/>
+              <a:t> time.</a:t>
+            </a:r>
+          </a:p>
+          <a:p>
+            <a:pPr marL="285750" lvl="0" indent="-285750">
+              <a:buFont typeface="Arial" panose="020B0604020202020204" pitchFamily="34" charset="0"/>
+              <a:buChar char="•"/>
+            </a:pPr>
+            <a:r>
+              <a:rPr lang="en-IN" sz="1600" dirty="0" err="1"/>
+              <a:t>Analyze</a:t>
+            </a:r>
+            <a:r>
+              <a:rPr lang="en-IN" sz="1600" dirty="0"/>
+              <a:t> batch scheduling efficiency using the Greedy Earliest Finish Time algorithm in </a:t>
+            </a:r>
+            <a:r>
+              <a:rPr lang="en-IN" sz="1600" b="1" dirty="0"/>
+              <a:t>O(M log M)</a:t>
+            </a:r>
+            <a:r>
+              <a:rPr lang="en-IN" sz="1600" dirty="0"/>
+              <a:t> time.</a:t>
+            </a:r>
+          </a:p>
+          <a:p>
+            <a:pPr marL="285750" lvl="0" indent="-285750">
+              <a:buFont typeface="Arial" panose="020B0604020202020204" pitchFamily="34" charset="0"/>
+              <a:buChar char="•"/>
+            </a:pPr>
+            <a:r>
+              <a:rPr lang="en-IN" sz="1600" dirty="0"/>
+              <a:t>Test concurrent booking requests to verify double-booking prevention.</a:t>
+            </a:r>
+          </a:p>
+          <a:p>
+            <a:pPr marL="285750" lvl="0" indent="-285750">
+              <a:buFont typeface="Arial" panose="020B0604020202020204" pitchFamily="34" charset="0"/>
+              <a:buChar char="•"/>
+            </a:pPr>
+            <a:r>
+              <a:rPr lang="en-IN" sz="1600" dirty="0"/>
+              <a:t>Evaluate database query performance, transaction integrity, and capacity management.</a:t>
+            </a:r>
+          </a:p>
+          <a:p>
+            <a:pPr marL="285750" lvl="0" indent="-285750">
+              <a:buFont typeface="Arial" panose="020B0604020202020204" pitchFamily="34" charset="0"/>
+              <a:buChar char="•"/>
+            </a:pPr>
+            <a:r>
+              <a:rPr lang="en-IN" sz="1600" dirty="0"/>
+              <a:t>Measure frontend loading speed, responsiveness, and QR ticket generation time.</a:t>
+            </a:r>
+          </a:p>
+          <a:p>
+            <a:pPr marL="285750" lvl="0" indent="-285750">
+              <a:buFont typeface="Arial" panose="020B0604020202020204" pitchFamily="34" charset="0"/>
+              <a:buChar char="•"/>
+            </a:pPr>
+            <a:r>
+              <a:rPr lang="en-IN" sz="1600" dirty="0"/>
+              <a:t>Test system </a:t>
+            </a:r>
+            <a:r>
+              <a:rPr lang="en-IN" sz="1600" dirty="0" err="1"/>
+              <a:t>behavior</a:t>
+            </a:r>
+            <a:r>
+              <a:rPr lang="en-IN" sz="1600" dirty="0"/>
+              <a:t> under increasing users and simultaneous event registrations.</a:t>
+            </a:r>
+          </a:p>
+          <a:p>
+            <a:pPr marL="285750" lvl="0" indent="-285750">
+              <a:buFont typeface="Arial" panose="020B0604020202020204" pitchFamily="34" charset="0"/>
+              <a:buChar char="•"/>
+            </a:pPr>
+            <a:r>
+              <a:rPr lang="en-IN" sz="1600" dirty="0"/>
+              <a:t>Monitor API latency, CPU and memory usage, error rates, and database availability.</a:t>
+            </a:r>
+          </a:p>
+          <a:p>
+            <a:pPr marL="285750" lvl="0" indent="-285750">
+              <a:buFont typeface="Arial" panose="020B0604020202020204" pitchFamily="34" charset="0"/>
+              <a:buChar char="•"/>
+            </a:pPr>
+            <a:r>
+              <a:rPr lang="en-IN" sz="1600" dirty="0"/>
+              <a:t>Verify data consistency and recovery during network interruptions and database failures.</a:t>
+            </a:r>
+          </a:p>
+          <a:p>
+            <a:pPr marL="285750" lvl="0" indent="-285750">
+              <a:buFont typeface="Arial" panose="020B0604020202020204" pitchFamily="34" charset="0"/>
+              <a:buChar char="•"/>
+            </a:pPr>
+            <a:r>
+              <a:rPr lang="en-IN" sz="1600" dirty="0"/>
+              <a:t>Compare measured results against targets: </a:t>
+            </a:r>
+            <a:r>
+              <a:rPr lang="en-IN" sz="1600" b="1" dirty="0"/>
+              <a:t>less than 2 </a:t>
+            </a:r>
+            <a:r>
+              <a:rPr lang="en-IN" sz="1600" b="1" dirty="0" err="1"/>
+              <a:t>ms</a:t>
+            </a:r>
+            <a:r>
+              <a:rPr lang="en-IN" sz="1600" b="1" dirty="0"/>
+              <a:t> for interval checks and less than 50 </a:t>
+            </a:r>
+            <a:r>
+              <a:rPr lang="en-IN" sz="1600" b="1" dirty="0" err="1"/>
+              <a:t>ms</a:t>
+            </a:r>
+            <a:r>
+              <a:rPr lang="en-IN" sz="1600" b="1" dirty="0"/>
+              <a:t> for API responses</a:t>
+            </a:r>
+            <a:r>
+              <a:rPr lang="en-IN" sz="1600" dirty="0"/>
+              <a:t>.</a:t>
+            </a:r>
+          </a:p>
+          <a:p>
+            <a:pPr marL="285750" lvl="0" indent="-285750">
+              <a:buFont typeface="Arial" panose="020B0604020202020204" pitchFamily="34" charset="0"/>
+              <a:buChar char="•"/>
+            </a:pPr>
+            <a:endParaRPr lang="en-IN" sz="1600" dirty="0"/>
+          </a:p>
+          <a:p>
+            <a:r>
+              <a:rPr lang="en-IN" sz="1600" b="1" dirty="0"/>
+              <a:t>Outcome:</a:t>
+            </a:r>
+            <a:r>
+              <a:rPr lang="en-IN" sz="1600" dirty="0"/>
+              <a:t> Assess system efficiency, reliability, scalability, and responsiveness under normal and high-load conditions.</a:t>
             </a:r>
           </a:p>
         </p:txBody>
       </p:sp>
       <p:sp>
         <p:nvSpPr>
-          <p:cNvPr id="4" name="Rectangle 3"/>
+          <p:cNvPr id="22" name="Shape 1">
+            <a:extLst>
+              <a:ext uri="{FF2B5EF4-FFF2-40B4-BE49-F238E27FC236}">
+                <a16:creationId xmlns:a16="http://schemas.microsoft.com/office/drawing/2014/main" id="{18DE4698-13A7-322F-E781-58D643C31D8F}"/>
+              </a:ext>
+            </a:extLst>
+          </p:cNvPr>
           <p:cNvSpPr/>
           <p:nvPr/>
         </p:nvSpPr>
         <p:spPr>
           <a:xfrm>
-            <a:off x="548640" y="1268730"/>
-            <a:ext cx="8044434" cy="13716"/>
+            <a:off x="548640" y="1005840"/>
+            <a:ext cx="8046720" cy="0"/>
           </a:xfrm>
-          <a:prstGeom prst="rect">
-            <a:avLst/>
-          </a:prstGeom>
-          <a:solidFill>
-            <a:srgbClr val="E2E8F0"/>
-          </a:solidFill>
-          <a:ln>
-            <a:solidFill>
-              <a:srgbClr val="E2E8F0"/>
-            </a:solidFill>
-          </a:ln>
-        </p:spPr>
-        <p:style>
-          <a:lnRef idx="1">
-            <a:schemeClr val="accent1"/>
-          </a:lnRef>
-          <a:fillRef idx="3">
-            <a:schemeClr val="accent1"/>
-          </a:fillRef>
-          <a:effectRef idx="2">
-            <a:schemeClr val="accent1"/>
-          </a:effectRef>
-          <a:fontRef idx="minor">
-            <a:schemeClr val="lt1"/>
-          </a:fontRef>
-        </p:style>
-        <p:txBody>
-          <a:bodyPr rtlCol="0" anchor="ctr"/>
-          <a:lstStyle/>
-          <a:p>
-            <a:pPr algn="ctr"/>
-            <a:endParaRPr sz="1350">
-              <a:latin typeface="+mj-lt"/>
-            </a:endParaRPr>
-          </a:p>
-        </p:txBody>
-      </p:sp>
-      <p:sp>
-        <p:nvSpPr>
-          <p:cNvPr id="5" name="TextBox 4"/>
-          <p:cNvSpPr txBox="1"/>
-          <p:nvPr/>
-        </p:nvSpPr>
-        <p:spPr>
-          <a:xfrm>
-            <a:off x="548640" y="4800600"/>
-            <a:ext cx="5486400" cy="150041"/>
-          </a:xfrm>
-          <a:prstGeom prst="rect">
+          <a:prstGeom prst="line">
             <a:avLst/>
           </a:prstGeom>
           <a:noFill/>
-        </p:spPr>
-        <p:txBody>
-          <a:bodyPr wrap="square" lIns="0" tIns="0">
-            <a:spAutoFit/>
-          </a:bodyPr>
-          <a:lstStyle/>
-          <a:p>
-            <a:pPr>
-              <a:defRPr sz="900">
-                <a:solidFill>
-                  <a:srgbClr val="64748B"/>
-                </a:solidFill>
-                <a:latin typeface="Calibri"/>
-              </a:defRPr>
-            </a:pPr>
-            <a:r>
-              <a:rPr sz="675">
-                <a:latin typeface="+mj-lt"/>
-              </a:rPr>
-              <a:t>CSA1021 - Software Engineering | Capstone Project 2026 | Saveetha School of Engineering (SIMATS)</a:t>
-            </a:r>
-          </a:p>
-        </p:txBody>
-      </p:sp>
-      <p:sp>
-        <p:nvSpPr>
-          <p:cNvPr id="6" name="TextBox 5"/>
-          <p:cNvSpPr txBox="1"/>
-          <p:nvPr/>
-        </p:nvSpPr>
-        <p:spPr>
-          <a:xfrm>
-            <a:off x="7200900" y="4800600"/>
-            <a:ext cx="1371600" cy="150041"/>
-          </a:xfrm>
-          <a:prstGeom prst="rect">
-            <a:avLst/>
-          </a:prstGeom>
-          <a:noFill/>
-        </p:spPr>
-        <p:txBody>
-          <a:bodyPr wrap="square" tIns="0" rIns="0">
-            <a:spAutoFit/>
-          </a:bodyPr>
-          <a:lstStyle/>
-          <a:p>
-            <a:pPr algn="r">
-              <a:defRPr sz="900">
-                <a:solidFill>
-                  <a:srgbClr val="64748B"/>
-                </a:solidFill>
-                <a:latin typeface="Calibri"/>
-              </a:defRPr>
-            </a:pPr>
-            <a:r>
-              <a:rPr sz="675">
-                <a:latin typeface="+mj-lt"/>
-              </a:rPr>
-              <a:t>Slide 12 of 13</a:t>
-            </a:r>
-          </a:p>
-        </p:txBody>
-      </p:sp>
-      <p:sp>
-        <p:nvSpPr>
-          <p:cNvPr id="7" name="Rounded Rectangle 6"/>
-          <p:cNvSpPr/>
-          <p:nvPr/>
-        </p:nvSpPr>
-        <p:spPr>
-          <a:xfrm>
-            <a:off x="548640" y="1405889"/>
-            <a:ext cx="2558034" cy="3223260"/>
-          </a:xfrm>
-          <a:prstGeom prst="roundRect">
-            <a:avLst/>
-          </a:prstGeom>
-          <a:solidFill>
-            <a:srgbClr val="F8FAFC"/>
-          </a:solidFill>
           <a:ln w="12700">
             <a:solidFill>
-              <a:srgbClr val="E2E8F0"/>
+              <a:srgbClr val="000000"/>
             </a:solidFill>
+            <a:prstDash val="solid"/>
           </a:ln>
         </p:spPr>
-        <p:style>
-          <a:lnRef idx="1">
-            <a:schemeClr val="accent1"/>
-          </a:lnRef>
-          <a:fillRef idx="3">
-            <a:schemeClr val="accent1"/>
-          </a:fillRef>
-          <a:effectRef idx="2">
-            <a:schemeClr val="accent1"/>
-          </a:effectRef>
-          <a:fontRef idx="minor">
-            <a:schemeClr val="lt1"/>
-          </a:fontRef>
-        </p:style>
-        <p:txBody>
-          <a:bodyPr wrap="square" lIns="137160" tIns="123444" rIns="137160" rtlCol="0" anchor="ctr"/>
-          <a:lstStyle/>
-          <a:p>
-            <a:pPr algn="ctr">
-              <a:spcAft>
-                <a:spcPts val="750"/>
-              </a:spcAft>
-              <a:defRPr sz="1200" b="1">
-                <a:solidFill>
-                  <a:srgbClr val="1A365D"/>
-                </a:solidFill>
-                <a:latin typeface="Calibri"/>
-              </a:defRPr>
-            </a:pPr>
-            <a:r>
-              <a:rPr sz="900">
-                <a:latin typeface="+mj-lt"/>
-              </a:rPr>
-              <a:t>1. Dual-Mode Deployment Topology</a:t>
-            </a:r>
-          </a:p>
-          <a:p>
-            <a:pPr>
-              <a:lnSpc>
-                <a:spcPct val="115000"/>
-              </a:lnSpc>
-              <a:spcAft>
-                <a:spcPts val="600"/>
-              </a:spcAft>
-              <a:defRPr sz="950">
-                <a:latin typeface="Calibri"/>
-              </a:defRPr>
-            </a:pPr>
-            <a:r>
-              <a:rPr sz="713" b="1">
-                <a:solidFill>
-                  <a:srgbClr val="0F172A"/>
-                </a:solidFill>
-                <a:latin typeface="+mj-lt"/>
-              </a:rPr>
-              <a:t>Cloud Production Architecture: </a:t>
-            </a:r>
-            <a:r>
-              <a:rPr sz="713">
-                <a:solidFill>
-                  <a:srgbClr val="334155"/>
-                </a:solidFill>
-                <a:latin typeface="+mj-lt"/>
-              </a:rPr>
-              <a:t>React SPA hosted on Vercel Edge Network with global CDN and SSL termination. Containerized FastAPI server on Render/Railway. Supabase Cloud PostgreSQL with automated backups.</a:t>
-            </a:r>
-          </a:p>
-          <a:p>
-            <a:pPr>
-              <a:lnSpc>
-                <a:spcPct val="115000"/>
-              </a:lnSpc>
-              <a:spcAft>
-                <a:spcPts val="600"/>
-              </a:spcAft>
-              <a:defRPr sz="950">
-                <a:latin typeface="Calibri"/>
-              </a:defRPr>
-            </a:pPr>
-            <a:r>
-              <a:rPr sz="713" b="1">
-                <a:solidFill>
-                  <a:srgbClr val="0F172A"/>
-                </a:solidFill>
-                <a:latin typeface="+mj-lt"/>
-              </a:rPr>
-              <a:t>Local Campus Edge Mode: </a:t>
-            </a:r>
-            <a:r>
-              <a:rPr sz="713">
-                <a:solidFill>
-                  <a:srgbClr val="334155"/>
-                </a:solidFill>
-                <a:latin typeface="+mj-lt"/>
-              </a:rPr>
-              <a:t>Single-command boot (npm run dev) executing concurrent FastAPI (port 5000) and Vite (port 5173). Zero external cloud dependencies.</a:t>
-            </a:r>
-          </a:p>
-          <a:p>
-            <a:pPr>
-              <a:lnSpc>
-                <a:spcPct val="115000"/>
-              </a:lnSpc>
-              <a:spcAft>
-                <a:spcPts val="600"/>
-              </a:spcAft>
-              <a:defRPr sz="950">
-                <a:latin typeface="Calibri"/>
-              </a:defRPr>
-            </a:pPr>
-            <a:r>
-              <a:rPr sz="713" b="1">
-                <a:solidFill>
-                  <a:srgbClr val="0F172A"/>
-                </a:solidFill>
-                <a:latin typeface="+mj-lt"/>
-              </a:rPr>
-              <a:t>Air-Gapped Operation: </a:t>
-            </a:r>
-            <a:r>
-              <a:rPr sz="713">
-                <a:solidFill>
-                  <a:srgbClr val="334155"/>
-                </a:solidFill>
-                <a:latin typeface="+mj-lt"/>
-              </a:rPr>
-              <a:t>Ideal for high-density campus symposiums or network-isolated computer science labs during 36-hour hackathons.</a:t>
-            </a:r>
-          </a:p>
-          <a:p>
-            <a:pPr>
-              <a:lnSpc>
-                <a:spcPct val="115000"/>
-              </a:lnSpc>
-              <a:spcAft>
-                <a:spcPts val="600"/>
-              </a:spcAft>
-              <a:defRPr sz="950">
-                <a:latin typeface="Calibri"/>
-              </a:defRPr>
-            </a:pPr>
-            <a:r>
-              <a:rPr sz="713" b="1">
-                <a:solidFill>
-                  <a:srgbClr val="0F172A"/>
-                </a:solidFill>
-                <a:latin typeface="+mj-lt"/>
-              </a:rPr>
-              <a:t>Seamless Failover: </a:t>
-            </a:r>
-            <a:r>
-              <a:rPr sz="713">
-                <a:solidFill>
-                  <a:srgbClr val="334155"/>
-                </a:solidFill>
-                <a:latin typeface="+mj-lt"/>
-              </a:rPr>
-              <a:t>Client api.js automatically detects cloud connectivity and routes queries without interface reload.</a:t>
-            </a:r>
-          </a:p>
-        </p:txBody>
-      </p:sp>
-      <p:sp>
-        <p:nvSpPr>
-          <p:cNvPr id="8" name="Rectangle 7"/>
-          <p:cNvSpPr/>
-          <p:nvPr/>
-        </p:nvSpPr>
-        <p:spPr>
-          <a:xfrm>
-            <a:off x="548640" y="1405889"/>
-            <a:ext cx="2558034" cy="68580"/>
-          </a:xfrm>
-          <a:prstGeom prst="rect">
-            <a:avLst/>
-          </a:prstGeom>
-          <a:solidFill>
-            <a:srgbClr val="2563EB"/>
-          </a:solidFill>
-          <a:ln>
-            <a:noFill/>
-          </a:ln>
-        </p:spPr>
-        <p:style>
-          <a:lnRef idx="1">
-            <a:schemeClr val="accent1"/>
-          </a:lnRef>
-          <a:fillRef idx="3">
-            <a:schemeClr val="accent1"/>
-          </a:fillRef>
-          <a:effectRef idx="2">
-            <a:schemeClr val="accent1"/>
-          </a:effectRef>
-          <a:fontRef idx="minor">
-            <a:schemeClr val="lt1"/>
-          </a:fontRef>
-        </p:style>
-        <p:txBody>
-          <a:bodyPr rtlCol="0" anchor="ctr"/>
-          <a:lstStyle/>
-          <a:p>
-            <a:pPr algn="ctr"/>
-            <a:endParaRPr sz="1350">
-              <a:latin typeface="+mj-lt"/>
-            </a:endParaRPr>
-          </a:p>
-        </p:txBody>
-      </p:sp>
-      <p:sp>
-        <p:nvSpPr>
-          <p:cNvPr id="9" name="Rounded Rectangle 8"/>
-          <p:cNvSpPr/>
-          <p:nvPr/>
-        </p:nvSpPr>
-        <p:spPr>
-          <a:xfrm>
-            <a:off x="3291840" y="1405889"/>
-            <a:ext cx="2558034" cy="3223260"/>
-          </a:xfrm>
-          <a:prstGeom prst="roundRect">
-            <a:avLst/>
-          </a:prstGeom>
-          <a:solidFill>
-            <a:srgbClr val="F8FAFC"/>
-          </a:solidFill>
-          <a:ln w="12700">
-            <a:solidFill>
-              <a:srgbClr val="E2E8F0"/>
-            </a:solidFill>
-          </a:ln>
-        </p:spPr>
-        <p:style>
-          <a:lnRef idx="1">
-            <a:schemeClr val="accent1"/>
-          </a:lnRef>
-          <a:fillRef idx="3">
-            <a:schemeClr val="accent1"/>
-          </a:fillRef>
-          <a:effectRef idx="2">
-            <a:schemeClr val="accent1"/>
-          </a:effectRef>
-          <a:fontRef idx="minor">
-            <a:schemeClr val="lt1"/>
-          </a:fontRef>
-        </p:style>
-        <p:txBody>
-          <a:bodyPr wrap="square" lIns="137160" tIns="123444" rIns="137160" rtlCol="0" anchor="ctr"/>
-          <a:lstStyle/>
-          <a:p>
-            <a:pPr algn="ctr">
-              <a:spcAft>
-                <a:spcPts val="750"/>
-              </a:spcAft>
-              <a:defRPr sz="1200" b="1">
-                <a:solidFill>
-                  <a:srgbClr val="1A365D"/>
-                </a:solidFill>
-                <a:latin typeface="Calibri"/>
-              </a:defRPr>
-            </a:pPr>
-            <a:r>
-              <a:rPr sz="900">
-                <a:latin typeface="+mj-lt"/>
-              </a:rPr>
-              <a:t>2. CI/CD Automation Pipeline</a:t>
-            </a:r>
-          </a:p>
-          <a:p>
-            <a:pPr>
-              <a:lnSpc>
-                <a:spcPct val="115000"/>
-              </a:lnSpc>
-              <a:spcAft>
-                <a:spcPts val="600"/>
-              </a:spcAft>
-              <a:defRPr sz="950">
-                <a:latin typeface="Calibri"/>
-              </a:defRPr>
-            </a:pPr>
-            <a:r>
-              <a:rPr sz="713" b="1">
-                <a:solidFill>
-                  <a:srgbClr val="0F172A"/>
-                </a:solidFill>
-                <a:latin typeface="+mj-lt"/>
-              </a:rPr>
-              <a:t>Stage 1: Lint &amp; Code Quality: </a:t>
-            </a:r>
-            <a:r>
-              <a:rPr sz="713">
-                <a:solidFill>
-                  <a:srgbClr val="334155"/>
-                </a:solidFill>
-                <a:latin typeface="+mj-lt"/>
-              </a:rPr>
-              <a:t>Triggered on push/PR to main. Flake8 and Black for Python backend; ESLint for React JSX components.</a:t>
-            </a:r>
-          </a:p>
-          <a:p>
-            <a:pPr>
-              <a:lnSpc>
-                <a:spcPct val="115000"/>
-              </a:lnSpc>
-              <a:spcAft>
-                <a:spcPts val="600"/>
-              </a:spcAft>
-              <a:defRPr sz="950">
-                <a:latin typeface="Calibri"/>
-              </a:defRPr>
-            </a:pPr>
-            <a:r>
-              <a:rPr sz="713" b="1">
-                <a:solidFill>
-                  <a:srgbClr val="0F172A"/>
-                </a:solidFill>
-                <a:latin typeface="+mj-lt"/>
-              </a:rPr>
-              <a:t>Stage 2: Automated Pytest Suite: </a:t>
-            </a:r>
-            <a:r>
-              <a:rPr sz="713">
-                <a:solidFill>
-                  <a:srgbClr val="334155"/>
-                </a:solidFill>
-                <a:latin typeface="+mj-lt"/>
-              </a:rPr>
-              <a:t>Executes all 28 automated test suites in isolated runner. Enforces 100% pass threshold prior to merge.</a:t>
-            </a:r>
-          </a:p>
-          <a:p>
-            <a:pPr>
-              <a:lnSpc>
-                <a:spcPct val="115000"/>
-              </a:lnSpc>
-              <a:spcAft>
-                <a:spcPts val="600"/>
-              </a:spcAft>
-              <a:defRPr sz="950">
-                <a:latin typeface="Calibri"/>
-              </a:defRPr>
-            </a:pPr>
-            <a:r>
-              <a:rPr sz="713" b="1">
-                <a:solidFill>
-                  <a:srgbClr val="0F172A"/>
-                </a:solidFill>
-                <a:latin typeface="+mj-lt"/>
-              </a:rPr>
-              <a:t>Stage 3: Production Client Build: </a:t>
-            </a:r>
-            <a:r>
-              <a:rPr sz="713">
-                <a:solidFill>
-                  <a:srgbClr val="334155"/>
-                </a:solidFill>
-                <a:latin typeface="+mj-lt"/>
-              </a:rPr>
-              <a:t>Compiles React production bundle via npm run build. Verifies asset minification and zero missing modules in dist/.</a:t>
-            </a:r>
-          </a:p>
-          <a:p>
-            <a:pPr>
-              <a:lnSpc>
-                <a:spcPct val="115000"/>
-              </a:lnSpc>
-              <a:spcAft>
-                <a:spcPts val="600"/>
-              </a:spcAft>
-              <a:defRPr sz="950">
-                <a:latin typeface="Calibri"/>
-              </a:defRPr>
-            </a:pPr>
-            <a:r>
-              <a:rPr sz="713" b="1">
-                <a:solidFill>
-                  <a:srgbClr val="0F172A"/>
-                </a:solidFill>
-                <a:latin typeface="+mj-lt"/>
-              </a:rPr>
-              <a:t>Stage 4: Container Packaging &amp; Rollout: </a:t>
-            </a:r>
-            <a:r>
-              <a:rPr sz="713">
-                <a:solidFill>
-                  <a:srgbClr val="334155"/>
-                </a:solidFill>
-                <a:latin typeface="+mj-lt"/>
-              </a:rPr>
-              <a:t>Multi-stage Docker build deployed with zero-downtime rolling update; automated rollback if /api/health probe fails.</a:t>
-            </a:r>
-          </a:p>
-        </p:txBody>
-      </p:sp>
-      <p:sp>
-        <p:nvSpPr>
-          <p:cNvPr id="10" name="Rectangle 9"/>
-          <p:cNvSpPr/>
-          <p:nvPr/>
-        </p:nvSpPr>
-        <p:spPr>
-          <a:xfrm>
-            <a:off x="3291840" y="1405889"/>
-            <a:ext cx="2558034" cy="68580"/>
-          </a:xfrm>
-          <a:prstGeom prst="rect">
-            <a:avLst/>
-          </a:prstGeom>
-          <a:solidFill>
-            <a:srgbClr val="1A365D"/>
-          </a:solidFill>
-          <a:ln>
-            <a:noFill/>
-          </a:ln>
-        </p:spPr>
-        <p:style>
-          <a:lnRef idx="1">
-            <a:schemeClr val="accent1"/>
-          </a:lnRef>
-          <a:fillRef idx="3">
-            <a:schemeClr val="accent1"/>
-          </a:fillRef>
-          <a:effectRef idx="2">
-            <a:schemeClr val="accent1"/>
-          </a:effectRef>
-          <a:fontRef idx="minor">
-            <a:schemeClr val="lt1"/>
-          </a:fontRef>
-        </p:style>
-        <p:txBody>
-          <a:bodyPr rtlCol="0" anchor="ctr"/>
-          <a:lstStyle/>
-          <a:p>
-            <a:pPr algn="ctr"/>
-            <a:endParaRPr sz="1350">
-              <a:latin typeface="+mj-lt"/>
-            </a:endParaRPr>
-          </a:p>
-        </p:txBody>
-      </p:sp>
-      <p:sp>
-        <p:nvSpPr>
-          <p:cNvPr id="11" name="Rounded Rectangle 10"/>
-          <p:cNvSpPr/>
-          <p:nvPr/>
-        </p:nvSpPr>
-        <p:spPr>
-          <a:xfrm>
-            <a:off x="6035040" y="1405889"/>
-            <a:ext cx="2558034" cy="3223260"/>
-          </a:xfrm>
-          <a:prstGeom prst="roundRect">
-            <a:avLst/>
-          </a:prstGeom>
-          <a:solidFill>
-            <a:srgbClr val="F8FAFC"/>
-          </a:solidFill>
-          <a:ln w="12700">
-            <a:solidFill>
-              <a:srgbClr val="E2E8F0"/>
-            </a:solidFill>
-          </a:ln>
-        </p:spPr>
-        <p:style>
-          <a:lnRef idx="1">
-            <a:schemeClr val="accent1"/>
-          </a:lnRef>
-          <a:fillRef idx="3">
-            <a:schemeClr val="accent1"/>
-          </a:fillRef>
-          <a:effectRef idx="2">
-            <a:schemeClr val="accent1"/>
-          </a:effectRef>
-          <a:fontRef idx="minor">
-            <a:schemeClr val="lt1"/>
-          </a:fontRef>
-        </p:style>
-        <p:txBody>
-          <a:bodyPr wrap="square" lIns="137160" tIns="123444" rIns="137160" rtlCol="0" anchor="ctr"/>
-          <a:lstStyle/>
-          <a:p>
-            <a:pPr algn="ctr">
-              <a:spcAft>
-                <a:spcPts val="750"/>
-              </a:spcAft>
-              <a:defRPr sz="1200" b="1">
-                <a:solidFill>
-                  <a:srgbClr val="1A365D"/>
-                </a:solidFill>
-                <a:latin typeface="Calibri"/>
-              </a:defRPr>
-            </a:pPr>
-            <a:r>
-              <a:rPr sz="900">
-                <a:latin typeface="+mj-lt"/>
-              </a:rPr>
-              <a:t>3. Operational Security &amp; Database Hardening</a:t>
-            </a:r>
-          </a:p>
-          <a:p>
-            <a:pPr>
-              <a:lnSpc>
-                <a:spcPct val="115000"/>
-              </a:lnSpc>
-              <a:spcAft>
-                <a:spcPts val="600"/>
-              </a:spcAft>
-              <a:defRPr sz="950">
-                <a:latin typeface="Calibri"/>
-              </a:defRPr>
-            </a:pPr>
-            <a:r>
-              <a:rPr sz="713" b="1">
-                <a:solidFill>
-                  <a:srgbClr val="0F172A"/>
-                </a:solidFill>
-                <a:latin typeface="+mj-lt"/>
-              </a:rPr>
-              <a:t>Row-Level Security (RLS): </a:t>
-            </a:r>
-            <a:r>
-              <a:rPr sz="713">
-                <a:solidFill>
-                  <a:srgbClr val="334155"/>
-                </a:solidFill>
-                <a:latin typeface="+mj-lt"/>
-              </a:rPr>
-              <a:t>Granular PostgreSQL RLS policies restrict table mutations. Public anon keys permitted read-only access for published events.</a:t>
-            </a:r>
-          </a:p>
-          <a:p>
-            <a:pPr>
-              <a:lnSpc>
-                <a:spcPct val="115000"/>
-              </a:lnSpc>
-              <a:spcAft>
-                <a:spcPts val="600"/>
-              </a:spcAft>
-              <a:defRPr sz="950">
-                <a:latin typeface="Calibri"/>
-              </a:defRPr>
-            </a:pPr>
-            <a:r>
-              <a:rPr sz="713" b="1">
-                <a:solidFill>
-                  <a:srgbClr val="0F172A"/>
-                </a:solidFill>
-                <a:latin typeface="+mj-lt"/>
-              </a:rPr>
-              <a:t>SQLite WAL Concurrency Tuning: </a:t>
-            </a:r>
-            <a:r>
-              <a:rPr sz="713">
-                <a:solidFill>
-                  <a:srgbClr val="334155"/>
-                </a:solidFill>
-                <a:latin typeface="+mj-lt"/>
-              </a:rPr>
-              <a:t>PRAGMA journal_mode = WAL enables concurrent readers without writer contention. PRAGMA busy_timeout = 5000 eliminates busy crashes.</a:t>
-            </a:r>
-          </a:p>
-          <a:p>
-            <a:pPr>
-              <a:lnSpc>
-                <a:spcPct val="115000"/>
-              </a:lnSpc>
-              <a:spcAft>
-                <a:spcPts val="600"/>
-              </a:spcAft>
-              <a:defRPr sz="950">
-                <a:latin typeface="Calibri"/>
-              </a:defRPr>
-            </a:pPr>
-            <a:r>
-              <a:rPr sz="713" b="1">
-                <a:solidFill>
-                  <a:srgbClr val="0F172A"/>
-                </a:solidFill>
-                <a:latin typeface="+mj-lt"/>
-              </a:rPr>
-              <a:t>Environment Segregation: </a:t>
-            </a:r>
-            <a:r>
-              <a:rPr sz="713">
-                <a:solidFill>
-                  <a:srgbClr val="334155"/>
-                </a:solidFill>
-                <a:latin typeface="+mj-lt"/>
-              </a:rPr>
-              <a:t>Strict .env isolation separates public client keys (VITE_SUPABASE_ANON_KEY) from backend secrets. CORS origin whitelisting.</a:t>
-            </a:r>
-          </a:p>
-          <a:p>
-            <a:pPr>
-              <a:lnSpc>
-                <a:spcPct val="115000"/>
-              </a:lnSpc>
-              <a:spcAft>
-                <a:spcPts val="600"/>
-              </a:spcAft>
-              <a:defRPr sz="950">
-                <a:latin typeface="Calibri"/>
-              </a:defRPr>
-            </a:pPr>
-            <a:r>
-              <a:rPr sz="713" b="1">
-                <a:solidFill>
-                  <a:srgbClr val="0F172A"/>
-                </a:solidFill>
-                <a:latin typeface="+mj-lt"/>
-              </a:rPr>
-              <a:t>Health Probes &amp; Telemetry: </a:t>
-            </a:r>
-            <a:r>
-              <a:rPr sz="713">
-                <a:solidFill>
-                  <a:srgbClr val="334155"/>
-                </a:solidFill>
-                <a:latin typeface="+mj-lt"/>
-              </a:rPr>
-              <a:t>GET /api/health continuously monitors database responsiveness and memory consumption for proactive operations.</a:t>
-            </a:r>
-          </a:p>
-        </p:txBody>
-      </p:sp>
-      <p:sp>
-        <p:nvSpPr>
-          <p:cNvPr id="12" name="Rectangle 11"/>
-          <p:cNvSpPr/>
-          <p:nvPr/>
-        </p:nvSpPr>
-        <p:spPr>
-          <a:xfrm>
-            <a:off x="6035040" y="1405889"/>
-            <a:ext cx="2558034" cy="68580"/>
-          </a:xfrm>
-          <a:prstGeom prst="rect">
-            <a:avLst/>
-          </a:prstGeom>
-          <a:solidFill>
-            <a:srgbClr val="0F172A"/>
-          </a:solidFill>
-          <a:ln>
-            <a:noFill/>
-          </a:ln>
-        </p:spPr>
-        <p:style>
-          <a:lnRef idx="1">
-            <a:schemeClr val="accent1"/>
-          </a:lnRef>
-          <a:fillRef idx="3">
-            <a:schemeClr val="accent1"/>
-          </a:fillRef>
-          <a:effectRef idx="2">
-            <a:schemeClr val="accent1"/>
-          </a:effectRef>
-          <a:fontRef idx="minor">
-            <a:schemeClr val="lt1"/>
-          </a:fontRef>
-        </p:style>
-        <p:txBody>
-          <a:bodyPr rtlCol="0" anchor="ctr"/>
-          <a:lstStyle/>
-          <a:p>
-            <a:pPr algn="ctr"/>
-            <a:endParaRPr sz="1350">
-              <a:latin typeface="+mj-lt"/>
-            </a:endParaRPr>
-          </a:p>
-        </p:txBody>
       </p:sp>
     </p:spTree>
-  </p:cSld>
-  <p:clrMapOvr>
-    <a:masterClrMapping/>
-  </p:clrMapOvr>
-</p:sld>
-</file>
-
-<file path=ppt/slides/slide13.xml><?xml version="1.0" encoding="utf-8"?>
-<p:sld xmlns:a="http://schemas.openxmlformats.org/drawingml/2006/main" xmlns:r="http://schemas.openxmlformats.org/officeDocument/2006/relationships" xmlns:p="http://schemas.openxmlformats.org/presentationml/2006/main">
-  <p:cSld>
-    <p:spTree>
-      <p:nvGrpSpPr>
-        <p:cNvPr id="1" name=""/>
-        <p:cNvGrpSpPr/>
-        <p:nvPr/>
-      </p:nvGrpSpPr>
-      <p:grpSpPr>
-        <a:xfrm>
-          <a:off x="0" y="0"/>
-          <a:ext cx="0" cy="0"/>
-          <a:chOff x="0" y="0"/>
-          <a:chExt cx="0" cy="0"/>
-        </a:xfrm>
-      </p:grpSpPr>
-      <p:sp>
-        <p:nvSpPr>
-          <p:cNvPr id="3" name="TextBox 2"/>
-          <p:cNvSpPr txBox="1"/>
-          <p:nvPr/>
-        </p:nvSpPr>
-        <p:spPr>
-          <a:xfrm>
-            <a:off x="548640" y="582931"/>
-            <a:ext cx="8023860" cy="418063"/>
-          </a:xfrm>
-          <a:prstGeom prst="rect">
-            <a:avLst/>
-          </a:prstGeom>
-          <a:noFill/>
-        </p:spPr>
-        <p:txBody>
-          <a:bodyPr wrap="square" lIns="0" tIns="0" rIns="0" bIns="0">
-            <a:spAutoFit/>
-          </a:bodyPr>
-          <a:lstStyle/>
-          <a:p>
-            <a:pPr>
-              <a:defRPr sz="2200" b="1">
-                <a:solidFill>
-                  <a:srgbClr val="1A365D"/>
-                </a:solidFill>
-                <a:latin typeface="Calibri"/>
-              </a:defRPr>
-            </a:pPr>
-            <a:r>
-              <a:rPr sz="1650">
-                <a:latin typeface="+mj-lt"/>
-              </a:rPr>
-              <a:t>Module 5: Performance Analysis &amp; Concurrency Benchmarks</a:t>
-            </a:r>
-          </a:p>
-          <a:p>
-            <a:pPr>
-              <a:spcBef>
-                <a:spcPts val="225"/>
-              </a:spcBef>
-              <a:defRPr sz="1200">
-                <a:solidFill>
-                  <a:srgbClr val="64748B"/>
-                </a:solidFill>
-                <a:latin typeface="Calibri"/>
-              </a:defRPr>
-            </a:pPr>
-            <a:r>
-              <a:rPr sz="900">
-                <a:latin typeface="+mj-lt"/>
-              </a:rPr>
-              <a:t>Computational complexity comparisons, empirical latency profiling, and stress-tested race condition mitigation</a:t>
-            </a:r>
-          </a:p>
-        </p:txBody>
-      </p:sp>
-      <p:sp>
-        <p:nvSpPr>
-          <p:cNvPr id="4" name="Rectangle 3"/>
-          <p:cNvSpPr/>
-          <p:nvPr/>
-        </p:nvSpPr>
-        <p:spPr>
-          <a:xfrm>
-            <a:off x="548640" y="1268730"/>
-            <a:ext cx="8044434" cy="13716"/>
-          </a:xfrm>
-          <a:prstGeom prst="rect">
-            <a:avLst/>
-          </a:prstGeom>
-          <a:solidFill>
-            <a:srgbClr val="E2E8F0"/>
-          </a:solidFill>
-          <a:ln>
-            <a:solidFill>
-              <a:srgbClr val="E2E8F0"/>
-            </a:solidFill>
-          </a:ln>
-        </p:spPr>
-        <p:style>
-          <a:lnRef idx="1">
-            <a:schemeClr val="accent1"/>
-          </a:lnRef>
-          <a:fillRef idx="3">
-            <a:schemeClr val="accent1"/>
-          </a:fillRef>
-          <a:effectRef idx="2">
-            <a:schemeClr val="accent1"/>
-          </a:effectRef>
-          <a:fontRef idx="minor">
-            <a:schemeClr val="lt1"/>
-          </a:fontRef>
-        </p:style>
-        <p:txBody>
-          <a:bodyPr rtlCol="0" anchor="ctr"/>
-          <a:lstStyle/>
-          <a:p>
-            <a:pPr algn="ctr"/>
-            <a:endParaRPr sz="1350">
-              <a:latin typeface="+mj-lt"/>
-            </a:endParaRPr>
-          </a:p>
-        </p:txBody>
-      </p:sp>
-      <p:sp>
-        <p:nvSpPr>
-          <p:cNvPr id="5" name="TextBox 4"/>
-          <p:cNvSpPr txBox="1"/>
-          <p:nvPr/>
-        </p:nvSpPr>
-        <p:spPr>
-          <a:xfrm>
-            <a:off x="548640" y="4800600"/>
-            <a:ext cx="5486400" cy="150041"/>
-          </a:xfrm>
-          <a:prstGeom prst="rect">
-            <a:avLst/>
-          </a:prstGeom>
-          <a:noFill/>
-        </p:spPr>
-        <p:txBody>
-          <a:bodyPr wrap="square" lIns="0" tIns="0">
-            <a:spAutoFit/>
-          </a:bodyPr>
-          <a:lstStyle/>
-          <a:p>
-            <a:pPr>
-              <a:defRPr sz="900">
-                <a:solidFill>
-                  <a:srgbClr val="64748B"/>
-                </a:solidFill>
-                <a:latin typeface="Calibri"/>
-              </a:defRPr>
-            </a:pPr>
-            <a:r>
-              <a:rPr sz="675">
-                <a:latin typeface="+mj-lt"/>
-              </a:rPr>
-              <a:t>CSA1021 - Software Engineering | Capstone Project 2026 | Saveetha School of Engineering (SIMATS)</a:t>
-            </a:r>
-          </a:p>
-        </p:txBody>
-      </p:sp>
-      <p:sp>
-        <p:nvSpPr>
-          <p:cNvPr id="6" name="TextBox 5"/>
-          <p:cNvSpPr txBox="1"/>
-          <p:nvPr/>
-        </p:nvSpPr>
-        <p:spPr>
-          <a:xfrm>
-            <a:off x="7200900" y="4800600"/>
-            <a:ext cx="1371600" cy="150041"/>
-          </a:xfrm>
-          <a:prstGeom prst="rect">
-            <a:avLst/>
-          </a:prstGeom>
-          <a:noFill/>
-        </p:spPr>
-        <p:txBody>
-          <a:bodyPr wrap="square" tIns="0" rIns="0">
-            <a:spAutoFit/>
-          </a:bodyPr>
-          <a:lstStyle/>
-          <a:p>
-            <a:pPr algn="r">
-              <a:defRPr sz="900">
-                <a:solidFill>
-                  <a:srgbClr val="64748B"/>
-                </a:solidFill>
-                <a:latin typeface="Calibri"/>
-              </a:defRPr>
-            </a:pPr>
-            <a:r>
-              <a:rPr sz="675">
-                <a:latin typeface="+mj-lt"/>
-              </a:rPr>
-              <a:t>Slide 13 of 13</a:t>
-            </a:r>
-          </a:p>
-        </p:txBody>
-      </p:sp>
-      <p:graphicFrame>
-        <p:nvGraphicFramePr>
-          <p:cNvPr id="7" name="Table 6"/>
-          <p:cNvGraphicFramePr>
-            <a:graphicFrameLocks noGrp="1"/>
-          </p:cNvGraphicFramePr>
-          <p:nvPr/>
-        </p:nvGraphicFramePr>
-        <p:xfrm>
-          <a:off x="548640" y="1405889"/>
-          <a:ext cx="8044434" cy="1474470"/>
-        </p:xfrm>
-        <a:graphic>
-          <a:graphicData uri="http://schemas.openxmlformats.org/drawingml/2006/table">
-            <a:tbl>
-              <a:tblPr firstRow="1" bandRow="1">
-                <a:tableStyleId>{5C22544A-7EE6-4342-B048-85BDC9FD1C3A}</a:tableStyleId>
-              </a:tblPr>
-              <a:tblGrid>
-                <a:gridCol w="1920240">
-                  <a:extLst>
-                    <a:ext uri="{9D8B030D-6E8A-4147-A177-3AD203B41FA5}">
-                      <a16:colId xmlns:a16="http://schemas.microsoft.com/office/drawing/2014/main" val="20000"/>
-                    </a:ext>
-                  </a:extLst>
-                </a:gridCol>
-                <a:gridCol w="1577340">
-                  <a:extLst>
-                    <a:ext uri="{9D8B030D-6E8A-4147-A177-3AD203B41FA5}">
-                      <a16:colId xmlns:a16="http://schemas.microsoft.com/office/drawing/2014/main" val="20001"/>
-                    </a:ext>
-                  </a:extLst>
-                </a:gridCol>
-                <a:gridCol w="1645920">
-                  <a:extLst>
-                    <a:ext uri="{9D8B030D-6E8A-4147-A177-3AD203B41FA5}">
-                      <a16:colId xmlns:a16="http://schemas.microsoft.com/office/drawing/2014/main" val="20002"/>
-                    </a:ext>
-                  </a:extLst>
-                </a:gridCol>
-                <a:gridCol w="1440180">
-                  <a:extLst>
-                    <a:ext uri="{9D8B030D-6E8A-4147-A177-3AD203B41FA5}">
-                      <a16:colId xmlns:a16="http://schemas.microsoft.com/office/drawing/2014/main" val="20003"/>
-                    </a:ext>
-                  </a:extLst>
-                </a:gridCol>
-                <a:gridCol w="1460754">
-                  <a:extLst>
-                    <a:ext uri="{9D8B030D-6E8A-4147-A177-3AD203B41FA5}">
-                      <a16:colId xmlns:a16="http://schemas.microsoft.com/office/drawing/2014/main" val="20004"/>
-                    </a:ext>
-                  </a:extLst>
-                </a:gridCol>
-              </a:tblGrid>
-              <a:tr h="294894">
-                <a:tc>
-                  <a:txBody>
-                    <a:bodyPr/>
-                    <a:lstStyle/>
-                    <a:p>
-                      <a:pPr>
-                        <a:defRPr sz="1000" b="1">
-                          <a:solidFill>
-                            <a:srgbClr val="FFFFFF"/>
-                          </a:solidFill>
-                          <a:latin typeface="Calibri"/>
-                        </a:defRPr>
-                      </a:pPr>
-                      <a:r>
-                        <a:rPr sz="800"/>
-                        <a:t>Scheduling Methodology</a:t>
-                      </a:r>
-                    </a:p>
-                  </a:txBody>
-                  <a:tcPr marL="68580" marR="68580" marT="34290" marB="34290">
-                    <a:solidFill>
-                      <a:srgbClr val="1A365D"/>
-                    </a:solidFill>
-                  </a:tcPr>
-                </a:tc>
-                <a:tc>
-                  <a:txBody>
-                    <a:bodyPr/>
-                    <a:lstStyle/>
-                    <a:p>
-                      <a:pPr>
-                        <a:defRPr sz="1000" b="1">
-                          <a:solidFill>
-                            <a:srgbClr val="FFFFFF"/>
-                          </a:solidFill>
-                          <a:latin typeface="Calibri"/>
-                        </a:defRPr>
-                      </a:pPr>
-                      <a:r>
-                        <a:rPr sz="800"/>
-                        <a:t>Single Collision Check</a:t>
-                      </a:r>
-                    </a:p>
-                  </a:txBody>
-                  <a:tcPr marL="68580" marR="68580" marT="34290" marB="34290">
-                    <a:solidFill>
-                      <a:srgbClr val="1A365D"/>
-                    </a:solidFill>
-                  </a:tcPr>
-                </a:tc>
-                <a:tc>
-                  <a:txBody>
-                    <a:bodyPr/>
-                    <a:lstStyle/>
-                    <a:p>
-                      <a:pPr>
-                        <a:defRPr sz="1000" b="1">
-                          <a:solidFill>
-                            <a:srgbClr val="FFFFFF"/>
-                          </a:solidFill>
-                          <a:latin typeface="Calibri"/>
-                        </a:defRPr>
-                      </a:pPr>
-                      <a:r>
-                        <a:rPr sz="800"/>
-                        <a:t>Batch Optimization</a:t>
-                      </a:r>
-                    </a:p>
-                  </a:txBody>
-                  <a:tcPr marL="68580" marR="68580" marT="34290" marB="34290">
-                    <a:solidFill>
-                      <a:srgbClr val="1A365D"/>
-                    </a:solidFill>
-                  </a:tcPr>
-                </a:tc>
-                <a:tc>
-                  <a:txBody>
-                    <a:bodyPr/>
-                    <a:lstStyle/>
-                    <a:p>
-                      <a:pPr>
-                        <a:defRPr sz="1000" b="1">
-                          <a:solidFill>
-                            <a:srgbClr val="FFFFFF"/>
-                          </a:solidFill>
-                          <a:latin typeface="Calibri"/>
-                        </a:defRPr>
-                      </a:pPr>
-                      <a:r>
-                        <a:rPr sz="800"/>
-                        <a:t>Time for 10,000 Ops</a:t>
-                      </a:r>
-                    </a:p>
-                  </a:txBody>
-                  <a:tcPr marL="68580" marR="68580" marT="34290" marB="34290">
-                    <a:solidFill>
-                      <a:srgbClr val="1A365D"/>
-                    </a:solidFill>
-                  </a:tcPr>
-                </a:tc>
-                <a:tc>
-                  <a:txBody>
-                    <a:bodyPr/>
-                    <a:lstStyle/>
-                    <a:p>
-                      <a:pPr>
-                        <a:defRPr sz="1000" b="1">
-                          <a:solidFill>
-                            <a:srgbClr val="FFFFFF"/>
-                          </a:solidFill>
-                          <a:latin typeface="Calibri"/>
-                        </a:defRPr>
-                      </a:pPr>
-                      <a:r>
-                        <a:rPr sz="800"/>
-                        <a:t>TOCTOU Race Safety</a:t>
-                      </a:r>
-                    </a:p>
-                  </a:txBody>
-                  <a:tcPr marL="68580" marR="68580" marT="34290" marB="34290">
-                    <a:solidFill>
-                      <a:srgbClr val="1A365D"/>
-                    </a:solidFill>
-                  </a:tcPr>
-                </a:tc>
-                <a:extLst>
-                  <a:ext uri="{0D108BD9-81ED-4DB2-BD59-A6C34878D82A}">
-                    <a16:rowId xmlns:a16="http://schemas.microsoft.com/office/drawing/2014/main" val="10000"/>
-                  </a:ext>
-                </a:extLst>
-              </a:tr>
-              <a:tr h="294894">
-                <a:tc>
-                  <a:txBody>
-                    <a:bodyPr/>
-                    <a:lstStyle/>
-                    <a:p>
-                      <a:pPr>
-                        <a:defRPr sz="900" b="1">
-                          <a:solidFill>
-                            <a:srgbClr val="0F172A"/>
-                          </a:solidFill>
-                          <a:latin typeface="Calibri"/>
-                        </a:defRPr>
-                      </a:pPr>
-                      <a:r>
-                        <a:rPr sz="700"/>
-                        <a:t>Manual Spreadsheets / Paper Forms</a:t>
-                      </a:r>
-                    </a:p>
-                  </a:txBody>
-                  <a:tcPr marL="68580" marR="68580" marT="34290" marB="34290">
-                    <a:solidFill>
-                      <a:srgbClr val="F8FAFC"/>
-                    </a:solidFill>
-                  </a:tcPr>
-                </a:tc>
-                <a:tc>
-                  <a:txBody>
-                    <a:bodyPr/>
-                    <a:lstStyle/>
-                    <a:p>
-                      <a:pPr>
-                        <a:defRPr sz="900">
-                          <a:solidFill>
-                            <a:srgbClr val="334155"/>
-                          </a:solidFill>
-                          <a:latin typeface="Calibri"/>
-                        </a:defRPr>
-                      </a:pPr>
-                      <a:r>
-                        <a:rPr sz="700"/>
-                        <a:t>O(N) (Manual lookup)</a:t>
-                      </a:r>
-                    </a:p>
-                  </a:txBody>
-                  <a:tcPr marL="68580" marR="68580" marT="34290" marB="34290">
-                    <a:solidFill>
-                      <a:srgbClr val="F8FAFC"/>
-                    </a:solidFill>
-                  </a:tcPr>
-                </a:tc>
-                <a:tc>
-                  <a:txBody>
-                    <a:bodyPr/>
-                    <a:lstStyle/>
-                    <a:p>
-                      <a:pPr>
-                        <a:defRPr sz="900">
-                          <a:solidFill>
-                            <a:srgbClr val="334155"/>
-                          </a:solidFill>
-                          <a:latin typeface="Calibri"/>
-                        </a:defRPr>
-                      </a:pPr>
-                      <a:r>
-                        <a:rPr sz="700"/>
-                        <a:t>Unbounded (Manual)</a:t>
-                      </a:r>
-                    </a:p>
-                  </a:txBody>
-                  <a:tcPr marL="68580" marR="68580" marT="34290" marB="34290">
-                    <a:solidFill>
-                      <a:srgbClr val="F8FAFC"/>
-                    </a:solidFill>
-                  </a:tcPr>
-                </a:tc>
-                <a:tc>
-                  <a:txBody>
-                    <a:bodyPr/>
-                    <a:lstStyle/>
-                    <a:p>
-                      <a:pPr>
-                        <a:defRPr sz="900">
-                          <a:solidFill>
-                            <a:srgbClr val="334155"/>
-                          </a:solidFill>
-                          <a:latin typeface="Calibri"/>
-                        </a:defRPr>
-                      </a:pPr>
-                      <a:r>
-                        <a:rPr sz="700"/>
-                        <a:t>Minutes to Days</a:t>
-                      </a:r>
-                    </a:p>
-                  </a:txBody>
-                  <a:tcPr marL="68580" marR="68580" marT="34290" marB="34290">
-                    <a:solidFill>
-                      <a:srgbClr val="F8FAFC"/>
-                    </a:solidFill>
-                  </a:tcPr>
-                </a:tc>
-                <a:tc>
-                  <a:txBody>
-                    <a:bodyPr/>
-                    <a:lstStyle/>
-                    <a:p>
-                      <a:pPr>
-                        <a:defRPr sz="900">
-                          <a:solidFill>
-                            <a:srgbClr val="334155"/>
-                          </a:solidFill>
-                          <a:latin typeface="Calibri"/>
-                        </a:defRPr>
-                      </a:pPr>
-                      <a:r>
-                        <a:rPr sz="700"/>
-                        <a:t>Zero (High Collision)</a:t>
-                      </a:r>
-                    </a:p>
-                  </a:txBody>
-                  <a:tcPr marL="68580" marR="68580" marT="34290" marB="34290">
-                    <a:solidFill>
-                      <a:srgbClr val="F8FAFC"/>
-                    </a:solidFill>
-                  </a:tcPr>
-                </a:tc>
-                <a:extLst>
-                  <a:ext uri="{0D108BD9-81ED-4DB2-BD59-A6C34878D82A}">
-                    <a16:rowId xmlns:a16="http://schemas.microsoft.com/office/drawing/2014/main" val="10001"/>
-                  </a:ext>
-                </a:extLst>
-              </a:tr>
-              <a:tr h="294894">
-                <a:tc>
-                  <a:txBody>
-                    <a:bodyPr/>
-                    <a:lstStyle/>
-                    <a:p>
-                      <a:pPr>
-                        <a:defRPr sz="900" b="1">
-                          <a:solidFill>
-                            <a:srgbClr val="0F172A"/>
-                          </a:solidFill>
-                          <a:latin typeface="Calibri"/>
-                        </a:defRPr>
-                      </a:pPr>
-                      <a:r>
-                        <a:rPr sz="700"/>
-                        <a:t>Naive SQL Linear Scan</a:t>
-                      </a:r>
-                    </a:p>
-                  </a:txBody>
-                  <a:tcPr marL="68580" marR="68580" marT="34290" marB="34290">
-                    <a:solidFill>
-                      <a:srgbClr val="FFFFFF"/>
-                    </a:solidFill>
-                  </a:tcPr>
-                </a:tc>
-                <a:tc>
-                  <a:txBody>
-                    <a:bodyPr/>
-                    <a:lstStyle/>
-                    <a:p>
-                      <a:pPr>
-                        <a:defRPr sz="900">
-                          <a:solidFill>
-                            <a:srgbClr val="334155"/>
-                          </a:solidFill>
-                          <a:latin typeface="Calibri"/>
-                        </a:defRPr>
-                      </a:pPr>
-                      <a:r>
-                        <a:rPr sz="700"/>
-                        <a:t>O(N) table scan</a:t>
-                      </a:r>
-                    </a:p>
-                  </a:txBody>
-                  <a:tcPr marL="68580" marR="68580" marT="34290" marB="34290">
-                    <a:solidFill>
-                      <a:srgbClr val="FFFFFF"/>
-                    </a:solidFill>
-                  </a:tcPr>
-                </a:tc>
-                <a:tc>
-                  <a:txBody>
-                    <a:bodyPr/>
-                    <a:lstStyle/>
-                    <a:p>
-                      <a:pPr>
-                        <a:defRPr sz="900">
-                          <a:solidFill>
-                            <a:srgbClr val="334155"/>
-                          </a:solidFill>
-                          <a:latin typeface="Calibri"/>
-                        </a:defRPr>
-                      </a:pPr>
-                      <a:r>
-                        <a:rPr sz="700"/>
-                        <a:t>O(N^2) pairwise compare</a:t>
-                      </a:r>
-                    </a:p>
-                  </a:txBody>
-                  <a:tcPr marL="68580" marR="68580" marT="34290" marB="34290">
-                    <a:solidFill>
-                      <a:srgbClr val="FFFFFF"/>
-                    </a:solidFill>
-                  </a:tcPr>
-                </a:tc>
-                <a:tc>
-                  <a:txBody>
-                    <a:bodyPr/>
-                    <a:lstStyle/>
-                    <a:p>
-                      <a:pPr>
-                        <a:defRPr sz="900">
-                          <a:solidFill>
-                            <a:srgbClr val="334155"/>
-                          </a:solidFill>
-                          <a:latin typeface="Calibri"/>
-                        </a:defRPr>
-                      </a:pPr>
-                      <a:r>
-                        <a:rPr sz="700"/>
-                        <a:t>42.3 ms</a:t>
-                      </a:r>
-                    </a:p>
-                  </a:txBody>
-                  <a:tcPr marL="68580" marR="68580" marT="34290" marB="34290">
-                    <a:solidFill>
-                      <a:srgbClr val="FFFFFF"/>
-                    </a:solidFill>
-                  </a:tcPr>
-                </a:tc>
-                <a:tc>
-                  <a:txBody>
-                    <a:bodyPr/>
-                    <a:lstStyle/>
-                    <a:p>
-                      <a:pPr>
-                        <a:defRPr sz="900">
-                          <a:solidFill>
-                            <a:srgbClr val="334155"/>
-                          </a:solidFill>
-                          <a:latin typeface="Calibri"/>
-                        </a:defRPr>
-                      </a:pPr>
-                      <a:r>
-                        <a:rPr sz="700"/>
-                        <a:t>Vulnerable (Interleaved)</a:t>
-                      </a:r>
-                    </a:p>
-                  </a:txBody>
-                  <a:tcPr marL="68580" marR="68580" marT="34290" marB="34290">
-                    <a:solidFill>
-                      <a:srgbClr val="FFFFFF"/>
-                    </a:solidFill>
-                  </a:tcPr>
-                </a:tc>
-                <a:extLst>
-                  <a:ext uri="{0D108BD9-81ED-4DB2-BD59-A6C34878D82A}">
-                    <a16:rowId xmlns:a16="http://schemas.microsoft.com/office/drawing/2014/main" val="10002"/>
-                  </a:ext>
-                </a:extLst>
-              </a:tr>
-              <a:tr h="294894">
-                <a:tc>
-                  <a:txBody>
-                    <a:bodyPr/>
-                    <a:lstStyle/>
-                    <a:p>
-                      <a:pPr>
-                        <a:defRPr sz="900" b="1">
-                          <a:solidFill>
-                            <a:srgbClr val="0F172A"/>
-                          </a:solidFill>
-                          <a:latin typeface="Calibri"/>
-                        </a:defRPr>
-                      </a:pPr>
-                      <a:r>
-                        <a:rPr sz="700"/>
-                        <a:t>Genetic Algorithm (Literature 2025)</a:t>
-                      </a:r>
-                    </a:p>
-                  </a:txBody>
-                  <a:tcPr marL="68580" marR="68580" marT="34290" marB="34290">
-                    <a:solidFill>
-                      <a:srgbClr val="F8FAFC"/>
-                    </a:solidFill>
-                  </a:tcPr>
-                </a:tc>
-                <a:tc>
-                  <a:txBody>
-                    <a:bodyPr/>
-                    <a:lstStyle/>
-                    <a:p>
-                      <a:pPr>
-                        <a:defRPr sz="900">
-                          <a:solidFill>
-                            <a:srgbClr val="334155"/>
-                          </a:solidFill>
-                          <a:latin typeface="Calibri"/>
-                        </a:defRPr>
-                      </a:pPr>
-                      <a:r>
-                        <a:rPr sz="700"/>
-                        <a:t>O(G · P · C) stochastic</a:t>
-                      </a:r>
-                    </a:p>
-                  </a:txBody>
-                  <a:tcPr marL="68580" marR="68580" marT="34290" marB="34290">
-                    <a:solidFill>
-                      <a:srgbClr val="F8FAFC"/>
-                    </a:solidFill>
-                  </a:tcPr>
-                </a:tc>
-                <a:tc>
-                  <a:txBody>
-                    <a:bodyPr/>
-                    <a:lstStyle/>
-                    <a:p>
-                      <a:pPr>
-                        <a:defRPr sz="900">
-                          <a:solidFill>
-                            <a:srgbClr val="334155"/>
-                          </a:solidFill>
-                          <a:latin typeface="Calibri"/>
-                        </a:defRPr>
-                      </a:pPr>
-                      <a:r>
-                        <a:rPr sz="700"/>
-                        <a:t>O(G · P · C) heuristic</a:t>
-                      </a:r>
-                    </a:p>
-                  </a:txBody>
-                  <a:tcPr marL="68580" marR="68580" marT="34290" marB="34290">
-                    <a:solidFill>
-                      <a:srgbClr val="F8FAFC"/>
-                    </a:solidFill>
-                  </a:tcPr>
-                </a:tc>
-                <a:tc>
-                  <a:txBody>
-                    <a:bodyPr/>
-                    <a:lstStyle/>
-                    <a:p>
-                      <a:pPr>
-                        <a:defRPr sz="900">
-                          <a:solidFill>
-                            <a:srgbClr val="334155"/>
-                          </a:solidFill>
-                          <a:latin typeface="Calibri"/>
-                        </a:defRPr>
-                      </a:pPr>
-                      <a:r>
-                        <a:rPr sz="700"/>
-                        <a:t>~2,400 ms</a:t>
-                      </a:r>
-                    </a:p>
-                  </a:txBody>
-                  <a:tcPr marL="68580" marR="68580" marT="34290" marB="34290">
-                    <a:solidFill>
-                      <a:srgbClr val="F8FAFC"/>
-                    </a:solidFill>
-                  </a:tcPr>
-                </a:tc>
-                <a:tc>
-                  <a:txBody>
-                    <a:bodyPr/>
-                    <a:lstStyle/>
-                    <a:p>
-                      <a:pPr>
-                        <a:defRPr sz="900">
-                          <a:solidFill>
-                            <a:srgbClr val="334155"/>
-                          </a:solidFill>
-                          <a:latin typeface="Calibri"/>
-                        </a:defRPr>
-                      </a:pPr>
-                      <a:r>
-                        <a:rPr sz="700"/>
-                        <a:t>Vulnerable (High Latency)</a:t>
-                      </a:r>
-                    </a:p>
-                  </a:txBody>
-                  <a:tcPr marL="68580" marR="68580" marT="34290" marB="34290">
-                    <a:solidFill>
-                      <a:srgbClr val="F8FAFC"/>
-                    </a:solidFill>
-                  </a:tcPr>
-                </a:tc>
-                <a:extLst>
-                  <a:ext uri="{0D108BD9-81ED-4DB2-BD59-A6C34878D82A}">
-                    <a16:rowId xmlns:a16="http://schemas.microsoft.com/office/drawing/2014/main" val="10003"/>
-                  </a:ext>
-                </a:extLst>
-              </a:tr>
-              <a:tr h="294894">
-                <a:tc>
-                  <a:txBody>
-                    <a:bodyPr/>
-                    <a:lstStyle/>
-                    <a:p>
-                      <a:pPr>
-                        <a:defRPr sz="900" b="1">
-                          <a:solidFill>
-                            <a:srgbClr val="312E81"/>
-                          </a:solidFill>
-                          <a:latin typeface="Calibri"/>
-                        </a:defRPr>
-                      </a:pPr>
-                      <a:r>
-                        <a:rPr sz="700"/>
-                        <a:t>EventFlow Interval Engine (Proposed)</a:t>
-                      </a:r>
-                    </a:p>
-                  </a:txBody>
-                  <a:tcPr marL="68580" marR="68580" marT="34290" marB="34290">
-                    <a:solidFill>
-                      <a:srgbClr val="EEF2FF"/>
-                    </a:solidFill>
-                  </a:tcPr>
-                </a:tc>
-                <a:tc>
-                  <a:txBody>
-                    <a:bodyPr/>
-                    <a:lstStyle/>
-                    <a:p>
-                      <a:pPr>
-                        <a:defRPr sz="900" b="1">
-                          <a:solidFill>
-                            <a:srgbClr val="312E81"/>
-                          </a:solidFill>
-                          <a:latin typeface="Calibri"/>
-                        </a:defRPr>
-                      </a:pPr>
-                      <a:r>
-                        <a:rPr sz="700"/>
-                        <a:t>O(log N) bisection</a:t>
-                      </a:r>
-                    </a:p>
-                  </a:txBody>
-                  <a:tcPr marL="68580" marR="68580" marT="34290" marB="34290">
-                    <a:solidFill>
-                      <a:srgbClr val="EEF2FF"/>
-                    </a:solidFill>
-                  </a:tcPr>
-                </a:tc>
-                <a:tc>
-                  <a:txBody>
-                    <a:bodyPr/>
-                    <a:lstStyle/>
-                    <a:p>
-                      <a:pPr>
-                        <a:defRPr sz="900" b="1">
-                          <a:solidFill>
-                            <a:srgbClr val="312E81"/>
-                          </a:solidFill>
-                          <a:latin typeface="Calibri"/>
-                        </a:defRPr>
-                      </a:pPr>
-                      <a:r>
-                        <a:rPr sz="700"/>
-                        <a:t>O(M log M) Greedy EFT</a:t>
-                      </a:r>
-                    </a:p>
-                  </a:txBody>
-                  <a:tcPr marL="68580" marR="68580" marT="34290" marB="34290">
-                    <a:solidFill>
-                      <a:srgbClr val="EEF2FF"/>
-                    </a:solidFill>
-                  </a:tcPr>
-                </a:tc>
-                <a:tc>
-                  <a:txBody>
-                    <a:bodyPr/>
-                    <a:lstStyle/>
-                    <a:p>
-                      <a:pPr>
-                        <a:defRPr sz="900" b="1">
-                          <a:solidFill>
-                            <a:srgbClr val="312E81"/>
-                          </a:solidFill>
-                          <a:latin typeface="Calibri"/>
-                        </a:defRPr>
-                      </a:pPr>
-                      <a:r>
-                        <a:rPr sz="700"/>
-                        <a:t>1.42 ms</a:t>
-                      </a:r>
-                    </a:p>
-                  </a:txBody>
-                  <a:tcPr marL="68580" marR="68580" marT="34290" marB="34290">
-                    <a:solidFill>
-                      <a:srgbClr val="EEF2FF"/>
-                    </a:solidFill>
-                  </a:tcPr>
-                </a:tc>
-                <a:tc>
-                  <a:txBody>
-                    <a:bodyPr/>
-                    <a:lstStyle/>
-                    <a:p>
-                      <a:pPr>
-                        <a:defRPr sz="900" b="1">
-                          <a:solidFill>
-                            <a:srgbClr val="312E81"/>
-                          </a:solidFill>
-                          <a:latin typeface="Calibri"/>
-                        </a:defRPr>
-                      </a:pPr>
-                      <a:r>
-                        <a:rPr sz="700"/>
-                        <a:t>100% Safe (Atomic Lock)</a:t>
-                      </a:r>
-                    </a:p>
-                  </a:txBody>
-                  <a:tcPr marL="68580" marR="68580" marT="34290" marB="34290">
-                    <a:solidFill>
-                      <a:srgbClr val="EEF2FF"/>
-                    </a:solidFill>
-                  </a:tcPr>
-                </a:tc>
-                <a:extLst>
-                  <a:ext uri="{0D108BD9-81ED-4DB2-BD59-A6C34878D82A}">
-                    <a16:rowId xmlns:a16="http://schemas.microsoft.com/office/drawing/2014/main" val="10004"/>
-                  </a:ext>
-                </a:extLst>
-              </a:tr>
-            </a:tbl>
-          </a:graphicData>
-        </a:graphic>
-      </p:graphicFrame>
-      <p:sp>
-        <p:nvSpPr>
-          <p:cNvPr id="8" name="Rounded Rectangle 7"/>
-          <p:cNvSpPr/>
-          <p:nvPr/>
-        </p:nvSpPr>
-        <p:spPr>
-          <a:xfrm>
-            <a:off x="548640" y="2983229"/>
-            <a:ext cx="2558034" cy="1645920"/>
-          </a:xfrm>
-          <a:prstGeom prst="roundRect">
-            <a:avLst/>
-          </a:prstGeom>
-          <a:solidFill>
-            <a:srgbClr val="F8FAFC"/>
-          </a:solidFill>
-          <a:ln w="12700">
-            <a:solidFill>
-              <a:srgbClr val="E2E8F0"/>
-            </a:solidFill>
-          </a:ln>
-        </p:spPr>
-        <p:style>
-          <a:lnRef idx="1">
-            <a:schemeClr val="accent1"/>
-          </a:lnRef>
-          <a:fillRef idx="3">
-            <a:schemeClr val="accent1"/>
-          </a:fillRef>
-          <a:effectRef idx="2">
-            <a:schemeClr val="accent1"/>
-          </a:effectRef>
-          <a:fontRef idx="minor">
-            <a:schemeClr val="lt1"/>
-          </a:fontRef>
-        </p:style>
-        <p:txBody>
-          <a:bodyPr wrap="square" lIns="137160" tIns="109728" rIns="137160" rtlCol="0" anchor="ctr"/>
-          <a:lstStyle/>
-          <a:p>
-            <a:pPr algn="ctr">
-              <a:spcAft>
-                <a:spcPts val="450"/>
-              </a:spcAft>
-              <a:defRPr sz="1150" b="1">
-                <a:solidFill>
-                  <a:srgbClr val="1A365D"/>
-                </a:solidFill>
-                <a:latin typeface="Calibri"/>
-              </a:defRPr>
-            </a:pPr>
-            <a:r>
-              <a:rPr sz="863">
-                <a:latin typeface="+mj-lt"/>
-              </a:rPr>
-              <a:t>1. Empirical Latency Profiling</a:t>
-            </a:r>
-          </a:p>
-          <a:p>
-            <a:pPr>
-              <a:lnSpc>
-                <a:spcPct val="118000"/>
-              </a:lnSpc>
-              <a:defRPr sz="919">
-                <a:solidFill>
-                  <a:srgbClr val="334155"/>
-                </a:solidFill>
-                <a:latin typeface="Calibri"/>
-              </a:defRPr>
-            </a:pPr>
-            <a:r>
-              <a:rPr sz="689">
-                <a:latin typeface="+mj-lt"/>
-              </a:rPr>
-              <a:t>Collision Evaluation Latency: 1.42 ms average in-memory binary search check.</a:t>
-            </a:r>
-            <a:br>
-              <a:rPr sz="689">
-                <a:latin typeface="+mj-lt"/>
-              </a:rPr>
-            </a:br>
-            <a:r>
-              <a:rPr sz="689">
-                <a:latin typeface="+mj-lt"/>
-              </a:rPr>
-              <a:t>HTTP API Response (p95): 18.6 ms (24.1 ms p99) under active load.</a:t>
-            </a:r>
-            <a:br>
-              <a:rPr sz="689">
-                <a:latin typeface="+mj-lt"/>
-              </a:rPr>
-            </a:br>
-            <a:r>
-              <a:rPr sz="689">
-                <a:latin typeface="+mj-lt"/>
-              </a:rPr>
-              <a:t>Database Commit Latency: 3.8 ms (SQLite WAL) / 12.4 ms (Supabase Cloud).</a:t>
-            </a:r>
-            <a:br>
-              <a:rPr sz="689">
-                <a:latin typeface="+mj-lt"/>
-              </a:rPr>
-            </a:br>
-            <a:r>
-              <a:rPr sz="689">
-                <a:latin typeface="+mj-lt"/>
-              </a:rPr>
-              <a:t>Client Ticket QR Render: 8.2 ms instant canvas generation.</a:t>
-            </a:r>
-            <a:br>
-              <a:rPr sz="689">
-                <a:latin typeface="+mj-lt"/>
-              </a:rPr>
-            </a:br>
-            <a:r>
-              <a:rPr sz="689">
-                <a:latin typeface="+mj-lt"/>
-              </a:rPr>
-              <a:t>CSV Roster Export: 14.5 ms to format and stream 1,000 attendee records.</a:t>
-            </a:r>
-          </a:p>
-        </p:txBody>
-      </p:sp>
-      <p:sp>
-        <p:nvSpPr>
-          <p:cNvPr id="9" name="Rectangle 8"/>
-          <p:cNvSpPr/>
-          <p:nvPr/>
-        </p:nvSpPr>
-        <p:spPr>
-          <a:xfrm>
-            <a:off x="548640" y="2983229"/>
-            <a:ext cx="2558034" cy="54864"/>
-          </a:xfrm>
-          <a:prstGeom prst="rect">
-            <a:avLst/>
-          </a:prstGeom>
-          <a:solidFill>
-            <a:srgbClr val="2563EB"/>
-          </a:solidFill>
-          <a:ln>
-            <a:noFill/>
-          </a:ln>
-        </p:spPr>
-        <p:style>
-          <a:lnRef idx="1">
-            <a:schemeClr val="accent1"/>
-          </a:lnRef>
-          <a:fillRef idx="3">
-            <a:schemeClr val="accent1"/>
-          </a:fillRef>
-          <a:effectRef idx="2">
-            <a:schemeClr val="accent1"/>
-          </a:effectRef>
-          <a:fontRef idx="minor">
-            <a:schemeClr val="lt1"/>
-          </a:fontRef>
-        </p:style>
-        <p:txBody>
-          <a:bodyPr rtlCol="0" anchor="ctr"/>
-          <a:lstStyle/>
-          <a:p>
-            <a:pPr algn="ctr"/>
-            <a:endParaRPr sz="1350">
-              <a:latin typeface="+mj-lt"/>
-            </a:endParaRPr>
-          </a:p>
-        </p:txBody>
-      </p:sp>
-      <p:sp>
-        <p:nvSpPr>
-          <p:cNvPr id="10" name="Rounded Rectangle 9"/>
-          <p:cNvSpPr/>
-          <p:nvPr/>
-        </p:nvSpPr>
-        <p:spPr>
-          <a:xfrm>
-            <a:off x="3291840" y="2983229"/>
-            <a:ext cx="2558034" cy="1645920"/>
-          </a:xfrm>
-          <a:prstGeom prst="roundRect">
-            <a:avLst/>
-          </a:prstGeom>
-          <a:solidFill>
-            <a:srgbClr val="F8FAFC"/>
-          </a:solidFill>
-          <a:ln w="12700">
-            <a:solidFill>
-              <a:srgbClr val="E2E8F0"/>
-            </a:solidFill>
-          </a:ln>
-        </p:spPr>
-        <p:style>
-          <a:lnRef idx="1">
-            <a:schemeClr val="accent1"/>
-          </a:lnRef>
-          <a:fillRef idx="3">
-            <a:schemeClr val="accent1"/>
-          </a:fillRef>
-          <a:effectRef idx="2">
-            <a:schemeClr val="accent1"/>
-          </a:effectRef>
-          <a:fontRef idx="minor">
-            <a:schemeClr val="lt1"/>
-          </a:fontRef>
-        </p:style>
-        <p:txBody>
-          <a:bodyPr wrap="square" lIns="137160" tIns="109728" rIns="137160" rtlCol="0" anchor="ctr"/>
-          <a:lstStyle/>
-          <a:p>
-            <a:pPr algn="ctr">
-              <a:spcAft>
-                <a:spcPts val="450"/>
-              </a:spcAft>
-              <a:defRPr sz="1150" b="1">
-                <a:solidFill>
-                  <a:srgbClr val="1A365D"/>
-                </a:solidFill>
-                <a:latin typeface="Calibri"/>
-              </a:defRPr>
-            </a:pPr>
-            <a:r>
-              <a:rPr sz="863">
-                <a:latin typeface="+mj-lt"/>
-              </a:rPr>
-              <a:t>2. High-Concurrency Stress Testing</a:t>
-            </a:r>
-          </a:p>
-          <a:p>
-            <a:pPr>
-              <a:lnSpc>
-                <a:spcPct val="118000"/>
-              </a:lnSpc>
-              <a:defRPr sz="919">
-                <a:solidFill>
-                  <a:srgbClr val="334155"/>
-                </a:solidFill>
-                <a:latin typeface="Calibri"/>
-              </a:defRPr>
-            </a:pPr>
-            <a:r>
-              <a:rPr sz="689">
-                <a:latin typeface="+mj-lt"/>
-              </a:rPr>
-              <a:t>Stress Scenario: 50 concurrent virtual threads simultaneously requesting the identical venue slot [10:00, 14:00).</a:t>
-            </a:r>
-            <a:br>
-              <a:rPr sz="689">
-                <a:latin typeface="+mj-lt"/>
-              </a:rPr>
-            </a:br>
-            <a:r>
-              <a:rPr sz="689">
-                <a:latin typeface="+mj-lt"/>
-              </a:rPr>
-              <a:t>Naive Unsynchronized Architecture: Admitted 14 double-bookings (28% failure rate) via TOCTOU race conditions.</a:t>
-            </a:r>
-            <a:br>
-              <a:rPr sz="689">
-                <a:latin typeface="+mj-lt"/>
-              </a:rPr>
-            </a:br>
-            <a:r>
-              <a:rPr sz="689">
-                <a:latin typeface="+mj-lt"/>
-              </a:rPr>
-              <a:t>EventFlow Atomic Engine: Exactly 1 booking admitted, 49 cleanly rejected with nearest alternative suggestions (0% failure rate, 100% mutual exclusion).</a:t>
-            </a:r>
-            <a:br>
-              <a:rPr sz="689">
-                <a:latin typeface="+mj-lt"/>
-              </a:rPr>
-            </a:br>
-            <a:r>
-              <a:rPr sz="689">
-                <a:latin typeface="+mj-lt"/>
-              </a:rPr>
-              <a:t>Lock Wait Time: Capped under 18 ms under 200 req/sec bursts.</a:t>
-            </a:r>
-          </a:p>
-        </p:txBody>
-      </p:sp>
-      <p:sp>
-        <p:nvSpPr>
-          <p:cNvPr id="11" name="Rectangle 10"/>
-          <p:cNvSpPr/>
-          <p:nvPr/>
-        </p:nvSpPr>
-        <p:spPr>
-          <a:xfrm>
-            <a:off x="3291840" y="2983229"/>
-            <a:ext cx="2558034" cy="54864"/>
-          </a:xfrm>
-          <a:prstGeom prst="rect">
-            <a:avLst/>
-          </a:prstGeom>
-          <a:solidFill>
-            <a:srgbClr val="1A365D"/>
-          </a:solidFill>
-          <a:ln>
-            <a:noFill/>
-          </a:ln>
-        </p:spPr>
-        <p:style>
-          <a:lnRef idx="1">
-            <a:schemeClr val="accent1"/>
-          </a:lnRef>
-          <a:fillRef idx="3">
-            <a:schemeClr val="accent1"/>
-          </a:fillRef>
-          <a:effectRef idx="2">
-            <a:schemeClr val="accent1"/>
-          </a:effectRef>
-          <a:fontRef idx="minor">
-            <a:schemeClr val="lt1"/>
-          </a:fontRef>
-        </p:style>
-        <p:txBody>
-          <a:bodyPr rtlCol="0" anchor="ctr"/>
-          <a:lstStyle/>
-          <a:p>
-            <a:pPr algn="ctr"/>
-            <a:endParaRPr sz="1350">
-              <a:latin typeface="+mj-lt"/>
-            </a:endParaRPr>
-          </a:p>
-        </p:txBody>
-      </p:sp>
-      <p:sp>
-        <p:nvSpPr>
-          <p:cNvPr id="12" name="Rounded Rectangle 11"/>
-          <p:cNvSpPr/>
-          <p:nvPr/>
-        </p:nvSpPr>
-        <p:spPr>
-          <a:xfrm>
-            <a:off x="6035040" y="2983229"/>
-            <a:ext cx="2558034" cy="1645920"/>
-          </a:xfrm>
-          <a:prstGeom prst="roundRect">
-            <a:avLst/>
-          </a:prstGeom>
-          <a:solidFill>
-            <a:srgbClr val="F8FAFC"/>
-          </a:solidFill>
-          <a:ln w="12700">
-            <a:solidFill>
-              <a:srgbClr val="E2E8F0"/>
-            </a:solidFill>
-          </a:ln>
-        </p:spPr>
-        <p:style>
-          <a:lnRef idx="1">
-            <a:schemeClr val="accent1"/>
-          </a:lnRef>
-          <a:fillRef idx="3">
-            <a:schemeClr val="accent1"/>
-          </a:fillRef>
-          <a:effectRef idx="2">
-            <a:schemeClr val="accent1"/>
-          </a:effectRef>
-          <a:fontRef idx="minor">
-            <a:schemeClr val="lt1"/>
-          </a:fontRef>
-        </p:style>
-        <p:txBody>
-          <a:bodyPr wrap="square" lIns="137160" tIns="109728" rIns="137160" rtlCol="0" anchor="ctr"/>
-          <a:lstStyle/>
-          <a:p>
-            <a:pPr algn="ctr">
-              <a:spcAft>
-                <a:spcPts val="450"/>
-              </a:spcAft>
-              <a:defRPr sz="1150" b="1">
-                <a:solidFill>
-                  <a:srgbClr val="1A365D"/>
-                </a:solidFill>
-                <a:latin typeface="Calibri"/>
-              </a:defRPr>
-            </a:pPr>
-            <a:r>
-              <a:rPr sz="863">
-                <a:latin typeface="+mj-lt"/>
-              </a:rPr>
-              <a:t>3. Scalability &amp; Resource Footprint</a:t>
-            </a:r>
-          </a:p>
-          <a:p>
-            <a:pPr>
-              <a:lnSpc>
-                <a:spcPct val="118000"/>
-              </a:lnSpc>
-              <a:defRPr sz="919">
-                <a:solidFill>
-                  <a:srgbClr val="334155"/>
-                </a:solidFill>
-                <a:latin typeface="Calibri"/>
-              </a:defRPr>
-            </a:pPr>
-            <a:r>
-              <a:rPr sz="689">
-                <a:latin typeface="+mj-lt"/>
-              </a:rPr>
-              <a:t>Memory Footprint: FastAPI backend consumes ~45 MB RAM under standard load; peaks at &lt;85 MB under high-volume stress.</a:t>
-            </a:r>
-            <a:br>
-              <a:rPr sz="689">
-                <a:latin typeface="+mj-lt"/>
-              </a:rPr>
-            </a:br>
-            <a:r>
-              <a:rPr sz="689">
-                <a:latin typeface="+mj-lt"/>
-              </a:rPr>
-              <a:t>Database Storage: SQLite WAL database file consumes &lt;15 MB with 10,000 historical booking and attendee records.</a:t>
-            </a:r>
-            <a:br>
-              <a:rPr sz="689">
-                <a:latin typeface="+mj-lt"/>
-              </a:rPr>
-            </a:br>
-            <a:r>
-              <a:rPr sz="689">
-                <a:latin typeface="+mj-lt"/>
-              </a:rPr>
-              <a:t>CPU Utilization: Consistently &lt;5% CPU during standard traffic; &lt;22% CPU under 200 req/sec stress bursts.</a:t>
-            </a:r>
-            <a:br>
-              <a:rPr sz="689">
-                <a:latin typeface="+mj-lt"/>
-              </a:rPr>
-            </a:br>
-            <a:r>
-              <a:rPr sz="689">
-                <a:latin typeface="+mj-lt"/>
-              </a:rPr>
-              <a:t>Throughput Capacity: Sustains 350+ requests/second per Uvicorn worker without thread starvation.</a:t>
-            </a:r>
-          </a:p>
-        </p:txBody>
-      </p:sp>
-      <p:sp>
-        <p:nvSpPr>
-          <p:cNvPr id="13" name="Rectangle 12"/>
-          <p:cNvSpPr/>
-          <p:nvPr/>
-        </p:nvSpPr>
-        <p:spPr>
-          <a:xfrm>
-            <a:off x="6035040" y="2983229"/>
-            <a:ext cx="2558034" cy="54864"/>
-          </a:xfrm>
-          <a:prstGeom prst="rect">
-            <a:avLst/>
-          </a:prstGeom>
-          <a:solidFill>
-            <a:srgbClr val="10B981"/>
-          </a:solidFill>
-          <a:ln>
-            <a:noFill/>
-          </a:ln>
-        </p:spPr>
-        <p:style>
-          <a:lnRef idx="1">
-            <a:schemeClr val="accent1"/>
-          </a:lnRef>
-          <a:fillRef idx="3">
-            <a:schemeClr val="accent1"/>
-          </a:fillRef>
-          <a:effectRef idx="2">
-            <a:schemeClr val="accent1"/>
-          </a:effectRef>
-          <a:fontRef idx="minor">
-            <a:schemeClr val="lt1"/>
-          </a:fontRef>
-        </p:style>
-        <p:txBody>
-          <a:bodyPr rtlCol="0" anchor="ctr"/>
-          <a:lstStyle/>
-          <a:p>
-            <a:pPr algn="ctr"/>
-            <a:endParaRPr sz="1350">
-              <a:latin typeface="+mj-lt"/>
-            </a:endParaRPr>
-          </a:p>
-        </p:txBody>
-      </p:sp>
-    </p:spTree>
+    <p:extLst>
+      <p:ext uri="{BB962C8B-B14F-4D97-AF65-F5344CB8AC3E}">
+        <p14:creationId xmlns:p14="http://schemas.microsoft.com/office/powerpoint/2010/main" val="1206175783"/>
+      </p:ext>
+    </p:extLst>
   </p:cSld>
   <p:clrMapOvr>
     <a:masterClrMapping/>
@@ -9506,14 +6785,20 @@
       </p:grpSpPr>
       <p:sp>
         <p:nvSpPr>
-          <p:cNvPr id="3" name="TextBox 2"/>
+          <p:cNvPr id="19" name="TextBox 18">
+            <a:extLst>
+              <a:ext uri="{FF2B5EF4-FFF2-40B4-BE49-F238E27FC236}">
+                <a16:creationId xmlns:a16="http://schemas.microsoft.com/office/drawing/2014/main" id="{1B8643E9-0863-3E4A-544E-0CC6D72D7425}"/>
+              </a:ext>
+            </a:extLst>
+          </p:cNvPr>
           <p:cNvSpPr txBox="1"/>
           <p:nvPr/>
         </p:nvSpPr>
         <p:spPr>
           <a:xfrm>
-            <a:off x="548640" y="582931"/>
-            <a:ext cx="8023860" cy="418063"/>
+            <a:off x="476250" y="438150"/>
+            <a:ext cx="8119110" cy="4308872"/>
           </a:xfrm>
           <a:prstGeom prst="rect">
             <a:avLst/>
@@ -9521,808 +6806,221 @@
           <a:noFill/>
         </p:spPr>
         <p:txBody>
-          <a:bodyPr wrap="square" lIns="0" tIns="0" rIns="0" bIns="0">
+          <a:bodyPr wrap="square">
             <a:spAutoFit/>
           </a:bodyPr>
           <a:lstStyle/>
           <a:p>
             <a:pPr>
-              <a:defRPr sz="2200" b="1">
-                <a:solidFill>
-                  <a:srgbClr val="1A365D"/>
-                </a:solidFill>
-                <a:latin typeface="Calibri"/>
-              </a:defRPr>
-            </a:pPr>
-            <a:r>
-              <a:rPr sz="1650" dirty="0">
-                <a:latin typeface="+mj-lt"/>
-              </a:rPr>
-              <a:t>Module 1: Requirement Gathering &amp; Specification Analysis</a:t>
+              <a:buNone/>
+            </a:pPr>
+            <a:r>
+              <a:rPr lang="en-IN" sz="3000" b="1" dirty="0"/>
+              <a:t>Module 1: Requirement Gathering</a:t>
             </a:r>
           </a:p>
           <a:p>
             <a:pPr>
-              <a:spcBef>
-                <a:spcPts val="225"/>
-              </a:spcBef>
-              <a:defRPr sz="1200">
-                <a:solidFill>
-                  <a:srgbClr val="64748B"/>
-                </a:solidFill>
-                <a:latin typeface="Calibri"/>
-              </a:defRPr>
-            </a:pPr>
-            <a:r>
-              <a:rPr sz="900" dirty="0">
-                <a:latin typeface="+mj-lt"/>
-              </a:rPr>
-              <a:t>Comprehensive stakeholder taxonomy, functional domain rules, and non-functional engineering constraints</a:t>
+              <a:buNone/>
+            </a:pPr>
+            <a:endParaRPr lang="en-IN" sz="1600" b="1" dirty="0"/>
+          </a:p>
+          <a:p>
+            <a:pPr>
+              <a:buNone/>
+            </a:pPr>
+            <a:r>
+              <a:rPr lang="en-IN" sz="1600" b="1" dirty="0"/>
+              <a:t>1. Stakeholder Requirements</a:t>
+            </a:r>
+            <a:endParaRPr lang="en-IN" sz="1600" dirty="0"/>
+          </a:p>
+          <a:p>
+            <a:pPr marL="342900" lvl="0" indent="-342900">
+              <a:buFont typeface="Arial" panose="020B0604020202020204" pitchFamily="34" charset="0"/>
+              <a:buChar char="•"/>
+            </a:pPr>
+            <a:r>
+              <a:rPr lang="en-IN" sz="1600" dirty="0"/>
+              <a:t>Coordinators ,Administration, Students, Faculty/HODs</a:t>
+            </a:r>
+          </a:p>
+          <a:p>
+            <a:pPr marL="342900" lvl="0" indent="-342900">
+              <a:buFont typeface="Arial" panose="020B0604020202020204" pitchFamily="34" charset="0"/>
+              <a:buChar char="•"/>
+            </a:pPr>
+            <a:endParaRPr lang="en-IN" sz="1600" dirty="0"/>
+          </a:p>
+          <a:p>
+            <a:pPr lvl="0"/>
+            <a:r>
+              <a:rPr lang="en-IN" sz="1600" b="1" dirty="0"/>
+              <a:t>2. Functional Requirements</a:t>
+            </a:r>
+            <a:endParaRPr lang="en-IN" sz="1600" dirty="0"/>
+          </a:p>
+          <a:p>
+            <a:pPr marL="342900" lvl="0" indent="-342900">
+              <a:buFont typeface="Arial" panose="020B0604020202020204" pitchFamily="34" charset="0"/>
+              <a:buChar char="•"/>
+            </a:pPr>
+            <a:r>
+              <a:rPr lang="en-IN" sz="1600" dirty="0"/>
+              <a:t>Conflict Detection ,Smart Scheduling ,Smart Suggestions ,Multi-Round Events</a:t>
+            </a:r>
+          </a:p>
+          <a:p>
+            <a:pPr marL="342900" lvl="0" indent="-342900">
+              <a:buFont typeface="Arial" panose="020B0604020202020204" pitchFamily="34" charset="0"/>
+              <a:buChar char="•"/>
+            </a:pPr>
+            <a:endParaRPr lang="en-IN" sz="1600" dirty="0"/>
+          </a:p>
+          <a:p>
+            <a:pPr lvl="0"/>
+            <a:r>
+              <a:rPr lang="en-IN" sz="1600" b="1" dirty="0"/>
+              <a:t>3. Non-Functional Requirements</a:t>
+            </a:r>
+            <a:endParaRPr lang="en-IN" sz="1600" dirty="0"/>
+          </a:p>
+          <a:p>
+            <a:pPr marL="342900" lvl="0" indent="-342900">
+              <a:buFont typeface="Arial" panose="020B0604020202020204" pitchFamily="34" charset="0"/>
+              <a:buChar char="•"/>
+            </a:pPr>
+            <a:r>
+              <a:rPr lang="en-IN" sz="1600" b="1" dirty="0"/>
+              <a:t>Reliability:</a:t>
+            </a:r>
+            <a:r>
+              <a:rPr lang="en-IN" sz="1600" dirty="0"/>
+              <a:t> Prevent double bookings during concurrent requests.</a:t>
+            </a:r>
+          </a:p>
+          <a:p>
+            <a:pPr marL="342900" lvl="0" indent="-342900">
+              <a:buFont typeface="Arial" panose="020B0604020202020204" pitchFamily="34" charset="0"/>
+              <a:buChar char="•"/>
+            </a:pPr>
+            <a:r>
+              <a:rPr lang="en-IN" sz="1600" b="1" dirty="0"/>
+              <a:t>Performance:</a:t>
+            </a:r>
+            <a:r>
+              <a:rPr lang="en-IN" sz="1600" dirty="0"/>
+              <a:t> Target &lt;2 </a:t>
+            </a:r>
+            <a:r>
+              <a:rPr lang="en-IN" sz="1600" dirty="0" err="1"/>
+              <a:t>ms</a:t>
+            </a:r>
+            <a:r>
+              <a:rPr lang="en-IN" sz="1600" dirty="0"/>
+              <a:t> conflict checks and &lt;50 </a:t>
+            </a:r>
+            <a:r>
+              <a:rPr lang="en-IN" sz="1600" dirty="0" err="1"/>
+              <a:t>ms</a:t>
+            </a:r>
+            <a:r>
+              <a:rPr lang="en-IN" sz="1600" dirty="0"/>
+              <a:t> API responses.</a:t>
+            </a:r>
+          </a:p>
+          <a:p>
+            <a:pPr marL="342900" lvl="0" indent="-342900">
+              <a:buFont typeface="Arial" panose="020B0604020202020204" pitchFamily="34" charset="0"/>
+              <a:buChar char="•"/>
+            </a:pPr>
+            <a:r>
+              <a:rPr lang="en-IN" sz="1600" b="1" dirty="0"/>
+              <a:t>Availability:</a:t>
+            </a:r>
+            <a:r>
+              <a:rPr lang="en-IN" sz="1600" dirty="0"/>
+              <a:t> </a:t>
+            </a:r>
+            <a:r>
+              <a:rPr lang="en-IN" sz="1600" dirty="0" err="1"/>
+              <a:t>Supabase</a:t>
+            </a:r>
+            <a:r>
+              <a:rPr lang="en-IN" sz="1600" dirty="0"/>
+              <a:t> PostgreSQL with local </a:t>
+            </a:r>
+            <a:r>
+              <a:rPr lang="en-IN" sz="1600" dirty="0" err="1"/>
+              <a:t>FastAPI</a:t>
+            </a:r>
+            <a:r>
+              <a:rPr lang="en-IN" sz="1600" dirty="0"/>
+              <a:t>/SQLite WAL fallback.</a:t>
+            </a:r>
+          </a:p>
+          <a:p>
+            <a:pPr marL="342900" lvl="0" indent="-342900">
+              <a:buFont typeface="Arial" panose="020B0604020202020204" pitchFamily="34" charset="0"/>
+              <a:buChar char="•"/>
+            </a:pPr>
+            <a:r>
+              <a:rPr lang="en-IN" sz="1600" b="1" dirty="0"/>
+              <a:t>Security: </a:t>
+            </a:r>
+            <a:r>
+              <a:rPr lang="en-IN" dirty="0"/>
+              <a:t>Row-Level Security (RLS), input validation, encrypted communication.</a:t>
+            </a:r>
+          </a:p>
+          <a:p>
+            <a:pPr marL="342900" lvl="0" indent="-342900">
+              <a:buFont typeface="Arial" panose="020B0604020202020204" pitchFamily="34" charset="0"/>
+              <a:buChar char="•"/>
+            </a:pPr>
+            <a:endParaRPr lang="en-IN" sz="1600" b="1" dirty="0"/>
+          </a:p>
+          <a:p>
+            <a:pPr lvl="0"/>
+            <a:r>
+              <a:rPr lang="en-IN" sz="1600" b="1" dirty="0"/>
+              <a:t>Outcome:</a:t>
+            </a:r>
+            <a:r>
+              <a:rPr lang="en-IN" sz="1600" dirty="0"/>
+              <a:t> A secure, reliable, and efficient event management system with conflict-free scheduling and optimized venue utilization.</a:t>
             </a:r>
           </a:p>
         </p:txBody>
       </p:sp>
       <p:sp>
         <p:nvSpPr>
-          <p:cNvPr id="4" name="Rectangle 3"/>
+          <p:cNvPr id="22" name="Shape 1">
+            <a:extLst>
+              <a:ext uri="{FF2B5EF4-FFF2-40B4-BE49-F238E27FC236}">
+                <a16:creationId xmlns:a16="http://schemas.microsoft.com/office/drawing/2014/main" id="{E49EBF43-A18D-D993-75AF-CEBD42B04136}"/>
+              </a:ext>
+            </a:extLst>
+          </p:cNvPr>
           <p:cNvSpPr/>
           <p:nvPr/>
         </p:nvSpPr>
         <p:spPr>
           <a:xfrm>
-            <a:off x="548640" y="1268730"/>
-            <a:ext cx="8044434" cy="13716"/>
+            <a:off x="548640" y="1005840"/>
+            <a:ext cx="8046720" cy="0"/>
           </a:xfrm>
-          <a:prstGeom prst="rect">
-            <a:avLst/>
-          </a:prstGeom>
-          <a:solidFill>
-            <a:srgbClr val="E2E8F0"/>
-          </a:solidFill>
-          <a:ln>
-            <a:solidFill>
-              <a:srgbClr val="E2E8F0"/>
-            </a:solidFill>
-          </a:ln>
-        </p:spPr>
-        <p:style>
-          <a:lnRef idx="1">
-            <a:schemeClr val="accent1"/>
-          </a:lnRef>
-          <a:fillRef idx="3">
-            <a:schemeClr val="accent1"/>
-          </a:fillRef>
-          <a:effectRef idx="2">
-            <a:schemeClr val="accent1"/>
-          </a:effectRef>
-          <a:fontRef idx="minor">
-            <a:schemeClr val="lt1"/>
-          </a:fontRef>
-        </p:style>
-        <p:txBody>
-          <a:bodyPr rtlCol="0" anchor="ctr"/>
-          <a:lstStyle/>
-          <a:p>
-            <a:pPr algn="ctr"/>
-            <a:endParaRPr sz="1350">
-              <a:latin typeface="+mj-lt"/>
-            </a:endParaRPr>
-          </a:p>
-        </p:txBody>
-      </p:sp>
-      <p:sp>
-        <p:nvSpPr>
-          <p:cNvPr id="5" name="TextBox 4"/>
-          <p:cNvSpPr txBox="1"/>
-          <p:nvPr/>
-        </p:nvSpPr>
-        <p:spPr>
-          <a:xfrm>
-            <a:off x="548640" y="4800600"/>
-            <a:ext cx="5486400" cy="150041"/>
-          </a:xfrm>
-          <a:prstGeom prst="rect">
+          <a:prstGeom prst="line">
             <a:avLst/>
           </a:prstGeom>
           <a:noFill/>
-        </p:spPr>
-        <p:txBody>
-          <a:bodyPr wrap="square" lIns="0" tIns="0">
-            <a:spAutoFit/>
-          </a:bodyPr>
-          <a:lstStyle/>
-          <a:p>
-            <a:pPr>
-              <a:defRPr sz="900">
-                <a:solidFill>
-                  <a:srgbClr val="64748B"/>
-                </a:solidFill>
-                <a:latin typeface="Calibri"/>
-              </a:defRPr>
-            </a:pPr>
-            <a:r>
-              <a:rPr sz="675">
-                <a:latin typeface="+mj-lt"/>
-              </a:rPr>
-              <a:t>CSA1021 - Software Engineering | Capstone Project 2026 | Saveetha School of Engineering (SIMATS)</a:t>
-            </a:r>
-          </a:p>
-        </p:txBody>
-      </p:sp>
-      <p:sp>
-        <p:nvSpPr>
-          <p:cNvPr id="6" name="TextBox 5"/>
-          <p:cNvSpPr txBox="1"/>
-          <p:nvPr/>
-        </p:nvSpPr>
-        <p:spPr>
-          <a:xfrm>
-            <a:off x="7200900" y="4800600"/>
-            <a:ext cx="1371600" cy="150041"/>
-          </a:xfrm>
-          <a:prstGeom prst="rect">
-            <a:avLst/>
-          </a:prstGeom>
-          <a:noFill/>
-        </p:spPr>
-        <p:txBody>
-          <a:bodyPr wrap="square" tIns="0" rIns="0">
-            <a:spAutoFit/>
-          </a:bodyPr>
-          <a:lstStyle/>
-          <a:p>
-            <a:pPr algn="r">
-              <a:defRPr sz="900">
-                <a:solidFill>
-                  <a:srgbClr val="64748B"/>
-                </a:solidFill>
-                <a:latin typeface="Calibri"/>
-              </a:defRPr>
-            </a:pPr>
-            <a:r>
-              <a:rPr sz="675">
-                <a:latin typeface="+mj-lt"/>
-              </a:rPr>
-              <a:t>Slide 9 of 13</a:t>
-            </a:r>
-          </a:p>
-        </p:txBody>
-      </p:sp>
-      <p:sp>
-        <p:nvSpPr>
-          <p:cNvPr id="7" name="Rounded Rectangle 6"/>
-          <p:cNvSpPr/>
-          <p:nvPr/>
-        </p:nvSpPr>
-        <p:spPr>
-          <a:xfrm>
-            <a:off x="548640" y="1405889"/>
-            <a:ext cx="3929634" cy="1543050"/>
-          </a:xfrm>
-          <a:prstGeom prst="roundRect">
-            <a:avLst/>
-          </a:prstGeom>
-          <a:solidFill>
-            <a:srgbClr val="F8FAFC"/>
-          </a:solidFill>
           <a:ln w="12700">
             <a:solidFill>
-              <a:srgbClr val="E2E8F0"/>
+              <a:srgbClr val="000000"/>
             </a:solidFill>
+            <a:prstDash val="solid"/>
           </a:ln>
         </p:spPr>
-        <p:style>
-          <a:lnRef idx="1">
-            <a:schemeClr val="accent1"/>
-          </a:lnRef>
-          <a:fillRef idx="3">
-            <a:schemeClr val="accent1"/>
-          </a:fillRef>
-          <a:effectRef idx="2">
-            <a:schemeClr val="accent1"/>
-          </a:effectRef>
-          <a:fontRef idx="minor">
-            <a:schemeClr val="lt1"/>
-          </a:fontRef>
-        </p:style>
-        <p:txBody>
-          <a:bodyPr wrap="square" lIns="205740" tIns="123444" rIns="137160" rtlCol="0" anchor="ctr"/>
-          <a:lstStyle/>
-          <a:p>
-            <a:pPr algn="ctr">
-              <a:spcAft>
-                <a:spcPts val="450"/>
-              </a:spcAft>
-              <a:defRPr sz="1250" b="1">
-                <a:solidFill>
-                  <a:srgbClr val="1A365D"/>
-                </a:solidFill>
-                <a:latin typeface="Calibri"/>
-              </a:defRPr>
-            </a:pPr>
-            <a:r>
-              <a:rPr sz="938" dirty="0">
-                <a:latin typeface="+mj-lt"/>
-              </a:rPr>
-              <a:t>1. Stakeholder Taxonomy &amp; User Personas</a:t>
-            </a:r>
-          </a:p>
-          <a:p>
-            <a:pPr>
-              <a:lnSpc>
-                <a:spcPct val="118000"/>
-              </a:lnSpc>
-              <a:defRPr sz="950">
-                <a:solidFill>
-                  <a:srgbClr val="334155"/>
-                </a:solidFill>
-                <a:latin typeface="Calibri"/>
-              </a:defRPr>
-            </a:pPr>
-            <a:r>
-              <a:rPr sz="713" dirty="0">
-                <a:latin typeface="+mj-lt"/>
-              </a:rPr>
-              <a:t>Student Coordinators: Rapid multi-session event creation, automated interval collision check, capacity capping, CSV exports.</a:t>
-            </a:r>
-            <a:br>
-              <a:rPr sz="713" dirty="0">
-                <a:latin typeface="+mj-lt"/>
-              </a:rPr>
-            </a:br>
-            <a:r>
-              <a:rPr sz="713" dirty="0">
-                <a:latin typeface="+mj-lt"/>
-              </a:rPr>
-              <a:t>Estate &amp; Administration: Centralized venue authority, audit log visibility, conflict override prevention, utilization tracking.</a:t>
-            </a:r>
-            <a:br>
-              <a:rPr sz="713" dirty="0">
-                <a:latin typeface="+mj-lt"/>
-              </a:rPr>
-            </a:br>
-            <a:r>
-              <a:rPr sz="713" dirty="0">
-                <a:latin typeface="+mj-lt"/>
-              </a:rPr>
-              <a:t>Student Attendees: Frictionless discovery, conflict-free schedule navigation, instant QR pass generation (EVF-2026-XXXX).</a:t>
-            </a:r>
-            <a:br>
-              <a:rPr sz="713" dirty="0">
-                <a:latin typeface="+mj-lt"/>
-              </a:rPr>
-            </a:br>
-            <a:r>
-              <a:rPr sz="713" dirty="0">
-                <a:latin typeface="+mj-lt"/>
-              </a:rPr>
-              <a:t>Faculty &amp; HODs: Verifiable attendance tracking, department engagement distributions, and emergency broadcast ticker.</a:t>
-            </a:r>
-          </a:p>
-        </p:txBody>
-      </p:sp>
-      <p:sp>
-        <p:nvSpPr>
-          <p:cNvPr id="8" name="Rectangle 7"/>
-          <p:cNvSpPr/>
-          <p:nvPr/>
-        </p:nvSpPr>
-        <p:spPr>
-          <a:xfrm>
-            <a:off x="548640" y="1405889"/>
-            <a:ext cx="82296" cy="1543050"/>
-          </a:xfrm>
-          <a:prstGeom prst="rect">
-            <a:avLst/>
-          </a:prstGeom>
-          <a:solidFill>
-            <a:srgbClr val="2563EB"/>
-          </a:solidFill>
-          <a:ln>
-            <a:noFill/>
-          </a:ln>
-        </p:spPr>
-        <p:style>
-          <a:lnRef idx="1">
-            <a:schemeClr val="accent1"/>
-          </a:lnRef>
-          <a:fillRef idx="3">
-            <a:schemeClr val="accent1"/>
-          </a:fillRef>
-          <a:effectRef idx="2">
-            <a:schemeClr val="accent1"/>
-          </a:effectRef>
-          <a:fontRef idx="minor">
-            <a:schemeClr val="lt1"/>
-          </a:fontRef>
-        </p:style>
-        <p:txBody>
-          <a:bodyPr rtlCol="0" anchor="ctr"/>
-          <a:lstStyle/>
-          <a:p>
-            <a:pPr algn="ctr"/>
-            <a:endParaRPr sz="1350">
-              <a:latin typeface="+mj-lt"/>
-            </a:endParaRPr>
-          </a:p>
-        </p:txBody>
-      </p:sp>
-      <p:sp>
-        <p:nvSpPr>
-          <p:cNvPr id="9" name="Rounded Rectangle 8"/>
-          <p:cNvSpPr/>
-          <p:nvPr/>
-        </p:nvSpPr>
-        <p:spPr>
-          <a:xfrm>
-            <a:off x="4663440" y="1405889"/>
-            <a:ext cx="3929634" cy="1543050"/>
-          </a:xfrm>
-          <a:prstGeom prst="roundRect">
-            <a:avLst/>
-          </a:prstGeom>
-          <a:solidFill>
-            <a:srgbClr val="F8FAFC"/>
-          </a:solidFill>
-          <a:ln w="12700">
-            <a:solidFill>
-              <a:srgbClr val="E2E8F0"/>
-            </a:solidFill>
-          </a:ln>
-        </p:spPr>
-        <p:style>
-          <a:lnRef idx="1">
-            <a:schemeClr val="accent1"/>
-          </a:lnRef>
-          <a:fillRef idx="3">
-            <a:schemeClr val="accent1"/>
-          </a:fillRef>
-          <a:effectRef idx="2">
-            <a:schemeClr val="accent1"/>
-          </a:effectRef>
-          <a:fontRef idx="minor">
-            <a:schemeClr val="lt1"/>
-          </a:fontRef>
-        </p:style>
-        <p:txBody>
-          <a:bodyPr wrap="square" lIns="205740" tIns="123444" rIns="137160" rtlCol="0" anchor="ctr"/>
-          <a:lstStyle/>
-          <a:p>
-            <a:pPr algn="ctr">
-              <a:spcAft>
-                <a:spcPts val="450"/>
-              </a:spcAft>
-              <a:defRPr sz="1250" b="1">
-                <a:solidFill>
-                  <a:srgbClr val="1A365D"/>
-                </a:solidFill>
-                <a:latin typeface="Calibri"/>
-              </a:defRPr>
-            </a:pPr>
-            <a:r>
-              <a:rPr sz="938">
-                <a:latin typeface="+mj-lt"/>
-              </a:rPr>
-              <a:t>2. Functional Requirements (FR) Specification</a:t>
-            </a:r>
-          </a:p>
-          <a:p>
-            <a:pPr>
-              <a:lnSpc>
-                <a:spcPct val="118000"/>
-              </a:lnSpc>
-              <a:defRPr sz="950">
-                <a:solidFill>
-                  <a:srgbClr val="334155"/>
-                </a:solidFill>
-                <a:latin typeface="Calibri"/>
-              </a:defRPr>
-            </a:pPr>
-            <a:r>
-              <a:rPr sz="713">
-                <a:latin typeface="+mj-lt"/>
-              </a:rPr>
-              <a:t>FR-1 (Temporal Collision Engine): Reject reservation if (s_new &lt; e_ext) AND (e_new &gt; s_ext) on venue V_k before database write.</a:t>
-            </a:r>
-            <a:br>
-              <a:rPr sz="713">
-                <a:latin typeface="+mj-lt"/>
-              </a:rPr>
-            </a:br>
-            <a:r>
-              <a:rPr sz="713">
-                <a:latin typeface="+mj-lt"/>
-              </a:rPr>
-              <a:t>FR-2 (Batch Conflict Resolution): Greedy Earliest Finish Time (EFT) maximizing accepted disjoint events in O(M log M).</a:t>
-            </a:r>
-            <a:br>
-              <a:rPr sz="713">
-                <a:latin typeface="+mj-lt"/>
-              </a:rPr>
-            </a:br>
-            <a:r>
-              <a:rPr sz="713">
-                <a:latin typeface="+mj-lt"/>
-              </a:rPr>
-              <a:t>FR-3 (Smart Rejection &amp; Routing): Compute nearest vacant gap [e_i, s_{i+1}) where duration &gt;= dt; suggest equivalent venues.</a:t>
-            </a:r>
-            <a:br>
-              <a:rPr sz="713">
-                <a:latin typeface="+mj-lt"/>
-              </a:rPr>
-            </a:br>
-            <a:r>
-              <a:rPr sz="713">
-                <a:latin typeface="+mj-lt"/>
-              </a:rPr>
-              <a:t>FR-4 (Hierarchical Rounds): Multi-round session modeling with distinct venue rooms (e.g. Round 1 Quiz, Round 2 Pitch).</a:t>
-            </a:r>
-          </a:p>
-        </p:txBody>
-      </p:sp>
-      <p:sp>
-        <p:nvSpPr>
-          <p:cNvPr id="10" name="Rectangle 9"/>
-          <p:cNvSpPr/>
-          <p:nvPr/>
-        </p:nvSpPr>
-        <p:spPr>
-          <a:xfrm>
-            <a:off x="4663440" y="1405889"/>
-            <a:ext cx="82296" cy="1543050"/>
-          </a:xfrm>
-          <a:prstGeom prst="rect">
-            <a:avLst/>
-          </a:prstGeom>
-          <a:solidFill>
-            <a:srgbClr val="1A365D"/>
-          </a:solidFill>
-          <a:ln>
-            <a:noFill/>
-          </a:ln>
-        </p:spPr>
-        <p:style>
-          <a:lnRef idx="1">
-            <a:schemeClr val="accent1"/>
-          </a:lnRef>
-          <a:fillRef idx="3">
-            <a:schemeClr val="accent1"/>
-          </a:fillRef>
-          <a:effectRef idx="2">
-            <a:schemeClr val="accent1"/>
-          </a:effectRef>
-          <a:fontRef idx="minor">
-            <a:schemeClr val="lt1"/>
-          </a:fontRef>
-        </p:style>
-        <p:txBody>
-          <a:bodyPr rtlCol="0" anchor="ctr"/>
-          <a:lstStyle/>
-          <a:p>
-            <a:pPr algn="ctr"/>
-            <a:endParaRPr sz="1350">
-              <a:latin typeface="+mj-lt"/>
-            </a:endParaRPr>
-          </a:p>
-        </p:txBody>
-      </p:sp>
-      <p:sp>
-        <p:nvSpPr>
-          <p:cNvPr id="11" name="Rounded Rectangle 10"/>
-          <p:cNvSpPr/>
-          <p:nvPr/>
-        </p:nvSpPr>
-        <p:spPr>
-          <a:xfrm>
-            <a:off x="548640" y="3086100"/>
-            <a:ext cx="3929634" cy="1543050"/>
-          </a:xfrm>
-          <a:prstGeom prst="roundRect">
-            <a:avLst/>
-          </a:prstGeom>
-          <a:solidFill>
-            <a:srgbClr val="F8FAFC"/>
-          </a:solidFill>
-          <a:ln w="12700">
-            <a:solidFill>
-              <a:srgbClr val="E2E8F0"/>
-            </a:solidFill>
-          </a:ln>
-        </p:spPr>
-        <p:style>
-          <a:lnRef idx="1">
-            <a:schemeClr val="accent1"/>
-          </a:lnRef>
-          <a:fillRef idx="3">
-            <a:schemeClr val="accent1"/>
-          </a:fillRef>
-          <a:effectRef idx="2">
-            <a:schemeClr val="accent1"/>
-          </a:effectRef>
-          <a:fontRef idx="minor">
-            <a:schemeClr val="lt1"/>
-          </a:fontRef>
-        </p:style>
-        <p:txBody>
-          <a:bodyPr wrap="square" lIns="205740" tIns="123444" rIns="137160" rtlCol="0" anchor="ctr"/>
-          <a:lstStyle/>
-          <a:p>
-            <a:pPr algn="ctr">
-              <a:spcAft>
-                <a:spcPts val="450"/>
-              </a:spcAft>
-              <a:defRPr sz="1250" b="1">
-                <a:solidFill>
-                  <a:srgbClr val="1A365D"/>
-                </a:solidFill>
-                <a:latin typeface="Calibri"/>
-              </a:defRPr>
-            </a:pPr>
-            <a:r>
-              <a:rPr sz="938">
-                <a:latin typeface="+mj-lt"/>
-              </a:rPr>
-              <a:t>3. Non-Functional Engineering Constraints (NFR)</a:t>
-            </a:r>
-          </a:p>
-          <a:p>
-            <a:pPr>
-              <a:lnSpc>
-                <a:spcPct val="118000"/>
-              </a:lnSpc>
-              <a:defRPr sz="950">
-                <a:solidFill>
-                  <a:srgbClr val="334155"/>
-                </a:solidFill>
-                <a:latin typeface="Calibri"/>
-              </a:defRPr>
-            </a:pPr>
-            <a:r>
-              <a:rPr sz="713">
-                <a:latin typeface="+mj-lt"/>
-              </a:rPr>
-              <a:t>NFR-1 (Consistency &amp; ACID Integrity): Zero double-booking tolerance under high-concurrency race conditions; mutual exclusion.</a:t>
-            </a:r>
-            <a:br>
-              <a:rPr sz="713">
-                <a:latin typeface="+mj-lt"/>
-              </a:rPr>
-            </a:br>
-            <a:r>
-              <a:rPr sz="713">
-                <a:latin typeface="+mj-lt"/>
-              </a:rPr>
-              <a:t>NFR-2 (Performance &amp; Latency): Sub-2ms interval bisection collision checks; sub-50ms HTTP API response latency.</a:t>
-            </a:r>
-            <a:br>
-              <a:rPr sz="713">
-                <a:latin typeface="+mj-lt"/>
-              </a:rPr>
-            </a:br>
-            <a:r>
-              <a:rPr sz="713">
-                <a:latin typeface="+mj-lt"/>
-              </a:rPr>
-              <a:t>NFR-3 (High Availability &amp; Failover): Supabase Cloud PostgreSQL with automated local FastAPI + SQLite WAL fallback.</a:t>
-            </a:r>
-            <a:br>
-              <a:rPr sz="713">
-                <a:latin typeface="+mj-lt"/>
-              </a:rPr>
-            </a:br>
-            <a:r>
-              <a:rPr sz="713">
-                <a:latin typeface="+mj-lt"/>
-              </a:rPr>
-              <a:t>NFR-4 (Security &amp; RBAC): Row-Level Security (RLS) enforcement, Pydantic v2 input sanitization, encrypted transport.</a:t>
-            </a:r>
-          </a:p>
-        </p:txBody>
-      </p:sp>
-      <p:sp>
-        <p:nvSpPr>
-          <p:cNvPr id="12" name="Rectangle 11"/>
-          <p:cNvSpPr/>
-          <p:nvPr/>
-        </p:nvSpPr>
-        <p:spPr>
-          <a:xfrm>
-            <a:off x="548640" y="3086100"/>
-            <a:ext cx="82296" cy="1543050"/>
-          </a:xfrm>
-          <a:prstGeom prst="rect">
-            <a:avLst/>
-          </a:prstGeom>
-          <a:solidFill>
-            <a:srgbClr val="0F172A"/>
-          </a:solidFill>
-          <a:ln>
-            <a:noFill/>
-          </a:ln>
-        </p:spPr>
-        <p:style>
-          <a:lnRef idx="1">
-            <a:schemeClr val="accent1"/>
-          </a:lnRef>
-          <a:fillRef idx="3">
-            <a:schemeClr val="accent1"/>
-          </a:fillRef>
-          <a:effectRef idx="2">
-            <a:schemeClr val="accent1"/>
-          </a:effectRef>
-          <a:fontRef idx="minor">
-            <a:schemeClr val="lt1"/>
-          </a:fontRef>
-        </p:style>
-        <p:txBody>
-          <a:bodyPr rtlCol="0" anchor="ctr"/>
-          <a:lstStyle/>
-          <a:p>
-            <a:pPr algn="ctr"/>
-            <a:endParaRPr sz="1350">
-              <a:latin typeface="+mj-lt"/>
-            </a:endParaRPr>
-          </a:p>
-        </p:txBody>
-      </p:sp>
-      <p:sp>
-        <p:nvSpPr>
-          <p:cNvPr id="13" name="Rounded Rectangle 12"/>
-          <p:cNvSpPr/>
-          <p:nvPr/>
-        </p:nvSpPr>
-        <p:spPr>
-          <a:xfrm>
-            <a:off x="4663440" y="3086100"/>
-            <a:ext cx="3929634" cy="1543050"/>
-          </a:xfrm>
-          <a:prstGeom prst="roundRect">
-            <a:avLst/>
-          </a:prstGeom>
-          <a:solidFill>
-            <a:srgbClr val="F8FAFC"/>
-          </a:solidFill>
-          <a:ln w="12700">
-            <a:solidFill>
-              <a:srgbClr val="E2E8F0"/>
-            </a:solidFill>
-          </a:ln>
-        </p:spPr>
-        <p:style>
-          <a:lnRef idx="1">
-            <a:schemeClr val="accent1"/>
-          </a:lnRef>
-          <a:fillRef idx="3">
-            <a:schemeClr val="accent1"/>
-          </a:fillRef>
-          <a:effectRef idx="2">
-            <a:schemeClr val="accent1"/>
-          </a:effectRef>
-          <a:fontRef idx="minor">
-            <a:schemeClr val="lt1"/>
-          </a:fontRef>
-        </p:style>
-        <p:txBody>
-          <a:bodyPr wrap="square" lIns="205740" tIns="123444" rIns="137160" rtlCol="0" anchor="ctr"/>
-          <a:lstStyle/>
-          <a:p>
-            <a:pPr algn="ctr">
-              <a:spcAft>
-                <a:spcPts val="450"/>
-              </a:spcAft>
-              <a:defRPr sz="1250" b="1">
-                <a:solidFill>
-                  <a:srgbClr val="1A365D"/>
-                </a:solidFill>
-                <a:latin typeface="Calibri"/>
-              </a:defRPr>
-            </a:pPr>
-            <a:r>
-              <a:rPr sz="938">
-                <a:latin typeface="+mj-lt"/>
-              </a:rPr>
-              <a:t>4. Domain Constraints &amp; Boundary Edge Cases</a:t>
-            </a:r>
-          </a:p>
-          <a:p>
-            <a:pPr>
-              <a:lnSpc>
-                <a:spcPct val="118000"/>
-              </a:lnSpc>
-              <a:defRPr sz="950">
-                <a:solidFill>
-                  <a:srgbClr val="334155"/>
-                </a:solidFill>
-                <a:latin typeface="Calibri"/>
-              </a:defRPr>
-            </a:pPr>
-            <a:r>
-              <a:rPr sz="713">
-                <a:latin typeface="+mj-lt"/>
-              </a:rPr>
-              <a:t>Half-Open Algebra [s_i, e_i): Eliminates false boundary collisions. Events ending at 12:00 and starting at 12:00 are contiguous.</a:t>
-            </a:r>
-            <a:br>
-              <a:rPr sz="713">
-                <a:latin typeface="+mj-lt"/>
-              </a:rPr>
-            </a:br>
-            <a:r>
-              <a:rPr sz="713">
-                <a:latin typeface="+mj-lt"/>
-              </a:rPr>
-              <a:t>Envelopment &amp; Partial Overlaps: Fully detects nested intervals (09:00-17:00 enclosing 13:00-15:00) and partial intersections.</a:t>
-            </a:r>
-            <a:br>
-              <a:rPr sz="713">
-                <a:latin typeface="+mj-lt"/>
-              </a:rPr>
-            </a:br>
-            <a:r>
-              <a:rPr sz="713">
-                <a:latin typeface="+mj-lt"/>
-              </a:rPr>
-              <a:t>Capacity Overflow Protection: Atomic decrements prevent over-registration beyond physical room limits during flash bursts.</a:t>
-            </a:r>
-            <a:br>
-              <a:rPr sz="713">
-                <a:latin typeface="+mj-lt"/>
-              </a:rPr>
-            </a:br>
-            <a:r>
-              <a:rPr sz="713">
-                <a:latin typeface="+mj-lt"/>
-              </a:rPr>
-              <a:t>Cascading Dependencies: Deletion of parent events cascades to nested sessions without orphaned schedule fragments.</a:t>
-            </a:r>
-          </a:p>
-        </p:txBody>
-      </p:sp>
-      <p:sp>
-        <p:nvSpPr>
-          <p:cNvPr id="14" name="Rectangle 13"/>
-          <p:cNvSpPr/>
-          <p:nvPr/>
-        </p:nvSpPr>
-        <p:spPr>
-          <a:xfrm>
-            <a:off x="4663440" y="3086100"/>
-            <a:ext cx="82296" cy="1543050"/>
-          </a:xfrm>
-          <a:prstGeom prst="rect">
-            <a:avLst/>
-          </a:prstGeom>
-          <a:solidFill>
-            <a:srgbClr val="2563EB"/>
-          </a:solidFill>
-          <a:ln>
-            <a:noFill/>
-          </a:ln>
-        </p:spPr>
-        <p:style>
-          <a:lnRef idx="1">
-            <a:schemeClr val="accent1"/>
-          </a:lnRef>
-          <a:fillRef idx="3">
-            <a:schemeClr val="accent1"/>
-          </a:fillRef>
-          <a:effectRef idx="2">
-            <a:schemeClr val="accent1"/>
-          </a:effectRef>
-          <a:fontRef idx="minor">
-            <a:schemeClr val="lt1"/>
-          </a:fontRef>
-        </p:style>
-        <p:txBody>
-          <a:bodyPr rtlCol="0" anchor="ctr"/>
-          <a:lstStyle/>
-          <a:p>
-            <a:pPr algn="ctr"/>
-            <a:endParaRPr sz="1350">
-              <a:latin typeface="+mj-lt"/>
-            </a:endParaRPr>
-          </a:p>
-        </p:txBody>
       </p:sp>
     </p:spTree>
   </p:cSld>
